--- a/Slides/Chapter05.pptx
+++ b/Slides/Chapter05.pptx
@@ -266,7 +266,7 @@
           <a:p>
             <a:fld id="{1014AD53-B32D-C140-B1EF-3AA5C844E3CC}" type="datetimeFigureOut">
               <a:rPr lang="en-US" smtClean="0"/>
-              <a:t>10/28/25</a:t>
+              <a:t>9/22/26</a:t>
             </a:fld>
             <a:endParaRPr lang="en-US"/>
           </a:p>
@@ -1075,7 +1075,7 @@
           <a:p>
             <a:fld id="{B81ECC85-AFE0-C249-B7B8-61A52844C17E}" type="datetime5">
               <a:rPr lang="en-US" smtClean="0"/>
-              <a:t>28-Oct-25</a:t>
+              <a:t>22-Sep-26</a:t>
             </a:fld>
             <a:endParaRPr lang="en-US"/>
           </a:p>
@@ -1256,7 +1256,7 @@
             <a:fld id="{59E145AF-2465-1345-A673-F2664B07CED8}" type="datetime5">
               <a:rPr lang="en-US" smtClean="0"/>
               <a:pPr/>
-              <a:t>28-Oct-25</a:t>
+              <a:t>22-Sep-26</a:t>
             </a:fld>
             <a:endParaRPr lang="en-US" dirty="0"/>
           </a:p>
@@ -1395,7 +1395,7 @@
           <a:p>
             <a:fld id="{F2E4E05D-C966-5845-BEBD-042485385735}" type="datetime5">
               <a:rPr lang="en-US" smtClean="0"/>
-              <a:t>28-Oct-25</a:t>
+              <a:t>22-Sep-26</a:t>
             </a:fld>
             <a:endParaRPr lang="en-US"/>
           </a:p>
@@ -1576,7 +1576,7 @@
             <a:fld id="{59E145AF-2465-1345-A673-F2664B07CED8}" type="datetime5">
               <a:rPr lang="en-US" smtClean="0"/>
               <a:pPr/>
-              <a:t>28-Oct-25</a:t>
+              <a:t>22-Sep-26</a:t>
             </a:fld>
             <a:endParaRPr lang="en-US" dirty="0"/>
           </a:p>
@@ -1704,7 +1704,7 @@
           <a:p>
             <a:fld id="{58ACF659-EF88-2B45-A576-F85780E7DB9B}" type="datetime5">
               <a:rPr lang="en-US" smtClean="0"/>
-              <a:t>28-Oct-25</a:t>
+              <a:t>22-Sep-26</a:t>
             </a:fld>
             <a:endParaRPr lang="en-US"/>
           </a:p>
@@ -1935,7 +1935,7 @@
             <a:fld id="{59E145AF-2465-1345-A673-F2664B07CED8}" type="datetime5">
               <a:rPr lang="en-US" smtClean="0"/>
               <a:pPr/>
-              <a:t>28-Oct-25</a:t>
+              <a:t>22-Sep-26</a:t>
             </a:fld>
             <a:endParaRPr lang="en-US" dirty="0"/>
           </a:p>
@@ -2186,7 +2186,7 @@
           <a:p>
             <a:fld id="{58D37E5E-00C5-534E-A15C-41F0900565AD}" type="datetime5">
               <a:rPr lang="en-US" smtClean="0"/>
-              <a:t>28-Oct-25</a:t>
+              <a:t>22-Sep-26</a:t>
             </a:fld>
             <a:endParaRPr lang="en-US"/>
           </a:p>
@@ -2367,7 +2367,7 @@
             <a:fld id="{59E145AF-2465-1345-A673-F2664B07CED8}" type="datetime5">
               <a:rPr lang="en-US" smtClean="0"/>
               <a:pPr/>
-              <a:t>28-Oct-25</a:t>
+              <a:t>22-Sep-26</a:t>
             </a:fld>
             <a:endParaRPr lang="en-US" dirty="0"/>
           </a:p>
@@ -2462,7 +2462,7 @@
           <a:p>
             <a:fld id="{7863BC3A-EEBB-604F-BA5E-9BB6AC27E8D5}" type="datetime5">
               <a:rPr lang="en-US" smtClean="0"/>
-              <a:t>28-Oct-25</a:t>
+              <a:t>22-Sep-26</a:t>
             </a:fld>
             <a:endParaRPr lang="en-US"/>
           </a:p>
@@ -2643,7 +2643,7 @@
             <a:fld id="{59E145AF-2465-1345-A673-F2664B07CED8}" type="datetime5">
               <a:rPr lang="en-US" smtClean="0"/>
               <a:pPr/>
-              <a:t>28-Oct-25</a:t>
+              <a:t>22-Sep-26</a:t>
             </a:fld>
             <a:endParaRPr lang="en-US" dirty="0"/>
           </a:p>
@@ -2787,7 +2787,7 @@
           <a:p>
             <a:fld id="{59E145AF-2465-1345-A673-F2664B07CED8}" type="datetime5">
               <a:rPr lang="en-US" smtClean="0"/>
-              <a:t>28-Oct-25</a:t>
+              <a:t>22-Sep-26</a:t>
             </a:fld>
             <a:endParaRPr lang="en-US" dirty="0"/>
           </a:p>
@@ -2897,7 +2897,7 @@
           <a:p>
             <a:fld id="{08C9136A-AC76-DC4C-98DA-7FB51FBB5081}" type="datetime5">
               <a:rPr lang="en-US" smtClean="0"/>
-              <a:t>28-Oct-25</a:t>
+              <a:t>22-Sep-26</a:t>
             </a:fld>
             <a:endParaRPr lang="en-US"/>
           </a:p>
@@ -3261,7 +3261,7 @@
           <a:p>
             <a:fld id="{59E145AF-2465-1345-A673-F2664B07CED8}" type="datetime5">
               <a:rPr lang="en-US" smtClean="0"/>
-              <a:t>28-Oct-25</a:t>
+              <a:t>22-Sep-26</a:t>
             </a:fld>
             <a:endParaRPr lang="en-US" dirty="0"/>
           </a:p>
@@ -3856,7 +3856,7 @@
           <a:p>
             <a:fld id="{F78B2FA2-835E-8F4B-98D8-B158DB0E4BD7}" type="datetime5">
               <a:rPr lang="en-US" smtClean="0"/>
-              <a:t>28-Oct-25</a:t>
+              <a:t>22-Sep-26</a:t>
             </a:fld>
             <a:endParaRPr lang="en-US"/>
           </a:p>
@@ -4084,7 +4084,7 @@
           <a:p>
             <a:fld id="{9A023C2D-68C5-FF4B-BEB8-2ACEB38C3AD4}" type="datetime5">
               <a:rPr lang="en-US" smtClean="0"/>
-              <a:t>28-Oct-25</a:t>
+              <a:t>22-Sep-26</a:t>
             </a:fld>
             <a:endParaRPr lang="en-US"/>
           </a:p>
@@ -4345,7 +4345,7 @@
           <a:p>
             <a:fld id="{2C605444-3734-674A-9A2E-14043CEA286C}" type="datetime5">
               <a:rPr lang="en-US" smtClean="0"/>
-              <a:t>28-Oct-25</a:t>
+              <a:t>22-Sep-26</a:t>
             </a:fld>
             <a:endParaRPr lang="en-US"/>
           </a:p>
@@ -4561,7 +4561,7 @@
           <a:p>
             <a:fld id="{4EB6881E-771B-4D47-A702-8BC2F50ED8E2}" type="datetime5">
               <a:rPr lang="en-US" smtClean="0"/>
-              <a:t>28-Oct-25</a:t>
+              <a:t>22-Sep-26</a:t>
             </a:fld>
             <a:endParaRPr lang="en-US"/>
           </a:p>
@@ -4826,7 +4826,7 @@
           <a:p>
             <a:fld id="{55D4C3B4-E812-734E-90B4-B13B6B121B4A}" type="datetime5">
               <a:rPr lang="en-US" smtClean="0"/>
-              <a:t>28-Oct-25</a:t>
+              <a:t>22-Sep-26</a:t>
             </a:fld>
             <a:endParaRPr lang="en-US"/>
           </a:p>
@@ -5055,7 +5055,7 @@
           <a:p>
             <a:fld id="{8C76FC07-724F-5440-922D-8140A361560B}" type="datetime5">
               <a:rPr lang="en-US" smtClean="0"/>
-              <a:t>28-Oct-25</a:t>
+              <a:t>22-Sep-26</a:t>
             </a:fld>
             <a:endParaRPr lang="en-US"/>
           </a:p>
@@ -5282,7 +5282,7 @@
           <a:p>
             <a:fld id="{4DE656D0-BA15-EC48-B86F-2AD18D80438C}" type="datetime5">
               <a:rPr lang="en-US" smtClean="0"/>
-              <a:t>28-Oct-25</a:t>
+              <a:t>22-Sep-26</a:t>
             </a:fld>
             <a:endParaRPr lang="en-US"/>
           </a:p>
@@ -5526,7 +5526,7 @@
           <a:p>
             <a:fld id="{BDA405F1-AF6E-DA40-9539-9C52DE8EE333}" type="datetime5">
               <a:rPr lang="en-US" smtClean="0"/>
-              <a:t>28-Oct-25</a:t>
+              <a:t>22-Sep-26</a:t>
             </a:fld>
             <a:endParaRPr lang="en-US"/>
           </a:p>
@@ -5741,7 +5741,7 @@
           <a:p>
             <a:fld id="{818448A1-54E4-0B49-B015-691384C8B39B}" type="datetime5">
               <a:rPr lang="en-US" smtClean="0"/>
-              <a:t>28-Oct-25</a:t>
+              <a:t>22-Sep-26</a:t>
             </a:fld>
             <a:endParaRPr lang="en-US"/>
           </a:p>
@@ -5943,7 +5943,7 @@
           <a:p>
             <a:fld id="{E5717335-B61E-874A-9156-EEE57ED72284}" type="datetime5">
               <a:rPr lang="en-US" smtClean="0"/>
-              <a:t>28-Oct-25</a:t>
+              <a:t>22-Sep-26</a:t>
             </a:fld>
             <a:endParaRPr lang="en-US"/>
           </a:p>
@@ -6127,7 +6127,7 @@
           <a:p>
             <a:fld id="{6C7D9CD9-7400-A442-AC8F-BA2E16295A02}" type="datetime5">
               <a:rPr lang="en-US" smtClean="0"/>
-              <a:t>28-Oct-25</a:t>
+              <a:t>22-Sep-26</a:t>
             </a:fld>
             <a:endParaRPr lang="en-US"/>
           </a:p>
@@ -6429,7 +6429,7 @@
           <a:p>
             <a:fld id="{6DD864FE-6753-6445-A872-7401665AF5EE}" type="datetime5">
               <a:rPr lang="en-US" smtClean="0"/>
-              <a:t>28-Oct-25</a:t>
+              <a:t>22-Sep-26</a:t>
             </a:fld>
             <a:endParaRPr lang="en-US"/>
           </a:p>
@@ -6678,7 +6678,7 @@
           <a:p>
             <a:fld id="{A0442797-051F-4041-9623-AE832FE49F4D}" type="datetime5">
               <a:rPr lang="en-US" smtClean="0"/>
-              <a:t>28-Oct-25</a:t>
+              <a:t>22-Sep-26</a:t>
             </a:fld>
             <a:endParaRPr lang="en-US"/>
           </a:p>
@@ -6955,7 +6955,7 @@
           <a:p>
             <a:fld id="{5E2F346F-77F5-F743-B21A-B0F8F651FAA2}" type="datetime5">
               <a:rPr lang="en-US" smtClean="0"/>
-              <a:t>28-Oct-25</a:t>
+              <a:t>22-Sep-26</a:t>
             </a:fld>
             <a:endParaRPr lang="en-US"/>
           </a:p>
@@ -7340,7 +7340,7 @@
           <a:p>
             <a:fld id="{026F8E30-E146-184D-B3A6-FEBEB7D6556E}" type="datetime5">
               <a:rPr lang="en-US" smtClean="0"/>
-              <a:t>28-Oct-25</a:t>
+              <a:t>22-Sep-26</a:t>
             </a:fld>
             <a:endParaRPr lang="en-US"/>
           </a:p>
@@ -7575,7 +7575,7 @@
           <a:p>
             <a:fld id="{43A25FB8-6C2E-5649-AA0A-03EA386A78C5}" type="datetime5">
               <a:rPr lang="en-US" smtClean="0"/>
-              <a:t>28-Oct-25</a:t>
+              <a:t>22-Sep-26</a:t>
             </a:fld>
             <a:endParaRPr lang="en-US"/>
           </a:p>
@@ -7825,7 +7825,7 @@
           <a:p>
             <a:fld id="{CB8E4670-2CF6-0742-BDB7-508D2A9A7FD7}" type="datetime5">
               <a:rPr lang="en-US" smtClean="0"/>
-              <a:t>28-Oct-25</a:t>
+              <a:t>22-Sep-26</a:t>
             </a:fld>
             <a:endParaRPr lang="en-US"/>
           </a:p>
@@ -8063,7 +8063,7 @@
           <a:p>
             <a:fld id="{37F45AC7-4C20-A342-B309-068E7EA7D754}" type="datetime5">
               <a:rPr lang="en-US" smtClean="0"/>
-              <a:t>28-Oct-25</a:t>
+              <a:t>22-Sep-26</a:t>
             </a:fld>
             <a:endParaRPr lang="en-US"/>
           </a:p>
@@ -8417,7 +8417,7 @@
           <a:p>
             <a:fld id="{31951A31-3C59-CB4B-9959-5F3D576A067B}" type="datetime5">
               <a:rPr lang="en-US" smtClean="0"/>
-              <a:t>28-Oct-25</a:t>
+              <a:t>22-Sep-26</a:t>
             </a:fld>
             <a:endParaRPr lang="en-US"/>
           </a:p>
@@ -8703,7 +8703,7 @@
           <a:p>
             <a:fld id="{F588FC08-5460-F440-A693-42E2EE05CCEC}" type="datetime5">
               <a:rPr lang="en-US" smtClean="0"/>
-              <a:t>28-Oct-25</a:t>
+              <a:t>22-Sep-26</a:t>
             </a:fld>
             <a:endParaRPr lang="en-US"/>
           </a:p>
@@ -8932,7 +8932,7 @@
           <a:p>
             <a:fld id="{82A06BF5-19CB-DE4B-8BEE-2C43E907898F}" type="datetime5">
               <a:rPr lang="en-US" smtClean="0"/>
-              <a:t>28-Oct-25</a:t>
+              <a:t>22-Sep-26</a:t>
             </a:fld>
             <a:endParaRPr lang="en-US"/>
           </a:p>
@@ -9163,7 +9163,7 @@
           <a:p>
             <a:fld id="{AC267708-46B6-F444-92FC-E249FC85BD91}" type="datetime5">
               <a:rPr lang="en-US" smtClean="0"/>
-              <a:t>28-Oct-25</a:t>
+              <a:t>22-Sep-26</a:t>
             </a:fld>
             <a:endParaRPr lang="en-US"/>
           </a:p>
@@ -9382,7 +9382,7 @@
           <a:p>
             <a:fld id="{C175082D-FC7A-AD45-8541-F74134668B97}" type="datetime5">
               <a:rPr lang="en-US" smtClean="0"/>
-              <a:t>28-Oct-25</a:t>
+              <a:t>22-Sep-26</a:t>
             </a:fld>
             <a:endParaRPr lang="en-US"/>
           </a:p>
@@ -9664,7 +9664,7 @@
           <a:p>
             <a:fld id="{D1C6B8C2-BBCF-9944-A8DD-2DA8B400F23C}" type="datetime5">
               <a:rPr lang="en-US" smtClean="0"/>
-              <a:t>28-Oct-25</a:t>
+              <a:t>22-Sep-26</a:t>
             </a:fld>
             <a:endParaRPr lang="en-US"/>
           </a:p>
@@ -9934,7 +9934,7 @@
           <a:p>
             <a:fld id="{C4ADDACB-E503-7C48-9E00-BF70228EEC5B}" type="datetime5">
               <a:rPr lang="en-US" smtClean="0"/>
-              <a:t>28-Oct-25</a:t>
+              <a:t>22-Sep-26</a:t>
             </a:fld>
             <a:endParaRPr lang="en-US"/>
           </a:p>
@@ -10197,7 +10197,7 @@
           <a:p>
             <a:fld id="{7DEA9370-25CC-824D-B014-7AA51985192F}" type="datetime5">
               <a:rPr lang="en-US" smtClean="0"/>
-              <a:t>28-Oct-25</a:t>
+              <a:t>22-Sep-26</a:t>
             </a:fld>
             <a:endParaRPr lang="en-US"/>
           </a:p>
@@ -10494,7 +10494,7 @@
           <a:p>
             <a:fld id="{C639441C-ACD0-2A45-9B42-A22416247B1F}" type="datetime5">
               <a:rPr lang="en-US" smtClean="0"/>
-              <a:t>28-Oct-25</a:t>
+              <a:t>22-Sep-26</a:t>
             </a:fld>
             <a:endParaRPr lang="en-US"/>
           </a:p>
@@ -10873,7 +10873,7 @@
           <a:p>
             <a:fld id="{3FEF16CF-7920-E044-B62C-2FFA54D2F3FF}" type="datetime5">
               <a:rPr lang="en-US" smtClean="0"/>
-              <a:t>28-Oct-25</a:t>
+              <a:t>22-Sep-26</a:t>
             </a:fld>
             <a:endParaRPr lang="en-US"/>
           </a:p>
@@ -10956,9 +10956,23 @@
         <p:spPr/>
         <p:txBody>
           <a:bodyPr>
-            <a:normAutofit fontScale="62500" lnSpcReduction="20000"/>
+            <a:normAutofit fontScale="55000" lnSpcReduction="20000"/>
           </a:bodyPr>
           <a:lstStyle/>
+          <a:p>
+            <a:r>
+              <a:rPr lang="en-US" dirty="0"/>
+              <a:t>&lt;%# Replace contents of app/views/items/</a:t>
+            </a:r>
+            <a:r>
+              <a:rPr lang="en-US" dirty="0" err="1"/>
+              <a:t>index.html.erb</a:t>
+            </a:r>
+            <a:r>
+              <a:rPr lang="en-US" dirty="0"/>
+              <a:t> with the following %&gt;</a:t>
+            </a:r>
+          </a:p>
           <a:p>
             <a:r>
               <a:rPr lang="en-US" dirty="0"/>
@@ -10982,7 +10996,7 @@
             </a:r>
             <a:r>
               <a:rPr lang="en-US" dirty="0" err="1"/>
-              <a:t>movies_path</a:t>
+              <a:t>items_path</a:t>
             </a:r>
             <a:r>
               <a:rPr lang="en-US" dirty="0"/>
@@ -11000,15 +11014,21 @@
             </a:r>
             <a:r>
               <a:rPr lang="en-US" dirty="0"/>
-              <a:t>: "</a:t>
+              <a:t>: "results", </a:t>
             </a:r>
             <a:r>
               <a:rPr lang="en-US" dirty="0" err="1"/>
-              <a:t>movie_results</a:t>
-            </a:r>
-            <a:r>
-              <a:rPr lang="en-US" dirty="0"/>
-              <a:t>" }) do |f| %&gt;</a:t>
+              <a:t>turbo_action</a:t>
+            </a:r>
+            <a:r>
+              <a:rPr lang="en-US" dirty="0"/>
+              <a:t>: "advance" }) do |f| %&gt;</a:t>
+            </a:r>
+          </a:p>
+          <a:p>
+            <a:r>
+              <a:rPr lang="en-US" dirty="0"/>
+              <a:t>  Search</a:t>
             </a:r>
           </a:p>
           <a:p>
@@ -11018,11 +11038,11 @@
             </a:r>
             <a:r>
               <a:rPr lang="en-US" dirty="0" err="1"/>
-              <a:t>f.text_field</a:t>
-            </a:r>
-            <a:r>
-              <a:rPr lang="en-US" dirty="0"/>
-              <a:t>(:query, value: @query, placeholder: "Search movies...",</a:t>
+              <a:t>f.search_field</a:t>
+            </a:r>
+            <a:r>
+              <a:rPr lang="en-US" dirty="0"/>
+              <a:t>(:query, value: params[:query],</a:t>
             </a:r>
           </a:p>
           <a:p>
@@ -11050,24 +11070,12 @@
           <a:p>
             <a:r>
               <a:rPr lang="en-US" dirty="0"/>
-              <a:t>  &lt;%= </a:t>
-            </a:r>
-            <a:r>
-              <a:rPr lang="en-US" dirty="0" err="1"/>
-              <a:t>f.submit</a:t>
-            </a:r>
-            <a:r>
-              <a:rPr lang="en-US" dirty="0"/>
-              <a:t> "Search" %&gt;</a:t>
-            </a:r>
-          </a:p>
-          <a:p>
-            <a:r>
-              <a:rPr lang="en-US" dirty="0"/>
-              <a:t>&lt;% end %&gt;</a:t>
-            </a:r>
-          </a:p>
-          <a:p>
+              <a:t>&lt;% </a:t>
+            </a:r>
+            <a:r>
+              <a:rPr lang="en-US"/>
+              <a:t>end %&gt;</a:t>
+            </a:r>
             <a:br>
               <a:rPr lang="en-US" dirty="0"/>
             </a:br>
@@ -11084,47 +11092,45 @@
             </a:r>
             <a:r>
               <a:rPr lang="en-US" dirty="0"/>
-              <a:t> "</a:t>
+              <a:t> "results" do %&gt;</a:t>
+            </a:r>
+          </a:p>
+          <a:p>
+            <a:r>
+              <a:rPr lang="en-US" dirty="0"/>
+              <a:t>  &lt;div id="results"&gt;</a:t>
+            </a:r>
+          </a:p>
+          <a:p>
+            <a:r>
+              <a:rPr lang="en-US" dirty="0"/>
+              <a:t>  &lt;% @</a:t>
             </a:r>
             <a:r>
               <a:rPr lang="en-US" dirty="0" err="1"/>
-              <a:t>movie_results</a:t>
-            </a:r>
-            <a:r>
-              <a:rPr lang="en-US" dirty="0"/>
-              <a:t>" do %&gt;</a:t>
-            </a:r>
-          </a:p>
-          <a:p>
-            <a:r>
-              <a:rPr lang="en-US" dirty="0"/>
-              <a:t>  &lt;%# Render your search results here %&gt;</a:t>
-            </a:r>
-          </a:p>
-          <a:p>
-            <a:r>
-              <a:rPr lang="en-US" dirty="0"/>
-              <a:t>  &lt;% @</a:t>
-            </a:r>
-            <a:r>
-              <a:rPr lang="en-US" dirty="0" err="1"/>
-              <a:t>movies.each</a:t>
-            </a:r>
-            <a:r>
-              <a:rPr lang="en-US" dirty="0"/>
-              <a:t> do |movie| %&gt;</a:t>
-            </a:r>
-          </a:p>
-          <a:p>
-            <a:r>
-              <a:rPr lang="en-US" dirty="0"/>
-              <a:t>    &lt;%= render movie %&gt;</a:t>
-            </a:r>
-          </a:p>
-          <a:p>
-            <a:r>
-              <a:rPr lang="en-US" dirty="0"/>
-              <a:t>    &lt;p&gt;&lt;%= </a:t>
+              <a:t>items.each</a:t>
+            </a:r>
+            <a:r>
+              <a:rPr lang="en-US" dirty="0"/>
+              <a:t> do |item| %&gt;</a:t>
+            </a:r>
+          </a:p>
+          <a:p>
+            <a:r>
+              <a:rPr lang="en-US" dirty="0"/>
+              <a:t>    &lt;%= render item %&gt;</a:t>
+            </a:r>
+          </a:p>
+          <a:p>
+            <a:r>
+              <a:rPr lang="en-US" dirty="0"/>
+              <a:t>    &lt;p&gt;</a:t>
+            </a:r>
+          </a:p>
+          <a:p>
+            <a:r>
+              <a:rPr lang="en-US" dirty="0"/>
+              <a:t>      &lt;%= </a:t>
             </a:r>
             <a:r>
               <a:rPr lang="en-US" dirty="0" err="1"/>
@@ -11132,7 +11138,13 @@
             </a:r>
             <a:r>
               <a:rPr lang="en-US" dirty="0"/>
-              <a:t> "Show this movie", movie %&gt;&lt;/p&gt;</a:t>
+              <a:t> "Show this item", item %&gt;</a:t>
+            </a:r>
+          </a:p>
+          <a:p>
+            <a:r>
+              <a:rPr lang="en-US" dirty="0"/>
+              <a:t>    &lt;/p&gt;</a:t>
             </a:r>
           </a:p>
           <a:p>
@@ -11229,7 +11241,7 @@
           <a:p>
             <a:fld id="{BC17ECB5-1D94-5947-969D-F4E0BE05A44A}" type="datetime5">
               <a:rPr lang="en-US" smtClean="0"/>
-              <a:t>28-Oct-25</a:t>
+              <a:t>24-Sep-26</a:t>
             </a:fld>
             <a:endParaRPr lang="en-US"/>
           </a:p>
@@ -11502,7 +11514,7 @@
           <a:p>
             <a:fld id="{3245DE90-0DE2-464F-955F-A797467E5088}" type="datetime5">
               <a:rPr lang="en-US" smtClean="0"/>
-              <a:t>28-Oct-25</a:t>
+              <a:t>22-Sep-26</a:t>
             </a:fld>
             <a:endParaRPr lang="en-US"/>
           </a:p>
@@ -11719,7 +11731,7 @@
           <a:p>
             <a:fld id="{E711CB83-F240-E543-A325-02B09C9F1A2C}" type="datetime5">
               <a:rPr lang="en-US" smtClean="0"/>
-              <a:t>28-Oct-25</a:t>
+              <a:t>22-Sep-26</a:t>
             </a:fld>
             <a:endParaRPr lang="en-US"/>
           </a:p>
@@ -12115,7 +12127,7 @@
           <a:p>
             <a:fld id="{750C8DE6-D873-E848-AA42-F28294B44C1B}" type="datetime5">
               <a:rPr lang="en-US" smtClean="0"/>
-              <a:t>28-Oct-25</a:t>
+              <a:t>22-Sep-26</a:t>
             </a:fld>
             <a:endParaRPr lang="en-US"/>
           </a:p>
@@ -12360,7 +12372,7 @@
           <a:p>
             <a:fld id="{F69BA1E6-75E7-AA49-9A91-641CE2A1808D}" type="datetime5">
               <a:rPr lang="en-US" smtClean="0"/>
-              <a:t>28-Oct-25</a:t>
+              <a:t>22-Sep-26</a:t>
             </a:fld>
             <a:endParaRPr lang="en-US"/>
           </a:p>
@@ -12720,7 +12732,7 @@
           <a:p>
             <a:fld id="{9C29CCE2-2A6C-8A44-B005-9603B118A03F}" type="datetime5">
               <a:rPr lang="en-US" smtClean="0"/>
-              <a:t>28-Oct-25</a:t>
+              <a:t>22-Sep-26</a:t>
             </a:fld>
             <a:endParaRPr lang="en-US"/>
           </a:p>
@@ -12943,7 +12955,7 @@
           <a:p>
             <a:fld id="{37A70494-6260-434B-8979-3D5FAA53955A}" type="datetime5">
               <a:rPr lang="en-US" smtClean="0"/>
-              <a:t>28-Oct-25</a:t>
+              <a:t>22-Sep-26</a:t>
             </a:fld>
             <a:endParaRPr lang="en-US"/>
           </a:p>
@@ -13174,7 +13186,7 @@
           <a:p>
             <a:fld id="{E01FFDF9-C11F-D248-A9C7-44F6AA5C4ABA}" type="datetime5">
               <a:rPr lang="en-US" smtClean="0"/>
-              <a:t>28-Oct-25</a:t>
+              <a:t>22-Sep-26</a:t>
             </a:fld>
             <a:endParaRPr lang="en-US"/>
           </a:p>
@@ -13394,7 +13406,7 @@
           <a:p>
             <a:fld id="{A1F0A67F-3C29-294A-A74B-2B9EA15F8FDD}" type="datetime5">
               <a:rPr lang="en-US" smtClean="0"/>
-              <a:t>28-Oct-25</a:t>
+              <a:t>22-Sep-26</a:t>
             </a:fld>
             <a:endParaRPr lang="en-US"/>
           </a:p>
@@ -13627,7 +13639,7 @@
           <a:p>
             <a:fld id="{F9CECF2E-CA0C-0D4F-968C-E166C13B08DD}" type="datetime5">
               <a:rPr lang="en-US" smtClean="0"/>
-              <a:t>28-Oct-25</a:t>
+              <a:t>22-Sep-26</a:t>
             </a:fld>
             <a:endParaRPr lang="en-US"/>
           </a:p>
@@ -13869,7 +13881,7 @@
           <a:p>
             <a:fld id="{F04372A4-148D-814C-AC5A-344975EB4FCE}" type="datetime5">
               <a:rPr lang="en-US" smtClean="0"/>
-              <a:t>28-Oct-25</a:t>
+              <a:t>22-Sep-26</a:t>
             </a:fld>
             <a:endParaRPr lang="en-US"/>
           </a:p>
@@ -14156,7 +14168,7 @@
           <a:p>
             <a:fld id="{5DAA0823-BE8A-6341-8413-2CF5840475D1}" type="datetime5">
               <a:rPr lang="en-US" smtClean="0"/>
-              <a:t>28-Oct-25</a:t>
+              <a:t>22-Sep-26</a:t>
             </a:fld>
             <a:endParaRPr lang="en-US"/>
           </a:p>
@@ -14372,7 +14384,7 @@
           <a:p>
             <a:fld id="{BEA5676E-5E7B-1845-B5EB-A601497F53B4}" type="datetime5">
               <a:rPr lang="en-US" smtClean="0"/>
-              <a:t>28-Oct-25</a:t>
+              <a:t>22-Sep-26</a:t>
             </a:fld>
             <a:endParaRPr lang="en-US"/>
           </a:p>
@@ -14645,7 +14657,7 @@
           <a:p>
             <a:fld id="{85C56534-930D-9443-9AEF-A9E1EF9E2C02}" type="datetime5">
               <a:rPr lang="en-US" smtClean="0"/>
-              <a:t>28-Oct-25</a:t>
+              <a:t>22-Sep-26</a:t>
             </a:fld>
             <a:endParaRPr lang="en-US"/>
           </a:p>
@@ -14892,7 +14904,7 @@
           <a:p>
             <a:fld id="{8C6433A7-47A8-0E4C-A4AB-23827F12FB38}" type="datetime5">
               <a:rPr lang="en-US" smtClean="0"/>
-              <a:t>28-Oct-25</a:t>
+              <a:t>22-Sep-26</a:t>
             </a:fld>
             <a:endParaRPr lang="en-US"/>
           </a:p>
@@ -15106,7 +15118,7 @@
           <a:p>
             <a:fld id="{FE48365E-C25A-BD44-B535-AB4E07360761}" type="datetime5">
               <a:rPr lang="en-US" smtClean="0"/>
-              <a:t>28-Oct-25</a:t>
+              <a:t>22-Sep-26</a:t>
             </a:fld>
             <a:endParaRPr lang="en-US"/>
           </a:p>
@@ -15411,7 +15423,7 @@
           <a:p>
             <a:fld id="{92589934-1A55-5446-A98E-0C0C010596F5}" type="datetime5">
               <a:rPr lang="en-US" smtClean="0"/>
-              <a:t>28-Oct-25</a:t>
+              <a:t>22-Sep-26</a:t>
             </a:fld>
             <a:endParaRPr lang="en-US"/>
           </a:p>
@@ -15633,7 +15645,7 @@
           <a:p>
             <a:fld id="{F31DB80B-8CB8-2646-AF6A-94F15B451640}" type="datetime5">
               <a:rPr lang="en-US" smtClean="0"/>
-              <a:t>28-Oct-25</a:t>
+              <a:t>22-Sep-26</a:t>
             </a:fld>
             <a:endParaRPr lang="en-US"/>
           </a:p>
@@ -15956,7 +15968,7 @@
           <a:p>
             <a:fld id="{FB942D24-AEF9-AC4C-A4F0-38DA28EBD6A1}" type="datetime5">
               <a:rPr lang="en-US" smtClean="0"/>
-              <a:t>28-Oct-25</a:t>
+              <a:t>22-Sep-26</a:t>
             </a:fld>
             <a:endParaRPr lang="en-US"/>
           </a:p>
@@ -16202,7 +16214,7 @@
           <a:p>
             <a:fld id="{518EF62C-B5CA-2041-BB9D-9D838BAB96EB}" type="datetime5">
               <a:rPr lang="en-US" smtClean="0"/>
-              <a:t>28-Oct-25</a:t>
+              <a:t>22-Sep-26</a:t>
             </a:fld>
             <a:endParaRPr lang="en-US"/>
           </a:p>
@@ -16419,7 +16431,7 @@
           <a:p>
             <a:fld id="{C5206D2D-090F-F844-9C7C-F80226B8D598}" type="datetime5">
               <a:rPr lang="en-US" smtClean="0"/>
-              <a:t>28-Oct-25</a:t>
+              <a:t>22-Sep-26</a:t>
             </a:fld>
             <a:endParaRPr lang="en-US"/>
           </a:p>
@@ -16641,7 +16653,7 @@
           <a:p>
             <a:fld id="{D19DCA0D-DF2D-7F43-B2C0-D9FE4F57E4F6}" type="datetime5">
               <a:rPr lang="en-US" smtClean="0"/>
-              <a:t>28-Oct-25</a:t>
+              <a:t>22-Sep-26</a:t>
             </a:fld>
             <a:endParaRPr lang="en-US"/>
           </a:p>
@@ -16953,7 +16965,7 @@
           <a:p>
             <a:fld id="{1CD96339-8FB9-FD41-A5AC-44DD3E48F30C}" type="datetime5">
               <a:rPr lang="en-US" smtClean="0"/>
-              <a:t>28-Oct-25</a:t>
+              <a:t>22-Sep-26</a:t>
             </a:fld>
             <a:endParaRPr lang="en-US"/>
           </a:p>
@@ -17192,7 +17204,7 @@
           <a:p>
             <a:fld id="{FE2001DF-606A-4A43-8592-17AED3BDE26A}" type="datetime5">
               <a:rPr lang="en-US" smtClean="0"/>
-              <a:t>28-Oct-25</a:t>
+              <a:t>22-Sep-26</a:t>
             </a:fld>
             <a:endParaRPr lang="en-US"/>
           </a:p>
@@ -17411,7 +17423,7 @@
           <a:p>
             <a:fld id="{4F756082-DF7E-2748-9E6C-0962311EBA1D}" type="datetime5">
               <a:rPr lang="en-US" smtClean="0"/>
-              <a:t>28-Oct-25</a:t>
+              <a:t>22-Sep-26</a:t>
             </a:fld>
             <a:endParaRPr lang="en-US"/>
           </a:p>
@@ -17630,7 +17642,7 @@
           <a:p>
             <a:fld id="{5E8C4CA4-9A7D-FB4E-80CB-4C957092B356}" type="datetime5">
               <a:rPr lang="en-US" smtClean="0"/>
-              <a:t>28-Oct-25</a:t>
+              <a:t>22-Sep-26</a:t>
             </a:fld>
             <a:endParaRPr lang="en-US"/>
           </a:p>
@@ -17849,7 +17861,7 @@
           <a:p>
             <a:fld id="{90570CE3-E5A7-A341-AFCA-D4CC4AB55FEE}" type="datetime5">
               <a:rPr lang="en-US" smtClean="0"/>
-              <a:t>28-Oct-25</a:t>
+              <a:t>22-Sep-26</a:t>
             </a:fld>
             <a:endParaRPr lang="en-US"/>
           </a:p>
@@ -18074,7 +18086,7 @@
           <a:p>
             <a:fld id="{0F13F11A-E5E7-7441-8B9B-B9AD1BDCA8E0}" type="datetime5">
               <a:rPr lang="en-US" smtClean="0"/>
-              <a:t>28-Oct-25</a:t>
+              <a:t>22-Sep-26</a:t>
             </a:fld>
             <a:endParaRPr lang="en-US"/>
           </a:p>
@@ -18376,7 +18388,7 @@
           <a:p>
             <a:fld id="{77C61401-1C60-6243-94F3-502972A47BC1}" type="datetime5">
               <a:rPr lang="en-US" smtClean="0"/>
-              <a:t>28-Oct-25</a:t>
+              <a:t>22-Sep-26</a:t>
             </a:fld>
             <a:endParaRPr lang="en-US"/>
           </a:p>
@@ -18600,7 +18612,7 @@
           <a:p>
             <a:fld id="{24B21688-43A1-9E40-B99C-09665BCD866A}" type="datetime5">
               <a:rPr lang="en-US" smtClean="0"/>
-              <a:t>28-Oct-25</a:t>
+              <a:t>22-Sep-26</a:t>
             </a:fld>
             <a:endParaRPr lang="en-US"/>
           </a:p>
@@ -18813,7 +18825,7 @@
           <a:p>
             <a:fld id="{2EACF658-CF45-DC48-B9F2-5526860EA20B}" type="datetime5">
               <a:rPr lang="en-US" smtClean="0"/>
-              <a:t>28-Oct-25</a:t>
+              <a:t>22-Sep-26</a:t>
             </a:fld>
             <a:endParaRPr lang="en-US"/>
           </a:p>
@@ -19079,7 +19091,7 @@
           <a:p>
             <a:fld id="{B65E434C-93F5-BD4A-A137-BD761AAC8857}" type="datetime5">
               <a:rPr lang="en-US" smtClean="0"/>
-              <a:t>28-Oct-25</a:t>
+              <a:t>22-Sep-26</a:t>
             </a:fld>
             <a:endParaRPr lang="en-US"/>
           </a:p>
@@ -19340,7 +19352,7 @@
           <a:p>
             <a:fld id="{DFE09402-F84C-4C45-B643-B08938A9942D}" type="datetime5">
               <a:rPr lang="en-US" smtClean="0"/>
-              <a:t>28-Oct-25</a:t>
+              <a:t>22-Sep-26</a:t>
             </a:fld>
             <a:endParaRPr lang="en-US"/>
           </a:p>
@@ -19596,7 +19608,7 @@
           <a:p>
             <a:fld id="{73BE34C8-A550-EB41-BD53-F4F8E94A99FE}" type="datetime5">
               <a:rPr lang="en-US" smtClean="0"/>
-              <a:t>28-Oct-25</a:t>
+              <a:t>22-Sep-26</a:t>
             </a:fld>
             <a:endParaRPr lang="en-US"/>
           </a:p>
@@ -19896,7 +19908,7 @@
           <a:p>
             <a:fld id="{C092998B-F0BE-B243-8379-C541DDDE14F4}" type="datetime5">
               <a:rPr lang="en-US" smtClean="0"/>
-              <a:t>28-Oct-25</a:t>
+              <a:t>22-Sep-26</a:t>
             </a:fld>
             <a:endParaRPr lang="en-US"/>
           </a:p>
@@ -20129,7 +20141,7 @@
           <a:p>
             <a:fld id="{8F7190E5-A397-6F48-92AE-CB7D20AF2B51}" type="datetime5">
               <a:rPr lang="en-US" smtClean="0"/>
-              <a:t>28-Oct-25</a:t>
+              <a:t>22-Sep-26</a:t>
             </a:fld>
             <a:endParaRPr lang="en-US"/>
           </a:p>
@@ -20363,7 +20375,7 @@
           <a:p>
             <a:fld id="{B973F0D1-6192-A149-B1EA-499F2B432EBE}" type="datetime5">
               <a:rPr lang="en-US" smtClean="0"/>
-              <a:t>28-Oct-25</a:t>
+              <a:t>22-Sep-26</a:t>
             </a:fld>
             <a:endParaRPr lang="en-US"/>
           </a:p>
@@ -20587,7 +20599,7 @@
           <a:p>
             <a:fld id="{5F7D23F5-FA24-FF4C-8365-C840C2558681}" type="datetime5">
               <a:rPr lang="en-US" smtClean="0"/>
-              <a:t>28-Oct-25</a:t>
+              <a:t>22-Sep-26</a:t>
             </a:fld>
             <a:endParaRPr lang="en-US"/>
           </a:p>
@@ -20802,7 +20814,7 @@
           <a:p>
             <a:fld id="{D822B67A-F9FD-D242-A472-4F952EF5CF6D}" type="datetime5">
               <a:rPr lang="en-US" smtClean="0"/>
-              <a:t>28-Oct-25</a:t>
+              <a:t>22-Sep-26</a:t>
             </a:fld>
             <a:endParaRPr lang="en-US"/>
           </a:p>
@@ -21053,7 +21065,7 @@
           <a:p>
             <a:fld id="{A5FA7841-9393-7145-9103-3D607B9E53BB}" type="datetime5">
               <a:rPr lang="en-US" smtClean="0"/>
-              <a:t>28-Oct-25</a:t>
+              <a:t>22-Sep-26</a:t>
             </a:fld>
             <a:endParaRPr lang="en-US"/>
           </a:p>
@@ -21343,7 +21355,7 @@
           <a:p>
             <a:fld id="{75C37B9F-0858-704F-B17D-B5F38B88B2D3}" type="datetime5">
               <a:rPr lang="en-US" smtClean="0"/>
-              <a:t>28-Oct-25</a:t>
+              <a:t>22-Sep-26</a:t>
             </a:fld>
             <a:endParaRPr lang="en-US"/>
           </a:p>

--- a/Slides/Chapter05.pptx
+++ b/Slides/Chapter05.pptx
@@ -2,7 +2,7 @@
 <file path=ppt/presentation.xml><?xml version="1.0" encoding="utf-8"?>
 <p:presentation xmlns:a="http://schemas.openxmlformats.org/drawingml/2006/main" xmlns:r="http://schemas.openxmlformats.org/officeDocument/2006/relationships" xmlns:p="http://schemas.openxmlformats.org/presentationml/2006/main" saveSubsetFonts="1" autoCompressPictures="0">
   <p:sldMasterIdLst>
-    <p:sldMasterId id="2147483668" r:id="rId1"/>
+    <p:sldMasterId id="2147483677" r:id="rId1"/>
   </p:sldMasterIdLst>
   <p:notesMasterIdLst>
     <p:notesMasterId r:id="rId72"/>
@@ -266,7 +266,7 @@
           <a:p>
             <a:fld id="{1014AD53-B32D-C140-B1EF-3AA5C844E3CC}" type="datetimeFigureOut">
               <a:rPr lang="en-US" smtClean="0"/>
-              <a:t>9/22/26</a:t>
+              <a:t>10/8/26</a:t>
             </a:fld>
             <a:endParaRPr lang="en-US"/>
           </a:p>
@@ -817,7 +817,7 @@
         </p:nvSpPr>
         <p:spPr>
           <a:xfrm>
-            <a:off x="914400" y="1058938"/>
+            <a:off x="914400" y="1058940"/>
             <a:ext cx="10363200" cy="1470025"/>
           </a:xfrm>
           <a:solidFill>
@@ -869,9 +869,14 @@
         </p:nvSpPr>
         <p:spPr>
           <a:xfrm>
-            <a:off x="2281186" y="2983610"/>
+            <a:off x="2281187" y="2983612"/>
             <a:ext cx="7609479" cy="1009561"/>
           </a:xfrm>
+          <a:prstGeom prst="roundRect">
+            <a:avLst>
+              <a:gd name="adj" fmla="val 37895"/>
+            </a:avLst>
+          </a:prstGeom>
           <a:solidFill>
             <a:schemeClr val="bg1">
               <a:alpha val="95000"/>
@@ -930,10 +935,98 @@
           </a:p>
         </p:txBody>
       </p:sp>
+      <p:sp>
+        <p:nvSpPr>
+          <p:cNvPr id="2" name="Date Placeholder 1">
+            <a:extLst>
+              <a:ext uri="{FF2B5EF4-FFF2-40B4-BE49-F238E27FC236}">
+                <a16:creationId xmlns:a16="http://schemas.microsoft.com/office/drawing/2014/main" id="{9B409C91-6E3E-5409-2F44-4E770C50190C}"/>
+              </a:ext>
+            </a:extLst>
+          </p:cNvPr>
+          <p:cNvSpPr>
+            <a:spLocks noGrp="1"/>
+          </p:cNvSpPr>
+          <p:nvPr>
+            <p:ph type="dt" sz="half" idx="11"/>
+          </p:nvPr>
+        </p:nvSpPr>
+        <p:spPr/>
+        <p:txBody>
+          <a:bodyPr/>
+          <a:lstStyle/>
+          <a:p>
+            <a:fld id="{CEC50CB2-6DC6-DE45-B7D9-48E888687942}" type="datetime1">
+              <a:rPr lang="en-US" smtClean="0"/>
+              <a:t>10/8/26</a:t>
+            </a:fld>
+            <a:endParaRPr lang="en-US" dirty="0"/>
+          </a:p>
+        </p:txBody>
+      </p:sp>
+      <p:sp>
+        <p:nvSpPr>
+          <p:cNvPr id="4" name="Footer Placeholder 3">
+            <a:extLst>
+              <a:ext uri="{FF2B5EF4-FFF2-40B4-BE49-F238E27FC236}">
+                <a16:creationId xmlns:a16="http://schemas.microsoft.com/office/drawing/2014/main" id="{594118C6-B924-AA1F-AEFC-17607998D78C}"/>
+              </a:ext>
+            </a:extLst>
+          </p:cNvPr>
+          <p:cNvSpPr>
+            <a:spLocks noGrp="1"/>
+          </p:cNvSpPr>
+          <p:nvPr>
+            <p:ph type="ftr" sz="quarter" idx="12"/>
+          </p:nvPr>
+        </p:nvSpPr>
+        <p:spPr/>
+        <p:txBody>
+          <a:bodyPr/>
+          <a:lstStyle/>
+          <a:p>
+            <a:r>
+              <a:rPr lang="en-US"/>
+              <a:t>© Steve Beaty and others as cited</a:t>
+            </a:r>
+            <a:endParaRPr lang="en-US" dirty="0"/>
+          </a:p>
+        </p:txBody>
+      </p:sp>
+      <p:sp>
+        <p:nvSpPr>
+          <p:cNvPr id="5" name="Slide Number Placeholder 4">
+            <a:extLst>
+              <a:ext uri="{FF2B5EF4-FFF2-40B4-BE49-F238E27FC236}">
+                <a16:creationId xmlns:a16="http://schemas.microsoft.com/office/drawing/2014/main" id="{29E93608-8881-8010-4D06-440F9FBB6BE8}"/>
+              </a:ext>
+            </a:extLst>
+          </p:cNvPr>
+          <p:cNvSpPr>
+            <a:spLocks noGrp="1"/>
+          </p:cNvSpPr>
+          <p:nvPr>
+            <p:ph type="sldNum" sz="quarter" idx="13"/>
+          </p:nvPr>
+        </p:nvSpPr>
+        <p:spPr/>
+        <p:txBody>
+          <a:bodyPr/>
+          <a:lstStyle/>
+          <a:p>
+            <a:fld id="{37D050C8-32A2-8944-BC0A-E76DEAECED1E}" type="slidenum">
+              <a:rPr lang="en-US" smtClean="0"/>
+              <a:pPr/>
+              <a:t>‹#›</a:t>
+            </a:fld>
+            <a:endParaRPr lang="en-US" dirty="0"/>
+          </a:p>
+        </p:txBody>
+      </p:sp>
     </p:spTree>
     <p:extLst>
       <p:ext uri="{BB962C8B-B14F-4D97-AF65-F5344CB8AC3E}">
-        <p14:creationId xmlns:p14="http://schemas.microsoft.com/office/powerpoint/2010/main" val="1746631109"/>
+        <p14:creationId xmlns:p14="http://schemas.microsoft.com/office/powerpoint/2010/main" val="2021084936"/>
       </p:ext>
     </p:extLst>
   </p:cSld>
@@ -942,12 +1035,12 @@
   </p:clrMapOvr>
   <mc:AlternateContent xmlns:mc="http://schemas.openxmlformats.org/markup-compatibility/2006" xmlns:p14="http://schemas.microsoft.com/office/powerpoint/2010/main">
     <mc:Choice Requires="p14">
-      <p:transition spd="slow" p14:dur="1200">
-        <p14:prism/>
+      <p:transition spd="slow" p14:dur="2000">
+        <p14:prism isContent="1"/>
       </p:transition>
     </mc:Choice>
     <mc:Fallback xmlns="">
-      <p:transition xmlns:p14="http://schemas.microsoft.com/office/powerpoint/2010/main" spd="slow">
+      <p:transition spd="slow">
         <p:fade/>
       </p:transition>
     </mc:Fallback>
@@ -1052,7 +1145,13 @@
       </p:sp>
       <p:sp>
         <p:nvSpPr>
-          <p:cNvPr id="4" name="Date Placeholder 3"/>
+          <p:cNvPr id="8" name="Date Placeholder 7">
+            <a:extLst>
+              <a:ext uri="{FF2B5EF4-FFF2-40B4-BE49-F238E27FC236}">
+                <a16:creationId xmlns:a16="http://schemas.microsoft.com/office/drawing/2014/main" id="{DB39033B-5031-2DE5-AF8A-E269BDEE889F}"/>
+              </a:ext>
+            </a:extLst>
+          </p:cNvPr>
           <p:cNvSpPr>
             <a:spLocks noGrp="1"/>
           </p:cNvSpPr>
@@ -1060,22 +1159,14 @@
             <p:ph type="dt" sz="half" idx="10"/>
           </p:nvPr>
         </p:nvSpPr>
-        <p:spPr>
-          <a:xfrm>
-            <a:off x="4406051" y="6308727"/>
-            <a:ext cx="1169155" cy="485424"/>
-          </a:xfrm>
-          <a:prstGeom prst="rect">
-            <a:avLst/>
-          </a:prstGeom>
-        </p:spPr>
-        <p:txBody>
-          <a:bodyPr/>
-          <a:lstStyle/>
-          <a:p>
-            <a:fld id="{B81ECC85-AFE0-C249-B7B8-61A52844C17E}" type="datetime5">
+        <p:spPr/>
+        <p:txBody>
+          <a:bodyPr/>
+          <a:lstStyle/>
+          <a:p>
+            <a:fld id="{2310765A-4BBB-804E-941D-19C2203611FC}" type="datetime1">
               <a:rPr lang="en-US" smtClean="0"/>
-              <a:t>22-Sep-26</a:t>
+              <a:t>10/8/26</a:t>
             </a:fld>
             <a:endParaRPr lang="en-US"/>
           </a:p>
@@ -1083,7 +1174,13 @@
       </p:sp>
       <p:sp>
         <p:nvSpPr>
-          <p:cNvPr id="5" name="Footer Placeholder 4"/>
+          <p:cNvPr id="9" name="Footer Placeholder 8">
+            <a:extLst>
+              <a:ext uri="{FF2B5EF4-FFF2-40B4-BE49-F238E27FC236}">
+                <a16:creationId xmlns:a16="http://schemas.microsoft.com/office/drawing/2014/main" id="{8CC0AD20-1FAB-5697-725E-A23B4E11A490}"/>
+              </a:ext>
+            </a:extLst>
+          </p:cNvPr>
           <p:cNvSpPr>
             <a:spLocks noGrp="1"/>
           </p:cNvSpPr>
@@ -1105,7 +1202,13 @@
       </p:sp>
       <p:sp>
         <p:nvSpPr>
-          <p:cNvPr id="6" name="Slide Number Placeholder 5"/>
+          <p:cNvPr id="10" name="SlideNumberWithTotal">
+            <a:extLst>
+              <a:ext uri="{FF2B5EF4-FFF2-40B4-BE49-F238E27FC236}">
+                <a16:creationId xmlns:a16="http://schemas.microsoft.com/office/drawing/2014/main" id="{C85ADDAF-31A4-85DD-32A3-DD43B60F68C2}"/>
+              </a:ext>
+            </a:extLst>
+          </p:cNvPr>
           <p:cNvSpPr>
             <a:spLocks noGrp="1"/>
           </p:cNvSpPr>
@@ -1128,10 +1231,10 @@
       </p:sp>
       <p:sp>
         <p:nvSpPr>
-          <p:cNvPr id="7" name="Date Placeholder 2">
-            <a:extLst>
-              <a:ext uri="{FF2B5EF4-FFF2-40B4-BE49-F238E27FC236}">
-                <a16:creationId xmlns:a16="http://schemas.microsoft.com/office/drawing/2014/main" id="{FD3C3453-6596-1340-01B9-8877C1567E49}"/>
+          <p:cNvPr id="4" name="Date Placeholder 2">
+            <a:extLst>
+              <a:ext uri="{FF2B5EF4-FFF2-40B4-BE49-F238E27FC236}">
+                <a16:creationId xmlns:a16="http://schemas.microsoft.com/office/drawing/2014/main" id="{317FA6C5-5BF6-287D-91F4-47597FBB83B6}"/>
               </a:ext>
             </a:extLst>
           </p:cNvPr>
@@ -1256,7 +1359,7 @@
             <a:fld id="{59E145AF-2465-1345-A673-F2664B07CED8}" type="datetime5">
               <a:rPr lang="en-US" smtClean="0"/>
               <a:pPr/>
-              <a:t>22-Sep-26</a:t>
+              <a:t>8-Oct-26</a:t>
             </a:fld>
             <a:endParaRPr lang="en-US" dirty="0"/>
           </a:p>
@@ -1265,7 +1368,7 @@
     </p:spTree>
     <p:extLst>
       <p:ext uri="{BB962C8B-B14F-4D97-AF65-F5344CB8AC3E}">
-        <p14:creationId xmlns:p14="http://schemas.microsoft.com/office/powerpoint/2010/main" val="1068914041"/>
+        <p14:creationId xmlns:p14="http://schemas.microsoft.com/office/powerpoint/2010/main" val="3990758910"/>
       </p:ext>
     </p:extLst>
   </p:cSld>
@@ -1274,12 +1377,12 @@
   </p:clrMapOvr>
   <mc:AlternateContent xmlns:mc="http://schemas.openxmlformats.org/markup-compatibility/2006" xmlns:p14="http://schemas.microsoft.com/office/powerpoint/2010/main">
     <mc:Choice Requires="p14">
-      <p:transition spd="slow" p14:dur="1200">
-        <p14:prism/>
+      <p:transition spd="slow" p14:dur="2000">
+        <p14:prism isContent="1"/>
       </p:transition>
     </mc:Choice>
     <mc:Fallback xmlns="">
-      <p:transition xmlns:p14="http://schemas.microsoft.com/office/powerpoint/2010/main" spd="slow">
+      <p:transition spd="slow">
         <p:fade/>
       </p:transition>
     </mc:Fallback>
@@ -1372,7 +1475,13 @@
       </p:sp>
       <p:sp>
         <p:nvSpPr>
-          <p:cNvPr id="4" name="Date Placeholder 3"/>
+          <p:cNvPr id="8" name="Date Placeholder 7">
+            <a:extLst>
+              <a:ext uri="{FF2B5EF4-FFF2-40B4-BE49-F238E27FC236}">
+                <a16:creationId xmlns:a16="http://schemas.microsoft.com/office/drawing/2014/main" id="{DEEF9C46-CD18-5177-41DC-5A44F050BB88}"/>
+              </a:ext>
+            </a:extLst>
+          </p:cNvPr>
           <p:cNvSpPr>
             <a:spLocks noGrp="1"/>
           </p:cNvSpPr>
@@ -1380,22 +1489,14 @@
             <p:ph type="dt" sz="half" idx="10"/>
           </p:nvPr>
         </p:nvSpPr>
-        <p:spPr>
-          <a:xfrm>
-            <a:off x="4406051" y="6308727"/>
-            <a:ext cx="1169155" cy="485424"/>
-          </a:xfrm>
-          <a:prstGeom prst="rect">
-            <a:avLst/>
-          </a:prstGeom>
-        </p:spPr>
-        <p:txBody>
-          <a:bodyPr/>
-          <a:lstStyle/>
-          <a:p>
-            <a:fld id="{F2E4E05D-C966-5845-BEBD-042485385735}" type="datetime5">
+        <p:spPr/>
+        <p:txBody>
+          <a:bodyPr/>
+          <a:lstStyle/>
+          <a:p>
+            <a:fld id="{758CEAC3-C00F-7848-97ED-8EC14DCD375E}" type="datetime1">
               <a:rPr lang="en-US" smtClean="0"/>
-              <a:t>22-Sep-26</a:t>
+              <a:t>10/8/26</a:t>
             </a:fld>
             <a:endParaRPr lang="en-US"/>
           </a:p>
@@ -1403,7 +1504,13 @@
       </p:sp>
       <p:sp>
         <p:nvSpPr>
-          <p:cNvPr id="5" name="Footer Placeholder 4"/>
+          <p:cNvPr id="9" name="Footer Placeholder 8">
+            <a:extLst>
+              <a:ext uri="{FF2B5EF4-FFF2-40B4-BE49-F238E27FC236}">
+                <a16:creationId xmlns:a16="http://schemas.microsoft.com/office/drawing/2014/main" id="{A6447FE1-5C78-6FAD-D883-46A9B247C887}"/>
+              </a:ext>
+            </a:extLst>
+          </p:cNvPr>
           <p:cNvSpPr>
             <a:spLocks noGrp="1"/>
           </p:cNvSpPr>
@@ -1425,7 +1532,13 @@
       </p:sp>
       <p:sp>
         <p:nvSpPr>
-          <p:cNvPr id="6" name="Slide Number Placeholder 5"/>
+          <p:cNvPr id="10" name="Slide Number Placeholder 9">
+            <a:extLst>
+              <a:ext uri="{FF2B5EF4-FFF2-40B4-BE49-F238E27FC236}">
+                <a16:creationId xmlns:a16="http://schemas.microsoft.com/office/drawing/2014/main" id="{3BEAED22-447D-B036-C934-3337B57F57F0}"/>
+              </a:ext>
+            </a:extLst>
+          </p:cNvPr>
           <p:cNvSpPr>
             <a:spLocks noGrp="1"/>
           </p:cNvSpPr>
@@ -1448,10 +1561,10 @@
       </p:sp>
       <p:sp>
         <p:nvSpPr>
-          <p:cNvPr id="7" name="Date Placeholder 2">
-            <a:extLst>
-              <a:ext uri="{FF2B5EF4-FFF2-40B4-BE49-F238E27FC236}">
-                <a16:creationId xmlns:a16="http://schemas.microsoft.com/office/drawing/2014/main" id="{9887BBEB-32D5-2D50-07CA-3F51A75FA0E8}"/>
+          <p:cNvPr id="4" name="Date Placeholder 2">
+            <a:extLst>
+              <a:ext uri="{FF2B5EF4-FFF2-40B4-BE49-F238E27FC236}">
+                <a16:creationId xmlns:a16="http://schemas.microsoft.com/office/drawing/2014/main" id="{21BA7917-730E-FE26-33D7-1804D7DEFC4D}"/>
               </a:ext>
             </a:extLst>
           </p:cNvPr>
@@ -1576,7 +1689,7 @@
             <a:fld id="{59E145AF-2465-1345-A673-F2664B07CED8}" type="datetime5">
               <a:rPr lang="en-US" smtClean="0"/>
               <a:pPr/>
-              <a:t>22-Sep-26</a:t>
+              <a:t>8-Oct-26</a:t>
             </a:fld>
             <a:endParaRPr lang="en-US" dirty="0"/>
           </a:p>
@@ -1585,13 +1698,25 @@
     </p:spTree>
     <p:extLst>
       <p:ext uri="{BB962C8B-B14F-4D97-AF65-F5344CB8AC3E}">
-        <p14:creationId xmlns:p14="http://schemas.microsoft.com/office/powerpoint/2010/main" val="601771503"/>
+        <p14:creationId xmlns:p14="http://schemas.microsoft.com/office/powerpoint/2010/main" val="4087777280"/>
       </p:ext>
     </p:extLst>
   </p:cSld>
   <p:clrMapOvr>
     <a:masterClrMapping/>
   </p:clrMapOvr>
+  <mc:AlternateContent xmlns:mc="http://schemas.openxmlformats.org/markup-compatibility/2006" xmlns:p14="http://schemas.microsoft.com/office/powerpoint/2010/main">
+    <mc:Choice Requires="p14">
+      <p:transition spd="slow" p14:dur="2000">
+        <p14:prism isContent="1"/>
+      </p:transition>
+    </mc:Choice>
+    <mc:Fallback xmlns="">
+      <p:transition spd="slow">
+        <p:fade/>
+      </p:transition>
+    </mc:Fallback>
+  </mc:AlternateContent>
 </p:sldLayout>
 </file>
 
@@ -1646,7 +1771,7 @@
         </p:nvSpPr>
         <p:spPr>
           <a:xfrm>
-            <a:off x="609600" y="1602487"/>
+            <a:off x="609600" y="1602488"/>
             <a:ext cx="5321600" cy="4525963"/>
           </a:xfrm>
           <a:ln w="25400" cap="flat">
@@ -1681,82 +1806,6 @@
       </p:sp>
       <p:sp>
         <p:nvSpPr>
-          <p:cNvPr id="4" name="Date Placeholder 3"/>
-          <p:cNvSpPr>
-            <a:spLocks noGrp="1"/>
-          </p:cNvSpPr>
-          <p:nvPr>
-            <p:ph type="dt" sz="half" idx="10"/>
-          </p:nvPr>
-        </p:nvSpPr>
-        <p:spPr>
-          <a:xfrm>
-            <a:off x="4406051" y="6308727"/>
-            <a:ext cx="1169155" cy="485424"/>
-          </a:xfrm>
-          <a:prstGeom prst="rect">
-            <a:avLst/>
-          </a:prstGeom>
-        </p:spPr>
-        <p:txBody>
-          <a:bodyPr/>
-          <a:lstStyle/>
-          <a:p>
-            <a:fld id="{58ACF659-EF88-2B45-A576-F85780E7DB9B}" type="datetime5">
-              <a:rPr lang="en-US" smtClean="0"/>
-              <a:t>22-Sep-26</a:t>
-            </a:fld>
-            <a:endParaRPr lang="en-US"/>
-          </a:p>
-        </p:txBody>
-      </p:sp>
-      <p:sp>
-        <p:nvSpPr>
-          <p:cNvPr id="5" name="Footer Placeholder 4"/>
-          <p:cNvSpPr>
-            <a:spLocks noGrp="1"/>
-          </p:cNvSpPr>
-          <p:nvPr>
-            <p:ph type="ftr" sz="quarter" idx="11"/>
-          </p:nvPr>
-        </p:nvSpPr>
-        <p:spPr/>
-        <p:txBody>
-          <a:bodyPr/>
-          <a:lstStyle/>
-          <a:p>
-            <a:r>
-              <a:rPr lang="en-US"/>
-              <a:t>© Steve Beaty and others as cited</a:t>
-            </a:r>
-          </a:p>
-        </p:txBody>
-      </p:sp>
-      <p:sp>
-        <p:nvSpPr>
-          <p:cNvPr id="6" name="Slide Number Placeholder 5"/>
-          <p:cNvSpPr>
-            <a:spLocks noGrp="1"/>
-          </p:cNvSpPr>
-          <p:nvPr>
-            <p:ph type="sldNum" sz="quarter" idx="12"/>
-          </p:nvPr>
-        </p:nvSpPr>
-        <p:spPr/>
-        <p:txBody>
-          <a:bodyPr/>
-          <a:lstStyle/>
-          <a:p>
-            <a:fld id="{62CBAC88-EF5B-3148-888C-824478CD1B05}" type="slidenum">
-              <a:rPr lang="en-US" smtClean="0"/>
-              <a:t>‹#›</a:t>
-            </a:fld>
-            <a:endParaRPr lang="en-US"/>
-          </a:p>
-        </p:txBody>
-      </p:sp>
-      <p:sp>
-        <p:nvSpPr>
           <p:cNvPr id="7" name="Content Placeholder 2">
             <a:extLst>
               <a:ext uri="{FF2B5EF4-FFF2-40B4-BE49-F238E27FC236}">
@@ -1807,10 +1856,96 @@
       </p:sp>
       <p:sp>
         <p:nvSpPr>
-          <p:cNvPr id="8" name="Date Placeholder 2">
-            <a:extLst>
-              <a:ext uri="{FF2B5EF4-FFF2-40B4-BE49-F238E27FC236}">
-                <a16:creationId xmlns:a16="http://schemas.microsoft.com/office/drawing/2014/main" id="{7DDEEDF1-8A77-85F3-9C93-920E453307BB}"/>
+          <p:cNvPr id="9" name="Date Placeholder 8">
+            <a:extLst>
+              <a:ext uri="{FF2B5EF4-FFF2-40B4-BE49-F238E27FC236}">
+                <a16:creationId xmlns:a16="http://schemas.microsoft.com/office/drawing/2014/main" id="{71D19512-769A-1A2D-AE4B-615827F538DF}"/>
+              </a:ext>
+            </a:extLst>
+          </p:cNvPr>
+          <p:cNvSpPr>
+            <a:spLocks noGrp="1"/>
+          </p:cNvSpPr>
+          <p:nvPr>
+            <p:ph type="dt" sz="half" idx="14"/>
+          </p:nvPr>
+        </p:nvSpPr>
+        <p:spPr/>
+        <p:txBody>
+          <a:bodyPr/>
+          <a:lstStyle/>
+          <a:p>
+            <a:fld id="{D94791E5-C041-E840-A09B-A928400C9397}" type="datetime1">
+              <a:rPr lang="en-US" smtClean="0"/>
+              <a:t>10/8/26</a:t>
+            </a:fld>
+            <a:endParaRPr lang="en-US"/>
+          </a:p>
+        </p:txBody>
+      </p:sp>
+      <p:sp>
+        <p:nvSpPr>
+          <p:cNvPr id="10" name="Footer Placeholder 9">
+            <a:extLst>
+              <a:ext uri="{FF2B5EF4-FFF2-40B4-BE49-F238E27FC236}">
+                <a16:creationId xmlns:a16="http://schemas.microsoft.com/office/drawing/2014/main" id="{88537417-0F7B-4AB8-2913-FC8911CF4DFA}"/>
+              </a:ext>
+            </a:extLst>
+          </p:cNvPr>
+          <p:cNvSpPr>
+            <a:spLocks noGrp="1"/>
+          </p:cNvSpPr>
+          <p:nvPr>
+            <p:ph type="ftr" sz="quarter" idx="15"/>
+          </p:nvPr>
+        </p:nvSpPr>
+        <p:spPr/>
+        <p:txBody>
+          <a:bodyPr/>
+          <a:lstStyle/>
+          <a:p>
+            <a:r>
+              <a:rPr lang="en-US"/>
+              <a:t>© Steve Beaty and others as cited</a:t>
+            </a:r>
+          </a:p>
+        </p:txBody>
+      </p:sp>
+      <p:sp>
+        <p:nvSpPr>
+          <p:cNvPr id="11" name="Slide Number Placeholder 10">
+            <a:extLst>
+              <a:ext uri="{FF2B5EF4-FFF2-40B4-BE49-F238E27FC236}">
+                <a16:creationId xmlns:a16="http://schemas.microsoft.com/office/drawing/2014/main" id="{6C508543-3E8A-F349-1E14-7A34163E0A10}"/>
+              </a:ext>
+            </a:extLst>
+          </p:cNvPr>
+          <p:cNvSpPr>
+            <a:spLocks noGrp="1"/>
+          </p:cNvSpPr>
+          <p:nvPr>
+            <p:ph type="sldNum" sz="quarter" idx="16"/>
+          </p:nvPr>
+        </p:nvSpPr>
+        <p:spPr/>
+        <p:txBody>
+          <a:bodyPr/>
+          <a:lstStyle/>
+          <a:p>
+            <a:fld id="{62CBAC88-EF5B-3148-888C-824478CD1B05}" type="slidenum">
+              <a:rPr lang="en-US" smtClean="0"/>
+              <a:t>‹#›</a:t>
+            </a:fld>
+            <a:endParaRPr lang="en-US"/>
+          </a:p>
+        </p:txBody>
+      </p:sp>
+      <p:sp>
+        <p:nvSpPr>
+          <p:cNvPr id="4" name="Date Placeholder 2">
+            <a:extLst>
+              <a:ext uri="{FF2B5EF4-FFF2-40B4-BE49-F238E27FC236}">
+                <a16:creationId xmlns:a16="http://schemas.microsoft.com/office/drawing/2014/main" id="{BC554FD7-644F-165A-8FF3-527D85F861AC}"/>
               </a:ext>
             </a:extLst>
           </p:cNvPr>
@@ -1935,7 +2070,7 @@
             <a:fld id="{59E145AF-2465-1345-A673-F2664B07CED8}" type="datetime5">
               <a:rPr lang="en-US" smtClean="0"/>
               <a:pPr/>
-              <a:t>22-Sep-26</a:t>
+              <a:t>8-Oct-26</a:t>
             </a:fld>
             <a:endParaRPr lang="en-US" dirty="0"/>
           </a:p>
@@ -1944,13 +2079,25 @@
     </p:spTree>
     <p:extLst>
       <p:ext uri="{BB962C8B-B14F-4D97-AF65-F5344CB8AC3E}">
-        <p14:creationId xmlns:p14="http://schemas.microsoft.com/office/powerpoint/2010/main" val="3573244763"/>
+        <p14:creationId xmlns:p14="http://schemas.microsoft.com/office/powerpoint/2010/main" val="1692682289"/>
       </p:ext>
     </p:extLst>
   </p:cSld>
   <p:clrMapOvr>
     <a:masterClrMapping/>
   </p:clrMapOvr>
+  <mc:AlternateContent xmlns:mc="http://schemas.openxmlformats.org/markup-compatibility/2006" xmlns:p14="http://schemas.microsoft.com/office/powerpoint/2010/main">
+    <mc:Choice Requires="p14">
+      <p:transition spd="slow" p14:dur="2000">
+        <p14:prism isContent="1"/>
+      </p:transition>
+    </mc:Choice>
+    <mc:Fallback xmlns="">
+      <p:transition spd="slow">
+        <p:fade/>
+      </p:transition>
+    </mc:Fallback>
+  </mc:AlternateContent>
 </p:sldLayout>
 </file>
 
@@ -2173,7 +2320,7 @@
         </p:nvSpPr>
         <p:spPr>
           <a:xfrm>
-            <a:off x="4406051" y="6308727"/>
+            <a:off x="4406052" y="6308727"/>
             <a:ext cx="1169155" cy="485424"/>
           </a:xfrm>
           <a:prstGeom prst="rect">
@@ -2184,9 +2331,9 @@
           <a:bodyPr/>
           <a:lstStyle/>
           <a:p>
-            <a:fld id="{58D37E5E-00C5-534E-A15C-41F0900565AD}" type="datetime5">
+            <a:fld id="{744B3F8B-C767-4F4C-8482-C2BBC803F883}" type="datetime1">
               <a:rPr lang="en-US" smtClean="0"/>
-              <a:t>22-Sep-26</a:t>
+              <a:t>10/8/26</a:t>
             </a:fld>
             <a:endParaRPr lang="en-US"/>
           </a:p>
@@ -2242,7 +2389,7 @@
           <p:cNvPr id="8" name="Date Placeholder 2">
             <a:extLst>
               <a:ext uri="{FF2B5EF4-FFF2-40B4-BE49-F238E27FC236}">
-                <a16:creationId xmlns:a16="http://schemas.microsoft.com/office/drawing/2014/main" id="{BC7257D9-CFE4-6187-731B-973A817958BF}"/>
+                <a16:creationId xmlns:a16="http://schemas.microsoft.com/office/drawing/2014/main" id="{1286FAB2-104E-7FBF-E674-513DC7ED95AD}"/>
               </a:ext>
             </a:extLst>
           </p:cNvPr>
@@ -2367,7 +2514,7 @@
             <a:fld id="{59E145AF-2465-1345-A673-F2664B07CED8}" type="datetime5">
               <a:rPr lang="en-US" smtClean="0"/>
               <a:pPr/>
-              <a:t>22-Sep-26</a:t>
+              <a:t>8-Oct-26</a:t>
             </a:fld>
             <a:endParaRPr lang="en-US" dirty="0"/>
           </a:p>
@@ -2376,7 +2523,7 @@
     </p:spTree>
     <p:extLst>
       <p:ext uri="{BB962C8B-B14F-4D97-AF65-F5344CB8AC3E}">
-        <p14:creationId xmlns:p14="http://schemas.microsoft.com/office/powerpoint/2010/main" val="2824154125"/>
+        <p14:creationId xmlns:p14="http://schemas.microsoft.com/office/powerpoint/2010/main" val="1390709898"/>
       </p:ext>
     </p:extLst>
   </p:cSld>
@@ -2385,12 +2532,12 @@
   </p:clrMapOvr>
   <mc:AlternateContent xmlns:mc="http://schemas.openxmlformats.org/markup-compatibility/2006" xmlns:p14="http://schemas.microsoft.com/office/powerpoint/2010/main">
     <mc:Choice Requires="p14">
-      <p:transition spd="slow" p14:dur="1200">
-        <p14:prism/>
+      <p:transition spd="slow" p14:dur="2000">
+        <p14:prism isContent="1"/>
       </p:transition>
     </mc:Choice>
     <mc:Fallback xmlns="">
-      <p:transition xmlns:p14="http://schemas.microsoft.com/office/powerpoint/2010/main" spd="slow">
+      <p:transition spd="slow">
         <p:fade/>
       </p:transition>
     </mc:Fallback>
@@ -2439,7 +2586,13 @@
       </p:sp>
       <p:sp>
         <p:nvSpPr>
-          <p:cNvPr id="3" name="Date Placeholder 2"/>
+          <p:cNvPr id="7" name="Date Placeholder 6">
+            <a:extLst>
+              <a:ext uri="{FF2B5EF4-FFF2-40B4-BE49-F238E27FC236}">
+                <a16:creationId xmlns:a16="http://schemas.microsoft.com/office/drawing/2014/main" id="{CD92DC31-8A1B-D6EF-9DCB-F31748611FEA}"/>
+              </a:ext>
+            </a:extLst>
+          </p:cNvPr>
           <p:cNvSpPr>
             <a:spLocks noGrp="1"/>
           </p:cNvSpPr>
@@ -2447,22 +2600,14 @@
             <p:ph type="dt" sz="half" idx="10"/>
           </p:nvPr>
         </p:nvSpPr>
-        <p:spPr>
-          <a:xfrm>
-            <a:off x="4406051" y="6308727"/>
-            <a:ext cx="1169155" cy="485424"/>
-          </a:xfrm>
-          <a:prstGeom prst="rect">
-            <a:avLst/>
-          </a:prstGeom>
-        </p:spPr>
-        <p:txBody>
-          <a:bodyPr/>
-          <a:lstStyle/>
-          <a:p>
-            <a:fld id="{7863BC3A-EEBB-604F-BA5E-9BB6AC27E8D5}" type="datetime5">
+        <p:spPr/>
+        <p:txBody>
+          <a:bodyPr/>
+          <a:lstStyle/>
+          <a:p>
+            <a:fld id="{2797BA57-E2D4-9E43-AE06-CBC17865D74F}" type="datetime1">
               <a:rPr lang="en-US" smtClean="0"/>
-              <a:t>22-Sep-26</a:t>
+              <a:t>10/8/26</a:t>
             </a:fld>
             <a:endParaRPr lang="en-US"/>
           </a:p>
@@ -2470,7 +2615,13 @@
       </p:sp>
       <p:sp>
         <p:nvSpPr>
-          <p:cNvPr id="4" name="Footer Placeholder 3"/>
+          <p:cNvPr id="8" name="Footer Placeholder 7">
+            <a:extLst>
+              <a:ext uri="{FF2B5EF4-FFF2-40B4-BE49-F238E27FC236}">
+                <a16:creationId xmlns:a16="http://schemas.microsoft.com/office/drawing/2014/main" id="{3E733F8A-5589-31C8-DB78-246D75351B3B}"/>
+              </a:ext>
+            </a:extLst>
+          </p:cNvPr>
           <p:cNvSpPr>
             <a:spLocks noGrp="1"/>
           </p:cNvSpPr>
@@ -2492,7 +2643,13 @@
       </p:sp>
       <p:sp>
         <p:nvSpPr>
-          <p:cNvPr id="5" name="Slide Number Placeholder 4"/>
+          <p:cNvPr id="9" name="Slide Number Placeholder 8">
+            <a:extLst>
+              <a:ext uri="{FF2B5EF4-FFF2-40B4-BE49-F238E27FC236}">
+                <a16:creationId xmlns:a16="http://schemas.microsoft.com/office/drawing/2014/main" id="{CF4200DB-D3DA-2D0A-8CD3-6E48E32FC594}"/>
+              </a:ext>
+            </a:extLst>
+          </p:cNvPr>
           <p:cNvSpPr>
             <a:spLocks noGrp="1"/>
           </p:cNvSpPr>
@@ -2515,10 +2672,10 @@
       </p:sp>
       <p:sp>
         <p:nvSpPr>
-          <p:cNvPr id="6" name="Date Placeholder 2">
-            <a:extLst>
-              <a:ext uri="{FF2B5EF4-FFF2-40B4-BE49-F238E27FC236}">
-                <a16:creationId xmlns:a16="http://schemas.microsoft.com/office/drawing/2014/main" id="{346DE585-182D-C90D-7BFC-E67326368F83}"/>
+          <p:cNvPr id="3" name="Date Placeholder 2">
+            <a:extLst>
+              <a:ext uri="{FF2B5EF4-FFF2-40B4-BE49-F238E27FC236}">
+                <a16:creationId xmlns:a16="http://schemas.microsoft.com/office/drawing/2014/main" id="{594BB24C-9498-4879-0B09-6F1A8090202B}"/>
               </a:ext>
             </a:extLst>
           </p:cNvPr>
@@ -2643,7 +2800,7 @@
             <a:fld id="{59E145AF-2465-1345-A673-F2664B07CED8}" type="datetime5">
               <a:rPr lang="en-US" smtClean="0"/>
               <a:pPr/>
-              <a:t>22-Sep-26</a:t>
+              <a:t>8-Oct-26</a:t>
             </a:fld>
             <a:endParaRPr lang="en-US" dirty="0"/>
           </a:p>
@@ -2652,7 +2809,7 @@
     </p:spTree>
     <p:extLst>
       <p:ext uri="{BB962C8B-B14F-4D97-AF65-F5344CB8AC3E}">
-        <p14:creationId xmlns:p14="http://schemas.microsoft.com/office/powerpoint/2010/main" val="2056972119"/>
+        <p14:creationId xmlns:p14="http://schemas.microsoft.com/office/powerpoint/2010/main" val="76443956"/>
       </p:ext>
     </p:extLst>
   </p:cSld>
@@ -2661,12 +2818,12 @@
   </p:clrMapOvr>
   <mc:AlternateContent xmlns:mc="http://schemas.openxmlformats.org/markup-compatibility/2006" xmlns:p14="http://schemas.microsoft.com/office/powerpoint/2010/main">
     <mc:Choice Requires="p14">
-      <p:transition spd="slow" p14:dur="1200">
-        <p14:prism/>
+      <p:transition spd="slow" p14:dur="2000">
+        <p14:prism isContent="1"/>
       </p:transition>
     </mc:Choice>
     <mc:Fallback xmlns="">
-      <p:transition xmlns:p14="http://schemas.microsoft.com/office/powerpoint/2010/main" spd="slow">
+      <p:transition spd="slow">
         <p:fade/>
       </p:transition>
     </mc:Fallback>
@@ -2693,7 +2850,42 @@
       </p:grpSpPr>
       <p:sp>
         <p:nvSpPr>
-          <p:cNvPr id="4" name="Footer Placeholder 3"/>
+          <p:cNvPr id="6" name="Date Placeholder 5">
+            <a:extLst>
+              <a:ext uri="{FF2B5EF4-FFF2-40B4-BE49-F238E27FC236}">
+                <a16:creationId xmlns:a16="http://schemas.microsoft.com/office/drawing/2014/main" id="{5C487D0D-A6BE-50D0-4804-465FF9AE0F65}"/>
+              </a:ext>
+            </a:extLst>
+          </p:cNvPr>
+          <p:cNvSpPr>
+            <a:spLocks noGrp="1"/>
+          </p:cNvSpPr>
+          <p:nvPr>
+            <p:ph type="dt" sz="half" idx="10"/>
+          </p:nvPr>
+        </p:nvSpPr>
+        <p:spPr/>
+        <p:txBody>
+          <a:bodyPr/>
+          <a:lstStyle/>
+          <a:p>
+            <a:fld id="{0F1D1E22-6DEE-9244-97CC-A22913F630A1}" type="datetime1">
+              <a:rPr lang="en-US" smtClean="0"/>
+              <a:t>10/8/26</a:t>
+            </a:fld>
+            <a:endParaRPr lang="en-US" dirty="0"/>
+          </a:p>
+        </p:txBody>
+      </p:sp>
+      <p:sp>
+        <p:nvSpPr>
+          <p:cNvPr id="7" name="Footer Placeholder 6">
+            <a:extLst>
+              <a:ext uri="{FF2B5EF4-FFF2-40B4-BE49-F238E27FC236}">
+                <a16:creationId xmlns:a16="http://schemas.microsoft.com/office/drawing/2014/main" id="{FF4343B0-C3EA-68AB-7293-4C580E1ED630}"/>
+              </a:ext>
+            </a:extLst>
+          </p:cNvPr>
           <p:cNvSpPr>
             <a:spLocks noGrp="1"/>
           </p:cNvSpPr>
@@ -2701,12 +2893,7 @@
             <p:ph type="ftr" sz="quarter" idx="11"/>
           </p:nvPr>
         </p:nvSpPr>
-        <p:spPr>
-          <a:xfrm>
-            <a:off x="1973208" y="6327488"/>
-            <a:ext cx="8605793" cy="487680"/>
-          </a:xfrm>
-        </p:spPr>
+        <p:spPr/>
         <p:txBody>
           <a:bodyPr/>
           <a:lstStyle/>
@@ -2720,7 +2907,13 @@
       </p:sp>
       <p:sp>
         <p:nvSpPr>
-          <p:cNvPr id="5" name="Slide Number Placeholder 4"/>
+          <p:cNvPr id="8" name="Slide Number Placeholder 7">
+            <a:extLst>
+              <a:ext uri="{FF2B5EF4-FFF2-40B4-BE49-F238E27FC236}">
+                <a16:creationId xmlns:a16="http://schemas.microsoft.com/office/drawing/2014/main" id="{498496D9-0557-9109-1A11-35D97D8FDD5A}"/>
+              </a:ext>
+            </a:extLst>
+          </p:cNvPr>
           <p:cNvSpPr>
             <a:spLocks noGrp="1"/>
           </p:cNvSpPr>
@@ -2728,12 +2921,7 @@
             <p:ph type="sldNum" sz="quarter" idx="12"/>
           </p:nvPr>
         </p:nvSpPr>
-        <p:spPr>
-          <a:xfrm>
-            <a:off x="10745942" y="6308726"/>
-            <a:ext cx="879777" cy="487680"/>
-          </a:xfrm>
-        </p:spPr>
+        <p:spPr/>
         <p:txBody>
           <a:bodyPr/>
           <a:lstStyle/>
@@ -2746,57 +2934,10 @@
           </a:p>
         </p:txBody>
       </p:sp>
-      <p:sp>
-        <p:nvSpPr>
-          <p:cNvPr id="2" name="Date Placeholder 2">
-            <a:extLst>
-              <a:ext uri="{FF2B5EF4-FFF2-40B4-BE49-F238E27FC236}">
-                <a16:creationId xmlns:a16="http://schemas.microsoft.com/office/drawing/2014/main" id="{ED4BD15D-B8F3-E5F7-61A8-F1581CE5EF72}"/>
-              </a:ext>
-            </a:extLst>
-          </p:cNvPr>
-          <p:cNvSpPr>
-            <a:spLocks noGrp="1"/>
-          </p:cNvSpPr>
-          <p:nvPr>
-            <p:ph type="dt" sz="half" idx="2"/>
-          </p:nvPr>
-        </p:nvSpPr>
-        <p:spPr>
-          <a:xfrm>
-            <a:off x="605141" y="6308726"/>
-            <a:ext cx="1169155" cy="487680"/>
-          </a:xfrm>
-          <a:prstGeom prst="rect">
-            <a:avLst/>
-          </a:prstGeom>
-          <a:solidFill>
-            <a:schemeClr val="bg1"/>
-          </a:solidFill>
-          <a:effectLst>
-            <a:softEdge rad="63500"/>
-          </a:effectLst>
-        </p:spPr>
-        <p:txBody>
-          <a:bodyPr anchor="ctr" anchorCtr="0"/>
-          <a:lstStyle>
-            <a:lvl1pPr algn="ctr">
-              <a:defRPr sz="1600"/>
-            </a:lvl1pPr>
-          </a:lstStyle>
-          <a:p>
-            <a:fld id="{59E145AF-2465-1345-A673-F2664B07CED8}" type="datetime5">
-              <a:rPr lang="en-US" smtClean="0"/>
-              <a:t>22-Sep-26</a:t>
-            </a:fld>
-            <a:endParaRPr lang="en-US" dirty="0"/>
-          </a:p>
-        </p:txBody>
-      </p:sp>
     </p:spTree>
     <p:extLst>
       <p:ext uri="{BB962C8B-B14F-4D97-AF65-F5344CB8AC3E}">
-        <p14:creationId xmlns:p14="http://schemas.microsoft.com/office/powerpoint/2010/main" val="3752876753"/>
+        <p14:creationId xmlns:p14="http://schemas.microsoft.com/office/powerpoint/2010/main" val="609171204"/>
       </p:ext>
     </p:extLst>
   </p:cSld>
@@ -2805,171 +2946,16 @@
   </p:clrMapOvr>
   <mc:AlternateContent xmlns:mc="http://schemas.openxmlformats.org/markup-compatibility/2006" xmlns:p14="http://schemas.microsoft.com/office/powerpoint/2010/main">
     <mc:Choice Requires="p14">
-      <p:transition spd="slow" p14:dur="1200">
-        <p14:prism/>
+      <p:transition spd="slow" p14:dur="2000">
+        <p14:prism isContent="1"/>
       </p:transition>
     </mc:Choice>
     <mc:Fallback xmlns="">
-      <p:transition xmlns:p14="http://schemas.microsoft.com/office/powerpoint/2010/main" spd="slow">
+      <p:transition spd="slow">
         <p:fade/>
       </p:transition>
     </mc:Fallback>
   </mc:AlternateContent>
-</p:sldLayout>
-</file>
-
-<file path=ppt/slideLayouts/slideLayout8.xml><?xml version="1.0" encoding="utf-8"?>
-<p:sldLayout xmlns:a="http://schemas.openxmlformats.org/drawingml/2006/main" xmlns:r="http://schemas.openxmlformats.org/officeDocument/2006/relationships" xmlns:p="http://schemas.openxmlformats.org/presentationml/2006/main">
-  <p:cSld name="Section">
-    <p:spTree>
-      <p:nvGrpSpPr>
-        <p:cNvPr id="1" name=""/>
-        <p:cNvGrpSpPr/>
-        <p:nvPr/>
-      </p:nvGrpSpPr>
-      <p:grpSpPr>
-        <a:xfrm>
-          <a:off x="0" y="0"/>
-          <a:ext cx="0" cy="0"/>
-          <a:chOff x="0" y="0"/>
-          <a:chExt cx="0" cy="0"/>
-        </a:xfrm>
-      </p:grpSpPr>
-      <p:sp>
-        <p:nvSpPr>
-          <p:cNvPr id="2" name="Title 1">
-            <a:extLst>
-              <a:ext uri="{FF2B5EF4-FFF2-40B4-BE49-F238E27FC236}">
-                <a16:creationId xmlns:a16="http://schemas.microsoft.com/office/drawing/2014/main" id="{4E0B955B-3757-0FEC-8150-652A2829B605}"/>
-              </a:ext>
-            </a:extLst>
-          </p:cNvPr>
-          <p:cNvSpPr>
-            <a:spLocks noGrp="1"/>
-          </p:cNvSpPr>
-          <p:nvPr>
-            <p:ph type="ctrTitle" hasCustomPrompt="1"/>
-          </p:nvPr>
-        </p:nvSpPr>
-        <p:spPr>
-          <a:xfrm>
-            <a:off x="1524000" y="2921168"/>
-            <a:ext cx="9144000" cy="1015663"/>
-          </a:xfrm>
-        </p:spPr>
-        <p:txBody>
-          <a:bodyPr anchor="ctr" anchorCtr="0">
-            <a:spAutoFit/>
-          </a:bodyPr>
-          <a:lstStyle>
-            <a:lvl1pPr algn="ctr">
-              <a:defRPr sz="6000"/>
-            </a:lvl1pPr>
-          </a:lstStyle>
-          <a:p>
-            <a:r>
-              <a:rPr lang="en-US" dirty="0"/>
-              <a:t>Click to edit Section</a:t>
-            </a:r>
-          </a:p>
-        </p:txBody>
-      </p:sp>
-      <p:sp>
-        <p:nvSpPr>
-          <p:cNvPr id="4" name="Date Placeholder 3">
-            <a:extLst>
-              <a:ext uri="{FF2B5EF4-FFF2-40B4-BE49-F238E27FC236}">
-                <a16:creationId xmlns:a16="http://schemas.microsoft.com/office/drawing/2014/main" id="{E6323134-95A2-6423-76C0-9D75A168C984}"/>
-              </a:ext>
-            </a:extLst>
-          </p:cNvPr>
-          <p:cNvSpPr>
-            <a:spLocks noGrp="1"/>
-          </p:cNvSpPr>
-          <p:nvPr>
-            <p:ph type="dt" sz="half" idx="10"/>
-          </p:nvPr>
-        </p:nvSpPr>
-        <p:spPr/>
-        <p:txBody>
-          <a:bodyPr/>
-          <a:lstStyle/>
-          <a:p>
-            <a:fld id="{08C9136A-AC76-DC4C-98DA-7FB51FBB5081}" type="datetime5">
-              <a:rPr lang="en-US" smtClean="0"/>
-              <a:t>22-Sep-26</a:t>
-            </a:fld>
-            <a:endParaRPr lang="en-US"/>
-          </a:p>
-        </p:txBody>
-      </p:sp>
-      <p:sp>
-        <p:nvSpPr>
-          <p:cNvPr id="5" name="Footer Placeholder 4">
-            <a:extLst>
-              <a:ext uri="{FF2B5EF4-FFF2-40B4-BE49-F238E27FC236}">
-                <a16:creationId xmlns:a16="http://schemas.microsoft.com/office/drawing/2014/main" id="{2419F5F4-E2F3-BFD8-53AA-6A6F195FC68B}"/>
-              </a:ext>
-            </a:extLst>
-          </p:cNvPr>
-          <p:cNvSpPr>
-            <a:spLocks noGrp="1"/>
-          </p:cNvSpPr>
-          <p:nvPr>
-            <p:ph type="ftr" sz="quarter" idx="11"/>
-          </p:nvPr>
-        </p:nvSpPr>
-        <p:spPr/>
-        <p:txBody>
-          <a:bodyPr/>
-          <a:lstStyle/>
-          <a:p>
-            <a:r>
-              <a:rPr lang="en-US"/>
-              <a:t>© Steve Beaty and others as cited</a:t>
-            </a:r>
-          </a:p>
-        </p:txBody>
-      </p:sp>
-      <p:sp>
-        <p:nvSpPr>
-          <p:cNvPr id="6" name="Slide Number Placeholder 5">
-            <a:extLst>
-              <a:ext uri="{FF2B5EF4-FFF2-40B4-BE49-F238E27FC236}">
-                <a16:creationId xmlns:a16="http://schemas.microsoft.com/office/drawing/2014/main" id="{17B90BEB-A9D1-FF29-0E8C-A755B6F9863F}"/>
-              </a:ext>
-            </a:extLst>
-          </p:cNvPr>
-          <p:cNvSpPr>
-            <a:spLocks noGrp="1"/>
-          </p:cNvSpPr>
-          <p:nvPr>
-            <p:ph type="sldNum" sz="quarter" idx="12"/>
-          </p:nvPr>
-        </p:nvSpPr>
-        <p:spPr/>
-        <p:txBody>
-          <a:bodyPr/>
-          <a:lstStyle/>
-          <a:p>
-            <a:fld id="{62CBAC88-EF5B-3148-888C-824478CD1B05}" type="slidenum">
-              <a:rPr lang="en-US" smtClean="0"/>
-              <a:t>‹#›</a:t>
-            </a:fld>
-            <a:endParaRPr lang="en-US"/>
-          </a:p>
-        </p:txBody>
-      </p:sp>
-    </p:spTree>
-    <p:extLst>
-      <p:ext uri="{BB962C8B-B14F-4D97-AF65-F5344CB8AC3E}">
-        <p14:creationId xmlns:p14="http://schemas.microsoft.com/office/powerpoint/2010/main" val="1718599021"/>
-      </p:ext>
-    </p:extLst>
-  </p:cSld>
-  <p:clrMapOvr>
-    <a:masterClrMapping/>
-  </p:clrMapOvr>
 </p:sldLayout>
 </file>
 
@@ -2979,7 +2965,7 @@
     <p:bg>
       <p:bgPr>
         <a:blipFill dpi="0" rotWithShape="1">
-          <a:blip r:embed="rId10">
+          <a:blip r:embed="rId9">
             <a:lum/>
           </a:blip>
           <a:srcRect/>
@@ -3019,8 +3005,10 @@
             <a:off x="609600" y="274639"/>
             <a:ext cx="10972800" cy="1143000"/>
           </a:xfrm>
-          <a:prstGeom prst="rect">
-            <a:avLst/>
+          <a:prstGeom prst="roundRect">
+            <a:avLst>
+              <a:gd name="adj" fmla="val 44167"/>
+            </a:avLst>
           </a:prstGeom>
           <a:solidFill>
             <a:schemeClr val="bg1">
@@ -3067,7 +3055,7 @@
             <a:off x="609600" y="1600201"/>
             <a:ext cx="10972800" cy="4525963"/>
           </a:xfrm>
-          <a:prstGeom prst="rect">
+          <a:prstGeom prst="roundRect">
             <a:avLst/>
           </a:prstGeom>
           <a:solidFill>
@@ -3141,11 +3129,13 @@
         </p:nvSpPr>
         <p:spPr>
           <a:xfrm>
-            <a:off x="1881808" y="6308726"/>
-            <a:ext cx="8605793" cy="487680"/>
+            <a:off x="1881809" y="6308727"/>
+            <a:ext cx="7945363" cy="487680"/>
           </a:xfrm>
-          <a:prstGeom prst="rect">
-            <a:avLst/>
+          <a:prstGeom prst="roundRect">
+            <a:avLst>
+              <a:gd name="adj" fmla="val 48894"/>
+            </a:avLst>
           </a:prstGeom>
           <a:solidFill>
             <a:schemeClr val="bg1"/>
@@ -3185,11 +3175,13 @@
         </p:nvSpPr>
         <p:spPr>
           <a:xfrm>
-            <a:off x="10595113" y="6308726"/>
+            <a:off x="9934686" y="6308727"/>
             <a:ext cx="879777" cy="487680"/>
           </a:xfrm>
-          <a:prstGeom prst="rect">
-            <a:avLst/>
+          <a:prstGeom prst="roundRect">
+            <a:avLst>
+              <a:gd name="adj" fmla="val 43034"/>
+            </a:avLst>
           </a:prstGeom>
           <a:solidFill>
             <a:schemeClr val="bg1"/>
@@ -3238,11 +3230,13 @@
         </p:nvSpPr>
         <p:spPr>
           <a:xfrm>
-            <a:off x="605141" y="6308726"/>
+            <a:off x="605141" y="6308727"/>
             <a:ext cx="1169155" cy="487680"/>
           </a:xfrm>
-          <a:prstGeom prst="rect">
-            <a:avLst/>
+          <a:prstGeom prst="roundRect">
+            <a:avLst>
+              <a:gd name="adj" fmla="val 48894"/>
+            </a:avLst>
           </a:prstGeom>
           <a:solidFill>
             <a:schemeClr val="bg1"/>
@@ -3259,31 +3253,169 @@
             </a:lvl1pPr>
           </a:lstStyle>
           <a:p>
-            <a:fld id="{59E145AF-2465-1345-A673-F2664B07CED8}" type="datetime5">
+            <a:fld id="{ACCB1BC1-0411-3943-97C5-AED949EF5644}" type="datetime1">
               <a:rPr lang="en-US" smtClean="0"/>
-              <a:t>22-Sep-26</a:t>
+              <a:t>10/8/26</a:t>
             </a:fld>
             <a:endParaRPr lang="en-US" dirty="0"/>
+          </a:p>
+        </p:txBody>
+      </p:sp>
+      <p:sp>
+        <p:nvSpPr>
+          <p:cNvPr id="7" name="SlideTotal">
+            <a:extLst>
+              <a:ext uri="{FF2B5EF4-FFF2-40B4-BE49-F238E27FC236}">
+                <a16:creationId xmlns:a16="http://schemas.microsoft.com/office/drawing/2014/main" id="{B74D5B4B-3C60-FF6A-4438-A067B7DE7333}"/>
+              </a:ext>
+            </a:extLst>
+          </p:cNvPr>
+          <p:cNvSpPr txBox="1">
+            <a:spLocks/>
+          </p:cNvSpPr>
+          <p:nvPr/>
+        </p:nvSpPr>
+        <p:spPr>
+          <a:xfrm>
+            <a:off x="10702624" y="6308727"/>
+            <a:ext cx="879777" cy="487680"/>
+          </a:xfrm>
+          <a:prstGeom prst="roundRect">
+            <a:avLst>
+              <a:gd name="adj" fmla="val 43034"/>
+            </a:avLst>
+          </a:prstGeom>
+          <a:solidFill>
+            <a:schemeClr val="bg1"/>
+          </a:solidFill>
+          <a:effectLst>
+            <a:softEdge rad="63500"/>
+          </a:effectLst>
+        </p:spPr>
+        <p:txBody>
+          <a:bodyPr vert="horz" lIns="121920" tIns="60960" rIns="121920" bIns="60960" rtlCol="0" anchor="ctr"/>
+          <a:lstStyle>
+            <a:defPPr>
+              <a:defRPr lang="en-US"/>
+            </a:defPPr>
+            <a:lvl1pPr marL="0" algn="ctr" defTabSz="914400" rtl="0" eaLnBrk="1" latinLnBrk="0" hangingPunct="1">
+              <a:defRPr sz="1200" kern="1200">
+                <a:solidFill>
+                  <a:schemeClr val="tx1">
+                    <a:tint val="75000"/>
+                  </a:schemeClr>
+                </a:solidFill>
+                <a:latin typeface="+mn-lt"/>
+                <a:ea typeface="+mn-ea"/>
+                <a:cs typeface="+mn-cs"/>
+              </a:defRPr>
+            </a:lvl1pPr>
+            <a:lvl2pPr marL="457200" algn="l" defTabSz="914400" rtl="0" eaLnBrk="1" latinLnBrk="0" hangingPunct="1">
+              <a:defRPr sz="1800" kern="1200">
+                <a:solidFill>
+                  <a:schemeClr val="tx1"/>
+                </a:solidFill>
+                <a:latin typeface="+mn-lt"/>
+                <a:ea typeface="+mn-ea"/>
+                <a:cs typeface="+mn-cs"/>
+              </a:defRPr>
+            </a:lvl2pPr>
+            <a:lvl3pPr marL="914400" algn="l" defTabSz="914400" rtl="0" eaLnBrk="1" latinLnBrk="0" hangingPunct="1">
+              <a:defRPr sz="1800" kern="1200">
+                <a:solidFill>
+                  <a:schemeClr val="tx1"/>
+                </a:solidFill>
+                <a:latin typeface="+mn-lt"/>
+                <a:ea typeface="+mn-ea"/>
+                <a:cs typeface="+mn-cs"/>
+              </a:defRPr>
+            </a:lvl3pPr>
+            <a:lvl4pPr marL="1371600" algn="l" defTabSz="914400" rtl="0" eaLnBrk="1" latinLnBrk="0" hangingPunct="1">
+              <a:defRPr sz="1800" kern="1200">
+                <a:solidFill>
+                  <a:schemeClr val="tx1"/>
+                </a:solidFill>
+                <a:latin typeface="+mn-lt"/>
+                <a:ea typeface="+mn-ea"/>
+                <a:cs typeface="+mn-cs"/>
+              </a:defRPr>
+            </a:lvl4pPr>
+            <a:lvl5pPr marL="1828800" algn="l" defTabSz="914400" rtl="0" eaLnBrk="1" latinLnBrk="0" hangingPunct="1">
+              <a:defRPr sz="1800" kern="1200">
+                <a:solidFill>
+                  <a:schemeClr val="tx1"/>
+                </a:solidFill>
+                <a:latin typeface="+mn-lt"/>
+                <a:ea typeface="+mn-ea"/>
+                <a:cs typeface="+mn-cs"/>
+              </a:defRPr>
+            </a:lvl5pPr>
+            <a:lvl6pPr marL="2286000" algn="l" defTabSz="914400" rtl="0" eaLnBrk="1" latinLnBrk="0" hangingPunct="1">
+              <a:defRPr sz="1800" kern="1200">
+                <a:solidFill>
+                  <a:schemeClr val="tx1"/>
+                </a:solidFill>
+                <a:latin typeface="+mn-lt"/>
+                <a:ea typeface="+mn-ea"/>
+                <a:cs typeface="+mn-cs"/>
+              </a:defRPr>
+            </a:lvl6pPr>
+            <a:lvl7pPr marL="2743200" algn="l" defTabSz="914400" rtl="0" eaLnBrk="1" latinLnBrk="0" hangingPunct="1">
+              <a:defRPr sz="1800" kern="1200">
+                <a:solidFill>
+                  <a:schemeClr val="tx1"/>
+                </a:solidFill>
+                <a:latin typeface="+mn-lt"/>
+                <a:ea typeface="+mn-ea"/>
+                <a:cs typeface="+mn-cs"/>
+              </a:defRPr>
+            </a:lvl7pPr>
+            <a:lvl8pPr marL="3200400" algn="l" defTabSz="914400" rtl="0" eaLnBrk="1" latinLnBrk="0" hangingPunct="1">
+              <a:defRPr sz="1800" kern="1200">
+                <a:solidFill>
+                  <a:schemeClr val="tx1"/>
+                </a:solidFill>
+                <a:latin typeface="+mn-lt"/>
+                <a:ea typeface="+mn-ea"/>
+                <a:cs typeface="+mn-cs"/>
+              </a:defRPr>
+            </a:lvl8pPr>
+            <a:lvl9pPr marL="3657600" algn="l" defTabSz="914400" rtl="0" eaLnBrk="1" latinLnBrk="0" hangingPunct="1">
+              <a:defRPr sz="1800" kern="1200">
+                <a:solidFill>
+                  <a:schemeClr val="tx1"/>
+                </a:solidFill>
+                <a:latin typeface="+mn-lt"/>
+                <a:ea typeface="+mn-ea"/>
+                <a:cs typeface="+mn-cs"/>
+              </a:defRPr>
+            </a:lvl9pPr>
+          </a:lstStyle>
+          <a:p>
+            <a:r>
+              <a:rPr lang="en-US" sz="1600"/>
+              <a:t>70</a:t>
+            </a:r>
+            <a:endParaRPr lang="en-US" sz="1600" dirty="0"/>
           </a:p>
         </p:txBody>
       </p:sp>
     </p:spTree>
     <p:extLst>
       <p:ext uri="{BB962C8B-B14F-4D97-AF65-F5344CB8AC3E}">
-        <p14:creationId xmlns:p14="http://schemas.microsoft.com/office/powerpoint/2010/main" val="2133950341"/>
+        <p14:creationId xmlns:p14="http://schemas.microsoft.com/office/powerpoint/2010/main" val="2711389004"/>
       </p:ext>
     </p:extLst>
   </p:cSld>
   <p:clrMap bg1="lt1" tx1="dk1" bg2="lt2" tx2="dk2" accent1="accent1" accent2="accent2" accent3="accent3" accent4="accent4" accent5="accent5" accent6="accent6" hlink="hlink" folHlink="folHlink"/>
   <p:sldLayoutIdLst>
-    <p:sldLayoutId id="2147483669" r:id="rId1"/>
-    <p:sldLayoutId id="2147483670" r:id="rId2"/>
-    <p:sldLayoutId id="2147483671" r:id="rId3"/>
-    <p:sldLayoutId id="2147483672" r:id="rId4"/>
-    <p:sldLayoutId id="2147483673" r:id="rId5"/>
-    <p:sldLayoutId id="2147483674" r:id="rId6"/>
-    <p:sldLayoutId id="2147483675" r:id="rId7"/>
-    <p:sldLayoutId id="2147483676" r:id="rId8"/>
+    <p:sldLayoutId id="2147483678" r:id="rId1"/>
+    <p:sldLayoutId id="2147483679" r:id="rId2"/>
+    <p:sldLayoutId id="2147483680" r:id="rId3"/>
+    <p:sldLayoutId id="2147483681" r:id="rId4"/>
+    <p:sldLayoutId id="2147483682" r:id="rId5"/>
+    <p:sldLayoutId id="2147483683" r:id="rId6"/>
+    <p:sldLayoutId id="2147483684" r:id="rId7"/>
   </p:sldLayoutIdLst>
   <mc:AlternateContent xmlns:mc="http://schemas.openxmlformats.org/markup-compatibility/2006" xmlns:p14="http://schemas.microsoft.com/office/powerpoint/2010/main">
     <mc:Choice Requires="p14">
@@ -3300,7 +3432,7 @@
   <p:hf hdr="0"/>
   <p:txStyles>
     <p:titleStyle>
-      <a:lvl1pPr algn="ctr" defTabSz="609570" rtl="0" eaLnBrk="1" latinLnBrk="0" hangingPunct="1">
+      <a:lvl1pPr algn="ctr" defTabSz="609555" rtl="0" eaLnBrk="1" latinLnBrk="0" hangingPunct="1">
         <a:spcBef>
           <a:spcPct val="0"/>
         </a:spcBef>
@@ -3316,7 +3448,7 @@
       </a:lvl1pPr>
     </p:titleStyle>
     <p:bodyStyle>
-      <a:lvl1pPr marL="457177" indent="-457177" algn="l" defTabSz="609570" rtl="0" eaLnBrk="1" latinLnBrk="0" hangingPunct="1">
+      <a:lvl1pPr marL="457166" indent="-457166" algn="l" defTabSz="609555" rtl="0" eaLnBrk="1" latinLnBrk="0" hangingPunct="1">
         <a:spcBef>
           <a:spcPct val="20000"/>
         </a:spcBef>
@@ -3331,7 +3463,7 @@
           <a:cs typeface="+mn-cs"/>
         </a:defRPr>
       </a:lvl1pPr>
-      <a:lvl2pPr marL="990551" indent="-380982" algn="l" defTabSz="609570" rtl="0" eaLnBrk="1" latinLnBrk="0" hangingPunct="1">
+      <a:lvl2pPr marL="990526" indent="-380973" algn="l" defTabSz="609555" rtl="0" eaLnBrk="1" latinLnBrk="0" hangingPunct="1">
         <a:spcBef>
           <a:spcPct val="20000"/>
         </a:spcBef>
@@ -3346,7 +3478,7 @@
           <a:cs typeface="+mn-cs"/>
         </a:defRPr>
       </a:lvl2pPr>
-      <a:lvl3pPr marL="1523923" indent="-304784" algn="l" defTabSz="609570" rtl="0" eaLnBrk="1" latinLnBrk="0" hangingPunct="1">
+      <a:lvl3pPr marL="1523885" indent="-304776" algn="l" defTabSz="609555" rtl="0" eaLnBrk="1" latinLnBrk="0" hangingPunct="1">
         <a:spcBef>
           <a:spcPct val="20000"/>
         </a:spcBef>
@@ -3361,7 +3493,7 @@
           <a:cs typeface="+mn-cs"/>
         </a:defRPr>
       </a:lvl3pPr>
-      <a:lvl4pPr marL="2133493" indent="-304784" algn="l" defTabSz="609570" rtl="0" eaLnBrk="1" latinLnBrk="0" hangingPunct="1">
+      <a:lvl4pPr marL="2133440" indent="-304776" algn="l" defTabSz="609555" rtl="0" eaLnBrk="1" latinLnBrk="0" hangingPunct="1">
         <a:spcBef>
           <a:spcPct val="20000"/>
         </a:spcBef>
@@ -3376,7 +3508,7 @@
           <a:cs typeface="+mn-cs"/>
         </a:defRPr>
       </a:lvl4pPr>
-      <a:lvl5pPr marL="2743063" indent="-304784" algn="l" defTabSz="609570" rtl="0" eaLnBrk="1" latinLnBrk="0" hangingPunct="1">
+      <a:lvl5pPr marL="2742994" indent="-304776" algn="l" defTabSz="609555" rtl="0" eaLnBrk="1" latinLnBrk="0" hangingPunct="1">
         <a:spcBef>
           <a:spcPct val="20000"/>
         </a:spcBef>
@@ -3391,7 +3523,7 @@
           <a:cs typeface="+mn-cs"/>
         </a:defRPr>
       </a:lvl5pPr>
-      <a:lvl6pPr marL="3352632" indent="-304784" algn="l" defTabSz="609570" rtl="0" eaLnBrk="1" latinLnBrk="0" hangingPunct="1">
+      <a:lvl6pPr marL="3352548" indent="-304776" algn="l" defTabSz="609555" rtl="0" eaLnBrk="1" latinLnBrk="0" hangingPunct="1">
         <a:spcBef>
           <a:spcPct val="20000"/>
         </a:spcBef>
@@ -3406,7 +3538,7 @@
           <a:cs typeface="+mn-cs"/>
         </a:defRPr>
       </a:lvl6pPr>
-      <a:lvl7pPr marL="3962202" indent="-304784" algn="l" defTabSz="609570" rtl="0" eaLnBrk="1" latinLnBrk="0" hangingPunct="1">
+      <a:lvl7pPr marL="3962104" indent="-304776" algn="l" defTabSz="609555" rtl="0" eaLnBrk="1" latinLnBrk="0" hangingPunct="1">
         <a:spcBef>
           <a:spcPct val="20000"/>
         </a:spcBef>
@@ -3421,7 +3553,7 @@
           <a:cs typeface="+mn-cs"/>
         </a:defRPr>
       </a:lvl7pPr>
-      <a:lvl8pPr marL="4571771" indent="-304784" algn="l" defTabSz="609570" rtl="0" eaLnBrk="1" latinLnBrk="0" hangingPunct="1">
+      <a:lvl8pPr marL="4571656" indent="-304776" algn="l" defTabSz="609555" rtl="0" eaLnBrk="1" latinLnBrk="0" hangingPunct="1">
         <a:spcBef>
           <a:spcPct val="20000"/>
         </a:spcBef>
@@ -3436,7 +3568,7 @@
           <a:cs typeface="+mn-cs"/>
         </a:defRPr>
       </a:lvl8pPr>
-      <a:lvl9pPr marL="5181341" indent="-304784" algn="l" defTabSz="609570" rtl="0" eaLnBrk="1" latinLnBrk="0" hangingPunct="1">
+      <a:lvl9pPr marL="5181212" indent="-304776" algn="l" defTabSz="609555" rtl="0" eaLnBrk="1" latinLnBrk="0" hangingPunct="1">
         <a:spcBef>
           <a:spcPct val="20000"/>
         </a:spcBef>
@@ -3456,7 +3588,7 @@
       <a:defPPr>
         <a:defRPr lang="en-US"/>
       </a:defPPr>
-      <a:lvl1pPr marL="0" algn="l" defTabSz="609570" rtl="0" eaLnBrk="1" latinLnBrk="0" hangingPunct="1">
+      <a:lvl1pPr marL="0" algn="l" defTabSz="609555" rtl="0" eaLnBrk="1" latinLnBrk="0" hangingPunct="1">
         <a:defRPr sz="2400" kern="1200">
           <a:solidFill>
             <a:schemeClr val="tx1"/>
@@ -3466,7 +3598,7 @@
           <a:cs typeface="+mn-cs"/>
         </a:defRPr>
       </a:lvl1pPr>
-      <a:lvl2pPr marL="609570" algn="l" defTabSz="609570" rtl="0" eaLnBrk="1" latinLnBrk="0" hangingPunct="1">
+      <a:lvl2pPr marL="609555" algn="l" defTabSz="609555" rtl="0" eaLnBrk="1" latinLnBrk="0" hangingPunct="1">
         <a:defRPr sz="2400" kern="1200">
           <a:solidFill>
             <a:schemeClr val="tx1"/>
@@ -3476,7 +3608,7 @@
           <a:cs typeface="+mn-cs"/>
         </a:defRPr>
       </a:lvl2pPr>
-      <a:lvl3pPr marL="1219139" algn="l" defTabSz="609570" rtl="0" eaLnBrk="1" latinLnBrk="0" hangingPunct="1">
+      <a:lvl3pPr marL="1219108" algn="l" defTabSz="609555" rtl="0" eaLnBrk="1" latinLnBrk="0" hangingPunct="1">
         <a:defRPr sz="2400" kern="1200">
           <a:solidFill>
             <a:schemeClr val="tx1"/>
@@ -3486,7 +3618,7 @@
           <a:cs typeface="+mn-cs"/>
         </a:defRPr>
       </a:lvl3pPr>
-      <a:lvl4pPr marL="1828709" algn="l" defTabSz="609570" rtl="0" eaLnBrk="1" latinLnBrk="0" hangingPunct="1">
+      <a:lvl4pPr marL="1828664" algn="l" defTabSz="609555" rtl="0" eaLnBrk="1" latinLnBrk="0" hangingPunct="1">
         <a:defRPr sz="2400" kern="1200">
           <a:solidFill>
             <a:schemeClr val="tx1"/>
@@ -3496,7 +3628,7 @@
           <a:cs typeface="+mn-cs"/>
         </a:defRPr>
       </a:lvl4pPr>
-      <a:lvl5pPr marL="2438278" algn="l" defTabSz="609570" rtl="0" eaLnBrk="1" latinLnBrk="0" hangingPunct="1">
+      <a:lvl5pPr marL="2438218" algn="l" defTabSz="609555" rtl="0" eaLnBrk="1" latinLnBrk="0" hangingPunct="1">
         <a:defRPr sz="2400" kern="1200">
           <a:solidFill>
             <a:schemeClr val="tx1"/>
@@ -3506,7 +3638,7 @@
           <a:cs typeface="+mn-cs"/>
         </a:defRPr>
       </a:lvl5pPr>
-      <a:lvl6pPr marL="3047848" algn="l" defTabSz="609570" rtl="0" eaLnBrk="1" latinLnBrk="0" hangingPunct="1">
+      <a:lvl6pPr marL="3047772" algn="l" defTabSz="609555" rtl="0" eaLnBrk="1" latinLnBrk="0" hangingPunct="1">
         <a:defRPr sz="2400" kern="1200">
           <a:solidFill>
             <a:schemeClr val="tx1"/>
@@ -3516,7 +3648,7 @@
           <a:cs typeface="+mn-cs"/>
         </a:defRPr>
       </a:lvl6pPr>
-      <a:lvl7pPr marL="3657417" algn="l" defTabSz="609570" rtl="0" eaLnBrk="1" latinLnBrk="0" hangingPunct="1">
+      <a:lvl7pPr marL="3657326" algn="l" defTabSz="609555" rtl="0" eaLnBrk="1" latinLnBrk="0" hangingPunct="1">
         <a:defRPr sz="2400" kern="1200">
           <a:solidFill>
             <a:schemeClr val="tx1"/>
@@ -3526,7 +3658,7 @@
           <a:cs typeface="+mn-cs"/>
         </a:defRPr>
       </a:lvl7pPr>
-      <a:lvl8pPr marL="4266987" algn="l" defTabSz="609570" rtl="0" eaLnBrk="1" latinLnBrk="0" hangingPunct="1">
+      <a:lvl8pPr marL="4266880" algn="l" defTabSz="609555" rtl="0" eaLnBrk="1" latinLnBrk="0" hangingPunct="1">
         <a:defRPr sz="2400" kern="1200">
           <a:solidFill>
             <a:schemeClr val="tx1"/>
@@ -3536,7 +3668,7 @@
           <a:cs typeface="+mn-cs"/>
         </a:defRPr>
       </a:lvl8pPr>
-      <a:lvl9pPr marL="4876557" algn="l" defTabSz="609570" rtl="0" eaLnBrk="1" latinLnBrk="0" hangingPunct="1">
+      <a:lvl9pPr marL="4876435" algn="l" defTabSz="609555" rtl="0" eaLnBrk="1" latinLnBrk="0" hangingPunct="1">
         <a:defRPr sz="2400" kern="1200">
           <a:solidFill>
             <a:schemeClr val="tx1"/>
@@ -3624,6 +3756,94 @@
           </a:p>
         </p:txBody>
       </p:sp>
+      <p:sp>
+        <p:nvSpPr>
+          <p:cNvPr id="4" name="Date Placeholder 3">
+            <a:extLst>
+              <a:ext uri="{FF2B5EF4-FFF2-40B4-BE49-F238E27FC236}">
+                <a16:creationId xmlns:a16="http://schemas.microsoft.com/office/drawing/2014/main" id="{7BBA15F8-75CD-C505-D030-7FF9D6DB13E8}"/>
+              </a:ext>
+            </a:extLst>
+          </p:cNvPr>
+          <p:cNvSpPr>
+            <a:spLocks noGrp="1"/>
+          </p:cNvSpPr>
+          <p:nvPr>
+            <p:ph type="dt" sz="half" idx="11"/>
+          </p:nvPr>
+        </p:nvSpPr>
+        <p:spPr/>
+        <p:txBody>
+          <a:bodyPr/>
+          <a:lstStyle/>
+          <a:p>
+            <a:fld id="{DEA31B0E-D54E-4A43-98E7-3A731D1C2373}" type="datetime1">
+              <a:rPr lang="en-US" smtClean="0"/>
+              <a:t>10/8/26</a:t>
+            </a:fld>
+            <a:endParaRPr lang="en-US" dirty="0"/>
+          </a:p>
+        </p:txBody>
+      </p:sp>
+      <p:sp>
+        <p:nvSpPr>
+          <p:cNvPr id="5" name="Footer Placeholder 4">
+            <a:extLst>
+              <a:ext uri="{FF2B5EF4-FFF2-40B4-BE49-F238E27FC236}">
+                <a16:creationId xmlns:a16="http://schemas.microsoft.com/office/drawing/2014/main" id="{653BB4FA-DD86-F544-DD83-D59531353194}"/>
+              </a:ext>
+            </a:extLst>
+          </p:cNvPr>
+          <p:cNvSpPr>
+            <a:spLocks noGrp="1"/>
+          </p:cNvSpPr>
+          <p:nvPr>
+            <p:ph type="ftr" sz="quarter" idx="12"/>
+          </p:nvPr>
+        </p:nvSpPr>
+        <p:spPr/>
+        <p:txBody>
+          <a:bodyPr/>
+          <a:lstStyle/>
+          <a:p>
+            <a:r>
+              <a:rPr lang="en-US"/>
+              <a:t>© Steve Beaty and others as cited</a:t>
+            </a:r>
+            <a:endParaRPr lang="en-US" dirty="0"/>
+          </a:p>
+        </p:txBody>
+      </p:sp>
+      <p:sp>
+        <p:nvSpPr>
+          <p:cNvPr id="6" name="Slide Number Placeholder 5">
+            <a:extLst>
+              <a:ext uri="{FF2B5EF4-FFF2-40B4-BE49-F238E27FC236}">
+                <a16:creationId xmlns:a16="http://schemas.microsoft.com/office/drawing/2014/main" id="{5BC83760-CE36-0A69-6633-E65B73C1CD3C}"/>
+              </a:ext>
+            </a:extLst>
+          </p:cNvPr>
+          <p:cNvSpPr>
+            <a:spLocks noGrp="1"/>
+          </p:cNvSpPr>
+          <p:nvPr>
+            <p:ph type="sldNum" sz="quarter" idx="13"/>
+          </p:nvPr>
+        </p:nvSpPr>
+        <p:spPr/>
+        <p:txBody>
+          <a:bodyPr/>
+          <a:lstStyle/>
+          <a:p>
+            <a:fld id="{37D050C8-32A2-8944-BC0A-E76DEAECED1E}" type="slidenum">
+              <a:rPr lang="en-US" smtClean="0"/>
+              <a:pPr/>
+              <a:t>1</a:t>
+            </a:fld>
+            <a:endParaRPr lang="en-US" dirty="0"/>
+          </a:p>
+        </p:txBody>
+      </p:sp>
     </p:spTree>
     <p:extLst>
       <p:ext uri="{BB962C8B-B14F-4D97-AF65-F5344CB8AC3E}">
@@ -3636,12 +3856,12 @@
   </p:clrMapOvr>
   <mc:AlternateContent xmlns:mc="http://schemas.openxmlformats.org/markup-compatibility/2006" xmlns:p14="http://schemas.microsoft.com/office/powerpoint/2010/main">
     <mc:Choice Requires="p14">
-      <p:transition spd="slow" p14:dur="1200">
-        <p14:prism/>
+      <p:transition spd="slow" p14:dur="2000">
+        <p14:prism isContent="1"/>
       </p:transition>
     </mc:Choice>
     <mc:Fallback xmlns="">
-      <p:transition xmlns:p14="http://schemas.microsoft.com/office/powerpoint/2010/main" spd="slow">
+      <p:transition spd="slow">
         <p:fade/>
       </p:transition>
     </mc:Fallback>
@@ -3684,7 +3904,9 @@
         </p:nvSpPr>
         <p:spPr/>
         <p:txBody>
-          <a:bodyPr/>
+          <a:bodyPr>
+            <a:normAutofit fontScale="90000"/>
+          </a:bodyPr>
           <a:lstStyle/>
           <a:p>
             <a:r>
@@ -3713,7 +3935,7 @@
         <p:spPr/>
         <p:txBody>
           <a:bodyPr>
-            <a:normAutofit/>
+            <a:normAutofit lnSpcReduction="10000"/>
           </a:bodyPr>
           <a:lstStyle/>
           <a:p>
@@ -3778,6 +4000,35 @@
       </p:sp>
       <p:sp>
         <p:nvSpPr>
+          <p:cNvPr id="7" name="Date Placeholder 6">
+            <a:extLst>
+              <a:ext uri="{FF2B5EF4-FFF2-40B4-BE49-F238E27FC236}">
+                <a16:creationId xmlns:a16="http://schemas.microsoft.com/office/drawing/2014/main" id="{DE442EC1-506A-5C81-53AB-CDDF75897D6D}"/>
+              </a:ext>
+            </a:extLst>
+          </p:cNvPr>
+          <p:cNvSpPr>
+            <a:spLocks noGrp="1"/>
+          </p:cNvSpPr>
+          <p:nvPr>
+            <p:ph type="dt" sz="half" idx="10"/>
+          </p:nvPr>
+        </p:nvSpPr>
+        <p:spPr/>
+        <p:txBody>
+          <a:bodyPr/>
+          <a:lstStyle/>
+          <a:p>
+            <a:fld id="{9223B4BA-2F7D-EC4C-AB0C-6189E69FDCBB}" type="datetime1">
+              <a:rPr lang="en-US" smtClean="0"/>
+              <a:t>10/8/26</a:t>
+            </a:fld>
+            <a:endParaRPr lang="en-US"/>
+          </a:p>
+        </p:txBody>
+      </p:sp>
+      <p:sp>
+        <p:nvSpPr>
           <p:cNvPr id="2" name="Footer Placeholder 1">
             <a:extLst>
               <a:ext uri="{FF2B5EF4-FFF2-40B4-BE49-F238E27FC236}">
@@ -3828,35 +4079,6 @@
             <a:fld id="{62CBAC88-EF5B-3148-888C-824478CD1B05}" type="slidenum">
               <a:rPr lang="en-US" smtClean="0"/>
               <a:t>10</a:t>
-            </a:fld>
-            <a:endParaRPr lang="en-US"/>
-          </a:p>
-        </p:txBody>
-      </p:sp>
-      <p:sp>
-        <p:nvSpPr>
-          <p:cNvPr id="7" name="Date Placeholder 6">
-            <a:extLst>
-              <a:ext uri="{FF2B5EF4-FFF2-40B4-BE49-F238E27FC236}">
-                <a16:creationId xmlns:a16="http://schemas.microsoft.com/office/drawing/2014/main" id="{DE442EC1-506A-5C81-53AB-CDDF75897D6D}"/>
-              </a:ext>
-            </a:extLst>
-          </p:cNvPr>
-          <p:cNvSpPr>
-            <a:spLocks noGrp="1"/>
-          </p:cNvSpPr>
-          <p:nvPr>
-            <p:ph type="dt" sz="half" idx="10"/>
-          </p:nvPr>
-        </p:nvSpPr>
-        <p:spPr/>
-        <p:txBody>
-          <a:bodyPr/>
-          <a:lstStyle/>
-          <a:p>
-            <a:fld id="{F78B2FA2-835E-8F4B-98D8-B158DB0E4BD7}" type="datetime5">
-              <a:rPr lang="en-US" smtClean="0"/>
-              <a:t>22-Sep-26</a:t>
             </a:fld>
             <a:endParaRPr lang="en-US"/>
           </a:p>
@@ -3874,12 +4096,12 @@
   </p:clrMapOvr>
   <mc:AlternateContent xmlns:mc="http://schemas.openxmlformats.org/markup-compatibility/2006" xmlns:p14="http://schemas.microsoft.com/office/powerpoint/2010/main">
     <mc:Choice Requires="p14">
-      <p:transition spd="slow" p14:dur="1200">
-        <p14:prism/>
+      <p:transition spd="slow" p14:dur="2000">
+        <p14:prism isContent="1"/>
       </p:transition>
     </mc:Choice>
     <mc:Fallback xmlns="">
-      <p:transition xmlns:p14="http://schemas.microsoft.com/office/powerpoint/2010/main" spd="slow">
+      <p:transition spd="slow">
         <p:fade/>
       </p:transition>
     </mc:Fallback>
@@ -3922,7 +4144,9 @@
         </p:nvSpPr>
         <p:spPr/>
         <p:txBody>
-          <a:bodyPr/>
+          <a:bodyPr>
+            <a:normAutofit fontScale="90000"/>
+          </a:bodyPr>
           <a:lstStyle/>
           <a:p>
             <a:r>
@@ -3956,7 +4180,7 @@
         <p:spPr/>
         <p:txBody>
           <a:bodyPr>
-            <a:normAutofit fontScale="92500" lnSpcReduction="10000"/>
+            <a:normAutofit fontScale="85000" lnSpcReduction="10000"/>
           </a:bodyPr>
           <a:lstStyle/>
           <a:p>
@@ -4001,6 +4225,35 @@
               <a:rPr lang="en-US" dirty="0"/>
               <a:t>Same controller method, different output format!</a:t>
             </a:r>
+          </a:p>
+        </p:txBody>
+      </p:sp>
+      <p:sp>
+        <p:nvSpPr>
+          <p:cNvPr id="7" name="Date Placeholder 6">
+            <a:extLst>
+              <a:ext uri="{FF2B5EF4-FFF2-40B4-BE49-F238E27FC236}">
+                <a16:creationId xmlns:a16="http://schemas.microsoft.com/office/drawing/2014/main" id="{8628BC95-BB95-F8DC-9A04-DF9EF20D2928}"/>
+              </a:ext>
+            </a:extLst>
+          </p:cNvPr>
+          <p:cNvSpPr>
+            <a:spLocks noGrp="1"/>
+          </p:cNvSpPr>
+          <p:nvPr>
+            <p:ph type="dt" sz="half" idx="10"/>
+          </p:nvPr>
+        </p:nvSpPr>
+        <p:spPr/>
+        <p:txBody>
+          <a:bodyPr/>
+          <a:lstStyle/>
+          <a:p>
+            <a:fld id="{D7B31B75-FA65-D34E-8244-C6C031E3256D}" type="datetime1">
+              <a:rPr lang="en-US" smtClean="0"/>
+              <a:t>10/8/26</a:t>
+            </a:fld>
+            <a:endParaRPr lang="en-US"/>
           </a:p>
         </p:txBody>
       </p:sp>
@@ -4056,35 +4309,6 @@
             <a:fld id="{62CBAC88-EF5B-3148-888C-824478CD1B05}" type="slidenum">
               <a:rPr lang="en-US" smtClean="0"/>
               <a:t>11</a:t>
-            </a:fld>
-            <a:endParaRPr lang="en-US"/>
-          </a:p>
-        </p:txBody>
-      </p:sp>
-      <p:sp>
-        <p:nvSpPr>
-          <p:cNvPr id="7" name="Date Placeholder 6">
-            <a:extLst>
-              <a:ext uri="{FF2B5EF4-FFF2-40B4-BE49-F238E27FC236}">
-                <a16:creationId xmlns:a16="http://schemas.microsoft.com/office/drawing/2014/main" id="{8628BC95-BB95-F8DC-9A04-DF9EF20D2928}"/>
-              </a:ext>
-            </a:extLst>
-          </p:cNvPr>
-          <p:cNvSpPr>
-            <a:spLocks noGrp="1"/>
-          </p:cNvSpPr>
-          <p:nvPr>
-            <p:ph type="dt" sz="half" idx="10"/>
-          </p:nvPr>
-        </p:nvSpPr>
-        <p:spPr/>
-        <p:txBody>
-          <a:bodyPr/>
-          <a:lstStyle/>
-          <a:p>
-            <a:fld id="{9A023C2D-68C5-FF4B-BEB8-2ACEB38C3AD4}" type="datetime5">
-              <a:rPr lang="en-US" smtClean="0"/>
-              <a:t>22-Sep-26</a:t>
             </a:fld>
             <a:endParaRPr lang="en-US"/>
           </a:p>
@@ -4102,12 +4326,12 @@
   </p:clrMapOvr>
   <mc:AlternateContent xmlns:mc="http://schemas.openxmlformats.org/markup-compatibility/2006" xmlns:p14="http://schemas.microsoft.com/office/powerpoint/2010/main">
     <mc:Choice Requires="p14">
-      <p:transition spd="slow" p14:dur="1200">
-        <p14:prism/>
+      <p:transition spd="slow" p14:dur="2000">
+        <p14:prism isContent="1"/>
       </p:transition>
     </mc:Choice>
     <mc:Fallback xmlns="">
-      <p:transition xmlns:p14="http://schemas.microsoft.com/office/powerpoint/2010/main" spd="slow">
+      <p:transition spd="slow">
         <p:fade/>
       </p:transition>
     </mc:Fallback>
@@ -4151,7 +4375,7 @@
         <p:spPr/>
         <p:txBody>
           <a:bodyPr>
-            <a:normAutofit/>
+            <a:normAutofit fontScale="90000"/>
           </a:bodyPr>
           <a:lstStyle/>
           <a:p>
@@ -4181,7 +4405,7 @@
         <p:spPr/>
         <p:txBody>
           <a:bodyPr>
-            <a:normAutofit fontScale="70000" lnSpcReduction="20000"/>
+            <a:normAutofit fontScale="62500" lnSpcReduction="20000"/>
           </a:bodyPr>
           <a:lstStyle/>
           <a:p>
@@ -4262,6 +4486,35 @@
           </a:p>
           <a:p>
             <a:endParaRPr lang="en-US" dirty="0"/>
+          </a:p>
+        </p:txBody>
+      </p:sp>
+      <p:sp>
+        <p:nvSpPr>
+          <p:cNvPr id="7" name="Date Placeholder 6">
+            <a:extLst>
+              <a:ext uri="{FF2B5EF4-FFF2-40B4-BE49-F238E27FC236}">
+                <a16:creationId xmlns:a16="http://schemas.microsoft.com/office/drawing/2014/main" id="{4FAD5AF3-5D43-2218-C335-70645B8ED7F7}"/>
+              </a:ext>
+            </a:extLst>
+          </p:cNvPr>
+          <p:cNvSpPr>
+            <a:spLocks noGrp="1"/>
+          </p:cNvSpPr>
+          <p:nvPr>
+            <p:ph type="dt" sz="half" idx="10"/>
+          </p:nvPr>
+        </p:nvSpPr>
+        <p:spPr/>
+        <p:txBody>
+          <a:bodyPr/>
+          <a:lstStyle/>
+          <a:p>
+            <a:fld id="{D3E13A53-34EC-CF4B-9A2C-004EA74ECF4C}" type="datetime1">
+              <a:rPr lang="en-US" smtClean="0"/>
+              <a:t>10/8/26</a:t>
+            </a:fld>
+            <a:endParaRPr lang="en-US"/>
           </a:p>
         </p:txBody>
       </p:sp>
@@ -4317,35 +4570,6 @@
             <a:fld id="{62CBAC88-EF5B-3148-888C-824478CD1B05}" type="slidenum">
               <a:rPr lang="en-US" smtClean="0"/>
               <a:t>12</a:t>
-            </a:fld>
-            <a:endParaRPr lang="en-US"/>
-          </a:p>
-        </p:txBody>
-      </p:sp>
-      <p:sp>
-        <p:nvSpPr>
-          <p:cNvPr id="7" name="Date Placeholder 6">
-            <a:extLst>
-              <a:ext uri="{FF2B5EF4-FFF2-40B4-BE49-F238E27FC236}">
-                <a16:creationId xmlns:a16="http://schemas.microsoft.com/office/drawing/2014/main" id="{4FAD5AF3-5D43-2218-C335-70645B8ED7F7}"/>
-              </a:ext>
-            </a:extLst>
-          </p:cNvPr>
-          <p:cNvSpPr>
-            <a:spLocks noGrp="1"/>
-          </p:cNvSpPr>
-          <p:nvPr>
-            <p:ph type="dt" sz="half" idx="10"/>
-          </p:nvPr>
-        </p:nvSpPr>
-        <p:spPr/>
-        <p:txBody>
-          <a:bodyPr/>
-          <a:lstStyle/>
-          <a:p>
-            <a:fld id="{2C605444-3734-674A-9A2E-14043CEA286C}" type="datetime5">
-              <a:rPr lang="en-US" smtClean="0"/>
-              <a:t>22-Sep-26</a:t>
             </a:fld>
             <a:endParaRPr lang="en-US"/>
           </a:p>
@@ -4363,12 +4587,12 @@
   </p:clrMapOvr>
   <mc:AlternateContent xmlns:mc="http://schemas.openxmlformats.org/markup-compatibility/2006" xmlns:p14="http://schemas.microsoft.com/office/powerpoint/2010/main">
     <mc:Choice Requires="p14">
-      <p:transition spd="slow" p14:dur="1200">
-        <p14:prism/>
+      <p:transition spd="slow" p14:dur="2000">
+        <p14:prism isContent="1"/>
       </p:transition>
     </mc:Choice>
     <mc:Fallback xmlns="">
-      <p:transition xmlns:p14="http://schemas.microsoft.com/office/powerpoint/2010/main" spd="slow">
+      <p:transition spd="slow">
         <p:fade/>
       </p:transition>
     </mc:Fallback>
@@ -4412,7 +4636,7 @@
         <p:spPr/>
         <p:txBody>
           <a:bodyPr>
-            <a:normAutofit/>
+            <a:normAutofit fontScale="90000"/>
           </a:bodyPr>
           <a:lstStyle/>
           <a:p>
@@ -4483,6 +4707,35 @@
       </p:sp>
       <p:sp>
         <p:nvSpPr>
+          <p:cNvPr id="7" name="Date Placeholder 6">
+            <a:extLst>
+              <a:ext uri="{FF2B5EF4-FFF2-40B4-BE49-F238E27FC236}">
+                <a16:creationId xmlns:a16="http://schemas.microsoft.com/office/drawing/2014/main" id="{0EC8BACC-ADF6-012B-C59D-1C08EC21433A}"/>
+              </a:ext>
+            </a:extLst>
+          </p:cNvPr>
+          <p:cNvSpPr>
+            <a:spLocks noGrp="1"/>
+          </p:cNvSpPr>
+          <p:nvPr>
+            <p:ph type="dt" sz="half" idx="10"/>
+          </p:nvPr>
+        </p:nvSpPr>
+        <p:spPr/>
+        <p:txBody>
+          <a:bodyPr/>
+          <a:lstStyle/>
+          <a:p>
+            <a:fld id="{AC7BB9FB-7043-8E4F-BD56-6113A2396EE2}" type="datetime1">
+              <a:rPr lang="en-US" smtClean="0"/>
+              <a:t>10/8/26</a:t>
+            </a:fld>
+            <a:endParaRPr lang="en-US"/>
+          </a:p>
+        </p:txBody>
+      </p:sp>
+      <p:sp>
+        <p:nvSpPr>
           <p:cNvPr id="4" name="Footer Placeholder 3">
             <a:extLst>
               <a:ext uri="{FF2B5EF4-FFF2-40B4-BE49-F238E27FC236}">
@@ -4533,35 +4786,6 @@
             <a:fld id="{62CBAC88-EF5B-3148-888C-824478CD1B05}" type="slidenum">
               <a:rPr lang="en-US" smtClean="0"/>
               <a:t>13</a:t>
-            </a:fld>
-            <a:endParaRPr lang="en-US"/>
-          </a:p>
-        </p:txBody>
-      </p:sp>
-      <p:sp>
-        <p:nvSpPr>
-          <p:cNvPr id="7" name="Date Placeholder 6">
-            <a:extLst>
-              <a:ext uri="{FF2B5EF4-FFF2-40B4-BE49-F238E27FC236}">
-                <a16:creationId xmlns:a16="http://schemas.microsoft.com/office/drawing/2014/main" id="{0EC8BACC-ADF6-012B-C59D-1C08EC21433A}"/>
-              </a:ext>
-            </a:extLst>
-          </p:cNvPr>
-          <p:cNvSpPr>
-            <a:spLocks noGrp="1"/>
-          </p:cNvSpPr>
-          <p:nvPr>
-            <p:ph type="dt" sz="half" idx="10"/>
-          </p:nvPr>
-        </p:nvSpPr>
-        <p:spPr/>
-        <p:txBody>
-          <a:bodyPr/>
-          <a:lstStyle/>
-          <a:p>
-            <a:fld id="{4EB6881E-771B-4D47-A702-8BC2F50ED8E2}" type="datetime5">
-              <a:rPr lang="en-US" smtClean="0"/>
-              <a:t>22-Sep-26</a:t>
             </a:fld>
             <a:endParaRPr lang="en-US"/>
           </a:p>
@@ -4579,12 +4803,12 @@
   </p:clrMapOvr>
   <mc:AlternateContent xmlns:mc="http://schemas.openxmlformats.org/markup-compatibility/2006" xmlns:p14="http://schemas.microsoft.com/office/powerpoint/2010/main">
     <mc:Choice Requires="p14">
-      <p:transition spd="slow" p14:dur="1200">
-        <p14:prism/>
+      <p:transition spd="slow" p14:dur="2000">
+        <p14:prism isContent="1"/>
       </p:transition>
     </mc:Choice>
     <mc:Fallback xmlns="">
-      <p:transition xmlns:p14="http://schemas.microsoft.com/office/powerpoint/2010/main" spd="slow">
+      <p:transition spd="slow">
         <p:fade/>
       </p:transition>
     </mc:Fallback>
@@ -4627,7 +4851,9 @@
         </p:nvSpPr>
         <p:spPr/>
         <p:txBody>
-          <a:bodyPr/>
+          <a:bodyPr>
+            <a:normAutofit fontScale="90000"/>
+          </a:bodyPr>
           <a:lstStyle/>
           <a:p>
             <a:r>
@@ -4656,7 +4882,7 @@
         <p:spPr/>
         <p:txBody>
           <a:bodyPr>
-            <a:normAutofit fontScale="77500" lnSpcReduction="20000"/>
+            <a:normAutofit fontScale="70000" lnSpcReduction="20000"/>
           </a:bodyPr>
           <a:lstStyle/>
           <a:p>
@@ -4748,6 +4974,35 @@
       </p:sp>
       <p:sp>
         <p:nvSpPr>
+          <p:cNvPr id="7" name="Date Placeholder 6">
+            <a:extLst>
+              <a:ext uri="{FF2B5EF4-FFF2-40B4-BE49-F238E27FC236}">
+                <a16:creationId xmlns:a16="http://schemas.microsoft.com/office/drawing/2014/main" id="{4FB307C0-9B99-D6D5-8D58-B15031545B62}"/>
+              </a:ext>
+            </a:extLst>
+          </p:cNvPr>
+          <p:cNvSpPr>
+            <a:spLocks noGrp="1"/>
+          </p:cNvSpPr>
+          <p:nvPr>
+            <p:ph type="dt" sz="half" idx="10"/>
+          </p:nvPr>
+        </p:nvSpPr>
+        <p:spPr/>
+        <p:txBody>
+          <a:bodyPr/>
+          <a:lstStyle/>
+          <a:p>
+            <a:fld id="{136FBCA0-627E-324F-85B5-274DA2540CF0}" type="datetime1">
+              <a:rPr lang="en-US" smtClean="0"/>
+              <a:t>10/8/26</a:t>
+            </a:fld>
+            <a:endParaRPr lang="en-US"/>
+          </a:p>
+        </p:txBody>
+      </p:sp>
+      <p:sp>
+        <p:nvSpPr>
           <p:cNvPr id="4" name="Footer Placeholder 3">
             <a:extLst>
               <a:ext uri="{FF2B5EF4-FFF2-40B4-BE49-F238E27FC236}">
@@ -4798,35 +5053,6 @@
             <a:fld id="{62CBAC88-EF5B-3148-888C-824478CD1B05}" type="slidenum">
               <a:rPr lang="en-US" smtClean="0"/>
               <a:t>14</a:t>
-            </a:fld>
-            <a:endParaRPr lang="en-US"/>
-          </a:p>
-        </p:txBody>
-      </p:sp>
-      <p:sp>
-        <p:nvSpPr>
-          <p:cNvPr id="7" name="Date Placeholder 6">
-            <a:extLst>
-              <a:ext uri="{FF2B5EF4-FFF2-40B4-BE49-F238E27FC236}">
-                <a16:creationId xmlns:a16="http://schemas.microsoft.com/office/drawing/2014/main" id="{4FB307C0-9B99-D6D5-8D58-B15031545B62}"/>
-              </a:ext>
-            </a:extLst>
-          </p:cNvPr>
-          <p:cNvSpPr>
-            <a:spLocks noGrp="1"/>
-          </p:cNvSpPr>
-          <p:nvPr>
-            <p:ph type="dt" sz="half" idx="10"/>
-          </p:nvPr>
-        </p:nvSpPr>
-        <p:spPr/>
-        <p:txBody>
-          <a:bodyPr/>
-          <a:lstStyle/>
-          <a:p>
-            <a:fld id="{55D4C3B4-E812-734E-90B4-B13B6B121B4A}" type="datetime5">
-              <a:rPr lang="en-US" smtClean="0"/>
-              <a:t>22-Sep-26</a:t>
             </a:fld>
             <a:endParaRPr lang="en-US"/>
           </a:p>
@@ -4844,12 +5070,12 @@
   </p:clrMapOvr>
   <mc:AlternateContent xmlns:mc="http://schemas.openxmlformats.org/markup-compatibility/2006" xmlns:p14="http://schemas.microsoft.com/office/powerpoint/2010/main">
     <mc:Choice Requires="p14">
-      <p:transition spd="slow" p14:dur="1200">
-        <p14:prism/>
+      <p:transition spd="slow" p14:dur="2000">
+        <p14:prism isContent="1"/>
       </p:transition>
     </mc:Choice>
     <mc:Fallback xmlns="">
-      <p:transition xmlns:p14="http://schemas.microsoft.com/office/powerpoint/2010/main" spd="slow">
+      <p:transition spd="slow">
         <p:fade/>
       </p:transition>
     </mc:Fallback>
@@ -4893,7 +5119,7 @@
         <p:spPr/>
         <p:txBody>
           <a:bodyPr>
-            <a:normAutofit/>
+            <a:normAutofit fontScale="90000"/>
           </a:bodyPr>
           <a:lstStyle/>
           <a:p>
@@ -4923,7 +5149,7 @@
         <p:spPr/>
         <p:txBody>
           <a:bodyPr>
-            <a:normAutofit lnSpcReduction="10000"/>
+            <a:normAutofit fontScale="92500" lnSpcReduction="10000"/>
           </a:bodyPr>
           <a:lstStyle/>
           <a:p>
@@ -4972,6 +5198,35 @@
               <a:rPr lang="en-US" dirty="0"/>
               <a:t>Instance variables automatically available in views</a:t>
             </a:r>
+          </a:p>
+        </p:txBody>
+      </p:sp>
+      <p:sp>
+        <p:nvSpPr>
+          <p:cNvPr id="7" name="Date Placeholder 6">
+            <a:extLst>
+              <a:ext uri="{FF2B5EF4-FFF2-40B4-BE49-F238E27FC236}">
+                <a16:creationId xmlns:a16="http://schemas.microsoft.com/office/drawing/2014/main" id="{EFB70907-3DB7-4B11-41AC-2C02DEF9B0B2}"/>
+              </a:ext>
+            </a:extLst>
+          </p:cNvPr>
+          <p:cNvSpPr>
+            <a:spLocks noGrp="1"/>
+          </p:cNvSpPr>
+          <p:nvPr>
+            <p:ph type="dt" sz="half" idx="10"/>
+          </p:nvPr>
+        </p:nvSpPr>
+        <p:spPr/>
+        <p:txBody>
+          <a:bodyPr/>
+          <a:lstStyle/>
+          <a:p>
+            <a:fld id="{32DF5E4A-072B-FC41-8AF0-F30D893308CA}" type="datetime1">
+              <a:rPr lang="en-US" smtClean="0"/>
+              <a:t>10/8/26</a:t>
+            </a:fld>
+            <a:endParaRPr lang="en-US"/>
           </a:p>
         </p:txBody>
       </p:sp>
@@ -5027,35 +5282,6 @@
             <a:fld id="{62CBAC88-EF5B-3148-888C-824478CD1B05}" type="slidenum">
               <a:rPr lang="en-US" smtClean="0"/>
               <a:t>15</a:t>
-            </a:fld>
-            <a:endParaRPr lang="en-US"/>
-          </a:p>
-        </p:txBody>
-      </p:sp>
-      <p:sp>
-        <p:nvSpPr>
-          <p:cNvPr id="7" name="Date Placeholder 6">
-            <a:extLst>
-              <a:ext uri="{FF2B5EF4-FFF2-40B4-BE49-F238E27FC236}">
-                <a16:creationId xmlns:a16="http://schemas.microsoft.com/office/drawing/2014/main" id="{EFB70907-3DB7-4B11-41AC-2C02DEF9B0B2}"/>
-              </a:ext>
-            </a:extLst>
-          </p:cNvPr>
-          <p:cNvSpPr>
-            <a:spLocks noGrp="1"/>
-          </p:cNvSpPr>
-          <p:nvPr>
-            <p:ph type="dt" sz="half" idx="10"/>
-          </p:nvPr>
-        </p:nvSpPr>
-        <p:spPr/>
-        <p:txBody>
-          <a:bodyPr/>
-          <a:lstStyle/>
-          <a:p>
-            <a:fld id="{8C76FC07-724F-5440-922D-8140A361560B}" type="datetime5">
-              <a:rPr lang="en-US" smtClean="0"/>
-              <a:t>22-Sep-26</a:t>
             </a:fld>
             <a:endParaRPr lang="en-US"/>
           </a:p>
@@ -5073,12 +5299,12 @@
   </p:clrMapOvr>
   <mc:AlternateContent xmlns:mc="http://schemas.openxmlformats.org/markup-compatibility/2006" xmlns:p14="http://schemas.microsoft.com/office/powerpoint/2010/main">
     <mc:Choice Requires="p14">
-      <p:transition spd="slow" p14:dur="1200">
-        <p14:prism/>
+      <p:transition spd="slow" p14:dur="2000">
+        <p14:prism isContent="1"/>
       </p:transition>
     </mc:Choice>
     <mc:Fallback xmlns="">
-      <p:transition xmlns:p14="http://schemas.microsoft.com/office/powerpoint/2010/main" spd="slow">
+      <p:transition spd="slow">
         <p:fade/>
       </p:transition>
     </mc:Fallback>
@@ -5122,7 +5348,7 @@
         <p:spPr/>
         <p:txBody>
           <a:bodyPr>
-            <a:normAutofit/>
+            <a:normAutofit fontScale="90000"/>
           </a:bodyPr>
           <a:lstStyle/>
           <a:p>
@@ -5152,7 +5378,7 @@
         <p:spPr/>
         <p:txBody>
           <a:bodyPr>
-            <a:normAutofit lnSpcReduction="10000"/>
+            <a:normAutofit fontScale="92500" lnSpcReduction="20000"/>
           </a:bodyPr>
           <a:lstStyle/>
           <a:p>
@@ -5199,6 +5425,35 @@
               <a:rPr lang="en-US" dirty="0"/>
               <a:t>Used for: authentication, logging, data setup, and more</a:t>
             </a:r>
+          </a:p>
+        </p:txBody>
+      </p:sp>
+      <p:sp>
+        <p:nvSpPr>
+          <p:cNvPr id="7" name="Date Placeholder 6">
+            <a:extLst>
+              <a:ext uri="{FF2B5EF4-FFF2-40B4-BE49-F238E27FC236}">
+                <a16:creationId xmlns:a16="http://schemas.microsoft.com/office/drawing/2014/main" id="{1A99CCC4-2C89-6DF4-9D93-D2B4783E2B22}"/>
+              </a:ext>
+            </a:extLst>
+          </p:cNvPr>
+          <p:cNvSpPr>
+            <a:spLocks noGrp="1"/>
+          </p:cNvSpPr>
+          <p:nvPr>
+            <p:ph type="dt" sz="half" idx="10"/>
+          </p:nvPr>
+        </p:nvSpPr>
+        <p:spPr/>
+        <p:txBody>
+          <a:bodyPr/>
+          <a:lstStyle/>
+          <a:p>
+            <a:fld id="{221F6F40-6780-AB4F-8F76-3A336C6AC81A}" type="datetime1">
+              <a:rPr lang="en-US" smtClean="0"/>
+              <a:t>10/8/26</a:t>
+            </a:fld>
+            <a:endParaRPr lang="en-US"/>
           </a:p>
         </p:txBody>
       </p:sp>
@@ -5254,35 +5509,6 @@
             <a:fld id="{62CBAC88-EF5B-3148-888C-824478CD1B05}" type="slidenum">
               <a:rPr lang="en-US" smtClean="0"/>
               <a:t>16</a:t>
-            </a:fld>
-            <a:endParaRPr lang="en-US"/>
-          </a:p>
-        </p:txBody>
-      </p:sp>
-      <p:sp>
-        <p:nvSpPr>
-          <p:cNvPr id="7" name="Date Placeholder 6">
-            <a:extLst>
-              <a:ext uri="{FF2B5EF4-FFF2-40B4-BE49-F238E27FC236}">
-                <a16:creationId xmlns:a16="http://schemas.microsoft.com/office/drawing/2014/main" id="{1A99CCC4-2C89-6DF4-9D93-D2B4783E2B22}"/>
-              </a:ext>
-            </a:extLst>
-          </p:cNvPr>
-          <p:cNvSpPr>
-            <a:spLocks noGrp="1"/>
-          </p:cNvSpPr>
-          <p:nvPr>
-            <p:ph type="dt" sz="half" idx="10"/>
-          </p:nvPr>
-        </p:nvSpPr>
-        <p:spPr/>
-        <p:txBody>
-          <a:bodyPr/>
-          <a:lstStyle/>
-          <a:p>
-            <a:fld id="{4DE656D0-BA15-EC48-B86F-2AD18D80438C}" type="datetime5">
-              <a:rPr lang="en-US" smtClean="0"/>
-              <a:t>22-Sep-26</a:t>
             </a:fld>
             <a:endParaRPr lang="en-US"/>
           </a:p>
@@ -5300,12 +5526,12 @@
   </p:clrMapOvr>
   <mc:AlternateContent xmlns:mc="http://schemas.openxmlformats.org/markup-compatibility/2006" xmlns:p14="http://schemas.microsoft.com/office/powerpoint/2010/main">
     <mc:Choice Requires="p14">
-      <p:transition spd="slow" p14:dur="1200">
-        <p14:prism/>
+      <p:transition spd="slow" p14:dur="2000">
+        <p14:prism isContent="1"/>
       </p:transition>
     </mc:Choice>
     <mc:Fallback xmlns="">
-      <p:transition xmlns:p14="http://schemas.microsoft.com/office/powerpoint/2010/main" spd="slow">
+      <p:transition spd="slow">
         <p:fade/>
       </p:transition>
     </mc:Fallback>
@@ -5348,7 +5574,9 @@
         </p:nvSpPr>
         <p:spPr/>
         <p:txBody>
-          <a:bodyPr/>
+          <a:bodyPr>
+            <a:normAutofit fontScale="90000"/>
+          </a:bodyPr>
           <a:lstStyle/>
           <a:p>
             <a:r>
@@ -5377,7 +5605,7 @@
         <p:spPr/>
         <p:txBody>
           <a:bodyPr>
-            <a:normAutofit/>
+            <a:normAutofit lnSpcReduction="10000"/>
           </a:bodyPr>
           <a:lstStyle/>
           <a:p>
@@ -5448,6 +5676,35 @@
       </p:sp>
       <p:sp>
         <p:nvSpPr>
+          <p:cNvPr id="7" name="Date Placeholder 6">
+            <a:extLst>
+              <a:ext uri="{FF2B5EF4-FFF2-40B4-BE49-F238E27FC236}">
+                <a16:creationId xmlns:a16="http://schemas.microsoft.com/office/drawing/2014/main" id="{CD2C6EBD-10E5-28CA-795D-C44258BF487D}"/>
+              </a:ext>
+            </a:extLst>
+          </p:cNvPr>
+          <p:cNvSpPr>
+            <a:spLocks noGrp="1"/>
+          </p:cNvSpPr>
+          <p:nvPr>
+            <p:ph type="dt" sz="half" idx="10"/>
+          </p:nvPr>
+        </p:nvSpPr>
+        <p:spPr/>
+        <p:txBody>
+          <a:bodyPr/>
+          <a:lstStyle/>
+          <a:p>
+            <a:fld id="{5A48E8F9-CDCC-3342-BE50-EFDAE83A1C2D}" type="datetime1">
+              <a:rPr lang="en-US" smtClean="0"/>
+              <a:t>10/8/26</a:t>
+            </a:fld>
+            <a:endParaRPr lang="en-US"/>
+          </a:p>
+        </p:txBody>
+      </p:sp>
+      <p:sp>
+        <p:nvSpPr>
           <p:cNvPr id="4" name="Footer Placeholder 3">
             <a:extLst>
               <a:ext uri="{FF2B5EF4-FFF2-40B4-BE49-F238E27FC236}">
@@ -5498,35 +5755,6 @@
             <a:fld id="{62CBAC88-EF5B-3148-888C-824478CD1B05}" type="slidenum">
               <a:rPr lang="en-US" smtClean="0"/>
               <a:t>17</a:t>
-            </a:fld>
-            <a:endParaRPr lang="en-US"/>
-          </a:p>
-        </p:txBody>
-      </p:sp>
-      <p:sp>
-        <p:nvSpPr>
-          <p:cNvPr id="7" name="Date Placeholder 6">
-            <a:extLst>
-              <a:ext uri="{FF2B5EF4-FFF2-40B4-BE49-F238E27FC236}">
-                <a16:creationId xmlns:a16="http://schemas.microsoft.com/office/drawing/2014/main" id="{CD2C6EBD-10E5-28CA-795D-C44258BF487D}"/>
-              </a:ext>
-            </a:extLst>
-          </p:cNvPr>
-          <p:cNvSpPr>
-            <a:spLocks noGrp="1"/>
-          </p:cNvSpPr>
-          <p:nvPr>
-            <p:ph type="dt" sz="half" idx="10"/>
-          </p:nvPr>
-        </p:nvSpPr>
-        <p:spPr/>
-        <p:txBody>
-          <a:bodyPr/>
-          <a:lstStyle/>
-          <a:p>
-            <a:fld id="{BDA405F1-AF6E-DA40-9539-9C52DE8EE333}" type="datetime5">
-              <a:rPr lang="en-US" smtClean="0"/>
-              <a:t>22-Sep-26</a:t>
             </a:fld>
             <a:endParaRPr lang="en-US"/>
           </a:p>
@@ -5544,12 +5772,12 @@
   </p:clrMapOvr>
   <mc:AlternateContent xmlns:mc="http://schemas.openxmlformats.org/markup-compatibility/2006" xmlns:p14="http://schemas.microsoft.com/office/powerpoint/2010/main">
     <mc:Choice Requires="p14">
-      <p:transition spd="slow" p14:dur="1200">
-        <p14:prism/>
+      <p:transition spd="slow" p14:dur="2000">
+        <p14:prism isContent="1"/>
       </p:transition>
     </mc:Choice>
     <mc:Fallback xmlns="">
-      <p:transition xmlns:p14="http://schemas.microsoft.com/office/powerpoint/2010/main" spd="slow">
+      <p:transition spd="slow">
         <p:fade/>
       </p:transition>
     </mc:Fallback>
@@ -5592,7 +5820,9 @@
         </p:nvSpPr>
         <p:spPr/>
         <p:txBody>
-          <a:bodyPr/>
+          <a:bodyPr>
+            <a:normAutofit fontScale="90000"/>
+          </a:bodyPr>
           <a:lstStyle/>
           <a:p>
             <a:r>
@@ -5658,6 +5888,35 @@
               <a:rPr lang="en-US" dirty="0"/>
               <a:t>end</a:t>
             </a:r>
+          </a:p>
+        </p:txBody>
+      </p:sp>
+      <p:sp>
+        <p:nvSpPr>
+          <p:cNvPr id="7" name="Date Placeholder 6">
+            <a:extLst>
+              <a:ext uri="{FF2B5EF4-FFF2-40B4-BE49-F238E27FC236}">
+                <a16:creationId xmlns:a16="http://schemas.microsoft.com/office/drawing/2014/main" id="{D123D832-EDC5-4FB6-FAB8-6131DFFB2F0C}"/>
+              </a:ext>
+            </a:extLst>
+          </p:cNvPr>
+          <p:cNvSpPr>
+            <a:spLocks noGrp="1"/>
+          </p:cNvSpPr>
+          <p:nvPr>
+            <p:ph type="dt" sz="half" idx="10"/>
+          </p:nvPr>
+        </p:nvSpPr>
+        <p:spPr/>
+        <p:txBody>
+          <a:bodyPr/>
+          <a:lstStyle/>
+          <a:p>
+            <a:fld id="{22ED4AED-74B9-D74C-92E6-947C4EA19F03}" type="datetime1">
+              <a:rPr lang="en-US" smtClean="0"/>
+              <a:t>10/8/26</a:t>
+            </a:fld>
+            <a:endParaRPr lang="en-US"/>
           </a:p>
         </p:txBody>
       </p:sp>
@@ -5713,35 +5972,6 @@
             <a:fld id="{62CBAC88-EF5B-3148-888C-824478CD1B05}" type="slidenum">
               <a:rPr lang="en-US" smtClean="0"/>
               <a:t>18</a:t>
-            </a:fld>
-            <a:endParaRPr lang="en-US"/>
-          </a:p>
-        </p:txBody>
-      </p:sp>
-      <p:sp>
-        <p:nvSpPr>
-          <p:cNvPr id="7" name="Date Placeholder 6">
-            <a:extLst>
-              <a:ext uri="{FF2B5EF4-FFF2-40B4-BE49-F238E27FC236}">
-                <a16:creationId xmlns:a16="http://schemas.microsoft.com/office/drawing/2014/main" id="{D123D832-EDC5-4FB6-FAB8-6131DFFB2F0C}"/>
-              </a:ext>
-            </a:extLst>
-          </p:cNvPr>
-          <p:cNvSpPr>
-            <a:spLocks noGrp="1"/>
-          </p:cNvSpPr>
-          <p:nvPr>
-            <p:ph type="dt" sz="half" idx="10"/>
-          </p:nvPr>
-        </p:nvSpPr>
-        <p:spPr/>
-        <p:txBody>
-          <a:bodyPr/>
-          <a:lstStyle/>
-          <a:p>
-            <a:fld id="{818448A1-54E4-0B49-B015-691384C8B39B}" type="datetime5">
-              <a:rPr lang="en-US" smtClean="0"/>
-              <a:t>22-Sep-26</a:t>
             </a:fld>
             <a:endParaRPr lang="en-US"/>
           </a:p>
@@ -5807,7 +6037,9 @@
         </p:nvSpPr>
         <p:spPr/>
         <p:txBody>
-          <a:bodyPr/>
+          <a:bodyPr>
+            <a:normAutofit fontScale="90000"/>
+          </a:bodyPr>
           <a:lstStyle/>
           <a:p>
             <a:r>
@@ -5860,6 +6092,35 @@
           </a:p>
           <a:p>
             <a:endParaRPr lang="en-US" dirty="0"/>
+          </a:p>
+        </p:txBody>
+      </p:sp>
+      <p:sp>
+        <p:nvSpPr>
+          <p:cNvPr id="7" name="Date Placeholder 6">
+            <a:extLst>
+              <a:ext uri="{FF2B5EF4-FFF2-40B4-BE49-F238E27FC236}">
+                <a16:creationId xmlns:a16="http://schemas.microsoft.com/office/drawing/2014/main" id="{17F56837-B258-792A-CEB8-E62291BDD873}"/>
+              </a:ext>
+            </a:extLst>
+          </p:cNvPr>
+          <p:cNvSpPr>
+            <a:spLocks noGrp="1"/>
+          </p:cNvSpPr>
+          <p:nvPr>
+            <p:ph type="dt" sz="half" idx="10"/>
+          </p:nvPr>
+        </p:nvSpPr>
+        <p:spPr/>
+        <p:txBody>
+          <a:bodyPr/>
+          <a:lstStyle/>
+          <a:p>
+            <a:fld id="{3981F190-BBFE-CE4D-975E-DF9F5D2C62D5}" type="datetime1">
+              <a:rPr lang="en-US" smtClean="0"/>
+              <a:t>10/8/26</a:t>
+            </a:fld>
+            <a:endParaRPr lang="en-US"/>
           </a:p>
         </p:txBody>
       </p:sp>
@@ -5915,35 +6176,6 @@
             <a:fld id="{62CBAC88-EF5B-3148-888C-824478CD1B05}" type="slidenum">
               <a:rPr lang="en-US" smtClean="0"/>
               <a:t>19</a:t>
-            </a:fld>
-            <a:endParaRPr lang="en-US"/>
-          </a:p>
-        </p:txBody>
-      </p:sp>
-      <p:sp>
-        <p:nvSpPr>
-          <p:cNvPr id="7" name="Date Placeholder 6">
-            <a:extLst>
-              <a:ext uri="{FF2B5EF4-FFF2-40B4-BE49-F238E27FC236}">
-                <a16:creationId xmlns:a16="http://schemas.microsoft.com/office/drawing/2014/main" id="{17F56837-B258-792A-CEB8-E62291BDD873}"/>
-              </a:ext>
-            </a:extLst>
-          </p:cNvPr>
-          <p:cNvSpPr>
-            <a:spLocks noGrp="1"/>
-          </p:cNvSpPr>
-          <p:nvPr>
-            <p:ph type="dt" sz="half" idx="10"/>
-          </p:nvPr>
-        </p:nvSpPr>
-        <p:spPr/>
-        <p:txBody>
-          <a:bodyPr/>
-          <a:lstStyle/>
-          <a:p>
-            <a:fld id="{E5717335-B61E-874A-9156-EEE57ED72284}" type="datetime5">
-              <a:rPr lang="en-US" smtClean="0"/>
-              <a:t>22-Sep-26</a:t>
             </a:fld>
             <a:endParaRPr lang="en-US"/>
           </a:p>
@@ -5961,12 +6193,12 @@
   </p:clrMapOvr>
   <mc:AlternateContent xmlns:mc="http://schemas.openxmlformats.org/markup-compatibility/2006" xmlns:p14="http://schemas.microsoft.com/office/powerpoint/2010/main">
     <mc:Choice Requires="p14">
-      <p:transition spd="slow" p14:dur="1200">
-        <p14:prism/>
+      <p:transition spd="slow" p14:dur="2000">
+        <p14:prism isContent="1"/>
       </p:transition>
     </mc:Choice>
     <mc:Fallback xmlns="">
-      <p:transition xmlns:p14="http://schemas.microsoft.com/office/powerpoint/2010/main" spd="slow">
+      <p:transition spd="slow">
         <p:fade/>
       </p:transition>
     </mc:Fallback>
@@ -6009,7 +6241,9 @@
         </p:nvSpPr>
         <p:spPr/>
         <p:txBody>
-          <a:bodyPr/>
+          <a:bodyPr>
+            <a:normAutofit fontScale="90000"/>
+          </a:bodyPr>
           <a:lstStyle/>
           <a:p>
             <a:r>
@@ -6044,6 +6278,35 @@
               <a:rPr lang="en-US" dirty="0"/>
               <a:t>Freedom is the only worthy goal in life. It is won by disregarding things that lie beyond our control.</a:t>
             </a:r>
+          </a:p>
+        </p:txBody>
+      </p:sp>
+      <p:sp>
+        <p:nvSpPr>
+          <p:cNvPr id="7" name="Date Placeholder 6">
+            <a:extLst>
+              <a:ext uri="{FF2B5EF4-FFF2-40B4-BE49-F238E27FC236}">
+                <a16:creationId xmlns:a16="http://schemas.microsoft.com/office/drawing/2014/main" id="{226B98D6-9DCC-6B38-A192-1D6178A115C4}"/>
+              </a:ext>
+            </a:extLst>
+          </p:cNvPr>
+          <p:cNvSpPr>
+            <a:spLocks noGrp="1"/>
+          </p:cNvSpPr>
+          <p:nvPr>
+            <p:ph type="dt" sz="half" idx="10"/>
+          </p:nvPr>
+        </p:nvSpPr>
+        <p:spPr/>
+        <p:txBody>
+          <a:bodyPr/>
+          <a:lstStyle/>
+          <a:p>
+            <a:fld id="{BCC34771-3F08-ED4D-B7E3-246778FDFDC9}" type="datetime1">
+              <a:rPr lang="en-US" smtClean="0"/>
+              <a:t>10/8/26</a:t>
+            </a:fld>
+            <a:endParaRPr lang="en-US"/>
           </a:p>
         </p:txBody>
       </p:sp>
@@ -6099,35 +6362,6 @@
             <a:fld id="{62CBAC88-EF5B-3148-888C-824478CD1B05}" type="slidenum">
               <a:rPr lang="en-US" smtClean="0"/>
               <a:t>2</a:t>
-            </a:fld>
-            <a:endParaRPr lang="en-US"/>
-          </a:p>
-        </p:txBody>
-      </p:sp>
-      <p:sp>
-        <p:nvSpPr>
-          <p:cNvPr id="7" name="Date Placeholder 6">
-            <a:extLst>
-              <a:ext uri="{FF2B5EF4-FFF2-40B4-BE49-F238E27FC236}">
-                <a16:creationId xmlns:a16="http://schemas.microsoft.com/office/drawing/2014/main" id="{226B98D6-9DCC-6B38-A192-1D6178A115C4}"/>
-              </a:ext>
-            </a:extLst>
-          </p:cNvPr>
-          <p:cNvSpPr>
-            <a:spLocks noGrp="1"/>
-          </p:cNvSpPr>
-          <p:nvPr>
-            <p:ph type="dt" sz="half" idx="10"/>
-          </p:nvPr>
-        </p:nvSpPr>
-        <p:spPr/>
-        <p:txBody>
-          <a:bodyPr/>
-          <a:lstStyle/>
-          <a:p>
-            <a:fld id="{6C7D9CD9-7400-A442-AC8F-BA2E16295A02}" type="datetime5">
-              <a:rPr lang="en-US" smtClean="0"/>
-              <a:t>22-Sep-26</a:t>
             </a:fld>
             <a:endParaRPr lang="en-US"/>
           </a:p>
@@ -6145,12 +6379,12 @@
   </p:clrMapOvr>
   <mc:AlternateContent xmlns:mc="http://schemas.openxmlformats.org/markup-compatibility/2006" xmlns:p14="http://schemas.microsoft.com/office/powerpoint/2010/main">
     <mc:Choice Requires="p14">
-      <p:transition spd="slow" p14:dur="1200">
-        <p14:prism/>
+      <p:transition spd="slow" p14:dur="2000">
+        <p14:prism isContent="1"/>
       </p:transition>
     </mc:Choice>
     <mc:Fallback xmlns="">
-      <p:transition xmlns:p14="http://schemas.microsoft.com/office/powerpoint/2010/main" spd="slow">
+      <p:transition spd="slow">
         <p:fade/>
       </p:transition>
     </mc:Fallback>
@@ -6194,7 +6428,7 @@
         <p:spPr/>
         <p:txBody>
           <a:bodyPr>
-            <a:normAutofit/>
+            <a:normAutofit fontScale="90000"/>
           </a:bodyPr>
           <a:lstStyle/>
           <a:p>
@@ -6351,6 +6585,35 @@
       </p:sp>
       <p:sp>
         <p:nvSpPr>
+          <p:cNvPr id="7" name="Date Placeholder 6">
+            <a:extLst>
+              <a:ext uri="{FF2B5EF4-FFF2-40B4-BE49-F238E27FC236}">
+                <a16:creationId xmlns:a16="http://schemas.microsoft.com/office/drawing/2014/main" id="{6EA6AC9A-74AC-F219-78E0-2A37C4B3F3BE}"/>
+              </a:ext>
+            </a:extLst>
+          </p:cNvPr>
+          <p:cNvSpPr>
+            <a:spLocks noGrp="1"/>
+          </p:cNvSpPr>
+          <p:nvPr>
+            <p:ph type="dt" sz="half" idx="10"/>
+          </p:nvPr>
+        </p:nvSpPr>
+        <p:spPr/>
+        <p:txBody>
+          <a:bodyPr/>
+          <a:lstStyle/>
+          <a:p>
+            <a:fld id="{5EB18843-A572-4546-A1B8-368C08CE3ED2}" type="datetime1">
+              <a:rPr lang="en-US" smtClean="0"/>
+              <a:t>10/8/26</a:t>
+            </a:fld>
+            <a:endParaRPr lang="en-US"/>
+          </a:p>
+        </p:txBody>
+      </p:sp>
+      <p:sp>
+        <p:nvSpPr>
           <p:cNvPr id="4" name="Footer Placeholder 3">
             <a:extLst>
               <a:ext uri="{FF2B5EF4-FFF2-40B4-BE49-F238E27FC236}">
@@ -6401,35 +6664,6 @@
             <a:fld id="{62CBAC88-EF5B-3148-888C-824478CD1B05}" type="slidenum">
               <a:rPr lang="en-US" smtClean="0"/>
               <a:t>20</a:t>
-            </a:fld>
-            <a:endParaRPr lang="en-US"/>
-          </a:p>
-        </p:txBody>
-      </p:sp>
-      <p:sp>
-        <p:nvSpPr>
-          <p:cNvPr id="7" name="Date Placeholder 6">
-            <a:extLst>
-              <a:ext uri="{FF2B5EF4-FFF2-40B4-BE49-F238E27FC236}">
-                <a16:creationId xmlns:a16="http://schemas.microsoft.com/office/drawing/2014/main" id="{6EA6AC9A-74AC-F219-78E0-2A37C4B3F3BE}"/>
-              </a:ext>
-            </a:extLst>
-          </p:cNvPr>
-          <p:cNvSpPr>
-            <a:spLocks noGrp="1"/>
-          </p:cNvSpPr>
-          <p:nvPr>
-            <p:ph type="dt" sz="half" idx="10"/>
-          </p:nvPr>
-        </p:nvSpPr>
-        <p:spPr/>
-        <p:txBody>
-          <a:bodyPr/>
-          <a:lstStyle/>
-          <a:p>
-            <a:fld id="{6DD864FE-6753-6445-A872-7401665AF5EE}" type="datetime5">
-              <a:rPr lang="en-US" smtClean="0"/>
-              <a:t>22-Sep-26</a:t>
             </a:fld>
             <a:endParaRPr lang="en-US"/>
           </a:p>
@@ -6447,12 +6681,12 @@
   </p:clrMapOvr>
   <mc:AlternateContent xmlns:mc="http://schemas.openxmlformats.org/markup-compatibility/2006" xmlns:p14="http://schemas.microsoft.com/office/powerpoint/2010/main">
     <mc:Choice Requires="p14">
-      <p:transition spd="slow" p14:dur="1200">
-        <p14:prism/>
+      <p:transition spd="slow" p14:dur="2000">
+        <p14:prism isContent="1"/>
       </p:transition>
     </mc:Choice>
     <mc:Fallback xmlns="">
-      <p:transition xmlns:p14="http://schemas.microsoft.com/office/powerpoint/2010/main" spd="slow">
+      <p:transition spd="slow">
         <p:fade/>
       </p:transition>
     </mc:Fallback>
@@ -6496,7 +6730,7 @@
         <p:spPr/>
         <p:txBody>
           <a:bodyPr>
-            <a:normAutofit/>
+            <a:normAutofit fontScale="90000"/>
           </a:bodyPr>
           <a:lstStyle/>
           <a:p>
@@ -6526,7 +6760,7 @@
         <p:spPr/>
         <p:txBody>
           <a:bodyPr>
-            <a:normAutofit fontScale="92500" lnSpcReduction="20000"/>
+            <a:normAutofit fontScale="85000" lnSpcReduction="20000"/>
           </a:bodyPr>
           <a:lstStyle/>
           <a:p>
@@ -6595,6 +6829,35 @@
           </a:p>
           <a:p>
             <a:endParaRPr lang="en-US" dirty="0"/>
+          </a:p>
+        </p:txBody>
+      </p:sp>
+      <p:sp>
+        <p:nvSpPr>
+          <p:cNvPr id="7" name="Date Placeholder 6">
+            <a:extLst>
+              <a:ext uri="{FF2B5EF4-FFF2-40B4-BE49-F238E27FC236}">
+                <a16:creationId xmlns:a16="http://schemas.microsoft.com/office/drawing/2014/main" id="{3B605F09-4243-928F-9A9B-13814E52CC35}"/>
+              </a:ext>
+            </a:extLst>
+          </p:cNvPr>
+          <p:cNvSpPr>
+            <a:spLocks noGrp="1"/>
+          </p:cNvSpPr>
+          <p:nvPr>
+            <p:ph type="dt" sz="half" idx="10"/>
+          </p:nvPr>
+        </p:nvSpPr>
+        <p:spPr/>
+        <p:txBody>
+          <a:bodyPr/>
+          <a:lstStyle/>
+          <a:p>
+            <a:fld id="{1897F91F-F0A7-F94B-9C11-9BF827AED3AC}" type="datetime1">
+              <a:rPr lang="en-US" smtClean="0"/>
+              <a:t>10/8/26</a:t>
+            </a:fld>
+            <a:endParaRPr lang="en-US"/>
           </a:p>
         </p:txBody>
       </p:sp>
@@ -6650,35 +6913,6 @@
             <a:fld id="{62CBAC88-EF5B-3148-888C-824478CD1B05}" type="slidenum">
               <a:rPr lang="en-US" smtClean="0"/>
               <a:t>21</a:t>
-            </a:fld>
-            <a:endParaRPr lang="en-US"/>
-          </a:p>
-        </p:txBody>
-      </p:sp>
-      <p:sp>
-        <p:nvSpPr>
-          <p:cNvPr id="7" name="Date Placeholder 6">
-            <a:extLst>
-              <a:ext uri="{FF2B5EF4-FFF2-40B4-BE49-F238E27FC236}">
-                <a16:creationId xmlns:a16="http://schemas.microsoft.com/office/drawing/2014/main" id="{3B605F09-4243-928F-9A9B-13814E52CC35}"/>
-              </a:ext>
-            </a:extLst>
-          </p:cNvPr>
-          <p:cNvSpPr>
-            <a:spLocks noGrp="1"/>
-          </p:cNvSpPr>
-          <p:nvPr>
-            <p:ph type="dt" sz="half" idx="10"/>
-          </p:nvPr>
-        </p:nvSpPr>
-        <p:spPr/>
-        <p:txBody>
-          <a:bodyPr/>
-          <a:lstStyle/>
-          <a:p>
-            <a:fld id="{A0442797-051F-4041-9623-AE832FE49F4D}" type="datetime5">
-              <a:rPr lang="en-US" smtClean="0"/>
-              <a:t>22-Sep-26</a:t>
             </a:fld>
             <a:endParaRPr lang="en-US"/>
           </a:p>
@@ -6696,12 +6930,12 @@
   </p:clrMapOvr>
   <mc:AlternateContent xmlns:mc="http://schemas.openxmlformats.org/markup-compatibility/2006" xmlns:p14="http://schemas.microsoft.com/office/powerpoint/2010/main">
     <mc:Choice Requires="p14">
-      <p:transition spd="slow" p14:dur="1200">
-        <p14:prism/>
+      <p:transition spd="slow" p14:dur="2000">
+        <p14:prism isContent="1"/>
       </p:transition>
     </mc:Choice>
     <mc:Fallback xmlns="">
-      <p:transition xmlns:p14="http://schemas.microsoft.com/office/powerpoint/2010/main" spd="slow">
+      <p:transition spd="slow">
         <p:fade/>
       </p:transition>
     </mc:Fallback>
@@ -6745,7 +6979,7 @@
         <p:spPr/>
         <p:txBody>
           <a:bodyPr>
-            <a:normAutofit/>
+            <a:normAutofit fontScale="90000"/>
           </a:bodyPr>
           <a:lstStyle/>
           <a:p>
@@ -6775,7 +7009,7 @@
         <p:spPr/>
         <p:txBody>
           <a:bodyPr>
-            <a:normAutofit fontScale="92500" lnSpcReduction="20000"/>
+            <a:normAutofit fontScale="85000" lnSpcReduction="20000"/>
           </a:bodyPr>
           <a:lstStyle/>
           <a:p>
@@ -6872,6 +7106,35 @@
           </a:p>
           <a:p>
             <a:endParaRPr lang="en-US" dirty="0"/>
+          </a:p>
+        </p:txBody>
+      </p:sp>
+      <p:sp>
+        <p:nvSpPr>
+          <p:cNvPr id="7" name="Date Placeholder 6">
+            <a:extLst>
+              <a:ext uri="{FF2B5EF4-FFF2-40B4-BE49-F238E27FC236}">
+                <a16:creationId xmlns:a16="http://schemas.microsoft.com/office/drawing/2014/main" id="{14288CB2-8E29-B291-6529-E78A483A4666}"/>
+              </a:ext>
+            </a:extLst>
+          </p:cNvPr>
+          <p:cNvSpPr>
+            <a:spLocks noGrp="1"/>
+          </p:cNvSpPr>
+          <p:nvPr>
+            <p:ph type="dt" sz="half" idx="10"/>
+          </p:nvPr>
+        </p:nvSpPr>
+        <p:spPr/>
+        <p:txBody>
+          <a:bodyPr/>
+          <a:lstStyle/>
+          <a:p>
+            <a:fld id="{53083AB1-B5A5-B843-B508-9EE26EF787BE}" type="datetime1">
+              <a:rPr lang="en-US" smtClean="0"/>
+              <a:t>10/8/26</a:t>
+            </a:fld>
+            <a:endParaRPr lang="en-US"/>
           </a:p>
         </p:txBody>
       </p:sp>
@@ -6927,35 +7190,6 @@
             <a:fld id="{62CBAC88-EF5B-3148-888C-824478CD1B05}" type="slidenum">
               <a:rPr lang="en-US" smtClean="0"/>
               <a:t>22</a:t>
-            </a:fld>
-            <a:endParaRPr lang="en-US"/>
-          </a:p>
-        </p:txBody>
-      </p:sp>
-      <p:sp>
-        <p:nvSpPr>
-          <p:cNvPr id="7" name="Date Placeholder 6">
-            <a:extLst>
-              <a:ext uri="{FF2B5EF4-FFF2-40B4-BE49-F238E27FC236}">
-                <a16:creationId xmlns:a16="http://schemas.microsoft.com/office/drawing/2014/main" id="{14288CB2-8E29-B291-6529-E78A483A4666}"/>
-              </a:ext>
-            </a:extLst>
-          </p:cNvPr>
-          <p:cNvSpPr>
-            <a:spLocks noGrp="1"/>
-          </p:cNvSpPr>
-          <p:nvPr>
-            <p:ph type="dt" sz="half" idx="10"/>
-          </p:nvPr>
-        </p:nvSpPr>
-        <p:spPr/>
-        <p:txBody>
-          <a:bodyPr/>
-          <a:lstStyle/>
-          <a:p>
-            <a:fld id="{5E2F346F-77F5-F743-B21A-B0F8F651FAA2}" type="datetime5">
-              <a:rPr lang="en-US" smtClean="0"/>
-              <a:t>22-Sep-26</a:t>
             </a:fld>
             <a:endParaRPr lang="en-US"/>
           </a:p>
@@ -7021,7 +7255,9 @@
         </p:nvSpPr>
         <p:spPr/>
         <p:txBody>
-          <a:bodyPr/>
+          <a:bodyPr>
+            <a:normAutofit fontScale="90000"/>
+          </a:bodyPr>
           <a:lstStyle/>
           <a:p>
             <a:r>
@@ -7050,7 +7286,7 @@
         <p:spPr/>
         <p:txBody>
           <a:bodyPr>
-            <a:normAutofit fontScale="62500" lnSpcReduction="20000"/>
+            <a:normAutofit fontScale="55000" lnSpcReduction="20000"/>
           </a:bodyPr>
           <a:lstStyle/>
           <a:p>
@@ -7257,6 +7493,35 @@
               <a:rPr lang="en-US" dirty="0"/>
               <a:t>end</a:t>
             </a:r>
+          </a:p>
+        </p:txBody>
+      </p:sp>
+      <p:sp>
+        <p:nvSpPr>
+          <p:cNvPr id="7" name="Date Placeholder 6">
+            <a:extLst>
+              <a:ext uri="{FF2B5EF4-FFF2-40B4-BE49-F238E27FC236}">
+                <a16:creationId xmlns:a16="http://schemas.microsoft.com/office/drawing/2014/main" id="{743FACD5-78E4-5A7A-D07A-AD0131671416}"/>
+              </a:ext>
+            </a:extLst>
+          </p:cNvPr>
+          <p:cNvSpPr>
+            <a:spLocks noGrp="1"/>
+          </p:cNvSpPr>
+          <p:nvPr>
+            <p:ph type="dt" sz="half" idx="10"/>
+          </p:nvPr>
+        </p:nvSpPr>
+        <p:spPr/>
+        <p:txBody>
+          <a:bodyPr/>
+          <a:lstStyle/>
+          <a:p>
+            <a:fld id="{1163D33F-652C-A345-BF95-79EAE5B0F026}" type="datetime1">
+              <a:rPr lang="en-US" smtClean="0"/>
+              <a:t>10/8/26</a:t>
+            </a:fld>
+            <a:endParaRPr lang="en-US"/>
           </a:p>
         </p:txBody>
       </p:sp>
@@ -7312,35 +7577,6 @@
             <a:fld id="{62CBAC88-EF5B-3148-888C-824478CD1B05}" type="slidenum">
               <a:rPr lang="en-US" smtClean="0"/>
               <a:t>23</a:t>
-            </a:fld>
-            <a:endParaRPr lang="en-US"/>
-          </a:p>
-        </p:txBody>
-      </p:sp>
-      <p:sp>
-        <p:nvSpPr>
-          <p:cNvPr id="7" name="Date Placeholder 6">
-            <a:extLst>
-              <a:ext uri="{FF2B5EF4-FFF2-40B4-BE49-F238E27FC236}">
-                <a16:creationId xmlns:a16="http://schemas.microsoft.com/office/drawing/2014/main" id="{743FACD5-78E4-5A7A-D07A-AD0131671416}"/>
-              </a:ext>
-            </a:extLst>
-          </p:cNvPr>
-          <p:cNvSpPr>
-            <a:spLocks noGrp="1"/>
-          </p:cNvSpPr>
-          <p:nvPr>
-            <p:ph type="dt" sz="half" idx="10"/>
-          </p:nvPr>
-        </p:nvSpPr>
-        <p:spPr/>
-        <p:txBody>
-          <a:bodyPr/>
-          <a:lstStyle/>
-          <a:p>
-            <a:fld id="{026F8E30-E146-184D-B3A6-FEBEB7D6556E}" type="datetime5">
-              <a:rPr lang="en-US" smtClean="0"/>
-              <a:t>22-Sep-26</a:t>
             </a:fld>
             <a:endParaRPr lang="en-US"/>
           </a:p>
@@ -7356,6 +7592,18 @@
   <p:clrMapOvr>
     <a:masterClrMapping/>
   </p:clrMapOvr>
+  <mc:AlternateContent xmlns:mc="http://schemas.openxmlformats.org/markup-compatibility/2006" xmlns:p14="http://schemas.microsoft.com/office/powerpoint/2010/main">
+    <mc:Choice Requires="p14">
+      <p:transition spd="slow" p14:dur="2000">
+        <p14:prism isContent="1"/>
+      </p:transition>
+    </mc:Choice>
+    <mc:Fallback xmlns="">
+      <p:transition spd="slow">
+        <p:fade/>
+      </p:transition>
+    </mc:Fallback>
+  </mc:AlternateContent>
 </p:sld>
 </file>
 
@@ -7395,7 +7643,7 @@
         <p:spPr/>
         <p:txBody>
           <a:bodyPr>
-            <a:normAutofit/>
+            <a:normAutofit fontScale="90000"/>
           </a:bodyPr>
           <a:lstStyle/>
           <a:p>
@@ -7430,7 +7678,7 @@
         <p:spPr/>
         <p:txBody>
           <a:bodyPr>
-            <a:normAutofit fontScale="85000" lnSpcReduction="20000"/>
+            <a:normAutofit fontScale="77500" lnSpcReduction="20000"/>
           </a:bodyPr>
           <a:lstStyle/>
           <a:p>
@@ -7492,6 +7740,35 @@
           </a:p>
           <a:p>
             <a:endParaRPr lang="en-US" dirty="0"/>
+          </a:p>
+        </p:txBody>
+      </p:sp>
+      <p:sp>
+        <p:nvSpPr>
+          <p:cNvPr id="7" name="Date Placeholder 6">
+            <a:extLst>
+              <a:ext uri="{FF2B5EF4-FFF2-40B4-BE49-F238E27FC236}">
+                <a16:creationId xmlns:a16="http://schemas.microsoft.com/office/drawing/2014/main" id="{09AEDBE4-CB49-66B0-F4A7-934FF9751D1E}"/>
+              </a:ext>
+            </a:extLst>
+          </p:cNvPr>
+          <p:cNvSpPr>
+            <a:spLocks noGrp="1"/>
+          </p:cNvSpPr>
+          <p:nvPr>
+            <p:ph type="dt" sz="half" idx="10"/>
+          </p:nvPr>
+        </p:nvSpPr>
+        <p:spPr/>
+        <p:txBody>
+          <a:bodyPr/>
+          <a:lstStyle/>
+          <a:p>
+            <a:fld id="{283062B6-C5D1-9B48-901F-1EE17EF91249}" type="datetime1">
+              <a:rPr lang="en-US" smtClean="0"/>
+              <a:t>10/8/26</a:t>
+            </a:fld>
+            <a:endParaRPr lang="en-US"/>
           </a:p>
         </p:txBody>
       </p:sp>
@@ -7547,35 +7824,6 @@
             <a:fld id="{62CBAC88-EF5B-3148-888C-824478CD1B05}" type="slidenum">
               <a:rPr lang="en-US" smtClean="0"/>
               <a:t>24</a:t>
-            </a:fld>
-            <a:endParaRPr lang="en-US"/>
-          </a:p>
-        </p:txBody>
-      </p:sp>
-      <p:sp>
-        <p:nvSpPr>
-          <p:cNvPr id="7" name="Date Placeholder 6">
-            <a:extLst>
-              <a:ext uri="{FF2B5EF4-FFF2-40B4-BE49-F238E27FC236}">
-                <a16:creationId xmlns:a16="http://schemas.microsoft.com/office/drawing/2014/main" id="{09AEDBE4-CB49-66B0-F4A7-934FF9751D1E}"/>
-              </a:ext>
-            </a:extLst>
-          </p:cNvPr>
-          <p:cNvSpPr>
-            <a:spLocks noGrp="1"/>
-          </p:cNvSpPr>
-          <p:nvPr>
-            <p:ph type="dt" sz="half" idx="10"/>
-          </p:nvPr>
-        </p:nvSpPr>
-        <p:spPr/>
-        <p:txBody>
-          <a:bodyPr/>
-          <a:lstStyle/>
-          <a:p>
-            <a:fld id="{43A25FB8-6C2E-5649-AA0A-03EA386A78C5}" type="datetime5">
-              <a:rPr lang="en-US" smtClean="0"/>
-              <a:t>22-Sep-26</a:t>
             </a:fld>
             <a:endParaRPr lang="en-US"/>
           </a:p>
@@ -7593,12 +7841,12 @@
   </p:clrMapOvr>
   <mc:AlternateContent xmlns:mc="http://schemas.openxmlformats.org/markup-compatibility/2006" xmlns:p14="http://schemas.microsoft.com/office/powerpoint/2010/main">
     <mc:Choice Requires="p14">
-      <p:transition spd="slow" p14:dur="1200">
-        <p14:prism/>
+      <p:transition spd="slow" p14:dur="2000">
+        <p14:prism isContent="1"/>
       </p:transition>
     </mc:Choice>
     <mc:Fallback xmlns="">
-      <p:transition xmlns:p14="http://schemas.microsoft.com/office/powerpoint/2010/main" spd="slow">
+      <p:transition spd="slow">
         <p:fade/>
       </p:transition>
     </mc:Fallback>
@@ -7642,7 +7890,7 @@
         <p:spPr/>
         <p:txBody>
           <a:bodyPr>
-            <a:normAutofit/>
+            <a:normAutofit fontScale="90000"/>
           </a:bodyPr>
           <a:lstStyle/>
           <a:p>
@@ -7672,7 +7920,7 @@
         <p:spPr/>
         <p:txBody>
           <a:bodyPr>
-            <a:normAutofit fontScale="92500" lnSpcReduction="10000"/>
+            <a:normAutofit fontScale="92500" lnSpcReduction="20000"/>
           </a:bodyPr>
           <a:lstStyle/>
           <a:p>
@@ -7742,6 +7990,35 @@
               <a:rPr lang="en-US" dirty="0"/>
               <a:t> - Server error</a:t>
             </a:r>
+          </a:p>
+        </p:txBody>
+      </p:sp>
+      <p:sp>
+        <p:nvSpPr>
+          <p:cNvPr id="7" name="Date Placeholder 6">
+            <a:extLst>
+              <a:ext uri="{FF2B5EF4-FFF2-40B4-BE49-F238E27FC236}">
+                <a16:creationId xmlns:a16="http://schemas.microsoft.com/office/drawing/2014/main" id="{C1618845-5D0E-2A77-A08A-20F6643D5D19}"/>
+              </a:ext>
+            </a:extLst>
+          </p:cNvPr>
+          <p:cNvSpPr>
+            <a:spLocks noGrp="1"/>
+          </p:cNvSpPr>
+          <p:nvPr>
+            <p:ph type="dt" sz="half" idx="10"/>
+          </p:nvPr>
+        </p:nvSpPr>
+        <p:spPr/>
+        <p:txBody>
+          <a:bodyPr/>
+          <a:lstStyle/>
+          <a:p>
+            <a:fld id="{39D5F208-E81A-FC4A-B950-28251E820C5B}" type="datetime1">
+              <a:rPr lang="en-US" smtClean="0"/>
+              <a:t>10/8/26</a:t>
+            </a:fld>
+            <a:endParaRPr lang="en-US"/>
           </a:p>
         </p:txBody>
       </p:sp>
@@ -7797,35 +8074,6 @@
             <a:fld id="{62CBAC88-EF5B-3148-888C-824478CD1B05}" type="slidenum">
               <a:rPr lang="en-US" smtClean="0"/>
               <a:t>25</a:t>
-            </a:fld>
-            <a:endParaRPr lang="en-US"/>
-          </a:p>
-        </p:txBody>
-      </p:sp>
-      <p:sp>
-        <p:nvSpPr>
-          <p:cNvPr id="7" name="Date Placeholder 6">
-            <a:extLst>
-              <a:ext uri="{FF2B5EF4-FFF2-40B4-BE49-F238E27FC236}">
-                <a16:creationId xmlns:a16="http://schemas.microsoft.com/office/drawing/2014/main" id="{C1618845-5D0E-2A77-A08A-20F6643D5D19}"/>
-              </a:ext>
-            </a:extLst>
-          </p:cNvPr>
-          <p:cNvSpPr>
-            <a:spLocks noGrp="1"/>
-          </p:cNvSpPr>
-          <p:nvPr>
-            <p:ph type="dt" sz="half" idx="10"/>
-          </p:nvPr>
-        </p:nvSpPr>
-        <p:spPr/>
-        <p:txBody>
-          <a:bodyPr/>
-          <a:lstStyle/>
-          <a:p>
-            <a:fld id="{CB8E4670-2CF6-0742-BDB7-508D2A9A7FD7}" type="datetime5">
-              <a:rPr lang="en-US" smtClean="0"/>
-              <a:t>22-Sep-26</a:t>
             </a:fld>
             <a:endParaRPr lang="en-US"/>
           </a:p>
@@ -7843,12 +8091,12 @@
   </p:clrMapOvr>
   <mc:AlternateContent xmlns:mc="http://schemas.openxmlformats.org/markup-compatibility/2006" xmlns:p14="http://schemas.microsoft.com/office/powerpoint/2010/main">
     <mc:Choice Requires="p14">
-      <p:transition spd="slow" p14:dur="1200">
-        <p14:prism/>
+      <p:transition spd="slow" p14:dur="2000">
+        <p14:prism isContent="1"/>
       </p:transition>
     </mc:Choice>
     <mc:Fallback xmlns="">
-      <p:transition xmlns:p14="http://schemas.microsoft.com/office/powerpoint/2010/main" spd="slow">
+      <p:transition spd="slow">
         <p:fade/>
       </p:transition>
     </mc:Fallback>
@@ -7892,7 +8140,7 @@
         <p:spPr/>
         <p:txBody>
           <a:bodyPr>
-            <a:normAutofit/>
+            <a:normAutofit fontScale="90000"/>
           </a:bodyPr>
           <a:lstStyle/>
           <a:p>
@@ -7922,7 +8170,7 @@
         <p:spPr/>
         <p:txBody>
           <a:bodyPr>
-            <a:normAutofit/>
+            <a:normAutofit fontScale="92500"/>
           </a:bodyPr>
           <a:lstStyle/>
           <a:p>
@@ -7985,6 +8233,35 @@
       </p:sp>
       <p:sp>
         <p:nvSpPr>
+          <p:cNvPr id="7" name="Date Placeholder 6">
+            <a:extLst>
+              <a:ext uri="{FF2B5EF4-FFF2-40B4-BE49-F238E27FC236}">
+                <a16:creationId xmlns:a16="http://schemas.microsoft.com/office/drawing/2014/main" id="{81B0C9D4-EC9B-E6DE-C42B-712443BD0FA8}"/>
+              </a:ext>
+            </a:extLst>
+          </p:cNvPr>
+          <p:cNvSpPr>
+            <a:spLocks noGrp="1"/>
+          </p:cNvSpPr>
+          <p:nvPr>
+            <p:ph type="dt" sz="half" idx="10"/>
+          </p:nvPr>
+        </p:nvSpPr>
+        <p:spPr/>
+        <p:txBody>
+          <a:bodyPr/>
+          <a:lstStyle/>
+          <a:p>
+            <a:fld id="{795370BD-894B-D644-B001-B82B3289C5C9}" type="datetime1">
+              <a:rPr lang="en-US" smtClean="0"/>
+              <a:t>10/8/26</a:t>
+            </a:fld>
+            <a:endParaRPr lang="en-US"/>
+          </a:p>
+        </p:txBody>
+      </p:sp>
+      <p:sp>
+        <p:nvSpPr>
           <p:cNvPr id="4" name="Footer Placeholder 3">
             <a:extLst>
               <a:ext uri="{FF2B5EF4-FFF2-40B4-BE49-F238E27FC236}">
@@ -8035,35 +8312,6 @@
             <a:fld id="{62CBAC88-EF5B-3148-888C-824478CD1B05}" type="slidenum">
               <a:rPr lang="en-US" smtClean="0"/>
               <a:t>26</a:t>
-            </a:fld>
-            <a:endParaRPr lang="en-US"/>
-          </a:p>
-        </p:txBody>
-      </p:sp>
-      <p:sp>
-        <p:nvSpPr>
-          <p:cNvPr id="7" name="Date Placeholder 6">
-            <a:extLst>
-              <a:ext uri="{FF2B5EF4-FFF2-40B4-BE49-F238E27FC236}">
-                <a16:creationId xmlns:a16="http://schemas.microsoft.com/office/drawing/2014/main" id="{81B0C9D4-EC9B-E6DE-C42B-712443BD0FA8}"/>
-              </a:ext>
-            </a:extLst>
-          </p:cNvPr>
-          <p:cNvSpPr>
-            <a:spLocks noGrp="1"/>
-          </p:cNvSpPr>
-          <p:nvPr>
-            <p:ph type="dt" sz="half" idx="10"/>
-          </p:nvPr>
-        </p:nvSpPr>
-        <p:spPr/>
-        <p:txBody>
-          <a:bodyPr/>
-          <a:lstStyle/>
-          <a:p>
-            <a:fld id="{37F45AC7-4C20-A342-B309-068E7EA7D754}" type="datetime5">
-              <a:rPr lang="en-US" smtClean="0"/>
-              <a:t>22-Sep-26</a:t>
             </a:fld>
             <a:endParaRPr lang="en-US"/>
           </a:p>
@@ -8081,12 +8329,12 @@
   </p:clrMapOvr>
   <mc:AlternateContent xmlns:mc="http://schemas.openxmlformats.org/markup-compatibility/2006" xmlns:p14="http://schemas.microsoft.com/office/powerpoint/2010/main">
     <mc:Choice Requires="p14">
-      <p:transition spd="slow" p14:dur="1200">
-        <p14:prism/>
+      <p:transition spd="slow" p14:dur="2000">
+        <p14:prism isContent="1"/>
       </p:transition>
     </mc:Choice>
     <mc:Fallback xmlns="">
-      <p:transition xmlns:p14="http://schemas.microsoft.com/office/powerpoint/2010/main" spd="slow">
+      <p:transition spd="slow">
         <p:fade/>
       </p:transition>
     </mc:Fallback>
@@ -8130,7 +8378,7 @@
         <p:spPr/>
         <p:txBody>
           <a:bodyPr>
-            <a:normAutofit/>
+            <a:normAutofit fontScale="90000"/>
           </a:bodyPr>
           <a:lstStyle/>
           <a:p>
@@ -8160,7 +8408,7 @@
         <p:spPr/>
         <p:txBody>
           <a:bodyPr>
-            <a:normAutofit fontScale="62500" lnSpcReduction="20000"/>
+            <a:normAutofit fontScale="55000" lnSpcReduction="20000"/>
           </a:bodyPr>
           <a:lstStyle/>
           <a:p>
@@ -8339,6 +8587,35 @@
       </p:sp>
       <p:sp>
         <p:nvSpPr>
+          <p:cNvPr id="7" name="Date Placeholder 6">
+            <a:extLst>
+              <a:ext uri="{FF2B5EF4-FFF2-40B4-BE49-F238E27FC236}">
+                <a16:creationId xmlns:a16="http://schemas.microsoft.com/office/drawing/2014/main" id="{C12C482D-D9B6-6683-A1FE-6F24E32CCDA3}"/>
+              </a:ext>
+            </a:extLst>
+          </p:cNvPr>
+          <p:cNvSpPr>
+            <a:spLocks noGrp="1"/>
+          </p:cNvSpPr>
+          <p:nvPr>
+            <p:ph type="dt" sz="half" idx="10"/>
+          </p:nvPr>
+        </p:nvSpPr>
+        <p:spPr/>
+        <p:txBody>
+          <a:bodyPr/>
+          <a:lstStyle/>
+          <a:p>
+            <a:fld id="{F51FD3CA-25F6-F04E-A231-3D12A5312A47}" type="datetime1">
+              <a:rPr lang="en-US" smtClean="0"/>
+              <a:t>10/8/26</a:t>
+            </a:fld>
+            <a:endParaRPr lang="en-US"/>
+          </a:p>
+        </p:txBody>
+      </p:sp>
+      <p:sp>
+        <p:nvSpPr>
           <p:cNvPr id="4" name="Footer Placeholder 3">
             <a:extLst>
               <a:ext uri="{FF2B5EF4-FFF2-40B4-BE49-F238E27FC236}">
@@ -8389,35 +8666,6 @@
             <a:fld id="{62CBAC88-EF5B-3148-888C-824478CD1B05}" type="slidenum">
               <a:rPr lang="en-US" smtClean="0"/>
               <a:t>27</a:t>
-            </a:fld>
-            <a:endParaRPr lang="en-US"/>
-          </a:p>
-        </p:txBody>
-      </p:sp>
-      <p:sp>
-        <p:nvSpPr>
-          <p:cNvPr id="7" name="Date Placeholder 6">
-            <a:extLst>
-              <a:ext uri="{FF2B5EF4-FFF2-40B4-BE49-F238E27FC236}">
-                <a16:creationId xmlns:a16="http://schemas.microsoft.com/office/drawing/2014/main" id="{C12C482D-D9B6-6683-A1FE-6F24E32CCDA3}"/>
-              </a:ext>
-            </a:extLst>
-          </p:cNvPr>
-          <p:cNvSpPr>
-            <a:spLocks noGrp="1"/>
-          </p:cNvSpPr>
-          <p:nvPr>
-            <p:ph type="dt" sz="half" idx="10"/>
-          </p:nvPr>
-        </p:nvSpPr>
-        <p:spPr/>
-        <p:txBody>
-          <a:bodyPr/>
-          <a:lstStyle/>
-          <a:p>
-            <a:fld id="{31951A31-3C59-CB4B-9959-5F3D576A067B}" type="datetime5">
-              <a:rPr lang="en-US" smtClean="0"/>
-              <a:t>22-Sep-26</a:t>
             </a:fld>
             <a:endParaRPr lang="en-US"/>
           </a:p>
@@ -8435,12 +8683,12 @@
   </p:clrMapOvr>
   <mc:AlternateContent xmlns:mc="http://schemas.openxmlformats.org/markup-compatibility/2006" xmlns:p14="http://schemas.microsoft.com/office/powerpoint/2010/main">
     <mc:Choice Requires="p14">
-      <p:transition spd="slow" p14:dur="1200">
-        <p14:prism/>
+      <p:transition spd="slow" p14:dur="2000">
+        <p14:prism isContent="1"/>
       </p:transition>
     </mc:Choice>
     <mc:Fallback xmlns="">
-      <p:transition xmlns:p14="http://schemas.microsoft.com/office/powerpoint/2010/main" spd="slow">
+      <p:transition spd="slow">
         <p:fade/>
       </p:transition>
     </mc:Fallback>
@@ -8484,7 +8732,7 @@
         <p:spPr/>
         <p:txBody>
           <a:bodyPr>
-            <a:normAutofit/>
+            <a:normAutofit fontScale="90000"/>
           </a:bodyPr>
           <a:lstStyle/>
           <a:p>
@@ -8514,7 +8762,7 @@
         <p:spPr/>
         <p:txBody>
           <a:bodyPr>
-            <a:normAutofit/>
+            <a:normAutofit lnSpcReduction="10000"/>
           </a:bodyPr>
           <a:lstStyle/>
           <a:p>
@@ -8620,6 +8868,35 @@
           </a:p>
           <a:p>
             <a:endParaRPr lang="en-US" dirty="0"/>
+          </a:p>
+        </p:txBody>
+      </p:sp>
+      <p:sp>
+        <p:nvSpPr>
+          <p:cNvPr id="7" name="Date Placeholder 6">
+            <a:extLst>
+              <a:ext uri="{FF2B5EF4-FFF2-40B4-BE49-F238E27FC236}">
+                <a16:creationId xmlns:a16="http://schemas.microsoft.com/office/drawing/2014/main" id="{B9F02CAB-020F-0B59-92C5-42DAA59184F0}"/>
+              </a:ext>
+            </a:extLst>
+          </p:cNvPr>
+          <p:cNvSpPr>
+            <a:spLocks noGrp="1"/>
+          </p:cNvSpPr>
+          <p:nvPr>
+            <p:ph type="dt" sz="half" idx="10"/>
+          </p:nvPr>
+        </p:nvSpPr>
+        <p:spPr/>
+        <p:txBody>
+          <a:bodyPr/>
+          <a:lstStyle/>
+          <a:p>
+            <a:fld id="{56387787-E753-AE4D-85D6-A5746B912299}" type="datetime1">
+              <a:rPr lang="en-US" smtClean="0"/>
+              <a:t>10/8/26</a:t>
+            </a:fld>
+            <a:endParaRPr lang="en-US"/>
           </a:p>
         </p:txBody>
       </p:sp>
@@ -8675,35 +8952,6 @@
             <a:fld id="{62CBAC88-EF5B-3148-888C-824478CD1B05}" type="slidenum">
               <a:rPr lang="en-US" smtClean="0"/>
               <a:t>28</a:t>
-            </a:fld>
-            <a:endParaRPr lang="en-US"/>
-          </a:p>
-        </p:txBody>
-      </p:sp>
-      <p:sp>
-        <p:nvSpPr>
-          <p:cNvPr id="7" name="Date Placeholder 6">
-            <a:extLst>
-              <a:ext uri="{FF2B5EF4-FFF2-40B4-BE49-F238E27FC236}">
-                <a16:creationId xmlns:a16="http://schemas.microsoft.com/office/drawing/2014/main" id="{B9F02CAB-020F-0B59-92C5-42DAA59184F0}"/>
-              </a:ext>
-            </a:extLst>
-          </p:cNvPr>
-          <p:cNvSpPr>
-            <a:spLocks noGrp="1"/>
-          </p:cNvSpPr>
-          <p:nvPr>
-            <p:ph type="dt" sz="half" idx="10"/>
-          </p:nvPr>
-        </p:nvSpPr>
-        <p:spPr/>
-        <p:txBody>
-          <a:bodyPr/>
-          <a:lstStyle/>
-          <a:p>
-            <a:fld id="{F588FC08-5460-F440-A693-42E2EE05CCEC}" type="datetime5">
-              <a:rPr lang="en-US" smtClean="0"/>
-              <a:t>22-Sep-26</a:t>
             </a:fld>
             <a:endParaRPr lang="en-US"/>
           </a:p>
@@ -8770,7 +9018,7 @@
         <p:spPr/>
         <p:txBody>
           <a:bodyPr>
-            <a:normAutofit/>
+            <a:normAutofit fontScale="90000"/>
           </a:bodyPr>
           <a:lstStyle/>
           <a:p>
@@ -8800,7 +9048,7 @@
         <p:spPr/>
         <p:txBody>
           <a:bodyPr>
-            <a:normAutofit fontScale="92500" lnSpcReduction="20000"/>
+            <a:normAutofit fontScale="85000" lnSpcReduction="20000"/>
           </a:bodyPr>
           <a:lstStyle/>
           <a:p>
@@ -8849,6 +9097,35 @@
               <a:rPr lang="en-US" dirty="0"/>
               <a:t>Access via the request object in controllers</a:t>
             </a:r>
+          </a:p>
+        </p:txBody>
+      </p:sp>
+      <p:sp>
+        <p:nvSpPr>
+          <p:cNvPr id="7" name="Date Placeholder 6">
+            <a:extLst>
+              <a:ext uri="{FF2B5EF4-FFF2-40B4-BE49-F238E27FC236}">
+                <a16:creationId xmlns:a16="http://schemas.microsoft.com/office/drawing/2014/main" id="{BB29CF1E-5993-5F20-3D09-B7EF4F09BC5C}"/>
+              </a:ext>
+            </a:extLst>
+          </p:cNvPr>
+          <p:cNvSpPr>
+            <a:spLocks noGrp="1"/>
+          </p:cNvSpPr>
+          <p:nvPr>
+            <p:ph type="dt" sz="half" idx="10"/>
+          </p:nvPr>
+        </p:nvSpPr>
+        <p:spPr/>
+        <p:txBody>
+          <a:bodyPr/>
+          <a:lstStyle/>
+          <a:p>
+            <a:fld id="{C2B79B2F-5ACF-514B-9D3C-A776CFD26C58}" type="datetime1">
+              <a:rPr lang="en-US" smtClean="0"/>
+              <a:t>10/8/26</a:t>
+            </a:fld>
+            <a:endParaRPr lang="en-US"/>
           </a:p>
         </p:txBody>
       </p:sp>
@@ -8904,35 +9181,6 @@
             <a:fld id="{62CBAC88-EF5B-3148-888C-824478CD1B05}" type="slidenum">
               <a:rPr lang="en-US" smtClean="0"/>
               <a:t>29</a:t>
-            </a:fld>
-            <a:endParaRPr lang="en-US"/>
-          </a:p>
-        </p:txBody>
-      </p:sp>
-      <p:sp>
-        <p:nvSpPr>
-          <p:cNvPr id="7" name="Date Placeholder 6">
-            <a:extLst>
-              <a:ext uri="{FF2B5EF4-FFF2-40B4-BE49-F238E27FC236}">
-                <a16:creationId xmlns:a16="http://schemas.microsoft.com/office/drawing/2014/main" id="{BB29CF1E-5993-5F20-3D09-B7EF4F09BC5C}"/>
-              </a:ext>
-            </a:extLst>
-          </p:cNvPr>
-          <p:cNvSpPr>
-            <a:spLocks noGrp="1"/>
-          </p:cNvSpPr>
-          <p:nvPr>
-            <p:ph type="dt" sz="half" idx="10"/>
-          </p:nvPr>
-        </p:nvSpPr>
-        <p:spPr/>
-        <p:txBody>
-          <a:bodyPr/>
-          <a:lstStyle/>
-          <a:p>
-            <a:fld id="{82A06BF5-19CB-DE4B-8BEE-2C43E907898F}" type="datetime5">
-              <a:rPr lang="en-US" smtClean="0"/>
-              <a:t>22-Sep-26</a:t>
             </a:fld>
             <a:endParaRPr lang="en-US"/>
           </a:p>
@@ -8950,12 +9198,12 @@
   </p:clrMapOvr>
   <mc:AlternateContent xmlns:mc="http://schemas.openxmlformats.org/markup-compatibility/2006" xmlns:p14="http://schemas.microsoft.com/office/powerpoint/2010/main">
     <mc:Choice Requires="p14">
-      <p:transition spd="slow" p14:dur="1200">
-        <p14:prism/>
+      <p:transition spd="slow" p14:dur="2000">
+        <p14:prism isContent="1"/>
       </p:transition>
     </mc:Choice>
     <mc:Fallback xmlns="">
-      <p:transition xmlns:p14="http://schemas.microsoft.com/office/powerpoint/2010/main" spd="slow">
+      <p:transition spd="slow">
         <p:fade/>
       </p:transition>
     </mc:Fallback>
@@ -8998,7 +9246,9 @@
         </p:nvSpPr>
         <p:spPr/>
         <p:txBody>
-          <a:bodyPr/>
+          <a:bodyPr>
+            <a:normAutofit fontScale="90000"/>
+          </a:bodyPr>
           <a:lstStyle/>
           <a:p>
             <a:r>
@@ -9027,7 +9277,7 @@
         <p:spPr/>
         <p:txBody>
           <a:bodyPr>
-            <a:normAutofit fontScale="85000" lnSpcReduction="20000"/>
+            <a:normAutofit fontScale="77500" lnSpcReduction="20000"/>
           </a:bodyPr>
           <a:lstStyle/>
           <a:p>
@@ -9080,6 +9330,35 @@
           </a:p>
           <a:p>
             <a:endParaRPr lang="en-US" dirty="0"/>
+          </a:p>
+        </p:txBody>
+      </p:sp>
+      <p:sp>
+        <p:nvSpPr>
+          <p:cNvPr id="7" name="Date Placeholder 6">
+            <a:extLst>
+              <a:ext uri="{FF2B5EF4-FFF2-40B4-BE49-F238E27FC236}">
+                <a16:creationId xmlns:a16="http://schemas.microsoft.com/office/drawing/2014/main" id="{0293109A-871A-EC5D-3243-C1344CEA3EB6}"/>
+              </a:ext>
+            </a:extLst>
+          </p:cNvPr>
+          <p:cNvSpPr>
+            <a:spLocks noGrp="1"/>
+          </p:cNvSpPr>
+          <p:nvPr>
+            <p:ph type="dt" sz="half" idx="10"/>
+          </p:nvPr>
+        </p:nvSpPr>
+        <p:spPr/>
+        <p:txBody>
+          <a:bodyPr/>
+          <a:lstStyle/>
+          <a:p>
+            <a:fld id="{710B5D3F-AC35-1944-8A58-5E035FC74E79}" type="datetime1">
+              <a:rPr lang="en-US" smtClean="0"/>
+              <a:t>10/8/26</a:t>
+            </a:fld>
+            <a:endParaRPr lang="en-US"/>
           </a:p>
         </p:txBody>
       </p:sp>
@@ -9135,35 +9414,6 @@
             <a:fld id="{62CBAC88-EF5B-3148-888C-824478CD1B05}" type="slidenum">
               <a:rPr lang="en-US" smtClean="0"/>
               <a:t>3</a:t>
-            </a:fld>
-            <a:endParaRPr lang="en-US"/>
-          </a:p>
-        </p:txBody>
-      </p:sp>
-      <p:sp>
-        <p:nvSpPr>
-          <p:cNvPr id="7" name="Date Placeholder 6">
-            <a:extLst>
-              <a:ext uri="{FF2B5EF4-FFF2-40B4-BE49-F238E27FC236}">
-                <a16:creationId xmlns:a16="http://schemas.microsoft.com/office/drawing/2014/main" id="{0293109A-871A-EC5D-3243-C1344CEA3EB6}"/>
-              </a:ext>
-            </a:extLst>
-          </p:cNvPr>
-          <p:cNvSpPr>
-            <a:spLocks noGrp="1"/>
-          </p:cNvSpPr>
-          <p:nvPr>
-            <p:ph type="dt" sz="half" idx="10"/>
-          </p:nvPr>
-        </p:nvSpPr>
-        <p:spPr/>
-        <p:txBody>
-          <a:bodyPr/>
-          <a:lstStyle/>
-          <a:p>
-            <a:fld id="{AC267708-46B6-F444-92FC-E249FC85BD91}" type="datetime5">
-              <a:rPr lang="en-US" smtClean="0"/>
-              <a:t>22-Sep-26</a:t>
             </a:fld>
             <a:endParaRPr lang="en-US"/>
           </a:p>
@@ -9181,12 +9431,12 @@
   </p:clrMapOvr>
   <mc:AlternateContent xmlns:mc="http://schemas.openxmlformats.org/markup-compatibility/2006" xmlns:p14="http://schemas.microsoft.com/office/powerpoint/2010/main">
     <mc:Choice Requires="p14">
-      <p:transition spd="slow" p14:dur="1200">
-        <p14:prism/>
+      <p:transition spd="slow" p14:dur="2000">
+        <p14:prism isContent="1"/>
       </p:transition>
     </mc:Choice>
     <mc:Fallback xmlns="">
-      <p:transition xmlns:p14="http://schemas.microsoft.com/office/powerpoint/2010/main" spd="slow">
+      <p:transition spd="slow">
         <p:fade/>
       </p:transition>
     </mc:Fallback>
@@ -9230,7 +9480,7 @@
         <p:spPr/>
         <p:txBody>
           <a:bodyPr>
-            <a:normAutofit/>
+            <a:normAutofit fontScale="90000"/>
           </a:bodyPr>
           <a:lstStyle/>
           <a:p>
@@ -9304,6 +9554,35 @@
       </p:sp>
       <p:sp>
         <p:nvSpPr>
+          <p:cNvPr id="7" name="Date Placeholder 6">
+            <a:extLst>
+              <a:ext uri="{FF2B5EF4-FFF2-40B4-BE49-F238E27FC236}">
+                <a16:creationId xmlns:a16="http://schemas.microsoft.com/office/drawing/2014/main" id="{8E636008-36C0-929D-6C7F-FF6778AADA1F}"/>
+              </a:ext>
+            </a:extLst>
+          </p:cNvPr>
+          <p:cNvSpPr>
+            <a:spLocks noGrp="1"/>
+          </p:cNvSpPr>
+          <p:nvPr>
+            <p:ph type="dt" sz="half" idx="10"/>
+          </p:nvPr>
+        </p:nvSpPr>
+        <p:spPr/>
+        <p:txBody>
+          <a:bodyPr/>
+          <a:lstStyle/>
+          <a:p>
+            <a:fld id="{7D686965-3F28-E447-83A2-FC119462B108}" type="datetime1">
+              <a:rPr lang="en-US" smtClean="0"/>
+              <a:t>10/8/26</a:t>
+            </a:fld>
+            <a:endParaRPr lang="en-US"/>
+          </a:p>
+        </p:txBody>
+      </p:sp>
+      <p:sp>
+        <p:nvSpPr>
           <p:cNvPr id="4" name="Footer Placeholder 3">
             <a:extLst>
               <a:ext uri="{FF2B5EF4-FFF2-40B4-BE49-F238E27FC236}">
@@ -9354,35 +9633,6 @@
             <a:fld id="{62CBAC88-EF5B-3148-888C-824478CD1B05}" type="slidenum">
               <a:rPr lang="en-US" smtClean="0"/>
               <a:t>30</a:t>
-            </a:fld>
-            <a:endParaRPr lang="en-US"/>
-          </a:p>
-        </p:txBody>
-      </p:sp>
-      <p:sp>
-        <p:nvSpPr>
-          <p:cNvPr id="7" name="Date Placeholder 6">
-            <a:extLst>
-              <a:ext uri="{FF2B5EF4-FFF2-40B4-BE49-F238E27FC236}">
-                <a16:creationId xmlns:a16="http://schemas.microsoft.com/office/drawing/2014/main" id="{8E636008-36C0-929D-6C7F-FF6778AADA1F}"/>
-              </a:ext>
-            </a:extLst>
-          </p:cNvPr>
-          <p:cNvSpPr>
-            <a:spLocks noGrp="1"/>
-          </p:cNvSpPr>
-          <p:nvPr>
-            <p:ph type="dt" sz="half" idx="10"/>
-          </p:nvPr>
-        </p:nvSpPr>
-        <p:spPr/>
-        <p:txBody>
-          <a:bodyPr/>
-          <a:lstStyle/>
-          <a:p>
-            <a:fld id="{C175082D-FC7A-AD45-8541-F74134668B97}" type="datetime5">
-              <a:rPr lang="en-US" smtClean="0"/>
-              <a:t>22-Sep-26</a:t>
             </a:fld>
             <a:endParaRPr lang="en-US"/>
           </a:p>
@@ -9400,12 +9650,12 @@
   </p:clrMapOvr>
   <mc:AlternateContent xmlns:mc="http://schemas.openxmlformats.org/markup-compatibility/2006" xmlns:p14="http://schemas.microsoft.com/office/powerpoint/2010/main">
     <mc:Choice Requires="p14">
-      <p:transition spd="slow" p14:dur="1200">
-        <p14:prism/>
+      <p:transition spd="slow" p14:dur="2000">
+        <p14:prism isContent="1"/>
       </p:transition>
     </mc:Choice>
     <mc:Fallback xmlns="">
-      <p:transition xmlns:p14="http://schemas.microsoft.com/office/powerpoint/2010/main" spd="slow">
+      <p:transition spd="slow">
         <p:fade/>
       </p:transition>
     </mc:Fallback>
@@ -9449,7 +9699,7 @@
         <p:spPr/>
         <p:txBody>
           <a:bodyPr>
-            <a:normAutofit/>
+            <a:normAutofit fontScale="90000"/>
           </a:bodyPr>
           <a:lstStyle/>
           <a:p>
@@ -9479,7 +9729,7 @@
         <p:spPr/>
         <p:txBody>
           <a:bodyPr>
-            <a:normAutofit fontScale="77500" lnSpcReduction="20000"/>
+            <a:normAutofit fontScale="70000" lnSpcReduction="20000"/>
           </a:bodyPr>
           <a:lstStyle/>
           <a:p>
@@ -9586,6 +9836,35 @@
       </p:sp>
       <p:sp>
         <p:nvSpPr>
+          <p:cNvPr id="7" name="Date Placeholder 6">
+            <a:extLst>
+              <a:ext uri="{FF2B5EF4-FFF2-40B4-BE49-F238E27FC236}">
+                <a16:creationId xmlns:a16="http://schemas.microsoft.com/office/drawing/2014/main" id="{C59DB2ED-EF4C-17D0-D4A6-A20DE572207D}"/>
+              </a:ext>
+            </a:extLst>
+          </p:cNvPr>
+          <p:cNvSpPr>
+            <a:spLocks noGrp="1"/>
+          </p:cNvSpPr>
+          <p:nvPr>
+            <p:ph type="dt" sz="half" idx="10"/>
+          </p:nvPr>
+        </p:nvSpPr>
+        <p:spPr/>
+        <p:txBody>
+          <a:bodyPr/>
+          <a:lstStyle/>
+          <a:p>
+            <a:fld id="{0D2CDE1A-8A3B-674C-9A4A-5882F3DB44E3}" type="datetime1">
+              <a:rPr lang="en-US" smtClean="0"/>
+              <a:t>10/8/26</a:t>
+            </a:fld>
+            <a:endParaRPr lang="en-US"/>
+          </a:p>
+        </p:txBody>
+      </p:sp>
+      <p:sp>
+        <p:nvSpPr>
           <p:cNvPr id="4" name="Footer Placeholder 3">
             <a:extLst>
               <a:ext uri="{FF2B5EF4-FFF2-40B4-BE49-F238E27FC236}">
@@ -9636,35 +9915,6 @@
             <a:fld id="{62CBAC88-EF5B-3148-888C-824478CD1B05}" type="slidenum">
               <a:rPr lang="en-US" smtClean="0"/>
               <a:t>31</a:t>
-            </a:fld>
-            <a:endParaRPr lang="en-US"/>
-          </a:p>
-        </p:txBody>
-      </p:sp>
-      <p:sp>
-        <p:nvSpPr>
-          <p:cNvPr id="7" name="Date Placeholder 6">
-            <a:extLst>
-              <a:ext uri="{FF2B5EF4-FFF2-40B4-BE49-F238E27FC236}">
-                <a16:creationId xmlns:a16="http://schemas.microsoft.com/office/drawing/2014/main" id="{C59DB2ED-EF4C-17D0-D4A6-A20DE572207D}"/>
-              </a:ext>
-            </a:extLst>
-          </p:cNvPr>
-          <p:cNvSpPr>
-            <a:spLocks noGrp="1"/>
-          </p:cNvSpPr>
-          <p:nvPr>
-            <p:ph type="dt" sz="half" idx="10"/>
-          </p:nvPr>
-        </p:nvSpPr>
-        <p:spPr/>
-        <p:txBody>
-          <a:bodyPr/>
-          <a:lstStyle/>
-          <a:p>
-            <a:fld id="{D1C6B8C2-BBCF-9944-A8DD-2DA8B400F23C}" type="datetime5">
-              <a:rPr lang="en-US" smtClean="0"/>
-              <a:t>22-Sep-26</a:t>
             </a:fld>
             <a:endParaRPr lang="en-US"/>
           </a:p>
@@ -9682,12 +9932,12 @@
   </p:clrMapOvr>
   <mc:AlternateContent xmlns:mc="http://schemas.openxmlformats.org/markup-compatibility/2006" xmlns:p14="http://schemas.microsoft.com/office/powerpoint/2010/main">
     <mc:Choice Requires="p14">
-      <p:transition spd="slow" p14:dur="1200">
-        <p14:prism/>
+      <p:transition spd="slow" p14:dur="2000">
+        <p14:prism isContent="1"/>
       </p:transition>
     </mc:Choice>
     <mc:Fallback xmlns="">
-      <p:transition xmlns:p14="http://schemas.microsoft.com/office/powerpoint/2010/main" spd="slow">
+      <p:transition spd="slow">
         <p:fade/>
       </p:transition>
     </mc:Fallback>
@@ -9731,7 +9981,7 @@
         <p:spPr/>
         <p:txBody>
           <a:bodyPr>
-            <a:normAutofit/>
+            <a:normAutofit fontScale="90000"/>
           </a:bodyPr>
           <a:lstStyle/>
           <a:p>
@@ -9761,7 +10011,7 @@
         <p:spPr/>
         <p:txBody>
           <a:bodyPr>
-            <a:normAutofit fontScale="92500"/>
+            <a:normAutofit fontScale="92500" lnSpcReduction="20000"/>
           </a:bodyPr>
           <a:lstStyle/>
           <a:p>
@@ -9851,6 +10101,35 @@
           </a:p>
           <a:p>
             <a:endParaRPr lang="en-US" dirty="0"/>
+          </a:p>
+        </p:txBody>
+      </p:sp>
+      <p:sp>
+        <p:nvSpPr>
+          <p:cNvPr id="7" name="Date Placeholder 6">
+            <a:extLst>
+              <a:ext uri="{FF2B5EF4-FFF2-40B4-BE49-F238E27FC236}">
+                <a16:creationId xmlns:a16="http://schemas.microsoft.com/office/drawing/2014/main" id="{18C42419-6B60-D648-C599-087E801C012D}"/>
+              </a:ext>
+            </a:extLst>
+          </p:cNvPr>
+          <p:cNvSpPr>
+            <a:spLocks noGrp="1"/>
+          </p:cNvSpPr>
+          <p:nvPr>
+            <p:ph type="dt" sz="half" idx="10"/>
+          </p:nvPr>
+        </p:nvSpPr>
+        <p:spPr/>
+        <p:txBody>
+          <a:bodyPr/>
+          <a:lstStyle/>
+          <a:p>
+            <a:fld id="{710C27FF-38C2-BD4A-AB14-9C11AA6666F7}" type="datetime1">
+              <a:rPr lang="en-US" smtClean="0"/>
+              <a:t>10/8/26</a:t>
+            </a:fld>
+            <a:endParaRPr lang="en-US"/>
           </a:p>
         </p:txBody>
       </p:sp>
@@ -9906,35 +10185,6 @@
             <a:fld id="{62CBAC88-EF5B-3148-888C-824478CD1B05}" type="slidenum">
               <a:rPr lang="en-US" smtClean="0"/>
               <a:t>32</a:t>
-            </a:fld>
-            <a:endParaRPr lang="en-US"/>
-          </a:p>
-        </p:txBody>
-      </p:sp>
-      <p:sp>
-        <p:nvSpPr>
-          <p:cNvPr id="7" name="Date Placeholder 6">
-            <a:extLst>
-              <a:ext uri="{FF2B5EF4-FFF2-40B4-BE49-F238E27FC236}">
-                <a16:creationId xmlns:a16="http://schemas.microsoft.com/office/drawing/2014/main" id="{18C42419-6B60-D648-C599-087E801C012D}"/>
-              </a:ext>
-            </a:extLst>
-          </p:cNvPr>
-          <p:cNvSpPr>
-            <a:spLocks noGrp="1"/>
-          </p:cNvSpPr>
-          <p:nvPr>
-            <p:ph type="dt" sz="half" idx="10"/>
-          </p:nvPr>
-        </p:nvSpPr>
-        <p:spPr/>
-        <p:txBody>
-          <a:bodyPr/>
-          <a:lstStyle/>
-          <a:p>
-            <a:fld id="{C4ADDACB-E503-7C48-9E00-BF70228EEC5B}" type="datetime5">
-              <a:rPr lang="en-US" smtClean="0"/>
-              <a:t>22-Sep-26</a:t>
             </a:fld>
             <a:endParaRPr lang="en-US"/>
           </a:p>
@@ -10001,7 +10251,7 @@
         <p:spPr/>
         <p:txBody>
           <a:bodyPr>
-            <a:normAutofit/>
+            <a:normAutofit fontScale="90000"/>
           </a:bodyPr>
           <a:lstStyle/>
           <a:p>
@@ -10031,7 +10281,7 @@
         <p:spPr/>
         <p:txBody>
           <a:bodyPr>
-            <a:normAutofit fontScale="92500" lnSpcReduction="20000"/>
+            <a:normAutofit fontScale="85000" lnSpcReduction="20000"/>
           </a:bodyPr>
           <a:lstStyle/>
           <a:p>
@@ -10119,6 +10369,35 @@
       </p:sp>
       <p:sp>
         <p:nvSpPr>
+          <p:cNvPr id="7" name="Date Placeholder 6">
+            <a:extLst>
+              <a:ext uri="{FF2B5EF4-FFF2-40B4-BE49-F238E27FC236}">
+                <a16:creationId xmlns:a16="http://schemas.microsoft.com/office/drawing/2014/main" id="{62BC279B-3A1C-A648-0A52-83471B003123}"/>
+              </a:ext>
+            </a:extLst>
+          </p:cNvPr>
+          <p:cNvSpPr>
+            <a:spLocks noGrp="1"/>
+          </p:cNvSpPr>
+          <p:nvPr>
+            <p:ph type="dt" sz="half" idx="10"/>
+          </p:nvPr>
+        </p:nvSpPr>
+        <p:spPr/>
+        <p:txBody>
+          <a:bodyPr/>
+          <a:lstStyle/>
+          <a:p>
+            <a:fld id="{5BFD4340-7E9F-4143-93D8-509AAF4CFDCE}" type="datetime1">
+              <a:rPr lang="en-US" smtClean="0"/>
+              <a:t>10/8/26</a:t>
+            </a:fld>
+            <a:endParaRPr lang="en-US"/>
+          </a:p>
+        </p:txBody>
+      </p:sp>
+      <p:sp>
+        <p:nvSpPr>
           <p:cNvPr id="4" name="Footer Placeholder 3">
             <a:extLst>
               <a:ext uri="{FF2B5EF4-FFF2-40B4-BE49-F238E27FC236}">
@@ -10169,35 +10448,6 @@
             <a:fld id="{62CBAC88-EF5B-3148-888C-824478CD1B05}" type="slidenum">
               <a:rPr lang="en-US" smtClean="0"/>
               <a:t>33</a:t>
-            </a:fld>
-            <a:endParaRPr lang="en-US"/>
-          </a:p>
-        </p:txBody>
-      </p:sp>
-      <p:sp>
-        <p:nvSpPr>
-          <p:cNvPr id="7" name="Date Placeholder 6">
-            <a:extLst>
-              <a:ext uri="{FF2B5EF4-FFF2-40B4-BE49-F238E27FC236}">
-                <a16:creationId xmlns:a16="http://schemas.microsoft.com/office/drawing/2014/main" id="{62BC279B-3A1C-A648-0A52-83471B003123}"/>
-              </a:ext>
-            </a:extLst>
-          </p:cNvPr>
-          <p:cNvSpPr>
-            <a:spLocks noGrp="1"/>
-          </p:cNvSpPr>
-          <p:nvPr>
-            <p:ph type="dt" sz="half" idx="10"/>
-          </p:nvPr>
-        </p:nvSpPr>
-        <p:spPr/>
-        <p:txBody>
-          <a:bodyPr/>
-          <a:lstStyle/>
-          <a:p>
-            <a:fld id="{7DEA9370-25CC-824D-B014-7AA51985192F}" type="datetime5">
-              <a:rPr lang="en-US" smtClean="0"/>
-              <a:t>22-Sep-26</a:t>
             </a:fld>
             <a:endParaRPr lang="en-US"/>
           </a:p>
@@ -10215,12 +10465,12 @@
   </p:clrMapOvr>
   <mc:AlternateContent xmlns:mc="http://schemas.openxmlformats.org/markup-compatibility/2006" xmlns:p14="http://schemas.microsoft.com/office/powerpoint/2010/main">
     <mc:Choice Requires="p14">
-      <p:transition spd="slow" p14:dur="1200">
-        <p14:prism/>
+      <p:transition spd="slow" p14:dur="2000">
+        <p14:prism isContent="1"/>
       </p:transition>
     </mc:Choice>
     <mc:Fallback xmlns="">
-      <p:transition xmlns:p14="http://schemas.microsoft.com/office/powerpoint/2010/main" spd="slow">
+      <p:transition spd="slow">
         <p:fade/>
       </p:transition>
     </mc:Fallback>
@@ -10264,7 +10514,7 @@
         <p:spPr/>
         <p:txBody>
           <a:bodyPr>
-            <a:normAutofit/>
+            <a:normAutofit fontScale="90000"/>
           </a:bodyPr>
           <a:lstStyle/>
           <a:p>
@@ -10416,6 +10666,35 @@
       </p:sp>
       <p:sp>
         <p:nvSpPr>
+          <p:cNvPr id="7" name="Date Placeholder 6">
+            <a:extLst>
+              <a:ext uri="{FF2B5EF4-FFF2-40B4-BE49-F238E27FC236}">
+                <a16:creationId xmlns:a16="http://schemas.microsoft.com/office/drawing/2014/main" id="{909E803D-1954-B8E9-96B1-F797DEC2F2D0}"/>
+              </a:ext>
+            </a:extLst>
+          </p:cNvPr>
+          <p:cNvSpPr>
+            <a:spLocks noGrp="1"/>
+          </p:cNvSpPr>
+          <p:nvPr>
+            <p:ph type="dt" sz="half" idx="10"/>
+          </p:nvPr>
+        </p:nvSpPr>
+        <p:spPr/>
+        <p:txBody>
+          <a:bodyPr/>
+          <a:lstStyle/>
+          <a:p>
+            <a:fld id="{5AB41E43-D18A-0545-8266-F0C5B5D43165}" type="datetime1">
+              <a:rPr lang="en-US" smtClean="0"/>
+              <a:t>10/8/26</a:t>
+            </a:fld>
+            <a:endParaRPr lang="en-US"/>
+          </a:p>
+        </p:txBody>
+      </p:sp>
+      <p:sp>
+        <p:nvSpPr>
           <p:cNvPr id="4" name="Footer Placeholder 3">
             <a:extLst>
               <a:ext uri="{FF2B5EF4-FFF2-40B4-BE49-F238E27FC236}">
@@ -10466,35 +10745,6 @@
             <a:fld id="{62CBAC88-EF5B-3148-888C-824478CD1B05}" type="slidenum">
               <a:rPr lang="en-US" smtClean="0"/>
               <a:t>34</a:t>
-            </a:fld>
-            <a:endParaRPr lang="en-US"/>
-          </a:p>
-        </p:txBody>
-      </p:sp>
-      <p:sp>
-        <p:nvSpPr>
-          <p:cNvPr id="7" name="Date Placeholder 6">
-            <a:extLst>
-              <a:ext uri="{FF2B5EF4-FFF2-40B4-BE49-F238E27FC236}">
-                <a16:creationId xmlns:a16="http://schemas.microsoft.com/office/drawing/2014/main" id="{909E803D-1954-B8E9-96B1-F797DEC2F2D0}"/>
-              </a:ext>
-            </a:extLst>
-          </p:cNvPr>
-          <p:cNvSpPr>
-            <a:spLocks noGrp="1"/>
-          </p:cNvSpPr>
-          <p:nvPr>
-            <p:ph type="dt" sz="half" idx="10"/>
-          </p:nvPr>
-        </p:nvSpPr>
-        <p:spPr/>
-        <p:txBody>
-          <a:bodyPr/>
-          <a:lstStyle/>
-          <a:p>
-            <a:fld id="{C639441C-ACD0-2A45-9B42-A22416247B1F}" type="datetime5">
-              <a:rPr lang="en-US" smtClean="0"/>
-              <a:t>22-Sep-26</a:t>
             </a:fld>
             <a:endParaRPr lang="en-US"/>
           </a:p>
@@ -10561,7 +10811,7 @@
         <p:spPr/>
         <p:txBody>
           <a:bodyPr>
-            <a:normAutofit/>
+            <a:normAutofit fontScale="90000"/>
           </a:bodyPr>
           <a:lstStyle/>
           <a:p>
@@ -10591,7 +10841,7 @@
         <p:spPr/>
         <p:txBody>
           <a:bodyPr>
-            <a:normAutofit fontScale="85000" lnSpcReduction="20000"/>
+            <a:normAutofit fontScale="77500" lnSpcReduction="20000"/>
           </a:bodyPr>
           <a:lstStyle/>
           <a:p>
@@ -10790,6 +11040,35 @@
           </a:p>
           <a:p>
             <a:endParaRPr lang="en-US" dirty="0"/>
+          </a:p>
+        </p:txBody>
+      </p:sp>
+      <p:sp>
+        <p:nvSpPr>
+          <p:cNvPr id="7" name="Date Placeholder 6">
+            <a:extLst>
+              <a:ext uri="{FF2B5EF4-FFF2-40B4-BE49-F238E27FC236}">
+                <a16:creationId xmlns:a16="http://schemas.microsoft.com/office/drawing/2014/main" id="{F05771D9-47D2-01F9-2EB5-9570526610C6}"/>
+              </a:ext>
+            </a:extLst>
+          </p:cNvPr>
+          <p:cNvSpPr>
+            <a:spLocks noGrp="1"/>
+          </p:cNvSpPr>
+          <p:nvPr>
+            <p:ph type="dt" sz="half" idx="10"/>
+          </p:nvPr>
+        </p:nvSpPr>
+        <p:spPr/>
+        <p:txBody>
+          <a:bodyPr/>
+          <a:lstStyle/>
+          <a:p>
+            <a:fld id="{6A7FA139-9B5D-2840-BD4E-B212E9738747}" type="datetime1">
+              <a:rPr lang="en-US" smtClean="0"/>
+              <a:t>10/8/26</a:t>
+            </a:fld>
+            <a:endParaRPr lang="en-US"/>
           </a:p>
         </p:txBody>
       </p:sp>
@@ -10845,35 +11124,6 @@
             <a:fld id="{62CBAC88-EF5B-3148-888C-824478CD1B05}" type="slidenum">
               <a:rPr lang="en-US" smtClean="0"/>
               <a:t>35</a:t>
-            </a:fld>
-            <a:endParaRPr lang="en-US"/>
-          </a:p>
-        </p:txBody>
-      </p:sp>
-      <p:sp>
-        <p:nvSpPr>
-          <p:cNvPr id="7" name="Date Placeholder 6">
-            <a:extLst>
-              <a:ext uri="{FF2B5EF4-FFF2-40B4-BE49-F238E27FC236}">
-                <a16:creationId xmlns:a16="http://schemas.microsoft.com/office/drawing/2014/main" id="{F05771D9-47D2-01F9-2EB5-9570526610C6}"/>
-              </a:ext>
-            </a:extLst>
-          </p:cNvPr>
-          <p:cNvSpPr>
-            <a:spLocks noGrp="1"/>
-          </p:cNvSpPr>
-          <p:nvPr>
-            <p:ph type="dt" sz="half" idx="10"/>
-          </p:nvPr>
-        </p:nvSpPr>
-        <p:spPr/>
-        <p:txBody>
-          <a:bodyPr/>
-          <a:lstStyle/>
-          <a:p>
-            <a:fld id="{3FEF16CF-7920-E044-B62C-2FFA54D2F3FF}" type="datetime5">
-              <a:rPr lang="en-US" smtClean="0"/>
-              <a:t>22-Sep-26</a:t>
             </a:fld>
             <a:endParaRPr lang="en-US"/>
           </a:p>
@@ -10889,6 +11139,18 @@
   <p:clrMapOvr>
     <a:masterClrMapping/>
   </p:clrMapOvr>
+  <mc:AlternateContent xmlns:mc="http://schemas.openxmlformats.org/markup-compatibility/2006" xmlns:p14="http://schemas.microsoft.com/office/powerpoint/2010/main">
+    <mc:Choice Requires="p14">
+      <p:transition spd="slow" p14:dur="2000">
+        <p14:prism isContent="1"/>
+      </p:transition>
+    </mc:Choice>
+    <mc:Fallback xmlns="">
+      <p:transition spd="slow">
+        <p:fade/>
+      </p:transition>
+    </mc:Fallback>
+  </mc:AlternateContent>
 </p:sld>
 </file>
 
@@ -10927,7 +11189,9 @@
         </p:nvSpPr>
         <p:spPr/>
         <p:txBody>
-          <a:bodyPr/>
+          <a:bodyPr>
+            <a:normAutofit fontScale="90000"/>
+          </a:bodyPr>
           <a:lstStyle/>
           <a:p>
             <a:r>
@@ -11163,6 +11427,35 @@
       </p:sp>
       <p:sp>
         <p:nvSpPr>
+          <p:cNvPr id="7" name="Date Placeholder 6">
+            <a:extLst>
+              <a:ext uri="{FF2B5EF4-FFF2-40B4-BE49-F238E27FC236}">
+                <a16:creationId xmlns:a16="http://schemas.microsoft.com/office/drawing/2014/main" id="{22C0FA3E-1709-A1B2-0FC3-DBF4BCA43183}"/>
+              </a:ext>
+            </a:extLst>
+          </p:cNvPr>
+          <p:cNvSpPr>
+            <a:spLocks noGrp="1"/>
+          </p:cNvSpPr>
+          <p:nvPr>
+            <p:ph type="dt" sz="half" idx="10"/>
+          </p:nvPr>
+        </p:nvSpPr>
+        <p:spPr/>
+        <p:txBody>
+          <a:bodyPr/>
+          <a:lstStyle/>
+          <a:p>
+            <a:fld id="{1B3E7CBD-36F0-8241-944B-0C0D4ED8A9DB}" type="datetime1">
+              <a:rPr lang="en-US" smtClean="0"/>
+              <a:t>10/8/26</a:t>
+            </a:fld>
+            <a:endParaRPr lang="en-US"/>
+          </a:p>
+        </p:txBody>
+      </p:sp>
+      <p:sp>
+        <p:nvSpPr>
           <p:cNvPr id="4" name="Footer Placeholder 3">
             <a:extLst>
               <a:ext uri="{FF2B5EF4-FFF2-40B4-BE49-F238E27FC236}">
@@ -11213,35 +11506,6 @@
             <a:fld id="{62CBAC88-EF5B-3148-888C-824478CD1B05}" type="slidenum">
               <a:rPr lang="en-US" smtClean="0"/>
               <a:t>36</a:t>
-            </a:fld>
-            <a:endParaRPr lang="en-US"/>
-          </a:p>
-        </p:txBody>
-      </p:sp>
-      <p:sp>
-        <p:nvSpPr>
-          <p:cNvPr id="7" name="Date Placeholder 6">
-            <a:extLst>
-              <a:ext uri="{FF2B5EF4-FFF2-40B4-BE49-F238E27FC236}">
-                <a16:creationId xmlns:a16="http://schemas.microsoft.com/office/drawing/2014/main" id="{22C0FA3E-1709-A1B2-0FC3-DBF4BCA43183}"/>
-              </a:ext>
-            </a:extLst>
-          </p:cNvPr>
-          <p:cNvSpPr>
-            <a:spLocks noGrp="1"/>
-          </p:cNvSpPr>
-          <p:nvPr>
-            <p:ph type="dt" sz="half" idx="10"/>
-          </p:nvPr>
-        </p:nvSpPr>
-        <p:spPr/>
-        <p:txBody>
-          <a:bodyPr/>
-          <a:lstStyle/>
-          <a:p>
-            <a:fld id="{BC17ECB5-1D94-5947-969D-F4E0BE05A44A}" type="datetime5">
-              <a:rPr lang="en-US" smtClean="0"/>
-              <a:t>24-Sep-26</a:t>
             </a:fld>
             <a:endParaRPr lang="en-US"/>
           </a:p>
@@ -11257,6 +11521,18 @@
   <p:clrMapOvr>
     <a:masterClrMapping/>
   </p:clrMapOvr>
+  <mc:AlternateContent xmlns:mc="http://schemas.openxmlformats.org/markup-compatibility/2006" xmlns:p14="http://schemas.microsoft.com/office/powerpoint/2010/main">
+    <mc:Choice Requires="p14">
+      <p:transition spd="slow" p14:dur="2000">
+        <p14:prism isContent="1"/>
+      </p:transition>
+    </mc:Choice>
+    <mc:Fallback xmlns="">
+      <p:transition spd="slow">
+        <p:fade/>
+      </p:transition>
+    </mc:Fallback>
+  </mc:AlternateContent>
 </p:sld>
 </file>
 
@@ -11296,7 +11572,7 @@
         <p:spPr/>
         <p:txBody>
           <a:bodyPr>
-            <a:normAutofit/>
+            <a:normAutofit fontScale="90000"/>
           </a:bodyPr>
           <a:lstStyle/>
           <a:p>
@@ -11326,7 +11602,7 @@
         <p:spPr/>
         <p:txBody>
           <a:bodyPr>
-            <a:normAutofit fontScale="62500" lnSpcReduction="20000"/>
+            <a:normAutofit fontScale="55000" lnSpcReduction="20000"/>
           </a:bodyPr>
           <a:lstStyle/>
           <a:p>
@@ -11431,6 +11707,35 @@
           </a:p>
           <a:p>
             <a:endParaRPr lang="en-US" dirty="0"/>
+          </a:p>
+        </p:txBody>
+      </p:sp>
+      <p:sp>
+        <p:nvSpPr>
+          <p:cNvPr id="7" name="Date Placeholder 6">
+            <a:extLst>
+              <a:ext uri="{FF2B5EF4-FFF2-40B4-BE49-F238E27FC236}">
+                <a16:creationId xmlns:a16="http://schemas.microsoft.com/office/drawing/2014/main" id="{9BCCAD5E-7D6D-C189-872E-48B9421A6586}"/>
+              </a:ext>
+            </a:extLst>
+          </p:cNvPr>
+          <p:cNvSpPr>
+            <a:spLocks noGrp="1"/>
+          </p:cNvSpPr>
+          <p:nvPr>
+            <p:ph type="dt" sz="half" idx="10"/>
+          </p:nvPr>
+        </p:nvSpPr>
+        <p:spPr/>
+        <p:txBody>
+          <a:bodyPr/>
+          <a:lstStyle/>
+          <a:p>
+            <a:fld id="{FA3A31B8-98A2-A649-A6A8-92F3A139BC95}" type="datetime1">
+              <a:rPr lang="en-US" smtClean="0"/>
+              <a:t>10/8/26</a:t>
+            </a:fld>
+            <a:endParaRPr lang="en-US"/>
           </a:p>
         </p:txBody>
       </p:sp>
@@ -11486,35 +11791,6 @@
             <a:fld id="{62CBAC88-EF5B-3148-888C-824478CD1B05}" type="slidenum">
               <a:rPr lang="en-US" smtClean="0"/>
               <a:t>37</a:t>
-            </a:fld>
-            <a:endParaRPr lang="en-US"/>
-          </a:p>
-        </p:txBody>
-      </p:sp>
-      <p:sp>
-        <p:nvSpPr>
-          <p:cNvPr id="7" name="Date Placeholder 6">
-            <a:extLst>
-              <a:ext uri="{FF2B5EF4-FFF2-40B4-BE49-F238E27FC236}">
-                <a16:creationId xmlns:a16="http://schemas.microsoft.com/office/drawing/2014/main" id="{9BCCAD5E-7D6D-C189-872E-48B9421A6586}"/>
-              </a:ext>
-            </a:extLst>
-          </p:cNvPr>
-          <p:cNvSpPr>
-            <a:spLocks noGrp="1"/>
-          </p:cNvSpPr>
-          <p:nvPr>
-            <p:ph type="dt" sz="half" idx="10"/>
-          </p:nvPr>
-        </p:nvSpPr>
-        <p:spPr/>
-        <p:txBody>
-          <a:bodyPr/>
-          <a:lstStyle/>
-          <a:p>
-            <a:fld id="{3245DE90-0DE2-464F-955F-A797467E5088}" type="datetime5">
-              <a:rPr lang="en-US" smtClean="0"/>
-              <a:t>22-Sep-26</a:t>
             </a:fld>
             <a:endParaRPr lang="en-US"/>
           </a:p>
@@ -11530,6 +11806,18 @@
   <p:clrMapOvr>
     <a:masterClrMapping/>
   </p:clrMapOvr>
+  <mc:AlternateContent xmlns:mc="http://schemas.openxmlformats.org/markup-compatibility/2006" xmlns:p14="http://schemas.microsoft.com/office/powerpoint/2010/main">
+    <mc:Choice Requires="p14">
+      <p:transition spd="slow" p14:dur="2000">
+        <p14:prism isContent="1"/>
+      </p:transition>
+    </mc:Choice>
+    <mc:Fallback xmlns="">
+      <p:transition spd="slow">
+        <p:fade/>
+      </p:transition>
+    </mc:Fallback>
+  </mc:AlternateContent>
 </p:sld>
 </file>
 
@@ -11569,7 +11857,7 @@
         <p:spPr/>
         <p:txBody>
           <a:bodyPr>
-            <a:normAutofit/>
+            <a:normAutofit fontScale="90000"/>
           </a:bodyPr>
           <a:lstStyle/>
           <a:p>
@@ -11599,7 +11887,7 @@
         <p:spPr/>
         <p:txBody>
           <a:bodyPr>
-            <a:normAutofit fontScale="92500" lnSpcReduction="20000"/>
+            <a:normAutofit fontScale="85000" lnSpcReduction="20000"/>
           </a:bodyPr>
           <a:lstStyle/>
           <a:p>
@@ -11648,6 +11936,35 @@
               <a:rPr lang="en-US" dirty="0"/>
               <a:t>Note: If data changes frequently, caching may not be appropriate</a:t>
             </a:r>
+          </a:p>
+        </p:txBody>
+      </p:sp>
+      <p:sp>
+        <p:nvSpPr>
+          <p:cNvPr id="7" name="Date Placeholder 6">
+            <a:extLst>
+              <a:ext uri="{FF2B5EF4-FFF2-40B4-BE49-F238E27FC236}">
+                <a16:creationId xmlns:a16="http://schemas.microsoft.com/office/drawing/2014/main" id="{E6A7859A-7B1F-72FD-D6FE-FEB5C37B8B89}"/>
+              </a:ext>
+            </a:extLst>
+          </p:cNvPr>
+          <p:cNvSpPr>
+            <a:spLocks noGrp="1"/>
+          </p:cNvSpPr>
+          <p:nvPr>
+            <p:ph type="dt" sz="half" idx="10"/>
+          </p:nvPr>
+        </p:nvSpPr>
+        <p:spPr/>
+        <p:txBody>
+          <a:bodyPr/>
+          <a:lstStyle/>
+          <a:p>
+            <a:fld id="{1343D6B4-EB27-844B-BFBF-A55BAEB43916}" type="datetime1">
+              <a:rPr lang="en-US" smtClean="0"/>
+              <a:t>10/8/26</a:t>
+            </a:fld>
+            <a:endParaRPr lang="en-US"/>
           </a:p>
         </p:txBody>
       </p:sp>
@@ -11703,35 +12020,6 @@
             <a:fld id="{62CBAC88-EF5B-3148-888C-824478CD1B05}" type="slidenum">
               <a:rPr lang="en-US" smtClean="0"/>
               <a:t>38</a:t>
-            </a:fld>
-            <a:endParaRPr lang="en-US"/>
-          </a:p>
-        </p:txBody>
-      </p:sp>
-      <p:sp>
-        <p:nvSpPr>
-          <p:cNvPr id="7" name="Date Placeholder 6">
-            <a:extLst>
-              <a:ext uri="{FF2B5EF4-FFF2-40B4-BE49-F238E27FC236}">
-                <a16:creationId xmlns:a16="http://schemas.microsoft.com/office/drawing/2014/main" id="{E6A7859A-7B1F-72FD-D6FE-FEB5C37B8B89}"/>
-              </a:ext>
-            </a:extLst>
-          </p:cNvPr>
-          <p:cNvSpPr>
-            <a:spLocks noGrp="1"/>
-          </p:cNvSpPr>
-          <p:nvPr>
-            <p:ph type="dt" sz="half" idx="10"/>
-          </p:nvPr>
-        </p:nvSpPr>
-        <p:spPr/>
-        <p:txBody>
-          <a:bodyPr/>
-          <a:lstStyle/>
-          <a:p>
-            <a:fld id="{E711CB83-F240-E543-A325-02B09C9F1A2C}" type="datetime5">
-              <a:rPr lang="en-US" smtClean="0"/>
-              <a:t>22-Sep-26</a:t>
             </a:fld>
             <a:endParaRPr lang="en-US"/>
           </a:p>
@@ -11749,12 +12037,12 @@
   </p:clrMapOvr>
   <mc:AlternateContent xmlns:mc="http://schemas.openxmlformats.org/markup-compatibility/2006" xmlns:p14="http://schemas.microsoft.com/office/powerpoint/2010/main">
     <mc:Choice Requires="p14">
-      <p:transition spd="slow" p14:dur="1200">
-        <p14:prism/>
+      <p:transition spd="slow" p14:dur="2000">
+        <p14:prism isContent="1"/>
       </p:transition>
     </mc:Choice>
     <mc:Fallback xmlns="">
-      <p:transition xmlns:p14="http://schemas.microsoft.com/office/powerpoint/2010/main" spd="slow">
+      <p:transition spd="slow">
         <p:fade/>
       </p:transition>
     </mc:Fallback>
@@ -11798,7 +12086,7 @@
         <p:spPr/>
         <p:txBody>
           <a:bodyPr>
-            <a:normAutofit/>
+            <a:normAutofit fontScale="90000"/>
           </a:bodyPr>
           <a:lstStyle/>
           <a:p>
@@ -12049,6 +12337,35 @@
       </p:sp>
       <p:sp>
         <p:nvSpPr>
+          <p:cNvPr id="7" name="Date Placeholder 6">
+            <a:extLst>
+              <a:ext uri="{FF2B5EF4-FFF2-40B4-BE49-F238E27FC236}">
+                <a16:creationId xmlns:a16="http://schemas.microsoft.com/office/drawing/2014/main" id="{03F21121-BA5C-AA70-13E0-B77D4BD71EFC}"/>
+              </a:ext>
+            </a:extLst>
+          </p:cNvPr>
+          <p:cNvSpPr>
+            <a:spLocks noGrp="1"/>
+          </p:cNvSpPr>
+          <p:nvPr>
+            <p:ph type="dt" sz="half" idx="10"/>
+          </p:nvPr>
+        </p:nvSpPr>
+        <p:spPr/>
+        <p:txBody>
+          <a:bodyPr/>
+          <a:lstStyle/>
+          <a:p>
+            <a:fld id="{62CA3B2D-34BD-2444-B755-3A7F88E34A59}" type="datetime1">
+              <a:rPr lang="en-US" smtClean="0"/>
+              <a:t>10/8/26</a:t>
+            </a:fld>
+            <a:endParaRPr lang="en-US"/>
+          </a:p>
+        </p:txBody>
+      </p:sp>
+      <p:sp>
+        <p:nvSpPr>
           <p:cNvPr id="4" name="Footer Placeholder 3">
             <a:extLst>
               <a:ext uri="{FF2B5EF4-FFF2-40B4-BE49-F238E27FC236}">
@@ -12099,35 +12416,6 @@
             <a:fld id="{62CBAC88-EF5B-3148-888C-824478CD1B05}" type="slidenum">
               <a:rPr lang="en-US" smtClean="0"/>
               <a:t>39</a:t>
-            </a:fld>
-            <a:endParaRPr lang="en-US"/>
-          </a:p>
-        </p:txBody>
-      </p:sp>
-      <p:sp>
-        <p:nvSpPr>
-          <p:cNvPr id="7" name="Date Placeholder 6">
-            <a:extLst>
-              <a:ext uri="{FF2B5EF4-FFF2-40B4-BE49-F238E27FC236}">
-                <a16:creationId xmlns:a16="http://schemas.microsoft.com/office/drawing/2014/main" id="{03F21121-BA5C-AA70-13E0-B77D4BD71EFC}"/>
-              </a:ext>
-            </a:extLst>
-          </p:cNvPr>
-          <p:cNvSpPr>
-            <a:spLocks noGrp="1"/>
-          </p:cNvSpPr>
-          <p:nvPr>
-            <p:ph type="dt" sz="half" idx="10"/>
-          </p:nvPr>
-        </p:nvSpPr>
-        <p:spPr/>
-        <p:txBody>
-          <a:bodyPr/>
-          <a:lstStyle/>
-          <a:p>
-            <a:fld id="{750C8DE6-D873-E848-AA42-F28294B44C1B}" type="datetime5">
-              <a:rPr lang="en-US" smtClean="0"/>
-              <a:t>22-Sep-26</a:t>
             </a:fld>
             <a:endParaRPr lang="en-US"/>
           </a:p>
@@ -12145,12 +12433,12 @@
   </p:clrMapOvr>
   <mc:AlternateContent xmlns:mc="http://schemas.openxmlformats.org/markup-compatibility/2006" xmlns:p14="http://schemas.microsoft.com/office/powerpoint/2010/main">
     <mc:Choice Requires="p14">
-      <p:transition spd="slow" p14:dur="1200">
-        <p14:prism/>
+      <p:transition spd="slow" p14:dur="2000">
+        <p14:prism isContent="1"/>
       </p:transition>
     </mc:Choice>
     <mc:Fallback xmlns="">
-      <p:transition xmlns:p14="http://schemas.microsoft.com/office/powerpoint/2010/main" spd="slow">
+      <p:transition spd="slow">
         <p:fade/>
       </p:transition>
     </mc:Fallback>
@@ -12193,7 +12481,9 @@
         </p:nvSpPr>
         <p:spPr/>
         <p:txBody>
-          <a:bodyPr/>
+          <a:bodyPr>
+            <a:normAutofit fontScale="90000"/>
+          </a:bodyPr>
           <a:lstStyle/>
           <a:p>
             <a:r>
@@ -12293,6 +12583,35 @@
       </p:sp>
       <p:sp>
         <p:nvSpPr>
+          <p:cNvPr id="7" name="Date Placeholder 6">
+            <a:extLst>
+              <a:ext uri="{FF2B5EF4-FFF2-40B4-BE49-F238E27FC236}">
+                <a16:creationId xmlns:a16="http://schemas.microsoft.com/office/drawing/2014/main" id="{1A5011A6-B8CF-887E-C144-EF5F301BEB89}"/>
+              </a:ext>
+            </a:extLst>
+          </p:cNvPr>
+          <p:cNvSpPr>
+            <a:spLocks noGrp="1"/>
+          </p:cNvSpPr>
+          <p:nvPr>
+            <p:ph type="dt" sz="half" idx="10"/>
+          </p:nvPr>
+        </p:nvSpPr>
+        <p:spPr/>
+        <p:txBody>
+          <a:bodyPr/>
+          <a:lstStyle/>
+          <a:p>
+            <a:fld id="{698FA46E-393D-864B-8C70-69C9BEB559DA}" type="datetime1">
+              <a:rPr lang="en-US" smtClean="0"/>
+              <a:t>10/8/26</a:t>
+            </a:fld>
+            <a:endParaRPr lang="en-US"/>
+          </a:p>
+        </p:txBody>
+      </p:sp>
+      <p:sp>
+        <p:nvSpPr>
           <p:cNvPr id="4" name="Footer Placeholder 3">
             <a:extLst>
               <a:ext uri="{FF2B5EF4-FFF2-40B4-BE49-F238E27FC236}">
@@ -12344,35 +12663,6 @@
             <a:fld id="{62CBAC88-EF5B-3148-888C-824478CD1B05}" type="slidenum">
               <a:rPr lang="en-US" smtClean="0"/>
               <a:t>4</a:t>
-            </a:fld>
-            <a:endParaRPr lang="en-US"/>
-          </a:p>
-        </p:txBody>
-      </p:sp>
-      <p:sp>
-        <p:nvSpPr>
-          <p:cNvPr id="7" name="Date Placeholder 6">
-            <a:extLst>
-              <a:ext uri="{FF2B5EF4-FFF2-40B4-BE49-F238E27FC236}">
-                <a16:creationId xmlns:a16="http://schemas.microsoft.com/office/drawing/2014/main" id="{1A5011A6-B8CF-887E-C144-EF5F301BEB89}"/>
-              </a:ext>
-            </a:extLst>
-          </p:cNvPr>
-          <p:cNvSpPr>
-            <a:spLocks noGrp="1"/>
-          </p:cNvSpPr>
-          <p:nvPr>
-            <p:ph type="dt" sz="half" idx="10"/>
-          </p:nvPr>
-        </p:nvSpPr>
-        <p:spPr/>
-        <p:txBody>
-          <a:bodyPr/>
-          <a:lstStyle/>
-          <a:p>
-            <a:fld id="{F69BA1E6-75E7-AA49-9A91-641CE2A1808D}" type="datetime5">
-              <a:rPr lang="en-US" smtClean="0"/>
-              <a:t>22-Sep-26</a:t>
             </a:fld>
             <a:endParaRPr lang="en-US"/>
           </a:p>
@@ -12390,12 +12680,12 @@
   </p:clrMapOvr>
   <mc:AlternateContent xmlns:mc="http://schemas.openxmlformats.org/markup-compatibility/2006" xmlns:p14="http://schemas.microsoft.com/office/powerpoint/2010/main">
     <mc:Choice Requires="p14">
-      <p:transition spd="slow" p14:dur="1200">
-        <p14:prism/>
+      <p:transition spd="slow" p14:dur="2000">
+        <p14:prism isContent="1"/>
       </p:transition>
     </mc:Choice>
     <mc:Fallback xmlns="">
-      <p:transition xmlns:p14="http://schemas.microsoft.com/office/powerpoint/2010/main" spd="slow">
+      <p:transition spd="slow">
         <p:fade/>
       </p:transition>
     </mc:Fallback>
@@ -12439,7 +12729,7 @@
         <p:spPr/>
         <p:txBody>
           <a:bodyPr>
-            <a:normAutofit/>
+            <a:normAutofit fontScale="90000"/>
           </a:bodyPr>
           <a:lstStyle/>
           <a:p>
@@ -12477,7 +12767,7 @@
         <p:spPr/>
         <p:txBody>
           <a:bodyPr>
-            <a:normAutofit fontScale="62500" lnSpcReduction="20000"/>
+            <a:normAutofit fontScale="55000" lnSpcReduction="20000"/>
           </a:bodyPr>
           <a:lstStyle/>
           <a:p>
@@ -12654,6 +12944,35 @@
       </p:sp>
       <p:sp>
         <p:nvSpPr>
+          <p:cNvPr id="7" name="Date Placeholder 6">
+            <a:extLst>
+              <a:ext uri="{FF2B5EF4-FFF2-40B4-BE49-F238E27FC236}">
+                <a16:creationId xmlns:a16="http://schemas.microsoft.com/office/drawing/2014/main" id="{9DB9A90B-359E-7579-88A4-0CB0D0ACFE1B}"/>
+              </a:ext>
+            </a:extLst>
+          </p:cNvPr>
+          <p:cNvSpPr>
+            <a:spLocks noGrp="1"/>
+          </p:cNvSpPr>
+          <p:nvPr>
+            <p:ph type="dt" sz="half" idx="10"/>
+          </p:nvPr>
+        </p:nvSpPr>
+        <p:spPr/>
+        <p:txBody>
+          <a:bodyPr/>
+          <a:lstStyle/>
+          <a:p>
+            <a:fld id="{B8FB8132-4B9A-574B-9694-EBE37CAEF249}" type="datetime1">
+              <a:rPr lang="en-US" smtClean="0"/>
+              <a:t>10/8/26</a:t>
+            </a:fld>
+            <a:endParaRPr lang="en-US"/>
+          </a:p>
+        </p:txBody>
+      </p:sp>
+      <p:sp>
+        <p:nvSpPr>
           <p:cNvPr id="4" name="Footer Placeholder 3">
             <a:extLst>
               <a:ext uri="{FF2B5EF4-FFF2-40B4-BE49-F238E27FC236}">
@@ -12704,35 +13023,6 @@
             <a:fld id="{62CBAC88-EF5B-3148-888C-824478CD1B05}" type="slidenum">
               <a:rPr lang="en-US" smtClean="0"/>
               <a:t>40</a:t>
-            </a:fld>
-            <a:endParaRPr lang="en-US"/>
-          </a:p>
-        </p:txBody>
-      </p:sp>
-      <p:sp>
-        <p:nvSpPr>
-          <p:cNvPr id="7" name="Date Placeholder 6">
-            <a:extLst>
-              <a:ext uri="{FF2B5EF4-FFF2-40B4-BE49-F238E27FC236}">
-                <a16:creationId xmlns:a16="http://schemas.microsoft.com/office/drawing/2014/main" id="{9DB9A90B-359E-7579-88A4-0CB0D0ACFE1B}"/>
-              </a:ext>
-            </a:extLst>
-          </p:cNvPr>
-          <p:cNvSpPr>
-            <a:spLocks noGrp="1"/>
-          </p:cNvSpPr>
-          <p:nvPr>
-            <p:ph type="dt" sz="half" idx="10"/>
-          </p:nvPr>
-        </p:nvSpPr>
-        <p:spPr/>
-        <p:txBody>
-          <a:bodyPr/>
-          <a:lstStyle/>
-          <a:p>
-            <a:fld id="{9C29CCE2-2A6C-8A44-B005-9603B118A03F}" type="datetime5">
-              <a:rPr lang="en-US" smtClean="0"/>
-              <a:t>22-Sep-26</a:t>
             </a:fld>
             <a:endParaRPr lang="en-US"/>
           </a:p>
@@ -12750,12 +13040,12 @@
   </p:clrMapOvr>
   <mc:AlternateContent xmlns:mc="http://schemas.openxmlformats.org/markup-compatibility/2006" xmlns:p14="http://schemas.microsoft.com/office/powerpoint/2010/main">
     <mc:Choice Requires="p14">
-      <p:transition spd="slow" p14:dur="1200">
-        <p14:prism/>
+      <p:transition spd="slow" p14:dur="2000">
+        <p14:prism isContent="1"/>
       </p:transition>
     </mc:Choice>
     <mc:Fallback xmlns="">
-      <p:transition xmlns:p14="http://schemas.microsoft.com/office/powerpoint/2010/main" spd="slow">
+      <p:transition spd="slow">
         <p:fade/>
       </p:transition>
     </mc:Fallback>
@@ -12799,7 +13089,7 @@
         <p:spPr/>
         <p:txBody>
           <a:bodyPr>
-            <a:normAutofit/>
+            <a:normAutofit fontScale="90000"/>
           </a:bodyPr>
           <a:lstStyle/>
           <a:p>
@@ -12829,7 +13119,7 @@
         <p:spPr/>
         <p:txBody>
           <a:bodyPr>
-            <a:normAutofit fontScale="92500" lnSpcReduction="10000"/>
+            <a:normAutofit fontScale="92500" lnSpcReduction="20000"/>
           </a:bodyPr>
           <a:lstStyle/>
           <a:p>
@@ -12872,6 +13162,35 @@
               <a:rPr lang="en-US" dirty="0"/>
               <a:t>Essential for: sessions, shopping carts, preferences, etc.</a:t>
             </a:r>
+          </a:p>
+        </p:txBody>
+      </p:sp>
+      <p:sp>
+        <p:nvSpPr>
+          <p:cNvPr id="7" name="Date Placeholder 6">
+            <a:extLst>
+              <a:ext uri="{FF2B5EF4-FFF2-40B4-BE49-F238E27FC236}">
+                <a16:creationId xmlns:a16="http://schemas.microsoft.com/office/drawing/2014/main" id="{3DFD991B-3CD0-897D-D9AF-2014786C8882}"/>
+              </a:ext>
+            </a:extLst>
+          </p:cNvPr>
+          <p:cNvSpPr>
+            <a:spLocks noGrp="1"/>
+          </p:cNvSpPr>
+          <p:nvPr>
+            <p:ph type="dt" sz="half" idx="10"/>
+          </p:nvPr>
+        </p:nvSpPr>
+        <p:spPr/>
+        <p:txBody>
+          <a:bodyPr/>
+          <a:lstStyle/>
+          <a:p>
+            <a:fld id="{F5DC4F7F-1067-7544-880C-3EB93C64AB89}" type="datetime1">
+              <a:rPr lang="en-US" smtClean="0"/>
+              <a:t>10/8/26</a:t>
+            </a:fld>
+            <a:endParaRPr lang="en-US"/>
           </a:p>
         </p:txBody>
       </p:sp>
@@ -12927,35 +13246,6 @@
             <a:fld id="{62CBAC88-EF5B-3148-888C-824478CD1B05}" type="slidenum">
               <a:rPr lang="en-US" smtClean="0"/>
               <a:t>41</a:t>
-            </a:fld>
-            <a:endParaRPr lang="en-US"/>
-          </a:p>
-        </p:txBody>
-      </p:sp>
-      <p:sp>
-        <p:nvSpPr>
-          <p:cNvPr id="7" name="Date Placeholder 6">
-            <a:extLst>
-              <a:ext uri="{FF2B5EF4-FFF2-40B4-BE49-F238E27FC236}">
-                <a16:creationId xmlns:a16="http://schemas.microsoft.com/office/drawing/2014/main" id="{3DFD991B-3CD0-897D-D9AF-2014786C8882}"/>
-              </a:ext>
-            </a:extLst>
-          </p:cNvPr>
-          <p:cNvSpPr>
-            <a:spLocks noGrp="1"/>
-          </p:cNvSpPr>
-          <p:nvPr>
-            <p:ph type="dt" sz="half" idx="10"/>
-          </p:nvPr>
-        </p:nvSpPr>
-        <p:spPr/>
-        <p:txBody>
-          <a:bodyPr/>
-          <a:lstStyle/>
-          <a:p>
-            <a:fld id="{37A70494-6260-434B-8979-3D5FAA53955A}" type="datetime5">
-              <a:rPr lang="en-US" smtClean="0"/>
-              <a:t>22-Sep-26</a:t>
             </a:fld>
             <a:endParaRPr lang="en-US"/>
           </a:p>
@@ -12973,12 +13263,12 @@
   </p:clrMapOvr>
   <mc:AlternateContent xmlns:mc="http://schemas.openxmlformats.org/markup-compatibility/2006" xmlns:p14="http://schemas.microsoft.com/office/powerpoint/2010/main">
     <mc:Choice Requires="p14">
-      <p:transition spd="slow" p14:dur="1200">
-        <p14:prism/>
+      <p:transition spd="slow" p14:dur="2000">
+        <p14:prism isContent="1"/>
       </p:transition>
     </mc:Choice>
     <mc:Fallback xmlns="">
-      <p:transition xmlns:p14="http://schemas.microsoft.com/office/powerpoint/2010/main" spd="slow">
+      <p:transition spd="slow">
         <p:fade/>
       </p:transition>
     </mc:Fallback>
@@ -13022,7 +13312,7 @@
         <p:spPr/>
         <p:txBody>
           <a:bodyPr>
-            <a:normAutofit/>
+            <a:normAutofit fontScale="90000"/>
           </a:bodyPr>
           <a:lstStyle/>
           <a:p>
@@ -13052,7 +13342,7 @@
         <p:spPr/>
         <p:txBody>
           <a:bodyPr>
-            <a:normAutofit/>
+            <a:normAutofit lnSpcReduction="10000"/>
           </a:bodyPr>
           <a:lstStyle/>
           <a:p>
@@ -13103,6 +13393,35 @@
           </a:p>
           <a:p>
             <a:endParaRPr lang="en-US" dirty="0"/>
+          </a:p>
+        </p:txBody>
+      </p:sp>
+      <p:sp>
+        <p:nvSpPr>
+          <p:cNvPr id="7" name="Date Placeholder 6">
+            <a:extLst>
+              <a:ext uri="{FF2B5EF4-FFF2-40B4-BE49-F238E27FC236}">
+                <a16:creationId xmlns:a16="http://schemas.microsoft.com/office/drawing/2014/main" id="{0189E0A8-AABB-81B8-1C3E-5E44A3BAF2B1}"/>
+              </a:ext>
+            </a:extLst>
+          </p:cNvPr>
+          <p:cNvSpPr>
+            <a:spLocks noGrp="1"/>
+          </p:cNvSpPr>
+          <p:nvPr>
+            <p:ph type="dt" sz="half" idx="10"/>
+          </p:nvPr>
+        </p:nvSpPr>
+        <p:spPr/>
+        <p:txBody>
+          <a:bodyPr/>
+          <a:lstStyle/>
+          <a:p>
+            <a:fld id="{5AED3680-AC1A-0442-9D7D-9F30E0FEF342}" type="datetime1">
+              <a:rPr lang="en-US" smtClean="0"/>
+              <a:t>10/8/26</a:t>
+            </a:fld>
+            <a:endParaRPr lang="en-US"/>
           </a:p>
         </p:txBody>
       </p:sp>
@@ -13158,35 +13477,6 @@
             <a:fld id="{62CBAC88-EF5B-3148-888C-824478CD1B05}" type="slidenum">
               <a:rPr lang="en-US" smtClean="0"/>
               <a:t>42</a:t>
-            </a:fld>
-            <a:endParaRPr lang="en-US"/>
-          </a:p>
-        </p:txBody>
-      </p:sp>
-      <p:sp>
-        <p:nvSpPr>
-          <p:cNvPr id="7" name="Date Placeholder 6">
-            <a:extLst>
-              <a:ext uri="{FF2B5EF4-FFF2-40B4-BE49-F238E27FC236}">
-                <a16:creationId xmlns:a16="http://schemas.microsoft.com/office/drawing/2014/main" id="{0189E0A8-AABB-81B8-1C3E-5E44A3BAF2B1}"/>
-              </a:ext>
-            </a:extLst>
-          </p:cNvPr>
-          <p:cNvSpPr>
-            <a:spLocks noGrp="1"/>
-          </p:cNvSpPr>
-          <p:nvPr>
-            <p:ph type="dt" sz="half" idx="10"/>
-          </p:nvPr>
-        </p:nvSpPr>
-        <p:spPr/>
-        <p:txBody>
-          <a:bodyPr/>
-          <a:lstStyle/>
-          <a:p>
-            <a:fld id="{E01FFDF9-C11F-D248-A9C7-44F6AA5C4ABA}" type="datetime5">
-              <a:rPr lang="en-US" smtClean="0"/>
-              <a:t>22-Sep-26</a:t>
             </a:fld>
             <a:endParaRPr lang="en-US"/>
           </a:p>
@@ -13204,12 +13494,12 @@
   </p:clrMapOvr>
   <mc:AlternateContent xmlns:mc="http://schemas.openxmlformats.org/markup-compatibility/2006" xmlns:p14="http://schemas.microsoft.com/office/powerpoint/2010/main">
     <mc:Choice Requires="p14">
-      <p:transition spd="slow" p14:dur="1200">
-        <p14:prism/>
+      <p:transition spd="slow" p14:dur="2000">
+        <p14:prism isContent="1"/>
       </p:transition>
     </mc:Choice>
     <mc:Fallback xmlns="">
-      <p:transition xmlns:p14="http://schemas.microsoft.com/office/powerpoint/2010/main" spd="slow">
+      <p:transition spd="slow">
         <p:fade/>
       </p:transition>
     </mc:Fallback>
@@ -13253,7 +13543,7 @@
         <p:spPr/>
         <p:txBody>
           <a:bodyPr>
-            <a:normAutofit/>
+            <a:normAutofit fontScale="90000"/>
           </a:bodyPr>
           <a:lstStyle/>
           <a:p>
@@ -13283,7 +13573,7 @@
         <p:spPr/>
         <p:txBody>
           <a:bodyPr>
-            <a:normAutofit/>
+            <a:normAutofit fontScale="92500"/>
           </a:bodyPr>
           <a:lstStyle/>
           <a:p>
@@ -13323,6 +13613,35 @@
               <a:rPr lang="en-US" dirty="0"/>
               <a:t>Expires - Cookie expiration date</a:t>
             </a:r>
+          </a:p>
+        </p:txBody>
+      </p:sp>
+      <p:sp>
+        <p:nvSpPr>
+          <p:cNvPr id="7" name="Date Placeholder 6">
+            <a:extLst>
+              <a:ext uri="{FF2B5EF4-FFF2-40B4-BE49-F238E27FC236}">
+                <a16:creationId xmlns:a16="http://schemas.microsoft.com/office/drawing/2014/main" id="{53940432-213E-12BE-6CC8-16E70F3C9961}"/>
+              </a:ext>
+            </a:extLst>
+          </p:cNvPr>
+          <p:cNvSpPr>
+            <a:spLocks noGrp="1"/>
+          </p:cNvSpPr>
+          <p:nvPr>
+            <p:ph type="dt" sz="half" idx="10"/>
+          </p:nvPr>
+        </p:nvSpPr>
+        <p:spPr/>
+        <p:txBody>
+          <a:bodyPr/>
+          <a:lstStyle/>
+          <a:p>
+            <a:fld id="{AEDB1466-B4ED-734F-BDE1-F48246D9D423}" type="datetime1">
+              <a:rPr lang="en-US" smtClean="0"/>
+              <a:t>10/8/26</a:t>
+            </a:fld>
+            <a:endParaRPr lang="en-US"/>
           </a:p>
         </p:txBody>
       </p:sp>
@@ -13378,35 +13697,6 @@
             <a:fld id="{62CBAC88-EF5B-3148-888C-824478CD1B05}" type="slidenum">
               <a:rPr lang="en-US" smtClean="0"/>
               <a:t>43</a:t>
-            </a:fld>
-            <a:endParaRPr lang="en-US"/>
-          </a:p>
-        </p:txBody>
-      </p:sp>
-      <p:sp>
-        <p:nvSpPr>
-          <p:cNvPr id="7" name="Date Placeholder 6">
-            <a:extLst>
-              <a:ext uri="{FF2B5EF4-FFF2-40B4-BE49-F238E27FC236}">
-                <a16:creationId xmlns:a16="http://schemas.microsoft.com/office/drawing/2014/main" id="{53940432-213E-12BE-6CC8-16E70F3C9961}"/>
-              </a:ext>
-            </a:extLst>
-          </p:cNvPr>
-          <p:cNvSpPr>
-            <a:spLocks noGrp="1"/>
-          </p:cNvSpPr>
-          <p:nvPr>
-            <p:ph type="dt" sz="half" idx="10"/>
-          </p:nvPr>
-        </p:nvSpPr>
-        <p:spPr/>
-        <p:txBody>
-          <a:bodyPr/>
-          <a:lstStyle/>
-          <a:p>
-            <a:fld id="{A1F0A67F-3C29-294A-A74B-2B9EA15F8FDD}" type="datetime5">
-              <a:rPr lang="en-US" smtClean="0"/>
-              <a:t>22-Sep-26</a:t>
             </a:fld>
             <a:endParaRPr lang="en-US"/>
           </a:p>
@@ -13424,12 +13714,12 @@
   </p:clrMapOvr>
   <mc:AlternateContent xmlns:mc="http://schemas.openxmlformats.org/markup-compatibility/2006" xmlns:p14="http://schemas.microsoft.com/office/powerpoint/2010/main">
     <mc:Choice Requires="p14">
-      <p:transition spd="slow" p14:dur="1200">
-        <p14:prism/>
+      <p:transition spd="slow" p14:dur="2000">
+        <p14:prism isContent="1"/>
       </p:transition>
     </mc:Choice>
     <mc:Fallback xmlns="">
-      <p:transition xmlns:p14="http://schemas.microsoft.com/office/powerpoint/2010/main" spd="slow">
+      <p:transition spd="slow">
         <p:fade/>
       </p:transition>
     </mc:Fallback>
@@ -13473,7 +13763,7 @@
         <p:spPr/>
         <p:txBody>
           <a:bodyPr>
-            <a:normAutofit/>
+            <a:normAutofit fontScale="90000"/>
           </a:bodyPr>
           <a:lstStyle/>
           <a:p>
@@ -13507,7 +13797,7 @@
         <p:spPr/>
         <p:txBody>
           <a:bodyPr>
-            <a:normAutofit fontScale="92500" lnSpcReduction="10000"/>
+            <a:normAutofit fontScale="92500" lnSpcReduction="20000"/>
           </a:bodyPr>
           <a:lstStyle/>
           <a:p>
@@ -13556,6 +13846,35 @@
               <a:rPr lang="en-US" dirty="0"/>
               <a:t>More secure but less convenient</a:t>
             </a:r>
+          </a:p>
+        </p:txBody>
+      </p:sp>
+      <p:sp>
+        <p:nvSpPr>
+          <p:cNvPr id="7" name="Date Placeholder 6">
+            <a:extLst>
+              <a:ext uri="{FF2B5EF4-FFF2-40B4-BE49-F238E27FC236}">
+                <a16:creationId xmlns:a16="http://schemas.microsoft.com/office/drawing/2014/main" id="{BFA2B5A0-F700-1D48-5B81-97E3C0C70C2D}"/>
+              </a:ext>
+            </a:extLst>
+          </p:cNvPr>
+          <p:cNvSpPr>
+            <a:spLocks noGrp="1"/>
+          </p:cNvSpPr>
+          <p:nvPr>
+            <p:ph type="dt" sz="half" idx="10"/>
+          </p:nvPr>
+        </p:nvSpPr>
+        <p:spPr/>
+        <p:txBody>
+          <a:bodyPr/>
+          <a:lstStyle/>
+          <a:p>
+            <a:fld id="{B35C31B3-591D-784C-8683-20B4D9AF854A}" type="datetime1">
+              <a:rPr lang="en-US" smtClean="0"/>
+              <a:t>10/8/26</a:t>
+            </a:fld>
+            <a:endParaRPr lang="en-US"/>
           </a:p>
         </p:txBody>
       </p:sp>
@@ -13611,35 +13930,6 @@
             <a:fld id="{62CBAC88-EF5B-3148-888C-824478CD1B05}" type="slidenum">
               <a:rPr lang="en-US" smtClean="0"/>
               <a:t>44</a:t>
-            </a:fld>
-            <a:endParaRPr lang="en-US"/>
-          </a:p>
-        </p:txBody>
-      </p:sp>
-      <p:sp>
-        <p:nvSpPr>
-          <p:cNvPr id="7" name="Date Placeholder 6">
-            <a:extLst>
-              <a:ext uri="{FF2B5EF4-FFF2-40B4-BE49-F238E27FC236}">
-                <a16:creationId xmlns:a16="http://schemas.microsoft.com/office/drawing/2014/main" id="{BFA2B5A0-F700-1D48-5B81-97E3C0C70C2D}"/>
-              </a:ext>
-            </a:extLst>
-          </p:cNvPr>
-          <p:cNvSpPr>
-            <a:spLocks noGrp="1"/>
-          </p:cNvSpPr>
-          <p:nvPr>
-            <p:ph type="dt" sz="half" idx="10"/>
-          </p:nvPr>
-        </p:nvSpPr>
-        <p:spPr/>
-        <p:txBody>
-          <a:bodyPr/>
-          <a:lstStyle/>
-          <a:p>
-            <a:fld id="{F9CECF2E-CA0C-0D4F-968C-E166C13B08DD}" type="datetime5">
-              <a:rPr lang="en-US" smtClean="0"/>
-              <a:t>22-Sep-26</a:t>
             </a:fld>
             <a:endParaRPr lang="en-US"/>
           </a:p>
@@ -13657,12 +13947,12 @@
   </p:clrMapOvr>
   <mc:AlternateContent xmlns:mc="http://schemas.openxmlformats.org/markup-compatibility/2006" xmlns:p14="http://schemas.microsoft.com/office/powerpoint/2010/main">
     <mc:Choice Requires="p14">
-      <p:transition spd="slow" p14:dur="1200">
-        <p14:prism/>
+      <p:transition spd="slow" p14:dur="2000">
+        <p14:prism isContent="1"/>
       </p:transition>
     </mc:Choice>
     <mc:Fallback xmlns="">
-      <p:transition xmlns:p14="http://schemas.microsoft.com/office/powerpoint/2010/main" spd="slow">
+      <p:transition spd="slow">
         <p:fade/>
       </p:transition>
     </mc:Fallback>
@@ -13706,7 +13996,7 @@
         <p:spPr/>
         <p:txBody>
           <a:bodyPr>
-            <a:normAutofit/>
+            <a:normAutofit fontScale="90000"/>
           </a:bodyPr>
           <a:lstStyle/>
           <a:p>
@@ -13736,7 +14026,7 @@
         <p:spPr/>
         <p:txBody>
           <a:bodyPr>
-            <a:normAutofit fontScale="77500" lnSpcReduction="20000"/>
+            <a:normAutofit fontScale="70000" lnSpcReduction="20000"/>
           </a:bodyPr>
           <a:lstStyle/>
           <a:p>
@@ -13798,6 +14088,35 @@
           </a:p>
           <a:p>
             <a:endParaRPr lang="en-US" dirty="0"/>
+          </a:p>
+        </p:txBody>
+      </p:sp>
+      <p:sp>
+        <p:nvSpPr>
+          <p:cNvPr id="7" name="Date Placeholder 6">
+            <a:extLst>
+              <a:ext uri="{FF2B5EF4-FFF2-40B4-BE49-F238E27FC236}">
+                <a16:creationId xmlns:a16="http://schemas.microsoft.com/office/drawing/2014/main" id="{D50EA0CA-1F8B-B690-6172-9283139F6B7D}"/>
+              </a:ext>
+            </a:extLst>
+          </p:cNvPr>
+          <p:cNvSpPr>
+            <a:spLocks noGrp="1"/>
+          </p:cNvSpPr>
+          <p:nvPr>
+            <p:ph type="dt" sz="half" idx="10"/>
+          </p:nvPr>
+        </p:nvSpPr>
+        <p:spPr/>
+        <p:txBody>
+          <a:bodyPr/>
+          <a:lstStyle/>
+          <a:p>
+            <a:fld id="{BB8C4652-05E1-4E43-B40D-B543A9723FE4}" type="datetime1">
+              <a:rPr lang="en-US" smtClean="0"/>
+              <a:t>10/8/26</a:t>
+            </a:fld>
+            <a:endParaRPr lang="en-US"/>
           </a:p>
         </p:txBody>
       </p:sp>
@@ -13853,35 +14172,6 @@
             <a:fld id="{62CBAC88-EF5B-3148-888C-824478CD1B05}" type="slidenum">
               <a:rPr lang="en-US" smtClean="0"/>
               <a:t>45</a:t>
-            </a:fld>
-            <a:endParaRPr lang="en-US"/>
-          </a:p>
-        </p:txBody>
-      </p:sp>
-      <p:sp>
-        <p:nvSpPr>
-          <p:cNvPr id="7" name="Date Placeholder 6">
-            <a:extLst>
-              <a:ext uri="{FF2B5EF4-FFF2-40B4-BE49-F238E27FC236}">
-                <a16:creationId xmlns:a16="http://schemas.microsoft.com/office/drawing/2014/main" id="{D50EA0CA-1F8B-B690-6172-9283139F6B7D}"/>
-              </a:ext>
-            </a:extLst>
-          </p:cNvPr>
-          <p:cNvSpPr>
-            <a:spLocks noGrp="1"/>
-          </p:cNvSpPr>
-          <p:nvPr>
-            <p:ph type="dt" sz="half" idx="10"/>
-          </p:nvPr>
-        </p:nvSpPr>
-        <p:spPr/>
-        <p:txBody>
-          <a:bodyPr/>
-          <a:lstStyle/>
-          <a:p>
-            <a:fld id="{F04372A4-148D-814C-AC5A-344975EB4FCE}" type="datetime5">
-              <a:rPr lang="en-US" smtClean="0"/>
-              <a:t>22-Sep-26</a:t>
             </a:fld>
             <a:endParaRPr lang="en-US"/>
           </a:p>
@@ -13899,12 +14189,12 @@
   </p:clrMapOvr>
   <mc:AlternateContent xmlns:mc="http://schemas.openxmlformats.org/markup-compatibility/2006" xmlns:p14="http://schemas.microsoft.com/office/powerpoint/2010/main">
     <mc:Choice Requires="p14">
-      <p:transition spd="slow" p14:dur="1200">
-        <p14:prism/>
+      <p:transition spd="slow" p14:dur="2000">
+        <p14:prism isContent="1"/>
       </p:transition>
     </mc:Choice>
     <mc:Fallback xmlns="">
-      <p:transition xmlns:p14="http://schemas.microsoft.com/office/powerpoint/2010/main" spd="slow">
+      <p:transition spd="slow">
         <p:fade/>
       </p:transition>
     </mc:Fallback>
@@ -13948,7 +14238,7 @@
         <p:spPr/>
         <p:txBody>
           <a:bodyPr>
-            <a:normAutofit/>
+            <a:normAutofit fontScale="90000"/>
           </a:bodyPr>
           <a:lstStyle/>
           <a:p>
@@ -13978,7 +14268,7 @@
         <p:spPr/>
         <p:txBody>
           <a:bodyPr>
-            <a:normAutofit fontScale="92500" lnSpcReduction="20000"/>
+            <a:normAutofit fontScale="85000" lnSpcReduction="20000"/>
           </a:bodyPr>
           <a:lstStyle/>
           <a:p>
@@ -14085,6 +14375,35 @@
           </a:p>
           <a:p>
             <a:endParaRPr lang="en-US" dirty="0"/>
+          </a:p>
+        </p:txBody>
+      </p:sp>
+      <p:sp>
+        <p:nvSpPr>
+          <p:cNvPr id="7" name="Date Placeholder 6">
+            <a:extLst>
+              <a:ext uri="{FF2B5EF4-FFF2-40B4-BE49-F238E27FC236}">
+                <a16:creationId xmlns:a16="http://schemas.microsoft.com/office/drawing/2014/main" id="{E14A0489-CEAA-248A-AE25-AFBF17BED088}"/>
+              </a:ext>
+            </a:extLst>
+          </p:cNvPr>
+          <p:cNvSpPr>
+            <a:spLocks noGrp="1"/>
+          </p:cNvSpPr>
+          <p:nvPr>
+            <p:ph type="dt" sz="half" idx="10"/>
+          </p:nvPr>
+        </p:nvSpPr>
+        <p:spPr/>
+        <p:txBody>
+          <a:bodyPr/>
+          <a:lstStyle/>
+          <a:p>
+            <a:fld id="{42EE8A92-C65E-1C49-B066-D4C456C5B286}" type="datetime1">
+              <a:rPr lang="en-US" smtClean="0"/>
+              <a:t>10/8/26</a:t>
+            </a:fld>
+            <a:endParaRPr lang="en-US"/>
           </a:p>
         </p:txBody>
       </p:sp>
@@ -14140,35 +14459,6 @@
             <a:fld id="{62CBAC88-EF5B-3148-888C-824478CD1B05}" type="slidenum">
               <a:rPr lang="en-US" smtClean="0"/>
               <a:t>46</a:t>
-            </a:fld>
-            <a:endParaRPr lang="en-US"/>
-          </a:p>
-        </p:txBody>
-      </p:sp>
-      <p:sp>
-        <p:nvSpPr>
-          <p:cNvPr id="7" name="Date Placeholder 6">
-            <a:extLst>
-              <a:ext uri="{FF2B5EF4-FFF2-40B4-BE49-F238E27FC236}">
-                <a16:creationId xmlns:a16="http://schemas.microsoft.com/office/drawing/2014/main" id="{E14A0489-CEAA-248A-AE25-AFBF17BED088}"/>
-              </a:ext>
-            </a:extLst>
-          </p:cNvPr>
-          <p:cNvSpPr>
-            <a:spLocks noGrp="1"/>
-          </p:cNvSpPr>
-          <p:nvPr>
-            <p:ph type="dt" sz="half" idx="10"/>
-          </p:nvPr>
-        </p:nvSpPr>
-        <p:spPr/>
-        <p:txBody>
-          <a:bodyPr/>
-          <a:lstStyle/>
-          <a:p>
-            <a:fld id="{5DAA0823-BE8A-6341-8413-2CF5840475D1}" type="datetime5">
-              <a:rPr lang="en-US" smtClean="0"/>
-              <a:t>22-Sep-26</a:t>
             </a:fld>
             <a:endParaRPr lang="en-US"/>
           </a:p>
@@ -14235,7 +14525,7 @@
         <p:spPr/>
         <p:txBody>
           <a:bodyPr>
-            <a:normAutofit/>
+            <a:normAutofit fontScale="90000"/>
           </a:bodyPr>
           <a:lstStyle/>
           <a:p>
@@ -14265,7 +14555,7 @@
         <p:spPr/>
         <p:txBody>
           <a:bodyPr>
-            <a:normAutofit/>
+            <a:normAutofit lnSpcReduction="10000"/>
           </a:bodyPr>
           <a:lstStyle/>
           <a:p>
@@ -14301,6 +14591,35 @@
               <a:rPr lang="en-US" dirty="0"/>
               <a:t>Two defaults: notice and alert</a:t>
             </a:r>
+          </a:p>
+        </p:txBody>
+      </p:sp>
+      <p:sp>
+        <p:nvSpPr>
+          <p:cNvPr id="7" name="Date Placeholder 6">
+            <a:extLst>
+              <a:ext uri="{FF2B5EF4-FFF2-40B4-BE49-F238E27FC236}">
+                <a16:creationId xmlns:a16="http://schemas.microsoft.com/office/drawing/2014/main" id="{E4901D72-B443-2660-CBD6-22396C37B453}"/>
+              </a:ext>
+            </a:extLst>
+          </p:cNvPr>
+          <p:cNvSpPr>
+            <a:spLocks noGrp="1"/>
+          </p:cNvSpPr>
+          <p:nvPr>
+            <p:ph type="dt" sz="half" idx="10"/>
+          </p:nvPr>
+        </p:nvSpPr>
+        <p:spPr/>
+        <p:txBody>
+          <a:bodyPr/>
+          <a:lstStyle/>
+          <a:p>
+            <a:fld id="{2937C9AE-2253-9242-9D92-C90771F0B841}" type="datetime1">
+              <a:rPr lang="en-US" smtClean="0"/>
+              <a:t>10/8/26</a:t>
+            </a:fld>
+            <a:endParaRPr lang="en-US"/>
           </a:p>
         </p:txBody>
       </p:sp>
@@ -14356,35 +14675,6 @@
             <a:fld id="{62CBAC88-EF5B-3148-888C-824478CD1B05}" type="slidenum">
               <a:rPr lang="en-US" smtClean="0"/>
               <a:t>47</a:t>
-            </a:fld>
-            <a:endParaRPr lang="en-US"/>
-          </a:p>
-        </p:txBody>
-      </p:sp>
-      <p:sp>
-        <p:nvSpPr>
-          <p:cNvPr id="7" name="Date Placeholder 6">
-            <a:extLst>
-              <a:ext uri="{FF2B5EF4-FFF2-40B4-BE49-F238E27FC236}">
-                <a16:creationId xmlns:a16="http://schemas.microsoft.com/office/drawing/2014/main" id="{E4901D72-B443-2660-CBD6-22396C37B453}"/>
-              </a:ext>
-            </a:extLst>
-          </p:cNvPr>
-          <p:cNvSpPr>
-            <a:spLocks noGrp="1"/>
-          </p:cNvSpPr>
-          <p:nvPr>
-            <p:ph type="dt" sz="half" idx="10"/>
-          </p:nvPr>
-        </p:nvSpPr>
-        <p:spPr/>
-        <p:txBody>
-          <a:bodyPr/>
-          <a:lstStyle/>
-          <a:p>
-            <a:fld id="{BEA5676E-5E7B-1845-B5EB-A601497F53B4}" type="datetime5">
-              <a:rPr lang="en-US" smtClean="0"/>
-              <a:t>22-Sep-26</a:t>
             </a:fld>
             <a:endParaRPr lang="en-US"/>
           </a:p>
@@ -14402,12 +14692,12 @@
   </p:clrMapOvr>
   <mc:AlternateContent xmlns:mc="http://schemas.openxmlformats.org/markup-compatibility/2006" xmlns:p14="http://schemas.microsoft.com/office/powerpoint/2010/main">
     <mc:Choice Requires="p14">
-      <p:transition spd="slow" p14:dur="1200">
-        <p14:prism/>
+      <p:transition spd="slow" p14:dur="2000">
+        <p14:prism isContent="1"/>
       </p:transition>
     </mc:Choice>
     <mc:Fallback xmlns="">
-      <p:transition xmlns:p14="http://schemas.microsoft.com/office/powerpoint/2010/main" spd="slow">
+      <p:transition spd="slow">
         <p:fade/>
       </p:transition>
     </mc:Fallback>
@@ -14451,7 +14741,7 @@
         <p:spPr/>
         <p:txBody>
           <a:bodyPr>
-            <a:normAutofit/>
+            <a:normAutofit fontScale="90000"/>
           </a:bodyPr>
           <a:lstStyle/>
           <a:p>
@@ -14481,7 +14771,7 @@
         <p:spPr/>
         <p:txBody>
           <a:bodyPr>
-            <a:normAutofit fontScale="92500" lnSpcReduction="20000"/>
+            <a:normAutofit fontScale="85000" lnSpcReduction="20000"/>
           </a:bodyPr>
           <a:lstStyle/>
           <a:p>
@@ -14574,6 +14864,35 @@
           </a:p>
           <a:p>
             <a:endParaRPr lang="en-US" dirty="0"/>
+          </a:p>
+        </p:txBody>
+      </p:sp>
+      <p:sp>
+        <p:nvSpPr>
+          <p:cNvPr id="7" name="Date Placeholder 6">
+            <a:extLst>
+              <a:ext uri="{FF2B5EF4-FFF2-40B4-BE49-F238E27FC236}">
+                <a16:creationId xmlns:a16="http://schemas.microsoft.com/office/drawing/2014/main" id="{DACECB07-7DD6-C769-09C8-A23A26771E59}"/>
+              </a:ext>
+            </a:extLst>
+          </p:cNvPr>
+          <p:cNvSpPr>
+            <a:spLocks noGrp="1"/>
+          </p:cNvSpPr>
+          <p:nvPr>
+            <p:ph type="dt" sz="half" idx="10"/>
+          </p:nvPr>
+        </p:nvSpPr>
+        <p:spPr/>
+        <p:txBody>
+          <a:bodyPr/>
+          <a:lstStyle/>
+          <a:p>
+            <a:fld id="{360DA297-E892-9940-9559-D6EB772FC4F8}" type="datetime1">
+              <a:rPr lang="en-US" smtClean="0"/>
+              <a:t>10/8/26</a:t>
+            </a:fld>
+            <a:endParaRPr lang="en-US"/>
           </a:p>
         </p:txBody>
       </p:sp>
@@ -14629,35 +14948,6 @@
             <a:fld id="{62CBAC88-EF5B-3148-888C-824478CD1B05}" type="slidenum">
               <a:rPr lang="en-US" smtClean="0"/>
               <a:t>48</a:t>
-            </a:fld>
-            <a:endParaRPr lang="en-US"/>
-          </a:p>
-        </p:txBody>
-      </p:sp>
-      <p:sp>
-        <p:nvSpPr>
-          <p:cNvPr id="7" name="Date Placeholder 6">
-            <a:extLst>
-              <a:ext uri="{FF2B5EF4-FFF2-40B4-BE49-F238E27FC236}">
-                <a16:creationId xmlns:a16="http://schemas.microsoft.com/office/drawing/2014/main" id="{DACECB07-7DD6-C769-09C8-A23A26771E59}"/>
-              </a:ext>
-            </a:extLst>
-          </p:cNvPr>
-          <p:cNvSpPr>
-            <a:spLocks noGrp="1"/>
-          </p:cNvSpPr>
-          <p:nvPr>
-            <p:ph type="dt" sz="half" idx="10"/>
-          </p:nvPr>
-        </p:nvSpPr>
-        <p:spPr/>
-        <p:txBody>
-          <a:bodyPr/>
-          <a:lstStyle/>
-          <a:p>
-            <a:fld id="{85C56534-930D-9443-9AEF-A9E1EF9E2C02}" type="datetime5">
-              <a:rPr lang="en-US" smtClean="0"/>
-              <a:t>22-Sep-26</a:t>
             </a:fld>
             <a:endParaRPr lang="en-US"/>
           </a:p>
@@ -14724,7 +15014,7 @@
         <p:spPr/>
         <p:txBody>
           <a:bodyPr>
-            <a:normAutofit/>
+            <a:normAutofit fontScale="90000"/>
           </a:bodyPr>
           <a:lstStyle/>
           <a:p>
@@ -14754,7 +15044,7 @@
         <p:spPr/>
         <p:txBody>
           <a:bodyPr>
-            <a:normAutofit fontScale="92500" lnSpcReduction="10000"/>
+            <a:normAutofit fontScale="92500" lnSpcReduction="20000"/>
           </a:bodyPr>
           <a:lstStyle/>
           <a:p>
@@ -14821,6 +15111,35 @@
               <a:rPr lang="en-US" dirty="0"/>
               <a:t>&lt;% end %&gt;</a:t>
             </a:r>
+          </a:p>
+        </p:txBody>
+      </p:sp>
+      <p:sp>
+        <p:nvSpPr>
+          <p:cNvPr id="7" name="Date Placeholder 6">
+            <a:extLst>
+              <a:ext uri="{FF2B5EF4-FFF2-40B4-BE49-F238E27FC236}">
+                <a16:creationId xmlns:a16="http://schemas.microsoft.com/office/drawing/2014/main" id="{512CDE1A-1A06-DA6A-1E9D-B16B59315512}"/>
+              </a:ext>
+            </a:extLst>
+          </p:cNvPr>
+          <p:cNvSpPr>
+            <a:spLocks noGrp="1"/>
+          </p:cNvSpPr>
+          <p:nvPr>
+            <p:ph type="dt" sz="half" idx="10"/>
+          </p:nvPr>
+        </p:nvSpPr>
+        <p:spPr/>
+        <p:txBody>
+          <a:bodyPr/>
+          <a:lstStyle/>
+          <a:p>
+            <a:fld id="{0F21B652-A788-C942-9914-5CA0F38A1C27}" type="datetime1">
+              <a:rPr lang="en-US" smtClean="0"/>
+              <a:t>10/8/26</a:t>
+            </a:fld>
+            <a:endParaRPr lang="en-US"/>
           </a:p>
         </p:txBody>
       </p:sp>
@@ -14876,35 +15195,6 @@
             <a:fld id="{62CBAC88-EF5B-3148-888C-824478CD1B05}" type="slidenum">
               <a:rPr lang="en-US" smtClean="0"/>
               <a:t>49</a:t>
-            </a:fld>
-            <a:endParaRPr lang="en-US"/>
-          </a:p>
-        </p:txBody>
-      </p:sp>
-      <p:sp>
-        <p:nvSpPr>
-          <p:cNvPr id="7" name="Date Placeholder 6">
-            <a:extLst>
-              <a:ext uri="{FF2B5EF4-FFF2-40B4-BE49-F238E27FC236}">
-                <a16:creationId xmlns:a16="http://schemas.microsoft.com/office/drawing/2014/main" id="{512CDE1A-1A06-DA6A-1E9D-B16B59315512}"/>
-              </a:ext>
-            </a:extLst>
-          </p:cNvPr>
-          <p:cNvSpPr>
-            <a:spLocks noGrp="1"/>
-          </p:cNvSpPr>
-          <p:nvPr>
-            <p:ph type="dt" sz="half" idx="10"/>
-          </p:nvPr>
-        </p:nvSpPr>
-        <p:spPr/>
-        <p:txBody>
-          <a:bodyPr/>
-          <a:lstStyle/>
-          <a:p>
-            <a:fld id="{8C6433A7-47A8-0E4C-A4AB-23827F12FB38}" type="datetime5">
-              <a:rPr lang="en-US" smtClean="0"/>
-              <a:t>22-Sep-26</a:t>
             </a:fld>
             <a:endParaRPr lang="en-US"/>
           </a:p>
@@ -14920,6 +15210,18 @@
   <p:clrMapOvr>
     <a:masterClrMapping/>
   </p:clrMapOvr>
+  <mc:AlternateContent xmlns:mc="http://schemas.openxmlformats.org/markup-compatibility/2006" xmlns:p14="http://schemas.microsoft.com/office/powerpoint/2010/main">
+    <mc:Choice Requires="p14">
+      <p:transition spd="slow" p14:dur="2000">
+        <p14:prism isContent="1"/>
+      </p:transition>
+    </mc:Choice>
+    <mc:Fallback xmlns="">
+      <p:transition spd="slow">
+        <p:fade/>
+      </p:transition>
+    </mc:Fallback>
+  </mc:AlternateContent>
 </p:sld>
 </file>
 
@@ -14958,7 +15260,9 @@
         </p:nvSpPr>
         <p:spPr/>
         <p:txBody>
-          <a:bodyPr/>
+          <a:bodyPr>
+            <a:normAutofit fontScale="90000"/>
+          </a:bodyPr>
           <a:lstStyle/>
           <a:p>
             <a:r>
@@ -14987,7 +15291,7 @@
         <p:spPr/>
         <p:txBody>
           <a:bodyPr>
-            <a:normAutofit fontScale="85000" lnSpcReduction="20000"/>
+            <a:normAutofit fontScale="77500" lnSpcReduction="20000"/>
           </a:bodyPr>
           <a:lstStyle/>
           <a:p>
@@ -15035,6 +15339,35 @@
           </a:p>
           <a:p>
             <a:endParaRPr lang="en-US" dirty="0"/>
+          </a:p>
+        </p:txBody>
+      </p:sp>
+      <p:sp>
+        <p:nvSpPr>
+          <p:cNvPr id="7" name="Date Placeholder 6">
+            <a:extLst>
+              <a:ext uri="{FF2B5EF4-FFF2-40B4-BE49-F238E27FC236}">
+                <a16:creationId xmlns:a16="http://schemas.microsoft.com/office/drawing/2014/main" id="{62786F6E-5D11-C631-F462-09EB756FEB3B}"/>
+              </a:ext>
+            </a:extLst>
+          </p:cNvPr>
+          <p:cNvSpPr>
+            <a:spLocks noGrp="1"/>
+          </p:cNvSpPr>
+          <p:nvPr>
+            <p:ph type="dt" sz="half" idx="10"/>
+          </p:nvPr>
+        </p:nvSpPr>
+        <p:spPr/>
+        <p:txBody>
+          <a:bodyPr/>
+          <a:lstStyle/>
+          <a:p>
+            <a:fld id="{CDBB04BF-F3F9-9E4D-AB20-FC800FFEDCF9}" type="datetime1">
+              <a:rPr lang="en-US" smtClean="0"/>
+              <a:t>10/8/26</a:t>
+            </a:fld>
+            <a:endParaRPr lang="en-US"/>
           </a:p>
         </p:txBody>
       </p:sp>
@@ -15090,35 +15423,6 @@
             <a:fld id="{62CBAC88-EF5B-3148-888C-824478CD1B05}" type="slidenum">
               <a:rPr lang="en-US" smtClean="0"/>
               <a:t>5</a:t>
-            </a:fld>
-            <a:endParaRPr lang="en-US"/>
-          </a:p>
-        </p:txBody>
-      </p:sp>
-      <p:sp>
-        <p:nvSpPr>
-          <p:cNvPr id="7" name="Date Placeholder 6">
-            <a:extLst>
-              <a:ext uri="{FF2B5EF4-FFF2-40B4-BE49-F238E27FC236}">
-                <a16:creationId xmlns:a16="http://schemas.microsoft.com/office/drawing/2014/main" id="{62786F6E-5D11-C631-F462-09EB756FEB3B}"/>
-              </a:ext>
-            </a:extLst>
-          </p:cNvPr>
-          <p:cNvSpPr>
-            <a:spLocks noGrp="1"/>
-          </p:cNvSpPr>
-          <p:nvPr>
-            <p:ph type="dt" sz="half" idx="10"/>
-          </p:nvPr>
-        </p:nvSpPr>
-        <p:spPr/>
-        <p:txBody>
-          <a:bodyPr/>
-          <a:lstStyle/>
-          <a:p>
-            <a:fld id="{FE48365E-C25A-BD44-B535-AB4E07360761}" type="datetime5">
-              <a:rPr lang="en-US" smtClean="0"/>
-              <a:t>22-Sep-26</a:t>
             </a:fld>
             <a:endParaRPr lang="en-US"/>
           </a:p>
@@ -15136,12 +15440,12 @@
   </p:clrMapOvr>
   <mc:AlternateContent xmlns:mc="http://schemas.openxmlformats.org/markup-compatibility/2006" xmlns:p14="http://schemas.microsoft.com/office/powerpoint/2010/main">
     <mc:Choice Requires="p14">
-      <p:transition spd="slow" p14:dur="1200">
-        <p14:prism/>
+      <p:transition spd="slow" p14:dur="2000">
+        <p14:prism isContent="1"/>
       </p:transition>
     </mc:Choice>
     <mc:Fallback xmlns="">
-      <p:transition xmlns:p14="http://schemas.microsoft.com/office/powerpoint/2010/main" spd="slow">
+      <p:transition spd="slow">
         <p:fade/>
       </p:transition>
     </mc:Fallback>
@@ -15185,7 +15489,7 @@
         <p:spPr/>
         <p:txBody>
           <a:bodyPr>
-            <a:normAutofit/>
+            <a:normAutofit fontScale="90000"/>
           </a:bodyPr>
           <a:lstStyle/>
           <a:p>
@@ -15215,7 +15519,7 @@
         <p:spPr/>
         <p:txBody>
           <a:bodyPr>
-            <a:normAutofit fontScale="85000" lnSpcReduction="20000"/>
+            <a:normAutofit fontScale="70000" lnSpcReduction="20000"/>
           </a:bodyPr>
           <a:lstStyle/>
           <a:p>
@@ -15345,6 +15649,35 @@
       </p:sp>
       <p:sp>
         <p:nvSpPr>
+          <p:cNvPr id="7" name="Date Placeholder 6">
+            <a:extLst>
+              <a:ext uri="{FF2B5EF4-FFF2-40B4-BE49-F238E27FC236}">
+                <a16:creationId xmlns:a16="http://schemas.microsoft.com/office/drawing/2014/main" id="{F82471F0-E19B-D190-BE76-25140F61362F}"/>
+              </a:ext>
+            </a:extLst>
+          </p:cNvPr>
+          <p:cNvSpPr>
+            <a:spLocks noGrp="1"/>
+          </p:cNvSpPr>
+          <p:nvPr>
+            <p:ph type="dt" sz="half" idx="10"/>
+          </p:nvPr>
+        </p:nvSpPr>
+        <p:spPr/>
+        <p:txBody>
+          <a:bodyPr/>
+          <a:lstStyle/>
+          <a:p>
+            <a:fld id="{215EC6A5-94AB-D14E-B271-7EC62EAB14E1}" type="datetime1">
+              <a:rPr lang="en-US" smtClean="0"/>
+              <a:t>10/8/26</a:t>
+            </a:fld>
+            <a:endParaRPr lang="en-US"/>
+          </a:p>
+        </p:txBody>
+      </p:sp>
+      <p:sp>
+        <p:nvSpPr>
           <p:cNvPr id="4" name="Footer Placeholder 3">
             <a:extLst>
               <a:ext uri="{FF2B5EF4-FFF2-40B4-BE49-F238E27FC236}">
@@ -15395,35 +15728,6 @@
             <a:fld id="{62CBAC88-EF5B-3148-888C-824478CD1B05}" type="slidenum">
               <a:rPr lang="en-US" smtClean="0"/>
               <a:t>50</a:t>
-            </a:fld>
-            <a:endParaRPr lang="en-US"/>
-          </a:p>
-        </p:txBody>
-      </p:sp>
-      <p:sp>
-        <p:nvSpPr>
-          <p:cNvPr id="7" name="Date Placeholder 6">
-            <a:extLst>
-              <a:ext uri="{FF2B5EF4-FFF2-40B4-BE49-F238E27FC236}">
-                <a16:creationId xmlns:a16="http://schemas.microsoft.com/office/drawing/2014/main" id="{F82471F0-E19B-D190-BE76-25140F61362F}"/>
-              </a:ext>
-            </a:extLst>
-          </p:cNvPr>
-          <p:cNvSpPr>
-            <a:spLocks noGrp="1"/>
-          </p:cNvSpPr>
-          <p:nvPr>
-            <p:ph type="dt" sz="half" idx="10"/>
-          </p:nvPr>
-        </p:nvSpPr>
-        <p:spPr/>
-        <p:txBody>
-          <a:bodyPr/>
-          <a:lstStyle/>
-          <a:p>
-            <a:fld id="{92589934-1A55-5446-A98E-0C0C010596F5}" type="datetime5">
-              <a:rPr lang="en-US" smtClean="0"/>
-              <a:t>22-Sep-26</a:t>
             </a:fld>
             <a:endParaRPr lang="en-US"/>
           </a:p>
@@ -15441,12 +15745,12 @@
   </p:clrMapOvr>
   <mc:AlternateContent xmlns:mc="http://schemas.openxmlformats.org/markup-compatibility/2006" xmlns:p14="http://schemas.microsoft.com/office/powerpoint/2010/main">
     <mc:Choice Requires="p14">
-      <p:transition spd="slow" p14:dur="1200">
-        <p14:prism/>
+      <p:transition spd="slow" p14:dur="2000">
+        <p14:prism isContent="1"/>
       </p:transition>
     </mc:Choice>
     <mc:Fallback xmlns="">
-      <p:transition xmlns:p14="http://schemas.microsoft.com/office/powerpoint/2010/main" spd="slow">
+      <p:transition spd="slow">
         <p:fade/>
       </p:transition>
     </mc:Fallback>
@@ -15490,7 +15794,7 @@
         <p:spPr/>
         <p:txBody>
           <a:bodyPr>
-            <a:normAutofit/>
+            <a:normAutofit fontScale="90000"/>
           </a:bodyPr>
           <a:lstStyle/>
           <a:p>
@@ -15520,7 +15824,7 @@
         <p:spPr/>
         <p:txBody>
           <a:bodyPr>
-            <a:normAutofit fontScale="92500" lnSpcReduction="10000"/>
+            <a:normAutofit fontScale="85000" lnSpcReduction="10000"/>
           </a:bodyPr>
           <a:lstStyle/>
           <a:p>
@@ -15562,6 +15866,35 @@
               <a:rPr lang="en-US" dirty="0"/>
               <a:t>Even writing tests after implementation is better than no tests</a:t>
             </a:r>
+          </a:p>
+        </p:txBody>
+      </p:sp>
+      <p:sp>
+        <p:nvSpPr>
+          <p:cNvPr id="7" name="Date Placeholder 6">
+            <a:extLst>
+              <a:ext uri="{FF2B5EF4-FFF2-40B4-BE49-F238E27FC236}">
+                <a16:creationId xmlns:a16="http://schemas.microsoft.com/office/drawing/2014/main" id="{D761CE81-106D-E2D5-75DB-4BDAC6E2164B}"/>
+              </a:ext>
+            </a:extLst>
+          </p:cNvPr>
+          <p:cNvSpPr>
+            <a:spLocks noGrp="1"/>
+          </p:cNvSpPr>
+          <p:nvPr>
+            <p:ph type="dt" sz="half" idx="10"/>
+          </p:nvPr>
+        </p:nvSpPr>
+        <p:spPr/>
+        <p:txBody>
+          <a:bodyPr/>
+          <a:lstStyle/>
+          <a:p>
+            <a:fld id="{49E7320A-5618-9348-9A26-17EB9A2A34D8}" type="datetime1">
+              <a:rPr lang="en-US" smtClean="0"/>
+              <a:t>10/8/26</a:t>
+            </a:fld>
+            <a:endParaRPr lang="en-US"/>
           </a:p>
         </p:txBody>
       </p:sp>
@@ -15617,35 +15950,6 @@
             <a:fld id="{62CBAC88-EF5B-3148-888C-824478CD1B05}" type="slidenum">
               <a:rPr lang="en-US" smtClean="0"/>
               <a:t>51</a:t>
-            </a:fld>
-            <a:endParaRPr lang="en-US"/>
-          </a:p>
-        </p:txBody>
-      </p:sp>
-      <p:sp>
-        <p:nvSpPr>
-          <p:cNvPr id="7" name="Date Placeholder 6">
-            <a:extLst>
-              <a:ext uri="{FF2B5EF4-FFF2-40B4-BE49-F238E27FC236}">
-                <a16:creationId xmlns:a16="http://schemas.microsoft.com/office/drawing/2014/main" id="{D761CE81-106D-E2D5-75DB-4BDAC6E2164B}"/>
-              </a:ext>
-            </a:extLst>
-          </p:cNvPr>
-          <p:cNvSpPr>
-            <a:spLocks noGrp="1"/>
-          </p:cNvSpPr>
-          <p:nvPr>
-            <p:ph type="dt" sz="half" idx="10"/>
-          </p:nvPr>
-        </p:nvSpPr>
-        <p:spPr/>
-        <p:txBody>
-          <a:bodyPr/>
-          <a:lstStyle/>
-          <a:p>
-            <a:fld id="{F31DB80B-8CB8-2646-AF6A-94F15B451640}" type="datetime5">
-              <a:rPr lang="en-US" smtClean="0"/>
-              <a:t>22-Sep-26</a:t>
             </a:fld>
             <a:endParaRPr lang="en-US"/>
           </a:p>
@@ -15663,12 +15967,12 @@
   </p:clrMapOvr>
   <mc:AlternateContent xmlns:mc="http://schemas.openxmlformats.org/markup-compatibility/2006" xmlns:p14="http://schemas.microsoft.com/office/powerpoint/2010/main">
     <mc:Choice Requires="p14">
-      <p:transition spd="slow" p14:dur="1200">
-        <p14:prism/>
+      <p:transition spd="slow" p14:dur="2000">
+        <p14:prism isContent="1"/>
       </p:transition>
     </mc:Choice>
     <mc:Fallback xmlns="">
-      <p:transition xmlns:p14="http://schemas.microsoft.com/office/powerpoint/2010/main" spd="slow">
+      <p:transition spd="slow">
         <p:fade/>
       </p:transition>
     </mc:Fallback>
@@ -15712,7 +16016,7 @@
         <p:spPr/>
         <p:txBody>
           <a:bodyPr>
-            <a:normAutofit/>
+            <a:normAutofit fontScale="90000"/>
           </a:bodyPr>
           <a:lstStyle/>
           <a:p>
@@ -15890,6 +16194,35 @@
       </p:sp>
       <p:sp>
         <p:nvSpPr>
+          <p:cNvPr id="7" name="Date Placeholder 6">
+            <a:extLst>
+              <a:ext uri="{FF2B5EF4-FFF2-40B4-BE49-F238E27FC236}">
+                <a16:creationId xmlns:a16="http://schemas.microsoft.com/office/drawing/2014/main" id="{60CF3A09-AB8D-C7AE-77BB-72D2912FD175}"/>
+              </a:ext>
+            </a:extLst>
+          </p:cNvPr>
+          <p:cNvSpPr>
+            <a:spLocks noGrp="1"/>
+          </p:cNvSpPr>
+          <p:nvPr>
+            <p:ph type="dt" sz="half" idx="10"/>
+          </p:nvPr>
+        </p:nvSpPr>
+        <p:spPr/>
+        <p:txBody>
+          <a:bodyPr/>
+          <a:lstStyle/>
+          <a:p>
+            <a:fld id="{D34F8885-4390-DC44-8FBF-684C655AFB14}" type="datetime1">
+              <a:rPr lang="en-US" smtClean="0"/>
+              <a:t>10/8/26</a:t>
+            </a:fld>
+            <a:endParaRPr lang="en-US"/>
+          </a:p>
+        </p:txBody>
+      </p:sp>
+      <p:sp>
+        <p:nvSpPr>
           <p:cNvPr id="4" name="Footer Placeholder 3">
             <a:extLst>
               <a:ext uri="{FF2B5EF4-FFF2-40B4-BE49-F238E27FC236}">
@@ -15940,35 +16273,6 @@
             <a:fld id="{62CBAC88-EF5B-3148-888C-824478CD1B05}" type="slidenum">
               <a:rPr lang="en-US" smtClean="0"/>
               <a:t>52</a:t>
-            </a:fld>
-            <a:endParaRPr lang="en-US"/>
-          </a:p>
-        </p:txBody>
-      </p:sp>
-      <p:sp>
-        <p:nvSpPr>
-          <p:cNvPr id="7" name="Date Placeholder 6">
-            <a:extLst>
-              <a:ext uri="{FF2B5EF4-FFF2-40B4-BE49-F238E27FC236}">
-                <a16:creationId xmlns:a16="http://schemas.microsoft.com/office/drawing/2014/main" id="{60CF3A09-AB8D-C7AE-77BB-72D2912FD175}"/>
-              </a:ext>
-            </a:extLst>
-          </p:cNvPr>
-          <p:cNvSpPr>
-            <a:spLocks noGrp="1"/>
-          </p:cNvSpPr>
-          <p:nvPr>
-            <p:ph type="dt" sz="half" idx="10"/>
-          </p:nvPr>
-        </p:nvSpPr>
-        <p:spPr/>
-        <p:txBody>
-          <a:bodyPr/>
-          <a:lstStyle/>
-          <a:p>
-            <a:fld id="{FB942D24-AEF9-AC4C-A4F0-38DA28EBD6A1}" type="datetime5">
-              <a:rPr lang="en-US" smtClean="0"/>
-              <a:t>22-Sep-26</a:t>
             </a:fld>
             <a:endParaRPr lang="en-US"/>
           </a:p>
@@ -15986,12 +16290,12 @@
   </p:clrMapOvr>
   <mc:AlternateContent xmlns:mc="http://schemas.openxmlformats.org/markup-compatibility/2006" xmlns:p14="http://schemas.microsoft.com/office/powerpoint/2010/main">
     <mc:Choice Requires="p14">
-      <p:transition spd="slow" p14:dur="1200">
-        <p14:prism/>
+      <p:transition spd="slow" p14:dur="2000">
+        <p14:prism isContent="1"/>
       </p:transition>
     </mc:Choice>
     <mc:Fallback xmlns="">
-      <p:transition xmlns:p14="http://schemas.microsoft.com/office/powerpoint/2010/main" spd="slow">
+      <p:transition spd="slow">
         <p:fade/>
       </p:transition>
     </mc:Fallback>
@@ -16035,7 +16339,7 @@
         <p:spPr/>
         <p:txBody>
           <a:bodyPr>
-            <a:normAutofit/>
+            <a:normAutofit fontScale="90000"/>
           </a:bodyPr>
           <a:lstStyle/>
           <a:p>
@@ -16070,7 +16374,7 @@
         </p:spPr>
         <p:txBody>
           <a:bodyPr>
-            <a:normAutofit fontScale="92500" lnSpcReduction="10000"/>
+            <a:normAutofit fontScale="92500" lnSpcReduction="20000"/>
           </a:bodyPr>
           <a:lstStyle/>
           <a:p>
@@ -16131,6 +16435,35 @@
           </a:p>
           <a:p>
             <a:endParaRPr lang="en-US" dirty="0"/>
+          </a:p>
+        </p:txBody>
+      </p:sp>
+      <p:sp>
+        <p:nvSpPr>
+          <p:cNvPr id="7" name="Date Placeholder 6">
+            <a:extLst>
+              <a:ext uri="{FF2B5EF4-FFF2-40B4-BE49-F238E27FC236}">
+                <a16:creationId xmlns:a16="http://schemas.microsoft.com/office/drawing/2014/main" id="{F66371A8-A358-D018-9D7E-958C6EB8DE8A}"/>
+              </a:ext>
+            </a:extLst>
+          </p:cNvPr>
+          <p:cNvSpPr>
+            <a:spLocks noGrp="1"/>
+          </p:cNvSpPr>
+          <p:nvPr>
+            <p:ph type="dt" sz="half" idx="10"/>
+          </p:nvPr>
+        </p:nvSpPr>
+        <p:spPr/>
+        <p:txBody>
+          <a:bodyPr/>
+          <a:lstStyle/>
+          <a:p>
+            <a:fld id="{E80841C2-5223-B442-A238-76F371160C7E}" type="datetime1">
+              <a:rPr lang="en-US" smtClean="0"/>
+              <a:t>10/8/26</a:t>
+            </a:fld>
+            <a:endParaRPr lang="en-US"/>
           </a:p>
         </p:txBody>
       </p:sp>
@@ -16186,35 +16519,6 @@
             <a:fld id="{62CBAC88-EF5B-3148-888C-824478CD1B05}" type="slidenum">
               <a:rPr lang="en-US" smtClean="0"/>
               <a:t>53</a:t>
-            </a:fld>
-            <a:endParaRPr lang="en-US"/>
-          </a:p>
-        </p:txBody>
-      </p:sp>
-      <p:sp>
-        <p:nvSpPr>
-          <p:cNvPr id="7" name="Date Placeholder 6">
-            <a:extLst>
-              <a:ext uri="{FF2B5EF4-FFF2-40B4-BE49-F238E27FC236}">
-                <a16:creationId xmlns:a16="http://schemas.microsoft.com/office/drawing/2014/main" id="{F66371A8-A358-D018-9D7E-958C6EB8DE8A}"/>
-              </a:ext>
-            </a:extLst>
-          </p:cNvPr>
-          <p:cNvSpPr>
-            <a:spLocks noGrp="1"/>
-          </p:cNvSpPr>
-          <p:nvPr>
-            <p:ph type="dt" sz="half" idx="10"/>
-          </p:nvPr>
-        </p:nvSpPr>
-        <p:spPr/>
-        <p:txBody>
-          <a:bodyPr/>
-          <a:lstStyle/>
-          <a:p>
-            <a:fld id="{518EF62C-B5CA-2041-BB9D-9D838BAB96EB}" type="datetime5">
-              <a:rPr lang="en-US" smtClean="0"/>
-              <a:t>22-Sep-26</a:t>
             </a:fld>
             <a:endParaRPr lang="en-US"/>
           </a:p>
@@ -16232,12 +16536,12 @@
   </p:clrMapOvr>
   <mc:AlternateContent xmlns:mc="http://schemas.openxmlformats.org/markup-compatibility/2006" xmlns:p14="http://schemas.microsoft.com/office/powerpoint/2010/main">
     <mc:Choice Requires="p14">
-      <p:transition spd="slow" p14:dur="1200">
-        <p14:prism/>
+      <p:transition spd="slow" p14:dur="2000">
+        <p14:prism isContent="1"/>
       </p:transition>
     </mc:Choice>
     <mc:Fallback xmlns="">
-      <p:transition xmlns:p14="http://schemas.microsoft.com/office/powerpoint/2010/main" spd="slow">
+      <p:transition spd="slow">
         <p:fade/>
       </p:transition>
     </mc:Fallback>
@@ -16281,7 +16585,7 @@
         <p:spPr/>
         <p:txBody>
           <a:bodyPr>
-            <a:normAutofit/>
+            <a:normAutofit fontScale="90000"/>
           </a:bodyPr>
           <a:lstStyle/>
           <a:p>
@@ -16353,6 +16657,35 @@
       </p:sp>
       <p:sp>
         <p:nvSpPr>
+          <p:cNvPr id="7" name="Date Placeholder 6">
+            <a:extLst>
+              <a:ext uri="{FF2B5EF4-FFF2-40B4-BE49-F238E27FC236}">
+                <a16:creationId xmlns:a16="http://schemas.microsoft.com/office/drawing/2014/main" id="{F1D75AAC-DEAF-5E9D-41A3-8169834E4681}"/>
+              </a:ext>
+            </a:extLst>
+          </p:cNvPr>
+          <p:cNvSpPr>
+            <a:spLocks noGrp="1"/>
+          </p:cNvSpPr>
+          <p:nvPr>
+            <p:ph type="dt" sz="half" idx="10"/>
+          </p:nvPr>
+        </p:nvSpPr>
+        <p:spPr/>
+        <p:txBody>
+          <a:bodyPr/>
+          <a:lstStyle/>
+          <a:p>
+            <a:fld id="{5160515D-0852-2343-865C-1BBDDA57E9EE}" type="datetime1">
+              <a:rPr lang="en-US" smtClean="0"/>
+              <a:t>10/8/26</a:t>
+            </a:fld>
+            <a:endParaRPr lang="en-US"/>
+          </a:p>
+        </p:txBody>
+      </p:sp>
+      <p:sp>
+        <p:nvSpPr>
           <p:cNvPr id="4" name="Footer Placeholder 3">
             <a:extLst>
               <a:ext uri="{FF2B5EF4-FFF2-40B4-BE49-F238E27FC236}">
@@ -16403,35 +16736,6 @@
             <a:fld id="{62CBAC88-EF5B-3148-888C-824478CD1B05}" type="slidenum">
               <a:rPr lang="en-US" smtClean="0"/>
               <a:t>54</a:t>
-            </a:fld>
-            <a:endParaRPr lang="en-US"/>
-          </a:p>
-        </p:txBody>
-      </p:sp>
-      <p:sp>
-        <p:nvSpPr>
-          <p:cNvPr id="7" name="Date Placeholder 6">
-            <a:extLst>
-              <a:ext uri="{FF2B5EF4-FFF2-40B4-BE49-F238E27FC236}">
-                <a16:creationId xmlns:a16="http://schemas.microsoft.com/office/drawing/2014/main" id="{F1D75AAC-DEAF-5E9D-41A3-8169834E4681}"/>
-              </a:ext>
-            </a:extLst>
-          </p:cNvPr>
-          <p:cNvSpPr>
-            <a:spLocks noGrp="1"/>
-          </p:cNvSpPr>
-          <p:nvPr>
-            <p:ph type="dt" sz="half" idx="10"/>
-          </p:nvPr>
-        </p:nvSpPr>
-        <p:spPr/>
-        <p:txBody>
-          <a:bodyPr/>
-          <a:lstStyle/>
-          <a:p>
-            <a:fld id="{C5206D2D-090F-F844-9C7C-F80226B8D598}" type="datetime5">
-              <a:rPr lang="en-US" smtClean="0"/>
-              <a:t>22-Sep-26</a:t>
             </a:fld>
             <a:endParaRPr lang="en-US"/>
           </a:p>
@@ -16498,7 +16802,7 @@
         <p:spPr/>
         <p:txBody>
           <a:bodyPr>
-            <a:normAutofit/>
+            <a:normAutofit fontScale="90000"/>
           </a:bodyPr>
           <a:lstStyle/>
           <a:p>
@@ -16528,7 +16832,7 @@
         <p:spPr/>
         <p:txBody>
           <a:bodyPr>
-            <a:normAutofit/>
+            <a:normAutofit lnSpcReduction="10000"/>
           </a:bodyPr>
           <a:lstStyle/>
           <a:p>
@@ -16570,6 +16874,35 @@
               <a:rPr lang="en-US" dirty="0"/>
               <a:t>Uses Capybara and Selenium</a:t>
             </a:r>
+          </a:p>
+        </p:txBody>
+      </p:sp>
+      <p:sp>
+        <p:nvSpPr>
+          <p:cNvPr id="7" name="Date Placeholder 6">
+            <a:extLst>
+              <a:ext uri="{FF2B5EF4-FFF2-40B4-BE49-F238E27FC236}">
+                <a16:creationId xmlns:a16="http://schemas.microsoft.com/office/drawing/2014/main" id="{D2B18922-DB0C-C055-BB7E-04EB3D2A36BD}"/>
+              </a:ext>
+            </a:extLst>
+          </p:cNvPr>
+          <p:cNvSpPr>
+            <a:spLocks noGrp="1"/>
+          </p:cNvSpPr>
+          <p:nvPr>
+            <p:ph type="dt" sz="half" idx="10"/>
+          </p:nvPr>
+        </p:nvSpPr>
+        <p:spPr/>
+        <p:txBody>
+          <a:bodyPr/>
+          <a:lstStyle/>
+          <a:p>
+            <a:fld id="{8F291AC0-C730-C344-87B5-BCD22847DDDD}" type="datetime1">
+              <a:rPr lang="en-US" smtClean="0"/>
+              <a:t>10/8/26</a:t>
+            </a:fld>
+            <a:endParaRPr lang="en-US"/>
           </a:p>
         </p:txBody>
       </p:sp>
@@ -16625,35 +16958,6 @@
             <a:fld id="{62CBAC88-EF5B-3148-888C-824478CD1B05}" type="slidenum">
               <a:rPr lang="en-US" smtClean="0"/>
               <a:t>55</a:t>
-            </a:fld>
-            <a:endParaRPr lang="en-US"/>
-          </a:p>
-        </p:txBody>
-      </p:sp>
-      <p:sp>
-        <p:nvSpPr>
-          <p:cNvPr id="7" name="Date Placeholder 6">
-            <a:extLst>
-              <a:ext uri="{FF2B5EF4-FFF2-40B4-BE49-F238E27FC236}">
-                <a16:creationId xmlns:a16="http://schemas.microsoft.com/office/drawing/2014/main" id="{D2B18922-DB0C-C055-BB7E-04EB3D2A36BD}"/>
-              </a:ext>
-            </a:extLst>
-          </p:cNvPr>
-          <p:cNvSpPr>
-            <a:spLocks noGrp="1"/>
-          </p:cNvSpPr>
-          <p:nvPr>
-            <p:ph type="dt" sz="half" idx="10"/>
-          </p:nvPr>
-        </p:nvSpPr>
-        <p:spPr/>
-        <p:txBody>
-          <a:bodyPr/>
-          <a:lstStyle/>
-          <a:p>
-            <a:fld id="{D19DCA0D-DF2D-7F43-B2C0-D9FE4F57E4F6}" type="datetime5">
-              <a:rPr lang="en-US" smtClean="0"/>
-              <a:t>22-Sep-26</a:t>
             </a:fld>
             <a:endParaRPr lang="en-US"/>
           </a:p>
@@ -16671,12 +16975,12 @@
   </p:clrMapOvr>
   <mc:AlternateContent xmlns:mc="http://schemas.openxmlformats.org/markup-compatibility/2006" xmlns:p14="http://schemas.microsoft.com/office/powerpoint/2010/main">
     <mc:Choice Requires="p14">
-      <p:transition spd="slow" p14:dur="1200">
-        <p14:prism/>
+      <p:transition spd="slow" p14:dur="2000">
+        <p14:prism isContent="1"/>
       </p:transition>
     </mc:Choice>
     <mc:Fallback xmlns="">
-      <p:transition xmlns:p14="http://schemas.microsoft.com/office/powerpoint/2010/main" spd="slow">
+      <p:transition spd="slow">
         <p:fade/>
       </p:transition>
     </mc:Fallback>
@@ -16720,7 +17024,7 @@
         <p:spPr/>
         <p:txBody>
           <a:bodyPr>
-            <a:normAutofit/>
+            <a:normAutofit fontScale="90000"/>
           </a:bodyPr>
           <a:lstStyle/>
           <a:p>
@@ -16750,7 +17054,7 @@
         <p:spPr/>
         <p:txBody>
           <a:bodyPr>
-            <a:normAutofit fontScale="85000" lnSpcReduction="20000"/>
+            <a:normAutofit fontScale="70000" lnSpcReduction="20000"/>
           </a:bodyPr>
           <a:lstStyle/>
           <a:p>
@@ -16887,6 +17191,35 @@
       </p:sp>
       <p:sp>
         <p:nvSpPr>
+          <p:cNvPr id="7" name="Date Placeholder 6">
+            <a:extLst>
+              <a:ext uri="{FF2B5EF4-FFF2-40B4-BE49-F238E27FC236}">
+                <a16:creationId xmlns:a16="http://schemas.microsoft.com/office/drawing/2014/main" id="{FF995DF1-6F24-0995-D599-D19C0F64AD19}"/>
+              </a:ext>
+            </a:extLst>
+          </p:cNvPr>
+          <p:cNvSpPr>
+            <a:spLocks noGrp="1"/>
+          </p:cNvSpPr>
+          <p:nvPr>
+            <p:ph type="dt" sz="half" idx="10"/>
+          </p:nvPr>
+        </p:nvSpPr>
+        <p:spPr/>
+        <p:txBody>
+          <a:bodyPr/>
+          <a:lstStyle/>
+          <a:p>
+            <a:fld id="{0AAAE58D-EEF4-4841-AA53-85AD12D92497}" type="datetime1">
+              <a:rPr lang="en-US" smtClean="0"/>
+              <a:t>10/8/26</a:t>
+            </a:fld>
+            <a:endParaRPr lang="en-US"/>
+          </a:p>
+        </p:txBody>
+      </p:sp>
+      <p:sp>
+        <p:nvSpPr>
           <p:cNvPr id="4" name="Footer Placeholder 3">
             <a:extLst>
               <a:ext uri="{FF2B5EF4-FFF2-40B4-BE49-F238E27FC236}">
@@ -16937,35 +17270,6 @@
             <a:fld id="{62CBAC88-EF5B-3148-888C-824478CD1B05}" type="slidenum">
               <a:rPr lang="en-US" smtClean="0"/>
               <a:t>56</a:t>
-            </a:fld>
-            <a:endParaRPr lang="en-US"/>
-          </a:p>
-        </p:txBody>
-      </p:sp>
-      <p:sp>
-        <p:nvSpPr>
-          <p:cNvPr id="7" name="Date Placeholder 6">
-            <a:extLst>
-              <a:ext uri="{FF2B5EF4-FFF2-40B4-BE49-F238E27FC236}">
-                <a16:creationId xmlns:a16="http://schemas.microsoft.com/office/drawing/2014/main" id="{FF995DF1-6F24-0995-D599-D19C0F64AD19}"/>
-              </a:ext>
-            </a:extLst>
-          </p:cNvPr>
-          <p:cNvSpPr>
-            <a:spLocks noGrp="1"/>
-          </p:cNvSpPr>
-          <p:nvPr>
-            <p:ph type="dt" sz="half" idx="10"/>
-          </p:nvPr>
-        </p:nvSpPr>
-        <p:spPr/>
-        <p:txBody>
-          <a:bodyPr/>
-          <a:lstStyle/>
-          <a:p>
-            <a:fld id="{1CD96339-8FB9-FD41-A5AC-44DD3E48F30C}" type="datetime5">
-              <a:rPr lang="en-US" smtClean="0"/>
-              <a:t>22-Sep-26</a:t>
             </a:fld>
             <a:endParaRPr lang="en-US"/>
           </a:p>
@@ -16983,12 +17287,12 @@
   </p:clrMapOvr>
   <mc:AlternateContent xmlns:mc="http://schemas.openxmlformats.org/markup-compatibility/2006" xmlns:p14="http://schemas.microsoft.com/office/powerpoint/2010/main">
     <mc:Choice Requires="p14">
-      <p:transition spd="slow" p14:dur="1200">
-        <p14:prism/>
+      <p:transition spd="slow" p14:dur="2000">
+        <p14:prism isContent="1"/>
       </p:transition>
     </mc:Choice>
     <mc:Fallback xmlns="">
-      <p:transition xmlns:p14="http://schemas.microsoft.com/office/powerpoint/2010/main" spd="slow">
+      <p:transition spd="slow">
         <p:fade/>
       </p:transition>
     </mc:Fallback>
@@ -17032,7 +17336,7 @@
         <p:spPr/>
         <p:txBody>
           <a:bodyPr>
-            <a:normAutofit/>
+            <a:normAutofit fontScale="90000"/>
           </a:bodyPr>
           <a:lstStyle/>
           <a:p>
@@ -17062,7 +17366,7 @@
         <p:spPr/>
         <p:txBody>
           <a:bodyPr>
-            <a:normAutofit fontScale="92500" lnSpcReduction="20000"/>
+            <a:normAutofit fontScale="85000" lnSpcReduction="20000"/>
           </a:bodyPr>
           <a:lstStyle/>
           <a:p>
@@ -17121,6 +17425,35 @@
           </a:p>
           <a:p>
             <a:endParaRPr lang="en-US" dirty="0"/>
+          </a:p>
+        </p:txBody>
+      </p:sp>
+      <p:sp>
+        <p:nvSpPr>
+          <p:cNvPr id="7" name="Date Placeholder 6">
+            <a:extLst>
+              <a:ext uri="{FF2B5EF4-FFF2-40B4-BE49-F238E27FC236}">
+                <a16:creationId xmlns:a16="http://schemas.microsoft.com/office/drawing/2014/main" id="{1D9C4AE6-E858-D500-734F-D8A8EB53FBDB}"/>
+              </a:ext>
+            </a:extLst>
+          </p:cNvPr>
+          <p:cNvSpPr>
+            <a:spLocks noGrp="1"/>
+          </p:cNvSpPr>
+          <p:nvPr>
+            <p:ph type="dt" sz="half" idx="10"/>
+          </p:nvPr>
+        </p:nvSpPr>
+        <p:spPr/>
+        <p:txBody>
+          <a:bodyPr/>
+          <a:lstStyle/>
+          <a:p>
+            <a:fld id="{38A1C157-C516-4C4D-B3D7-10438FA4EC06}" type="datetime1">
+              <a:rPr lang="en-US" smtClean="0"/>
+              <a:t>10/8/26</a:t>
+            </a:fld>
+            <a:endParaRPr lang="en-US"/>
           </a:p>
         </p:txBody>
       </p:sp>
@@ -17176,35 +17509,6 @@
             <a:fld id="{62CBAC88-EF5B-3148-888C-824478CD1B05}" type="slidenum">
               <a:rPr lang="en-US" smtClean="0"/>
               <a:t>57</a:t>
-            </a:fld>
-            <a:endParaRPr lang="en-US"/>
-          </a:p>
-        </p:txBody>
-      </p:sp>
-      <p:sp>
-        <p:nvSpPr>
-          <p:cNvPr id="7" name="Date Placeholder 6">
-            <a:extLst>
-              <a:ext uri="{FF2B5EF4-FFF2-40B4-BE49-F238E27FC236}">
-                <a16:creationId xmlns:a16="http://schemas.microsoft.com/office/drawing/2014/main" id="{1D9C4AE6-E858-D500-734F-D8A8EB53FBDB}"/>
-              </a:ext>
-            </a:extLst>
-          </p:cNvPr>
-          <p:cNvSpPr>
-            <a:spLocks noGrp="1"/>
-          </p:cNvSpPr>
-          <p:nvPr>
-            <p:ph type="dt" sz="half" idx="10"/>
-          </p:nvPr>
-        </p:nvSpPr>
-        <p:spPr/>
-        <p:txBody>
-          <a:bodyPr/>
-          <a:lstStyle/>
-          <a:p>
-            <a:fld id="{FE2001DF-606A-4A43-8592-17AED3BDE26A}" type="datetime5">
-              <a:rPr lang="en-US" smtClean="0"/>
-              <a:t>22-Sep-26</a:t>
             </a:fld>
             <a:endParaRPr lang="en-US"/>
           </a:p>
@@ -17222,12 +17526,12 @@
   </p:clrMapOvr>
   <mc:AlternateContent xmlns:mc="http://schemas.openxmlformats.org/markup-compatibility/2006" xmlns:p14="http://schemas.microsoft.com/office/powerpoint/2010/main">
     <mc:Choice Requires="p14">
-      <p:transition spd="slow" p14:dur="1200">
-        <p14:prism/>
+      <p:transition spd="slow" p14:dur="2000">
+        <p14:prism isContent="1"/>
       </p:transition>
     </mc:Choice>
     <mc:Fallback xmlns="">
-      <p:transition xmlns:p14="http://schemas.microsoft.com/office/powerpoint/2010/main" spd="slow">
+      <p:transition spd="slow">
         <p:fade/>
       </p:transition>
     </mc:Fallback>
@@ -17271,7 +17575,7 @@
         <p:spPr/>
         <p:txBody>
           <a:bodyPr>
-            <a:normAutofit/>
+            <a:normAutofit fontScale="90000"/>
           </a:bodyPr>
           <a:lstStyle/>
           <a:p>
@@ -17301,7 +17605,7 @@
         <p:spPr/>
         <p:txBody>
           <a:bodyPr>
-            <a:normAutofit/>
+            <a:normAutofit lnSpcReduction="10000"/>
           </a:bodyPr>
           <a:lstStyle/>
           <a:p>
@@ -17340,6 +17644,35 @@
           </a:p>
           <a:p>
             <a:endParaRPr lang="en-US" dirty="0"/>
+          </a:p>
+        </p:txBody>
+      </p:sp>
+      <p:sp>
+        <p:nvSpPr>
+          <p:cNvPr id="7" name="Date Placeholder 6">
+            <a:extLst>
+              <a:ext uri="{FF2B5EF4-FFF2-40B4-BE49-F238E27FC236}">
+                <a16:creationId xmlns:a16="http://schemas.microsoft.com/office/drawing/2014/main" id="{7F5067E5-2AA1-90BF-1796-F795E353F92E}"/>
+              </a:ext>
+            </a:extLst>
+          </p:cNvPr>
+          <p:cNvSpPr>
+            <a:spLocks noGrp="1"/>
+          </p:cNvSpPr>
+          <p:nvPr>
+            <p:ph type="dt" sz="half" idx="10"/>
+          </p:nvPr>
+        </p:nvSpPr>
+        <p:spPr/>
+        <p:txBody>
+          <a:bodyPr/>
+          <a:lstStyle/>
+          <a:p>
+            <a:fld id="{8FF94E7E-AA28-9845-8EEA-DE3CBCAAA38E}" type="datetime1">
+              <a:rPr lang="en-US" smtClean="0"/>
+              <a:t>10/8/26</a:t>
+            </a:fld>
+            <a:endParaRPr lang="en-US"/>
           </a:p>
         </p:txBody>
       </p:sp>
@@ -17395,35 +17728,6 @@
             <a:fld id="{62CBAC88-EF5B-3148-888C-824478CD1B05}" type="slidenum">
               <a:rPr lang="en-US" smtClean="0"/>
               <a:t>58</a:t>
-            </a:fld>
-            <a:endParaRPr lang="en-US"/>
-          </a:p>
-        </p:txBody>
-      </p:sp>
-      <p:sp>
-        <p:nvSpPr>
-          <p:cNvPr id="7" name="Date Placeholder 6">
-            <a:extLst>
-              <a:ext uri="{FF2B5EF4-FFF2-40B4-BE49-F238E27FC236}">
-                <a16:creationId xmlns:a16="http://schemas.microsoft.com/office/drawing/2014/main" id="{7F5067E5-2AA1-90BF-1796-F795E353F92E}"/>
-              </a:ext>
-            </a:extLst>
-          </p:cNvPr>
-          <p:cNvSpPr>
-            <a:spLocks noGrp="1"/>
-          </p:cNvSpPr>
-          <p:nvPr>
-            <p:ph type="dt" sz="half" idx="10"/>
-          </p:nvPr>
-        </p:nvSpPr>
-        <p:spPr/>
-        <p:txBody>
-          <a:bodyPr/>
-          <a:lstStyle/>
-          <a:p>
-            <a:fld id="{4F756082-DF7E-2748-9E6C-0962311EBA1D}" type="datetime5">
-              <a:rPr lang="en-US" smtClean="0"/>
-              <a:t>22-Sep-26</a:t>
             </a:fld>
             <a:endParaRPr lang="en-US"/>
           </a:p>
@@ -17441,12 +17745,12 @@
   </p:clrMapOvr>
   <mc:AlternateContent xmlns:mc="http://schemas.openxmlformats.org/markup-compatibility/2006" xmlns:p14="http://schemas.microsoft.com/office/powerpoint/2010/main">
     <mc:Choice Requires="p14">
-      <p:transition spd="slow" p14:dur="1200">
-        <p14:prism/>
+      <p:transition spd="slow" p14:dur="2000">
+        <p14:prism isContent="1"/>
       </p:transition>
     </mc:Choice>
     <mc:Fallback xmlns="">
-      <p:transition xmlns:p14="http://schemas.microsoft.com/office/powerpoint/2010/main" spd="slow">
+      <p:transition spd="slow">
         <p:fade/>
       </p:transition>
     </mc:Fallback>
@@ -17490,7 +17794,7 @@
         <p:spPr/>
         <p:txBody>
           <a:bodyPr>
-            <a:normAutofit/>
+            <a:normAutofit fontScale="90000"/>
           </a:bodyPr>
           <a:lstStyle/>
           <a:p>
@@ -17564,6 +17868,35 @@
       </p:sp>
       <p:sp>
         <p:nvSpPr>
+          <p:cNvPr id="7" name="Date Placeholder 6">
+            <a:extLst>
+              <a:ext uri="{FF2B5EF4-FFF2-40B4-BE49-F238E27FC236}">
+                <a16:creationId xmlns:a16="http://schemas.microsoft.com/office/drawing/2014/main" id="{848FA5AD-D3DE-62C5-2ACE-92E56E3FFBF4}"/>
+              </a:ext>
+            </a:extLst>
+          </p:cNvPr>
+          <p:cNvSpPr>
+            <a:spLocks noGrp="1"/>
+          </p:cNvSpPr>
+          <p:nvPr>
+            <p:ph type="dt" sz="half" idx="10"/>
+          </p:nvPr>
+        </p:nvSpPr>
+        <p:spPr/>
+        <p:txBody>
+          <a:bodyPr/>
+          <a:lstStyle/>
+          <a:p>
+            <a:fld id="{533C85DD-CE4B-E742-9E11-1DB3E6A98387}" type="datetime1">
+              <a:rPr lang="en-US" smtClean="0"/>
+              <a:t>10/8/26</a:t>
+            </a:fld>
+            <a:endParaRPr lang="en-US"/>
+          </a:p>
+        </p:txBody>
+      </p:sp>
+      <p:sp>
+        <p:nvSpPr>
           <p:cNvPr id="4" name="Footer Placeholder 3">
             <a:extLst>
               <a:ext uri="{FF2B5EF4-FFF2-40B4-BE49-F238E27FC236}">
@@ -17614,35 +17947,6 @@
             <a:fld id="{62CBAC88-EF5B-3148-888C-824478CD1B05}" type="slidenum">
               <a:rPr lang="en-US" smtClean="0"/>
               <a:t>59</a:t>
-            </a:fld>
-            <a:endParaRPr lang="en-US"/>
-          </a:p>
-        </p:txBody>
-      </p:sp>
-      <p:sp>
-        <p:nvSpPr>
-          <p:cNvPr id="7" name="Date Placeholder 6">
-            <a:extLst>
-              <a:ext uri="{FF2B5EF4-FFF2-40B4-BE49-F238E27FC236}">
-                <a16:creationId xmlns:a16="http://schemas.microsoft.com/office/drawing/2014/main" id="{848FA5AD-D3DE-62C5-2ACE-92E56E3FFBF4}"/>
-              </a:ext>
-            </a:extLst>
-          </p:cNvPr>
-          <p:cNvSpPr>
-            <a:spLocks noGrp="1"/>
-          </p:cNvSpPr>
-          <p:nvPr>
-            <p:ph type="dt" sz="half" idx="10"/>
-          </p:nvPr>
-        </p:nvSpPr>
-        <p:spPr/>
-        <p:txBody>
-          <a:bodyPr/>
-          <a:lstStyle/>
-          <a:p>
-            <a:fld id="{5E8C4CA4-9A7D-FB4E-80CB-4C957092B356}" type="datetime5">
-              <a:rPr lang="en-US" smtClean="0"/>
-              <a:t>22-Sep-26</a:t>
             </a:fld>
             <a:endParaRPr lang="en-US"/>
           </a:p>
@@ -17660,12 +17964,12 @@
   </p:clrMapOvr>
   <mc:AlternateContent xmlns:mc="http://schemas.openxmlformats.org/markup-compatibility/2006" xmlns:p14="http://schemas.microsoft.com/office/powerpoint/2010/main">
     <mc:Choice Requires="p14">
-      <p:transition spd="slow" p14:dur="1200">
-        <p14:prism/>
+      <p:transition spd="slow" p14:dur="2000">
+        <p14:prism isContent="1"/>
       </p:transition>
     </mc:Choice>
     <mc:Fallback xmlns="">
-      <p:transition xmlns:p14="http://schemas.microsoft.com/office/powerpoint/2010/main" spd="slow">
+      <p:transition spd="slow">
         <p:fade/>
       </p:transition>
     </mc:Fallback>
@@ -17708,7 +18012,9 @@
         </p:nvSpPr>
         <p:spPr/>
         <p:txBody>
-          <a:bodyPr/>
+          <a:bodyPr>
+            <a:normAutofit fontScale="90000"/>
+          </a:bodyPr>
           <a:lstStyle/>
           <a:p>
             <a:r>
@@ -17737,7 +18043,7 @@
         <p:spPr/>
         <p:txBody>
           <a:bodyPr>
-            <a:normAutofit lnSpcReduction="10000"/>
+            <a:normAutofit fontScale="92500" lnSpcReduction="10000"/>
           </a:bodyPr>
           <a:lstStyle/>
           <a:p>
@@ -17778,6 +18084,35 @@
           </a:p>
           <a:p>
             <a:endParaRPr lang="en-US" dirty="0"/>
+          </a:p>
+        </p:txBody>
+      </p:sp>
+      <p:sp>
+        <p:nvSpPr>
+          <p:cNvPr id="7" name="Date Placeholder 6">
+            <a:extLst>
+              <a:ext uri="{FF2B5EF4-FFF2-40B4-BE49-F238E27FC236}">
+                <a16:creationId xmlns:a16="http://schemas.microsoft.com/office/drawing/2014/main" id="{AC85741F-6A87-D2F6-6117-F6CA0B8FC34A}"/>
+              </a:ext>
+            </a:extLst>
+          </p:cNvPr>
+          <p:cNvSpPr>
+            <a:spLocks noGrp="1"/>
+          </p:cNvSpPr>
+          <p:nvPr>
+            <p:ph type="dt" sz="half" idx="10"/>
+          </p:nvPr>
+        </p:nvSpPr>
+        <p:spPr/>
+        <p:txBody>
+          <a:bodyPr/>
+          <a:lstStyle/>
+          <a:p>
+            <a:fld id="{0F9B758C-239B-0D45-BED3-FCB5639D6592}" type="datetime1">
+              <a:rPr lang="en-US" smtClean="0"/>
+              <a:t>10/8/26</a:t>
+            </a:fld>
+            <a:endParaRPr lang="en-US"/>
           </a:p>
         </p:txBody>
       </p:sp>
@@ -17833,35 +18168,6 @@
             <a:fld id="{62CBAC88-EF5B-3148-888C-824478CD1B05}" type="slidenum">
               <a:rPr lang="en-US" smtClean="0"/>
               <a:t>6</a:t>
-            </a:fld>
-            <a:endParaRPr lang="en-US"/>
-          </a:p>
-        </p:txBody>
-      </p:sp>
-      <p:sp>
-        <p:nvSpPr>
-          <p:cNvPr id="7" name="Date Placeholder 6">
-            <a:extLst>
-              <a:ext uri="{FF2B5EF4-FFF2-40B4-BE49-F238E27FC236}">
-                <a16:creationId xmlns:a16="http://schemas.microsoft.com/office/drawing/2014/main" id="{AC85741F-6A87-D2F6-6117-F6CA0B8FC34A}"/>
-              </a:ext>
-            </a:extLst>
-          </p:cNvPr>
-          <p:cNvSpPr>
-            <a:spLocks noGrp="1"/>
-          </p:cNvSpPr>
-          <p:nvPr>
-            <p:ph type="dt" sz="half" idx="10"/>
-          </p:nvPr>
-        </p:nvSpPr>
-        <p:spPr/>
-        <p:txBody>
-          <a:bodyPr/>
-          <a:lstStyle/>
-          <a:p>
-            <a:fld id="{90570CE3-E5A7-A341-AFCA-D4CC4AB55FEE}" type="datetime5">
-              <a:rPr lang="en-US" smtClean="0"/>
-              <a:t>22-Sep-26</a:t>
             </a:fld>
             <a:endParaRPr lang="en-US"/>
           </a:p>
@@ -17879,12 +18185,12 @@
   </p:clrMapOvr>
   <mc:AlternateContent xmlns:mc="http://schemas.openxmlformats.org/markup-compatibility/2006" xmlns:p14="http://schemas.microsoft.com/office/powerpoint/2010/main">
     <mc:Choice Requires="p14">
-      <p:transition spd="slow" p14:dur="1200">
-        <p14:prism/>
+      <p:transition spd="slow" p14:dur="2000">
+        <p14:prism isContent="1"/>
       </p:transition>
     </mc:Choice>
     <mc:Fallback xmlns="">
-      <p:transition xmlns:p14="http://schemas.microsoft.com/office/powerpoint/2010/main" spd="slow">
+      <p:transition spd="slow">
         <p:fade/>
       </p:transition>
     </mc:Fallback>
@@ -17928,7 +18234,7 @@
         <p:spPr/>
         <p:txBody>
           <a:bodyPr>
-            <a:normAutofit/>
+            <a:normAutofit fontScale="90000"/>
           </a:bodyPr>
           <a:lstStyle/>
           <a:p>
@@ -17958,7 +18264,7 @@
         <p:spPr/>
         <p:txBody>
           <a:bodyPr>
-            <a:normAutofit/>
+            <a:normAutofit lnSpcReduction="10000"/>
           </a:bodyPr>
           <a:lstStyle/>
           <a:p>
@@ -18003,6 +18309,35 @@
           </a:p>
           <a:p>
             <a:endParaRPr lang="en-US" dirty="0"/>
+          </a:p>
+        </p:txBody>
+      </p:sp>
+      <p:sp>
+        <p:nvSpPr>
+          <p:cNvPr id="7" name="Date Placeholder 6">
+            <a:extLst>
+              <a:ext uri="{FF2B5EF4-FFF2-40B4-BE49-F238E27FC236}">
+                <a16:creationId xmlns:a16="http://schemas.microsoft.com/office/drawing/2014/main" id="{D9E739C7-E199-E3DB-C2F8-D4EEA2E188FA}"/>
+              </a:ext>
+            </a:extLst>
+          </p:cNvPr>
+          <p:cNvSpPr>
+            <a:spLocks noGrp="1"/>
+          </p:cNvSpPr>
+          <p:nvPr>
+            <p:ph type="dt" sz="half" idx="10"/>
+          </p:nvPr>
+        </p:nvSpPr>
+        <p:spPr/>
+        <p:txBody>
+          <a:bodyPr/>
+          <a:lstStyle/>
+          <a:p>
+            <a:fld id="{07311B3D-D130-8D47-9A5E-7C0DA8FC699C}" type="datetime1">
+              <a:rPr lang="en-US" smtClean="0"/>
+              <a:t>10/8/26</a:t>
+            </a:fld>
+            <a:endParaRPr lang="en-US"/>
           </a:p>
         </p:txBody>
       </p:sp>
@@ -18058,35 +18393,6 @@
             <a:fld id="{62CBAC88-EF5B-3148-888C-824478CD1B05}" type="slidenum">
               <a:rPr lang="en-US" smtClean="0"/>
               <a:t>60</a:t>
-            </a:fld>
-            <a:endParaRPr lang="en-US"/>
-          </a:p>
-        </p:txBody>
-      </p:sp>
-      <p:sp>
-        <p:nvSpPr>
-          <p:cNvPr id="7" name="Date Placeholder 6">
-            <a:extLst>
-              <a:ext uri="{FF2B5EF4-FFF2-40B4-BE49-F238E27FC236}">
-                <a16:creationId xmlns:a16="http://schemas.microsoft.com/office/drawing/2014/main" id="{D9E739C7-E199-E3DB-C2F8-D4EEA2E188FA}"/>
-              </a:ext>
-            </a:extLst>
-          </p:cNvPr>
-          <p:cNvSpPr>
-            <a:spLocks noGrp="1"/>
-          </p:cNvSpPr>
-          <p:nvPr>
-            <p:ph type="dt" sz="half" idx="10"/>
-          </p:nvPr>
-        </p:nvSpPr>
-        <p:spPr/>
-        <p:txBody>
-          <a:bodyPr/>
-          <a:lstStyle/>
-          <a:p>
-            <a:fld id="{0F13F11A-E5E7-7441-8B9B-B9AD1BDCA8E0}" type="datetime5">
-              <a:rPr lang="en-US" smtClean="0"/>
-              <a:t>22-Sep-26</a:t>
             </a:fld>
             <a:endParaRPr lang="en-US"/>
           </a:p>
@@ -18104,12 +18410,12 @@
   </p:clrMapOvr>
   <mc:AlternateContent xmlns:mc="http://schemas.openxmlformats.org/markup-compatibility/2006" xmlns:p14="http://schemas.microsoft.com/office/powerpoint/2010/main">
     <mc:Choice Requires="p14">
-      <p:transition spd="slow" p14:dur="1200">
-        <p14:prism/>
+      <p:transition spd="slow" p14:dur="2000">
+        <p14:prism isContent="1"/>
       </p:transition>
     </mc:Choice>
     <mc:Fallback xmlns="">
-      <p:transition xmlns:p14="http://schemas.microsoft.com/office/powerpoint/2010/main" spd="slow">
+      <p:transition spd="slow">
         <p:fade/>
       </p:transition>
     </mc:Fallback>
@@ -18153,7 +18459,7 @@
         <p:spPr/>
         <p:txBody>
           <a:bodyPr>
-            <a:normAutofit/>
+            <a:normAutofit fontScale="90000"/>
           </a:bodyPr>
           <a:lstStyle/>
           <a:p>
@@ -18183,7 +18489,7 @@
         <p:spPr/>
         <p:txBody>
           <a:bodyPr>
-            <a:normAutofit fontScale="62500" lnSpcReduction="20000"/>
+            <a:normAutofit fontScale="55000" lnSpcReduction="20000"/>
           </a:bodyPr>
           <a:lstStyle/>
           <a:p>
@@ -18305,6 +18611,35 @@
           </a:p>
           <a:p>
             <a:endParaRPr lang="en-US" dirty="0"/>
+          </a:p>
+        </p:txBody>
+      </p:sp>
+      <p:sp>
+        <p:nvSpPr>
+          <p:cNvPr id="7" name="Date Placeholder 6">
+            <a:extLst>
+              <a:ext uri="{FF2B5EF4-FFF2-40B4-BE49-F238E27FC236}">
+                <a16:creationId xmlns:a16="http://schemas.microsoft.com/office/drawing/2014/main" id="{0AF0144E-7D3D-1E99-0CEB-BAC7FDA060A0}"/>
+              </a:ext>
+            </a:extLst>
+          </p:cNvPr>
+          <p:cNvSpPr>
+            <a:spLocks noGrp="1"/>
+          </p:cNvSpPr>
+          <p:nvPr>
+            <p:ph type="dt" sz="half" idx="10"/>
+          </p:nvPr>
+        </p:nvSpPr>
+        <p:spPr/>
+        <p:txBody>
+          <a:bodyPr/>
+          <a:lstStyle/>
+          <a:p>
+            <a:fld id="{3D426976-964D-F44A-928E-2A1102E9AD76}" type="datetime1">
+              <a:rPr lang="en-US" smtClean="0"/>
+              <a:t>10/8/26</a:t>
+            </a:fld>
+            <a:endParaRPr lang="en-US"/>
           </a:p>
         </p:txBody>
       </p:sp>
@@ -18360,35 +18695,6 @@
             <a:fld id="{62CBAC88-EF5B-3148-888C-824478CD1B05}" type="slidenum">
               <a:rPr lang="en-US" smtClean="0"/>
               <a:t>61</a:t>
-            </a:fld>
-            <a:endParaRPr lang="en-US"/>
-          </a:p>
-        </p:txBody>
-      </p:sp>
-      <p:sp>
-        <p:nvSpPr>
-          <p:cNvPr id="7" name="Date Placeholder 6">
-            <a:extLst>
-              <a:ext uri="{FF2B5EF4-FFF2-40B4-BE49-F238E27FC236}">
-                <a16:creationId xmlns:a16="http://schemas.microsoft.com/office/drawing/2014/main" id="{0AF0144E-7D3D-1E99-0CEB-BAC7FDA060A0}"/>
-              </a:ext>
-            </a:extLst>
-          </p:cNvPr>
-          <p:cNvSpPr>
-            <a:spLocks noGrp="1"/>
-          </p:cNvSpPr>
-          <p:nvPr>
-            <p:ph type="dt" sz="half" idx="10"/>
-          </p:nvPr>
-        </p:nvSpPr>
-        <p:spPr/>
-        <p:txBody>
-          <a:bodyPr/>
-          <a:lstStyle/>
-          <a:p>
-            <a:fld id="{77C61401-1C60-6243-94F3-502972A47BC1}" type="datetime5">
-              <a:rPr lang="en-US" smtClean="0"/>
-              <a:t>22-Sep-26</a:t>
             </a:fld>
             <a:endParaRPr lang="en-US"/>
           </a:p>
@@ -18455,7 +18761,7 @@
         <p:spPr/>
         <p:txBody>
           <a:bodyPr>
-            <a:normAutofit/>
+            <a:normAutofit fontScale="90000"/>
           </a:bodyPr>
           <a:lstStyle/>
           <a:p>
@@ -18534,6 +18840,35 @@
       </p:sp>
       <p:sp>
         <p:nvSpPr>
+          <p:cNvPr id="7" name="Date Placeholder 6">
+            <a:extLst>
+              <a:ext uri="{FF2B5EF4-FFF2-40B4-BE49-F238E27FC236}">
+                <a16:creationId xmlns:a16="http://schemas.microsoft.com/office/drawing/2014/main" id="{E74517F0-BE7A-2143-A7BF-0E618DFEC124}"/>
+              </a:ext>
+            </a:extLst>
+          </p:cNvPr>
+          <p:cNvSpPr>
+            <a:spLocks noGrp="1"/>
+          </p:cNvSpPr>
+          <p:nvPr>
+            <p:ph type="dt" sz="half" idx="10"/>
+          </p:nvPr>
+        </p:nvSpPr>
+        <p:spPr/>
+        <p:txBody>
+          <a:bodyPr/>
+          <a:lstStyle/>
+          <a:p>
+            <a:fld id="{24D7FF67-2432-4640-8C88-62D9A8B59A29}" type="datetime1">
+              <a:rPr lang="en-US" smtClean="0"/>
+              <a:t>10/8/26</a:t>
+            </a:fld>
+            <a:endParaRPr lang="en-US"/>
+          </a:p>
+        </p:txBody>
+      </p:sp>
+      <p:sp>
+        <p:nvSpPr>
           <p:cNvPr id="4" name="Footer Placeholder 3">
             <a:extLst>
               <a:ext uri="{FF2B5EF4-FFF2-40B4-BE49-F238E27FC236}">
@@ -18584,35 +18919,6 @@
             <a:fld id="{62CBAC88-EF5B-3148-888C-824478CD1B05}" type="slidenum">
               <a:rPr lang="en-US" smtClean="0"/>
               <a:t>62</a:t>
-            </a:fld>
-            <a:endParaRPr lang="en-US"/>
-          </a:p>
-        </p:txBody>
-      </p:sp>
-      <p:sp>
-        <p:nvSpPr>
-          <p:cNvPr id="7" name="Date Placeholder 6">
-            <a:extLst>
-              <a:ext uri="{FF2B5EF4-FFF2-40B4-BE49-F238E27FC236}">
-                <a16:creationId xmlns:a16="http://schemas.microsoft.com/office/drawing/2014/main" id="{E74517F0-BE7A-2143-A7BF-0E618DFEC124}"/>
-              </a:ext>
-            </a:extLst>
-          </p:cNvPr>
-          <p:cNvSpPr>
-            <a:spLocks noGrp="1"/>
-          </p:cNvSpPr>
-          <p:nvPr>
-            <p:ph type="dt" sz="half" idx="10"/>
-          </p:nvPr>
-        </p:nvSpPr>
-        <p:spPr/>
-        <p:txBody>
-          <a:bodyPr/>
-          <a:lstStyle/>
-          <a:p>
-            <a:fld id="{24B21688-43A1-9E40-B99C-09665BCD866A}" type="datetime5">
-              <a:rPr lang="en-US" smtClean="0"/>
-              <a:t>22-Sep-26</a:t>
             </a:fld>
             <a:endParaRPr lang="en-US"/>
           </a:p>
@@ -18630,12 +18936,12 @@
   </p:clrMapOvr>
   <mc:AlternateContent xmlns:mc="http://schemas.openxmlformats.org/markup-compatibility/2006" xmlns:p14="http://schemas.microsoft.com/office/powerpoint/2010/main">
     <mc:Choice Requires="p14">
-      <p:transition spd="slow" p14:dur="1200">
-        <p14:prism/>
+      <p:transition spd="slow" p14:dur="2000">
+        <p14:prism isContent="1"/>
       </p:transition>
     </mc:Choice>
     <mc:Fallback xmlns="">
-      <p:transition xmlns:p14="http://schemas.microsoft.com/office/powerpoint/2010/main" spd="slow">
+      <p:transition spd="slow">
         <p:fade/>
       </p:transition>
     </mc:Fallback>
@@ -18679,7 +18985,7 @@
         <p:spPr/>
         <p:txBody>
           <a:bodyPr>
-            <a:normAutofit/>
+            <a:normAutofit fontScale="90000"/>
           </a:bodyPr>
           <a:lstStyle/>
           <a:p>
@@ -18747,6 +19053,35 @@
       </p:sp>
       <p:sp>
         <p:nvSpPr>
+          <p:cNvPr id="7" name="Date Placeholder 6">
+            <a:extLst>
+              <a:ext uri="{FF2B5EF4-FFF2-40B4-BE49-F238E27FC236}">
+                <a16:creationId xmlns:a16="http://schemas.microsoft.com/office/drawing/2014/main" id="{25C35762-E85F-91F5-AF7A-B0B9EF58A043}"/>
+              </a:ext>
+            </a:extLst>
+          </p:cNvPr>
+          <p:cNvSpPr>
+            <a:spLocks noGrp="1"/>
+          </p:cNvSpPr>
+          <p:nvPr>
+            <p:ph type="dt" sz="half" idx="10"/>
+          </p:nvPr>
+        </p:nvSpPr>
+        <p:spPr/>
+        <p:txBody>
+          <a:bodyPr/>
+          <a:lstStyle/>
+          <a:p>
+            <a:fld id="{3C3D58B9-D7C2-6443-BD1C-7D3A49F24371}" type="datetime1">
+              <a:rPr lang="en-US" smtClean="0"/>
+              <a:t>10/8/26</a:t>
+            </a:fld>
+            <a:endParaRPr lang="en-US"/>
+          </a:p>
+        </p:txBody>
+      </p:sp>
+      <p:sp>
+        <p:nvSpPr>
           <p:cNvPr id="4" name="Footer Placeholder 3">
             <a:extLst>
               <a:ext uri="{FF2B5EF4-FFF2-40B4-BE49-F238E27FC236}">
@@ -18797,35 +19132,6 @@
             <a:fld id="{62CBAC88-EF5B-3148-888C-824478CD1B05}" type="slidenum">
               <a:rPr lang="en-US" smtClean="0"/>
               <a:t>63</a:t>
-            </a:fld>
-            <a:endParaRPr lang="en-US"/>
-          </a:p>
-        </p:txBody>
-      </p:sp>
-      <p:sp>
-        <p:nvSpPr>
-          <p:cNvPr id="7" name="Date Placeholder 6">
-            <a:extLst>
-              <a:ext uri="{FF2B5EF4-FFF2-40B4-BE49-F238E27FC236}">
-                <a16:creationId xmlns:a16="http://schemas.microsoft.com/office/drawing/2014/main" id="{25C35762-E85F-91F5-AF7A-B0B9EF58A043}"/>
-              </a:ext>
-            </a:extLst>
-          </p:cNvPr>
-          <p:cNvSpPr>
-            <a:spLocks noGrp="1"/>
-          </p:cNvSpPr>
-          <p:nvPr>
-            <p:ph type="dt" sz="half" idx="10"/>
-          </p:nvPr>
-        </p:nvSpPr>
-        <p:spPr/>
-        <p:txBody>
-          <a:bodyPr/>
-          <a:lstStyle/>
-          <a:p>
-            <a:fld id="{2EACF658-CF45-DC48-B9F2-5526860EA20B}" type="datetime5">
-              <a:rPr lang="en-US" smtClean="0"/>
-              <a:t>22-Sep-26</a:t>
             </a:fld>
             <a:endParaRPr lang="en-US"/>
           </a:p>
@@ -18843,12 +19149,12 @@
   </p:clrMapOvr>
   <mc:AlternateContent xmlns:mc="http://schemas.openxmlformats.org/markup-compatibility/2006" xmlns:p14="http://schemas.microsoft.com/office/powerpoint/2010/main">
     <mc:Choice Requires="p14">
-      <p:transition spd="slow" p14:dur="1200">
-        <p14:prism/>
+      <p:transition spd="slow" p14:dur="2000">
+        <p14:prism isContent="1"/>
       </p:transition>
     </mc:Choice>
     <mc:Fallback xmlns="">
-      <p:transition xmlns:p14="http://schemas.microsoft.com/office/powerpoint/2010/main" spd="slow">
+      <p:transition spd="slow">
         <p:fade/>
       </p:transition>
     </mc:Fallback>
@@ -18892,7 +19198,7 @@
         <p:spPr/>
         <p:txBody>
           <a:bodyPr>
-            <a:normAutofit/>
+            <a:normAutofit fontScale="90000"/>
           </a:bodyPr>
           <a:lstStyle/>
           <a:p>
@@ -18922,7 +19228,7 @@
         <p:spPr/>
         <p:txBody>
           <a:bodyPr>
-            <a:normAutofit/>
+            <a:normAutofit lnSpcReduction="10000"/>
           </a:bodyPr>
           <a:lstStyle/>
           <a:p>
@@ -19013,6 +19319,35 @@
       </p:sp>
       <p:sp>
         <p:nvSpPr>
+          <p:cNvPr id="7" name="Date Placeholder 6">
+            <a:extLst>
+              <a:ext uri="{FF2B5EF4-FFF2-40B4-BE49-F238E27FC236}">
+                <a16:creationId xmlns:a16="http://schemas.microsoft.com/office/drawing/2014/main" id="{BF0590F3-05DB-01B5-AB5B-80678EE463DD}"/>
+              </a:ext>
+            </a:extLst>
+          </p:cNvPr>
+          <p:cNvSpPr>
+            <a:spLocks noGrp="1"/>
+          </p:cNvSpPr>
+          <p:nvPr>
+            <p:ph type="dt" sz="half" idx="10"/>
+          </p:nvPr>
+        </p:nvSpPr>
+        <p:spPr/>
+        <p:txBody>
+          <a:bodyPr/>
+          <a:lstStyle/>
+          <a:p>
+            <a:fld id="{77E52C6C-33B8-484E-8764-3A452BAE36B0}" type="datetime1">
+              <a:rPr lang="en-US" smtClean="0"/>
+              <a:t>10/8/26</a:t>
+            </a:fld>
+            <a:endParaRPr lang="en-US"/>
+          </a:p>
+        </p:txBody>
+      </p:sp>
+      <p:sp>
+        <p:nvSpPr>
           <p:cNvPr id="4" name="Footer Placeholder 3">
             <a:extLst>
               <a:ext uri="{FF2B5EF4-FFF2-40B4-BE49-F238E27FC236}">
@@ -19063,35 +19398,6 @@
             <a:fld id="{62CBAC88-EF5B-3148-888C-824478CD1B05}" type="slidenum">
               <a:rPr lang="en-US" smtClean="0"/>
               <a:t>64</a:t>
-            </a:fld>
-            <a:endParaRPr lang="en-US"/>
-          </a:p>
-        </p:txBody>
-      </p:sp>
-      <p:sp>
-        <p:nvSpPr>
-          <p:cNvPr id="7" name="Date Placeholder 6">
-            <a:extLst>
-              <a:ext uri="{FF2B5EF4-FFF2-40B4-BE49-F238E27FC236}">
-                <a16:creationId xmlns:a16="http://schemas.microsoft.com/office/drawing/2014/main" id="{BF0590F3-05DB-01B5-AB5B-80678EE463DD}"/>
-              </a:ext>
-            </a:extLst>
-          </p:cNvPr>
-          <p:cNvSpPr>
-            <a:spLocks noGrp="1"/>
-          </p:cNvSpPr>
-          <p:nvPr>
-            <p:ph type="dt" sz="half" idx="10"/>
-          </p:nvPr>
-        </p:nvSpPr>
-        <p:spPr/>
-        <p:txBody>
-          <a:bodyPr/>
-          <a:lstStyle/>
-          <a:p>
-            <a:fld id="{B65E434C-93F5-BD4A-A137-BD761AAC8857}" type="datetime5">
-              <a:rPr lang="en-US" smtClean="0"/>
-              <a:t>22-Sep-26</a:t>
             </a:fld>
             <a:endParaRPr lang="en-US"/>
           </a:p>
@@ -19109,12 +19415,12 @@
   </p:clrMapOvr>
   <mc:AlternateContent xmlns:mc="http://schemas.openxmlformats.org/markup-compatibility/2006" xmlns:p14="http://schemas.microsoft.com/office/powerpoint/2010/main">
     <mc:Choice Requires="p14">
-      <p:transition spd="slow" p14:dur="1200">
-        <p14:prism/>
+      <p:transition spd="slow" p14:dur="2000">
+        <p14:prism isContent="1"/>
       </p:transition>
     </mc:Choice>
     <mc:Fallback xmlns="">
-      <p:transition xmlns:p14="http://schemas.microsoft.com/office/powerpoint/2010/main" spd="slow">
+      <p:transition spd="slow">
         <p:fade/>
       </p:transition>
     </mc:Fallback>
@@ -19158,7 +19464,7 @@
         <p:spPr/>
         <p:txBody>
           <a:bodyPr>
-            <a:normAutofit/>
+            <a:normAutofit fontScale="90000"/>
           </a:bodyPr>
           <a:lstStyle/>
           <a:p>
@@ -19188,7 +19494,7 @@
         <p:spPr/>
         <p:txBody>
           <a:bodyPr>
-            <a:normAutofit/>
+            <a:normAutofit lnSpcReduction="10000"/>
           </a:bodyPr>
           <a:lstStyle/>
           <a:p>
@@ -19274,6 +19580,35 @@
       </p:sp>
       <p:sp>
         <p:nvSpPr>
+          <p:cNvPr id="7" name="Date Placeholder 6">
+            <a:extLst>
+              <a:ext uri="{FF2B5EF4-FFF2-40B4-BE49-F238E27FC236}">
+                <a16:creationId xmlns:a16="http://schemas.microsoft.com/office/drawing/2014/main" id="{9A2BDD8D-0A3D-3350-1BC9-537FB62B44A8}"/>
+              </a:ext>
+            </a:extLst>
+          </p:cNvPr>
+          <p:cNvSpPr>
+            <a:spLocks noGrp="1"/>
+          </p:cNvSpPr>
+          <p:nvPr>
+            <p:ph type="dt" sz="half" idx="10"/>
+          </p:nvPr>
+        </p:nvSpPr>
+        <p:spPr/>
+        <p:txBody>
+          <a:bodyPr/>
+          <a:lstStyle/>
+          <a:p>
+            <a:fld id="{B4AF1A81-6C87-C24F-AAE3-254D6C037B72}" type="datetime1">
+              <a:rPr lang="en-US" smtClean="0"/>
+              <a:t>10/8/26</a:t>
+            </a:fld>
+            <a:endParaRPr lang="en-US"/>
+          </a:p>
+        </p:txBody>
+      </p:sp>
+      <p:sp>
+        <p:nvSpPr>
           <p:cNvPr id="4" name="Footer Placeholder 3">
             <a:extLst>
               <a:ext uri="{FF2B5EF4-FFF2-40B4-BE49-F238E27FC236}">
@@ -19324,35 +19659,6 @@
             <a:fld id="{62CBAC88-EF5B-3148-888C-824478CD1B05}" type="slidenum">
               <a:rPr lang="en-US" smtClean="0"/>
               <a:t>65</a:t>
-            </a:fld>
-            <a:endParaRPr lang="en-US"/>
-          </a:p>
-        </p:txBody>
-      </p:sp>
-      <p:sp>
-        <p:nvSpPr>
-          <p:cNvPr id="7" name="Date Placeholder 6">
-            <a:extLst>
-              <a:ext uri="{FF2B5EF4-FFF2-40B4-BE49-F238E27FC236}">
-                <a16:creationId xmlns:a16="http://schemas.microsoft.com/office/drawing/2014/main" id="{9A2BDD8D-0A3D-3350-1BC9-537FB62B44A8}"/>
-              </a:ext>
-            </a:extLst>
-          </p:cNvPr>
-          <p:cNvSpPr>
-            <a:spLocks noGrp="1"/>
-          </p:cNvSpPr>
-          <p:nvPr>
-            <p:ph type="dt" sz="half" idx="10"/>
-          </p:nvPr>
-        </p:nvSpPr>
-        <p:spPr/>
-        <p:txBody>
-          <a:bodyPr/>
-          <a:lstStyle/>
-          <a:p>
-            <a:fld id="{DFE09402-F84C-4C45-B643-B08938A9942D}" type="datetime5">
-              <a:rPr lang="en-US" smtClean="0"/>
-              <a:t>22-Sep-26</a:t>
             </a:fld>
             <a:endParaRPr lang="en-US"/>
           </a:p>
@@ -19370,12 +19676,12 @@
   </p:clrMapOvr>
   <mc:AlternateContent xmlns:mc="http://schemas.openxmlformats.org/markup-compatibility/2006" xmlns:p14="http://schemas.microsoft.com/office/powerpoint/2010/main">
     <mc:Choice Requires="p14">
-      <p:transition spd="slow" p14:dur="1200">
-        <p14:prism/>
+      <p:transition spd="slow" p14:dur="2000">
+        <p14:prism isContent="1"/>
       </p:transition>
     </mc:Choice>
     <mc:Fallback xmlns="">
-      <p:transition xmlns:p14="http://schemas.microsoft.com/office/powerpoint/2010/main" spd="slow">
+      <p:transition spd="slow">
         <p:fade/>
       </p:transition>
     </mc:Fallback>
@@ -19419,7 +19725,7 @@
         <p:spPr/>
         <p:txBody>
           <a:bodyPr>
-            <a:normAutofit/>
+            <a:normAutofit fontScale="90000"/>
           </a:bodyPr>
           <a:lstStyle/>
           <a:p>
@@ -19449,7 +19755,7 @@
         <p:spPr/>
         <p:txBody>
           <a:bodyPr>
-            <a:normAutofit/>
+            <a:normAutofit lnSpcReduction="10000"/>
           </a:bodyPr>
           <a:lstStyle/>
           <a:p>
@@ -19530,6 +19836,35 @@
       </p:sp>
       <p:sp>
         <p:nvSpPr>
+          <p:cNvPr id="7" name="Date Placeholder 6">
+            <a:extLst>
+              <a:ext uri="{FF2B5EF4-FFF2-40B4-BE49-F238E27FC236}">
+                <a16:creationId xmlns:a16="http://schemas.microsoft.com/office/drawing/2014/main" id="{3863A576-230D-B785-D645-3219DF08892B}"/>
+              </a:ext>
+            </a:extLst>
+          </p:cNvPr>
+          <p:cNvSpPr>
+            <a:spLocks noGrp="1"/>
+          </p:cNvSpPr>
+          <p:nvPr>
+            <p:ph type="dt" sz="half" idx="10"/>
+          </p:nvPr>
+        </p:nvSpPr>
+        <p:spPr/>
+        <p:txBody>
+          <a:bodyPr/>
+          <a:lstStyle/>
+          <a:p>
+            <a:fld id="{BE1CA53B-5A02-FB43-A314-4D982FEAE67E}" type="datetime1">
+              <a:rPr lang="en-US" smtClean="0"/>
+              <a:t>10/8/26</a:t>
+            </a:fld>
+            <a:endParaRPr lang="en-US"/>
+          </a:p>
+        </p:txBody>
+      </p:sp>
+      <p:sp>
+        <p:nvSpPr>
           <p:cNvPr id="4" name="Footer Placeholder 3">
             <a:extLst>
               <a:ext uri="{FF2B5EF4-FFF2-40B4-BE49-F238E27FC236}">
@@ -19580,35 +19915,6 @@
             <a:fld id="{62CBAC88-EF5B-3148-888C-824478CD1B05}" type="slidenum">
               <a:rPr lang="en-US" smtClean="0"/>
               <a:t>66</a:t>
-            </a:fld>
-            <a:endParaRPr lang="en-US"/>
-          </a:p>
-        </p:txBody>
-      </p:sp>
-      <p:sp>
-        <p:nvSpPr>
-          <p:cNvPr id="7" name="Date Placeholder 6">
-            <a:extLst>
-              <a:ext uri="{FF2B5EF4-FFF2-40B4-BE49-F238E27FC236}">
-                <a16:creationId xmlns:a16="http://schemas.microsoft.com/office/drawing/2014/main" id="{3863A576-230D-B785-D645-3219DF08892B}"/>
-              </a:ext>
-            </a:extLst>
-          </p:cNvPr>
-          <p:cNvSpPr>
-            <a:spLocks noGrp="1"/>
-          </p:cNvSpPr>
-          <p:nvPr>
-            <p:ph type="dt" sz="half" idx="10"/>
-          </p:nvPr>
-        </p:nvSpPr>
-        <p:spPr/>
-        <p:txBody>
-          <a:bodyPr/>
-          <a:lstStyle/>
-          <a:p>
-            <a:fld id="{73BE34C8-A550-EB41-BD53-F4F8E94A99FE}" type="datetime5">
-              <a:rPr lang="en-US" smtClean="0"/>
-              <a:t>22-Sep-26</a:t>
             </a:fld>
             <a:endParaRPr lang="en-US"/>
           </a:p>
@@ -19626,12 +19932,12 @@
   </p:clrMapOvr>
   <mc:AlternateContent xmlns:mc="http://schemas.openxmlformats.org/markup-compatibility/2006" xmlns:p14="http://schemas.microsoft.com/office/powerpoint/2010/main">
     <mc:Choice Requires="p14">
-      <p:transition spd="slow" p14:dur="1200">
-        <p14:prism/>
+      <p:transition spd="slow" p14:dur="2000">
+        <p14:prism isContent="1"/>
       </p:transition>
     </mc:Choice>
     <mc:Fallback xmlns="">
-      <p:transition xmlns:p14="http://schemas.microsoft.com/office/powerpoint/2010/main" spd="slow">
+      <p:transition spd="slow">
         <p:fade/>
       </p:transition>
     </mc:Fallback>
@@ -19675,7 +19981,7 @@
         <p:spPr/>
         <p:txBody>
           <a:bodyPr>
-            <a:normAutofit/>
+            <a:normAutofit fontScale="90000"/>
           </a:bodyPr>
           <a:lstStyle/>
           <a:p>
@@ -19705,7 +20011,7 @@
         <p:spPr/>
         <p:txBody>
           <a:bodyPr>
-            <a:normAutofit fontScale="92500" lnSpcReduction="10000"/>
+            <a:normAutofit fontScale="92500" lnSpcReduction="20000"/>
           </a:bodyPr>
           <a:lstStyle/>
           <a:p>
@@ -19830,6 +20136,35 @@
       </p:sp>
       <p:sp>
         <p:nvSpPr>
+          <p:cNvPr id="7" name="Date Placeholder 6">
+            <a:extLst>
+              <a:ext uri="{FF2B5EF4-FFF2-40B4-BE49-F238E27FC236}">
+                <a16:creationId xmlns:a16="http://schemas.microsoft.com/office/drawing/2014/main" id="{B8EBCD1E-ABBF-FAF0-77CA-D4648828AE66}"/>
+              </a:ext>
+            </a:extLst>
+          </p:cNvPr>
+          <p:cNvSpPr>
+            <a:spLocks noGrp="1"/>
+          </p:cNvSpPr>
+          <p:nvPr>
+            <p:ph type="dt" sz="half" idx="10"/>
+          </p:nvPr>
+        </p:nvSpPr>
+        <p:spPr/>
+        <p:txBody>
+          <a:bodyPr/>
+          <a:lstStyle/>
+          <a:p>
+            <a:fld id="{8EA8C427-EC5F-3947-90E9-8DFB70EE15C9}" type="datetime1">
+              <a:rPr lang="en-US" smtClean="0"/>
+              <a:t>10/8/26</a:t>
+            </a:fld>
+            <a:endParaRPr lang="en-US"/>
+          </a:p>
+        </p:txBody>
+      </p:sp>
+      <p:sp>
+        <p:nvSpPr>
           <p:cNvPr id="4" name="Footer Placeholder 3">
             <a:extLst>
               <a:ext uri="{FF2B5EF4-FFF2-40B4-BE49-F238E27FC236}">
@@ -19880,35 +20215,6 @@
             <a:fld id="{62CBAC88-EF5B-3148-888C-824478CD1B05}" type="slidenum">
               <a:rPr lang="en-US" smtClean="0"/>
               <a:t>67</a:t>
-            </a:fld>
-            <a:endParaRPr lang="en-US"/>
-          </a:p>
-        </p:txBody>
-      </p:sp>
-      <p:sp>
-        <p:nvSpPr>
-          <p:cNvPr id="7" name="Date Placeholder 6">
-            <a:extLst>
-              <a:ext uri="{FF2B5EF4-FFF2-40B4-BE49-F238E27FC236}">
-                <a16:creationId xmlns:a16="http://schemas.microsoft.com/office/drawing/2014/main" id="{B8EBCD1E-ABBF-FAF0-77CA-D4648828AE66}"/>
-              </a:ext>
-            </a:extLst>
-          </p:cNvPr>
-          <p:cNvSpPr>
-            <a:spLocks noGrp="1"/>
-          </p:cNvSpPr>
-          <p:nvPr>
-            <p:ph type="dt" sz="half" idx="10"/>
-          </p:nvPr>
-        </p:nvSpPr>
-        <p:spPr/>
-        <p:txBody>
-          <a:bodyPr/>
-          <a:lstStyle/>
-          <a:p>
-            <a:fld id="{C092998B-F0BE-B243-8379-C541DDDE14F4}" type="datetime5">
-              <a:rPr lang="en-US" smtClean="0"/>
-              <a:t>22-Sep-26</a:t>
             </a:fld>
             <a:endParaRPr lang="en-US"/>
           </a:p>
@@ -19926,12 +20232,12 @@
   </p:clrMapOvr>
   <mc:AlternateContent xmlns:mc="http://schemas.openxmlformats.org/markup-compatibility/2006" xmlns:p14="http://schemas.microsoft.com/office/powerpoint/2010/main">
     <mc:Choice Requires="p14">
-      <p:transition spd="slow" p14:dur="1200">
-        <p14:prism/>
+      <p:transition spd="slow" p14:dur="2000">
+        <p14:prism isContent="1"/>
       </p:transition>
     </mc:Choice>
     <mc:Fallback xmlns="">
-      <p:transition xmlns:p14="http://schemas.microsoft.com/office/powerpoint/2010/main" spd="slow">
+      <p:transition spd="slow">
         <p:fade/>
       </p:transition>
     </mc:Fallback>
@@ -19975,7 +20281,7 @@
         <p:spPr/>
         <p:txBody>
           <a:bodyPr>
-            <a:normAutofit/>
+            <a:normAutofit fontScale="90000"/>
           </a:bodyPr>
           <a:lstStyle/>
           <a:p>
@@ -20005,7 +20311,7 @@
         <p:spPr/>
         <p:txBody>
           <a:bodyPr>
-            <a:normAutofit/>
+            <a:normAutofit lnSpcReduction="10000"/>
           </a:bodyPr>
           <a:lstStyle/>
           <a:p>
@@ -20063,6 +20369,35 @@
       </p:sp>
       <p:sp>
         <p:nvSpPr>
+          <p:cNvPr id="7" name="Date Placeholder 6">
+            <a:extLst>
+              <a:ext uri="{FF2B5EF4-FFF2-40B4-BE49-F238E27FC236}">
+                <a16:creationId xmlns:a16="http://schemas.microsoft.com/office/drawing/2014/main" id="{A4DBCED5-000F-F32F-871D-B126E563842D}"/>
+              </a:ext>
+            </a:extLst>
+          </p:cNvPr>
+          <p:cNvSpPr>
+            <a:spLocks noGrp="1"/>
+          </p:cNvSpPr>
+          <p:nvPr>
+            <p:ph type="dt" sz="half" idx="10"/>
+          </p:nvPr>
+        </p:nvSpPr>
+        <p:spPr/>
+        <p:txBody>
+          <a:bodyPr/>
+          <a:lstStyle/>
+          <a:p>
+            <a:fld id="{1674771F-1AE5-284B-9021-F06BE80AAE07}" type="datetime1">
+              <a:rPr lang="en-US" smtClean="0"/>
+              <a:t>10/8/26</a:t>
+            </a:fld>
+            <a:endParaRPr lang="en-US"/>
+          </a:p>
+        </p:txBody>
+      </p:sp>
+      <p:sp>
+        <p:nvSpPr>
           <p:cNvPr id="4" name="Footer Placeholder 3">
             <a:extLst>
               <a:ext uri="{FF2B5EF4-FFF2-40B4-BE49-F238E27FC236}">
@@ -20113,35 +20448,6 @@
             <a:fld id="{62CBAC88-EF5B-3148-888C-824478CD1B05}" type="slidenum">
               <a:rPr lang="en-US" smtClean="0"/>
               <a:t>68</a:t>
-            </a:fld>
-            <a:endParaRPr lang="en-US"/>
-          </a:p>
-        </p:txBody>
-      </p:sp>
-      <p:sp>
-        <p:nvSpPr>
-          <p:cNvPr id="7" name="Date Placeholder 6">
-            <a:extLst>
-              <a:ext uri="{FF2B5EF4-FFF2-40B4-BE49-F238E27FC236}">
-                <a16:creationId xmlns:a16="http://schemas.microsoft.com/office/drawing/2014/main" id="{A4DBCED5-000F-F32F-871D-B126E563842D}"/>
-              </a:ext>
-            </a:extLst>
-          </p:cNvPr>
-          <p:cNvSpPr>
-            <a:spLocks noGrp="1"/>
-          </p:cNvSpPr>
-          <p:nvPr>
-            <p:ph type="dt" sz="half" idx="10"/>
-          </p:nvPr>
-        </p:nvSpPr>
-        <p:spPr/>
-        <p:txBody>
-          <a:bodyPr/>
-          <a:lstStyle/>
-          <a:p>
-            <a:fld id="{8F7190E5-A397-6F48-92AE-CB7D20AF2B51}" type="datetime5">
-              <a:rPr lang="en-US" smtClean="0"/>
-              <a:t>22-Sep-26</a:t>
             </a:fld>
             <a:endParaRPr lang="en-US"/>
           </a:p>
@@ -20159,12 +20465,12 @@
   </p:clrMapOvr>
   <mc:AlternateContent xmlns:mc="http://schemas.openxmlformats.org/markup-compatibility/2006" xmlns:p14="http://schemas.microsoft.com/office/powerpoint/2010/main">
     <mc:Choice Requires="p14">
-      <p:transition spd="slow" p14:dur="1200">
-        <p14:prism/>
+      <p:transition spd="slow" p14:dur="2000">
+        <p14:prism isContent="1"/>
       </p:transition>
     </mc:Choice>
     <mc:Fallback xmlns="">
-      <p:transition xmlns:p14="http://schemas.microsoft.com/office/powerpoint/2010/main" spd="slow">
+      <p:transition spd="slow">
         <p:fade/>
       </p:transition>
     </mc:Fallback>
@@ -20208,7 +20514,7 @@
         <p:spPr/>
         <p:txBody>
           <a:bodyPr>
-            <a:normAutofit/>
+            <a:normAutofit fontScale="90000"/>
           </a:bodyPr>
           <a:lstStyle/>
           <a:p>
@@ -20238,7 +20544,7 @@
         <p:spPr/>
         <p:txBody>
           <a:bodyPr>
-            <a:normAutofit fontScale="92500"/>
+            <a:normAutofit fontScale="92500" lnSpcReduction="10000"/>
           </a:bodyPr>
           <a:lstStyle/>
           <a:p>
@@ -20292,6 +20598,35 @@
               <a:rPr lang="en-US" dirty="0"/>
               <a:t>Remember: render can only be called once</a:t>
             </a:r>
+          </a:p>
+        </p:txBody>
+      </p:sp>
+      <p:sp>
+        <p:nvSpPr>
+          <p:cNvPr id="7" name="Date Placeholder 6">
+            <a:extLst>
+              <a:ext uri="{FF2B5EF4-FFF2-40B4-BE49-F238E27FC236}">
+                <a16:creationId xmlns:a16="http://schemas.microsoft.com/office/drawing/2014/main" id="{860E76AB-2E4C-44BB-30A9-D9D507F3D1CF}"/>
+              </a:ext>
+            </a:extLst>
+          </p:cNvPr>
+          <p:cNvSpPr>
+            <a:spLocks noGrp="1"/>
+          </p:cNvSpPr>
+          <p:nvPr>
+            <p:ph type="dt" sz="half" idx="10"/>
+          </p:nvPr>
+        </p:nvSpPr>
+        <p:spPr/>
+        <p:txBody>
+          <a:bodyPr/>
+          <a:lstStyle/>
+          <a:p>
+            <a:fld id="{50430C1B-B1DF-7D42-8779-4E972A9D600D}" type="datetime1">
+              <a:rPr lang="en-US" smtClean="0"/>
+              <a:t>10/8/26</a:t>
+            </a:fld>
+            <a:endParaRPr lang="en-US"/>
           </a:p>
         </p:txBody>
       </p:sp>
@@ -20347,35 +20682,6 @@
             <a:fld id="{62CBAC88-EF5B-3148-888C-824478CD1B05}" type="slidenum">
               <a:rPr lang="en-US" smtClean="0"/>
               <a:t>69</a:t>
-            </a:fld>
-            <a:endParaRPr lang="en-US"/>
-          </a:p>
-        </p:txBody>
-      </p:sp>
-      <p:sp>
-        <p:nvSpPr>
-          <p:cNvPr id="7" name="Date Placeholder 6">
-            <a:extLst>
-              <a:ext uri="{FF2B5EF4-FFF2-40B4-BE49-F238E27FC236}">
-                <a16:creationId xmlns:a16="http://schemas.microsoft.com/office/drawing/2014/main" id="{860E76AB-2E4C-44BB-30A9-D9D507F3D1CF}"/>
-              </a:ext>
-            </a:extLst>
-          </p:cNvPr>
-          <p:cNvSpPr>
-            <a:spLocks noGrp="1"/>
-          </p:cNvSpPr>
-          <p:nvPr>
-            <p:ph type="dt" sz="half" idx="10"/>
-          </p:nvPr>
-        </p:nvSpPr>
-        <p:spPr/>
-        <p:txBody>
-          <a:bodyPr/>
-          <a:lstStyle/>
-          <a:p>
-            <a:fld id="{B973F0D1-6192-A149-B1EA-499F2B432EBE}" type="datetime5">
-              <a:rPr lang="en-US" smtClean="0"/>
-              <a:t>22-Sep-26</a:t>
             </a:fld>
             <a:endParaRPr lang="en-US"/>
           </a:p>
@@ -20393,12 +20699,12 @@
   </p:clrMapOvr>
   <mc:AlternateContent xmlns:mc="http://schemas.openxmlformats.org/markup-compatibility/2006" xmlns:p14="http://schemas.microsoft.com/office/powerpoint/2010/main">
     <mc:Choice Requires="p14">
-      <p:transition spd="slow" p14:dur="1200">
-        <p14:prism/>
+      <p:transition spd="slow" p14:dur="2000">
+        <p14:prism isContent="1"/>
       </p:transition>
     </mc:Choice>
     <mc:Fallback xmlns="">
-      <p:transition xmlns:p14="http://schemas.microsoft.com/office/powerpoint/2010/main" spd="slow">
+      <p:transition spd="slow">
         <p:fade/>
       </p:transition>
     </mc:Fallback>
@@ -20441,7 +20747,9 @@
         </p:nvSpPr>
         <p:spPr/>
         <p:txBody>
-          <a:bodyPr/>
+          <a:bodyPr>
+            <a:normAutofit fontScale="90000"/>
+          </a:bodyPr>
           <a:lstStyle/>
           <a:p>
             <a:r>
@@ -20470,7 +20778,7 @@
         <p:spPr/>
         <p:txBody>
           <a:bodyPr>
-            <a:normAutofit/>
+            <a:normAutofit lnSpcReduction="10000"/>
           </a:bodyPr>
           <a:lstStyle/>
           <a:p>
@@ -20521,6 +20829,35 @@
       </p:sp>
       <p:sp>
         <p:nvSpPr>
+          <p:cNvPr id="7" name="Date Placeholder 6">
+            <a:extLst>
+              <a:ext uri="{FF2B5EF4-FFF2-40B4-BE49-F238E27FC236}">
+                <a16:creationId xmlns:a16="http://schemas.microsoft.com/office/drawing/2014/main" id="{38339254-ECFA-7898-95ED-67065308A0F9}"/>
+              </a:ext>
+            </a:extLst>
+          </p:cNvPr>
+          <p:cNvSpPr>
+            <a:spLocks noGrp="1"/>
+          </p:cNvSpPr>
+          <p:nvPr>
+            <p:ph type="dt" sz="half" idx="10"/>
+          </p:nvPr>
+        </p:nvSpPr>
+        <p:spPr/>
+        <p:txBody>
+          <a:bodyPr/>
+          <a:lstStyle/>
+          <a:p>
+            <a:fld id="{C207B860-2B13-0A4F-9325-E1D770F53373}" type="datetime1">
+              <a:rPr lang="en-US" smtClean="0"/>
+              <a:t>10/8/26</a:t>
+            </a:fld>
+            <a:endParaRPr lang="en-US"/>
+          </a:p>
+        </p:txBody>
+      </p:sp>
+      <p:sp>
+        <p:nvSpPr>
           <p:cNvPr id="4" name="Footer Placeholder 3">
             <a:extLst>
               <a:ext uri="{FF2B5EF4-FFF2-40B4-BE49-F238E27FC236}">
@@ -20571,35 +20908,6 @@
             <a:fld id="{62CBAC88-EF5B-3148-888C-824478CD1B05}" type="slidenum">
               <a:rPr lang="en-US" smtClean="0"/>
               <a:t>7</a:t>
-            </a:fld>
-            <a:endParaRPr lang="en-US"/>
-          </a:p>
-        </p:txBody>
-      </p:sp>
-      <p:sp>
-        <p:nvSpPr>
-          <p:cNvPr id="7" name="Date Placeholder 6">
-            <a:extLst>
-              <a:ext uri="{FF2B5EF4-FFF2-40B4-BE49-F238E27FC236}">
-                <a16:creationId xmlns:a16="http://schemas.microsoft.com/office/drawing/2014/main" id="{38339254-ECFA-7898-95ED-67065308A0F9}"/>
-              </a:ext>
-            </a:extLst>
-          </p:cNvPr>
-          <p:cNvSpPr>
-            <a:spLocks noGrp="1"/>
-          </p:cNvSpPr>
-          <p:nvPr>
-            <p:ph type="dt" sz="half" idx="10"/>
-          </p:nvPr>
-        </p:nvSpPr>
-        <p:spPr/>
-        <p:txBody>
-          <a:bodyPr/>
-          <a:lstStyle/>
-          <a:p>
-            <a:fld id="{5F7D23F5-FA24-FF4C-8365-C840C2558681}" type="datetime5">
-              <a:rPr lang="en-US" smtClean="0"/>
-              <a:t>22-Sep-26</a:t>
             </a:fld>
             <a:endParaRPr lang="en-US"/>
           </a:p>
@@ -20617,12 +20925,12 @@
   </p:clrMapOvr>
   <mc:AlternateContent xmlns:mc="http://schemas.openxmlformats.org/markup-compatibility/2006" xmlns:p14="http://schemas.microsoft.com/office/powerpoint/2010/main">
     <mc:Choice Requires="p14">
-      <p:transition spd="slow" p14:dur="1200">
-        <p14:prism/>
+      <p:transition spd="slow" p14:dur="2000">
+        <p14:prism isContent="1"/>
       </p:transition>
     </mc:Choice>
     <mc:Fallback xmlns="">
-      <p:transition xmlns:p14="http://schemas.microsoft.com/office/powerpoint/2010/main" spd="slow">
+      <p:transition spd="slow">
         <p:fade/>
       </p:transition>
     </mc:Fallback>
@@ -20666,7 +20974,7 @@
         <p:spPr/>
         <p:txBody>
           <a:bodyPr>
-            <a:normAutofit/>
+            <a:normAutofit fontScale="90000"/>
           </a:bodyPr>
           <a:lstStyle/>
           <a:p>
@@ -20731,6 +21039,35 @@
           </a:p>
           <a:p>
             <a:endParaRPr lang="en-US" dirty="0"/>
+          </a:p>
+        </p:txBody>
+      </p:sp>
+      <p:sp>
+        <p:nvSpPr>
+          <p:cNvPr id="7" name="Date Placeholder 6">
+            <a:extLst>
+              <a:ext uri="{FF2B5EF4-FFF2-40B4-BE49-F238E27FC236}">
+                <a16:creationId xmlns:a16="http://schemas.microsoft.com/office/drawing/2014/main" id="{42983D1B-873D-54C7-105F-3B9549D5C81E}"/>
+              </a:ext>
+            </a:extLst>
+          </p:cNvPr>
+          <p:cNvSpPr>
+            <a:spLocks noGrp="1"/>
+          </p:cNvSpPr>
+          <p:nvPr>
+            <p:ph type="dt" sz="half" idx="10"/>
+          </p:nvPr>
+        </p:nvSpPr>
+        <p:spPr/>
+        <p:txBody>
+          <a:bodyPr/>
+          <a:lstStyle/>
+          <a:p>
+            <a:fld id="{BC822E3A-584A-6E40-86B4-91763235E360}" type="datetime1">
+              <a:rPr lang="en-US" smtClean="0"/>
+              <a:t>10/8/26</a:t>
+            </a:fld>
+            <a:endParaRPr lang="en-US"/>
           </a:p>
         </p:txBody>
       </p:sp>
@@ -20786,35 +21123,6 @@
             <a:fld id="{62CBAC88-EF5B-3148-888C-824478CD1B05}" type="slidenum">
               <a:rPr lang="en-US" smtClean="0"/>
               <a:t>70</a:t>
-            </a:fld>
-            <a:endParaRPr lang="en-US"/>
-          </a:p>
-        </p:txBody>
-      </p:sp>
-      <p:sp>
-        <p:nvSpPr>
-          <p:cNvPr id="7" name="Date Placeholder 6">
-            <a:extLst>
-              <a:ext uri="{FF2B5EF4-FFF2-40B4-BE49-F238E27FC236}">
-                <a16:creationId xmlns:a16="http://schemas.microsoft.com/office/drawing/2014/main" id="{42983D1B-873D-54C7-105F-3B9549D5C81E}"/>
-              </a:ext>
-            </a:extLst>
-          </p:cNvPr>
-          <p:cNvSpPr>
-            <a:spLocks noGrp="1"/>
-          </p:cNvSpPr>
-          <p:nvPr>
-            <p:ph type="dt" sz="half" idx="10"/>
-          </p:nvPr>
-        </p:nvSpPr>
-        <p:spPr/>
-        <p:txBody>
-          <a:bodyPr/>
-          <a:lstStyle/>
-          <a:p>
-            <a:fld id="{D822B67A-F9FD-D242-A472-4F952EF5CF6D}" type="datetime5">
-              <a:rPr lang="en-US" smtClean="0"/>
-              <a:t>22-Sep-26</a:t>
             </a:fld>
             <a:endParaRPr lang="en-US"/>
           </a:p>
@@ -20832,12 +21140,12 @@
   </p:clrMapOvr>
   <mc:AlternateContent xmlns:mc="http://schemas.openxmlformats.org/markup-compatibility/2006" xmlns:p14="http://schemas.microsoft.com/office/powerpoint/2010/main">
     <mc:Choice Requires="p14">
-      <p:transition spd="slow" p14:dur="1200">
-        <p14:prism/>
+      <p:transition spd="slow" p14:dur="2000">
+        <p14:prism isContent="1"/>
       </p:transition>
     </mc:Choice>
     <mc:Fallback xmlns="">
-      <p:transition xmlns:p14="http://schemas.microsoft.com/office/powerpoint/2010/main" spd="slow">
+      <p:transition spd="slow">
         <p:fade/>
       </p:transition>
     </mc:Fallback>
@@ -20881,7 +21189,7 @@
         <p:spPr/>
         <p:txBody>
           <a:bodyPr>
-            <a:normAutofit/>
+            <a:normAutofit fontScale="90000"/>
           </a:bodyPr>
           <a:lstStyle/>
           <a:p>
@@ -20911,7 +21219,7 @@
         <p:spPr/>
         <p:txBody>
           <a:bodyPr>
-            <a:normAutofit fontScale="85000" lnSpcReduction="20000"/>
+            <a:normAutofit fontScale="77500" lnSpcReduction="20000"/>
           </a:bodyPr>
           <a:lstStyle/>
           <a:p>
@@ -20982,6 +21290,35 @@
               <a:rPr lang="en-US" dirty="0"/>
               <a:t>Which controller method handles the request</a:t>
             </a:r>
+          </a:p>
+        </p:txBody>
+      </p:sp>
+      <p:sp>
+        <p:nvSpPr>
+          <p:cNvPr id="7" name="Date Placeholder 6">
+            <a:extLst>
+              <a:ext uri="{FF2B5EF4-FFF2-40B4-BE49-F238E27FC236}">
+                <a16:creationId xmlns:a16="http://schemas.microsoft.com/office/drawing/2014/main" id="{43BC54A7-92CA-8E7F-707C-6FF042D8455E}"/>
+              </a:ext>
+            </a:extLst>
+          </p:cNvPr>
+          <p:cNvSpPr>
+            <a:spLocks noGrp="1"/>
+          </p:cNvSpPr>
+          <p:nvPr>
+            <p:ph type="dt" sz="half" idx="10"/>
+          </p:nvPr>
+        </p:nvSpPr>
+        <p:spPr/>
+        <p:txBody>
+          <a:bodyPr/>
+          <a:lstStyle/>
+          <a:p>
+            <a:fld id="{12F5AF9C-0568-E241-91A8-F8E9553BDC8B}" type="datetime1">
+              <a:rPr lang="en-US" smtClean="0"/>
+              <a:t>10/8/26</a:t>
+            </a:fld>
+            <a:endParaRPr lang="en-US"/>
           </a:p>
         </p:txBody>
       </p:sp>
@@ -21037,35 +21374,6 @@
             <a:fld id="{62CBAC88-EF5B-3148-888C-824478CD1B05}" type="slidenum">
               <a:rPr lang="en-US" smtClean="0"/>
               <a:t>8</a:t>
-            </a:fld>
-            <a:endParaRPr lang="en-US"/>
-          </a:p>
-        </p:txBody>
-      </p:sp>
-      <p:sp>
-        <p:nvSpPr>
-          <p:cNvPr id="7" name="Date Placeholder 6">
-            <a:extLst>
-              <a:ext uri="{FF2B5EF4-FFF2-40B4-BE49-F238E27FC236}">
-                <a16:creationId xmlns:a16="http://schemas.microsoft.com/office/drawing/2014/main" id="{43BC54A7-92CA-8E7F-707C-6FF042D8455E}"/>
-              </a:ext>
-            </a:extLst>
-          </p:cNvPr>
-          <p:cNvSpPr>
-            <a:spLocks noGrp="1"/>
-          </p:cNvSpPr>
-          <p:nvPr>
-            <p:ph type="dt" sz="half" idx="10"/>
-          </p:nvPr>
-        </p:nvSpPr>
-        <p:spPr/>
-        <p:txBody>
-          <a:bodyPr/>
-          <a:lstStyle/>
-          <a:p>
-            <a:fld id="{A5FA7841-9393-7145-9103-3D607B9E53BB}" type="datetime5">
-              <a:rPr lang="en-US" smtClean="0"/>
-              <a:t>22-Sep-26</a:t>
             </a:fld>
             <a:endParaRPr lang="en-US"/>
           </a:p>
@@ -21083,12 +21391,12 @@
   </p:clrMapOvr>
   <mc:AlternateContent xmlns:mc="http://schemas.openxmlformats.org/markup-compatibility/2006" xmlns:p14="http://schemas.microsoft.com/office/powerpoint/2010/main">
     <mc:Choice Requires="p14">
-      <p:transition spd="slow" p14:dur="1200">
-        <p14:prism/>
+      <p:transition spd="slow" p14:dur="2000">
+        <p14:prism isContent="1"/>
       </p:transition>
     </mc:Choice>
     <mc:Fallback xmlns="">
-      <p:transition xmlns:p14="http://schemas.microsoft.com/office/powerpoint/2010/main" spd="slow">
+      <p:transition spd="slow">
         <p:fade/>
       </p:transition>
     </mc:Fallback>
@@ -21131,7 +21439,9 @@
         </p:nvSpPr>
         <p:spPr/>
         <p:txBody>
-          <a:bodyPr/>
+          <a:bodyPr>
+            <a:normAutofit fontScale="90000"/>
+          </a:bodyPr>
           <a:lstStyle/>
           <a:p>
             <a:r>
@@ -21160,7 +21470,7 @@
         <p:spPr/>
         <p:txBody>
           <a:bodyPr>
-            <a:normAutofit/>
+            <a:normAutofit fontScale="92500"/>
           </a:bodyPr>
           <a:lstStyle/>
           <a:p>
@@ -21272,6 +21582,35 @@
           </a:p>
           <a:p>
             <a:endParaRPr lang="en-US" sz="2400" dirty="0"/>
+          </a:p>
+        </p:txBody>
+      </p:sp>
+      <p:sp>
+        <p:nvSpPr>
+          <p:cNvPr id="7" name="Date Placeholder 6">
+            <a:extLst>
+              <a:ext uri="{FF2B5EF4-FFF2-40B4-BE49-F238E27FC236}">
+                <a16:creationId xmlns:a16="http://schemas.microsoft.com/office/drawing/2014/main" id="{4F9DCF3D-0B24-BA59-8A17-7C826E1A80D6}"/>
+              </a:ext>
+            </a:extLst>
+          </p:cNvPr>
+          <p:cNvSpPr>
+            <a:spLocks noGrp="1"/>
+          </p:cNvSpPr>
+          <p:nvPr>
+            <p:ph type="dt" sz="half" idx="10"/>
+          </p:nvPr>
+        </p:nvSpPr>
+        <p:spPr/>
+        <p:txBody>
+          <a:bodyPr/>
+          <a:lstStyle/>
+          <a:p>
+            <a:fld id="{AA97DC8B-721D-7140-8043-EE2F30809416}" type="datetime1">
+              <a:rPr lang="en-US" smtClean="0"/>
+              <a:t>10/8/26</a:t>
+            </a:fld>
+            <a:endParaRPr lang="en-US"/>
           </a:p>
         </p:txBody>
       </p:sp>
@@ -21327,35 +21666,6 @@
             <a:fld id="{62CBAC88-EF5B-3148-888C-824478CD1B05}" type="slidenum">
               <a:rPr lang="en-US" smtClean="0"/>
               <a:t>9</a:t>
-            </a:fld>
-            <a:endParaRPr lang="en-US"/>
-          </a:p>
-        </p:txBody>
-      </p:sp>
-      <p:sp>
-        <p:nvSpPr>
-          <p:cNvPr id="7" name="Date Placeholder 6">
-            <a:extLst>
-              <a:ext uri="{FF2B5EF4-FFF2-40B4-BE49-F238E27FC236}">
-                <a16:creationId xmlns:a16="http://schemas.microsoft.com/office/drawing/2014/main" id="{4F9DCF3D-0B24-BA59-8A17-7C826E1A80D6}"/>
-              </a:ext>
-            </a:extLst>
-          </p:cNvPr>
-          <p:cNvSpPr>
-            <a:spLocks noGrp="1"/>
-          </p:cNvSpPr>
-          <p:nvPr>
-            <p:ph type="dt" sz="half" idx="10"/>
-          </p:nvPr>
-        </p:nvSpPr>
-        <p:spPr/>
-        <p:txBody>
-          <a:bodyPr/>
-          <a:lstStyle/>
-          <a:p>
-            <a:fld id="{75C37B9F-0858-704F-B17D-B5F38B88B2D3}" type="datetime5">
-              <a:rPr lang="en-US" smtClean="0"/>
-              <a:t>22-Sep-26</a:t>
             </a:fld>
             <a:endParaRPr lang="en-US"/>
           </a:p>
@@ -21705,7 +22015,7 @@
   <a:extraClrSchemeLst/>
   <a:extLst>
     <a:ext uri="{05A4C25C-085E-4340-85A3-A5531E510DB2}">
-      <thm15:themeFamily xmlns:thm15="http://schemas.microsoft.com/office/thememl/2012/main" name="Cognella" id="{9B7AACB3-BED8-6844-ADDB-C87436244734}" vid="{7749C953-94DA-D341-AC03-734E71A764AB}"/>
+      <thm15:themeFamily xmlns:thm15="http://schemas.microsoft.com/office/thememl/2012/main" name="Presentation1" id="{9DA9736E-330F-4D40-A0AF-1CC780C29072}" vid="{881790AE-4280-6941-9F6C-19A6C408C41E}"/>
     </a:ext>
   </a:extLst>
 </a:theme>
